--- a/納品レポート/ホテル別レポート/kawasaki_nikko_口コミ分析レポート.pptx
+++ b/納品レポート/ホテル別レポート/kawasaki_nikko_口コミ分析レポート.pptx
@@ -186,10 +186,10 @@
                     <c:v>楽天トラベル</c:v>
                   </c:pt>
                   <c:pt idx="2">
-                    <c:v>Booking.com</c:v>
+                    <c:v>じゃらん</c:v>
                   </c:pt>
                   <c:pt idx="3">
-                    <c:v>じゃらん</c:v>
+                    <c:v>Booking.com</c:v>
                   </c:pt>
                   <c:pt idx="4">
                     <c:v>Google</c:v>
@@ -208,16 +208,16 @@
                 <c:formatCode>General</c:formatCode>
                 <c:ptCount val="6"/>
                 <c:pt idx="0">
-                  <c:v>9.64</c:v>
+                  <c:v>9.65</c:v>
                 </c:pt>
                 <c:pt idx="1">
                   <c:v>8.8</c:v>
                 </c:pt>
                 <c:pt idx="2">
-                  <c:v>8.44</c:v>
+                  <c:v>8.67</c:v>
                 </c:pt>
                 <c:pt idx="3">
-                  <c:v>8.4</c:v>
+                  <c:v>8.46</c:v>
                 </c:pt>
                 <c:pt idx="4">
                   <c:v>7.88</c:v>
@@ -566,7 +566,7 @@
               <c:numCache>
                 <c:ptCount val="3"/>
                 <c:pt idx="0">
-                  <c:v>96</c:v>
+                  <c:v>99</c:v>
                 </c:pt>
                 <c:pt idx="1">
                   <c:v>23</c:v>
@@ -795,7 +795,7 @@
                 <c:formatCode>General</c:formatCode>
                 <c:ptCount val="7"/>
                 <c:pt idx="0">
-                  <c:v>46</c:v>
+                  <c:v>49</c:v>
                 </c:pt>
                 <c:pt idx="1">
                   <c:v>24</c:v>
@@ -2764,7 +2764,7 @@
                 <a:ea typeface="Arial" pitchFamily="34" charset="-122"/>
                 <a:cs typeface="Arial" pitchFamily="34" charset="-120"/>
               </a:rPr>
-              <a:t>レビュー総数：120件（6サイト）</a:t>
+              <a:t>レビュー総数：123件（6サイト）</a:t>
             </a:r>
             <a:endParaRPr lang="en-US" sz="1000" dirty="0"/>
           </a:p>
@@ -2784,7 +2784,7 @@
                 <a:ea typeface="Arial" pitchFamily="34" charset="-122"/>
                 <a:cs typeface="Arial" pitchFamily="34" charset="-120"/>
               </a:rPr>
-              <a:t>作成日：2026年3月17日</a:t>
+              <a:t>作成日：2026年3月18日</a:t>
             </a:r>
             <a:endParaRPr lang="en-US" sz="1000" dirty="0"/>
           </a:p>
@@ -3330,7 +3330,7 @@
                           <a:ea typeface="Arial" pitchFamily="34" charset="-122"/>
                           <a:cs typeface="Arial" pitchFamily="34" charset="-120"/>
                         </a:rPr>
-                        <a:t>8.62点</a:t>
+                        <a:t>8.65点</a:t>
                       </a:r>
                       <a:endParaRPr lang="en-US" sz="1000" dirty="0">
                         <a:latin typeface="Arial" charset="0"/>
@@ -3398,7 +3398,7 @@
                           <a:ea typeface="Arial" pitchFamily="34" charset="-122"/>
                           <a:cs typeface="Arial" pitchFamily="34" charset="-120"/>
                         </a:rPr>
-                        <a:t>8.9点以上</a:t>
+                        <a:t>9.0点以上</a:t>
                       </a:r>
                       <a:endParaRPr lang="en-US" sz="1000" dirty="0">
                         <a:latin typeface="Arial" charset="0"/>
@@ -3604,7 +3604,7 @@
                           <a:ea typeface="Arial" pitchFamily="34" charset="-122"/>
                           <a:cs typeface="Arial" pitchFamily="34" charset="-120"/>
                         </a:rPr>
-                        <a:t>80.0%</a:t>
+                        <a:t>80.5%</a:t>
                       </a:r>
                       <a:endParaRPr lang="en-US" sz="1000" dirty="0">
                         <a:latin typeface="Arial" charset="0"/>
@@ -3672,7 +3672,7 @@
                           <a:ea typeface="Arial" pitchFamily="34" charset="-122"/>
                           <a:cs typeface="Arial" pitchFamily="34" charset="-120"/>
                         </a:rPr>
-                        <a:t>85%以上</a:t>
+                        <a:t>86%以上</a:t>
                       </a:r>
                       <a:endParaRPr lang="en-US" sz="1000" dirty="0">
                         <a:latin typeface="Arial" charset="0"/>
@@ -5339,7 +5339,7 @@
                 <a:ea typeface="Arial" pitchFamily="34" charset="-122"/>
                 <a:cs typeface="Arial" pitchFamily="34" charset="-120"/>
               </a:rPr>
-              <a:t>8.62</a:t>
+              <a:t>8.65</a:t>
             </a:r>
             <a:endParaRPr lang="en-US" sz="3200" dirty="0"/>
           </a:p>
@@ -5464,7 +5464,7 @@
                 <a:ea typeface="Arial" pitchFamily="34" charset="-122"/>
                 <a:cs typeface="Arial" pitchFamily="34" charset="-120"/>
               </a:rPr>
-              <a:t>80.0%</a:t>
+              <a:t>80.5%</a:t>
             </a:r>
             <a:endParaRPr lang="en-US" sz="3200" dirty="0"/>
           </a:p>
@@ -5714,7 +5714,7 @@
                 <a:ea typeface="Arial" pitchFamily="34" charset="-122"/>
                 <a:cs typeface="Arial" pitchFamily="34" charset="-120"/>
               </a:rPr>
-              <a:t>120件</a:t>
+              <a:t>123件</a:t>
             </a:r>
             <a:endParaRPr lang="en-US" sz="3200" dirty="0"/>
           </a:p>
@@ -5862,7 +5862,7 @@
                 <a:ea typeface="Arial" pitchFamily="34" charset="-122"/>
                 <a:cs typeface="Arial" pitchFamily="34" charset="-120"/>
               </a:rPr>
-              <a:t>  交通方便，購物方便 交通の便が良く、買い物にも便利</a:t>
+              <a:t>  乾淨方便，適合商旅出行 清潔で便利、ビジネス旅行者に最適</a:t>
             </a:r>
             <a:endParaRPr lang="en-US" sz="1100" dirty="0"/>
           </a:p>
@@ -6523,7 +6523,7 @@
                 <a:ea typeface="Arial" pitchFamily="34" charset="-122"/>
                 <a:cs typeface="Arial" pitchFamily="34" charset="-120"/>
               </a:rPr>
-              <a:t>8.62</a:t>
+              <a:t>8.65</a:t>
             </a:r>
             <a:endParaRPr lang="en-US" sz="3200" dirty="0"/>
           </a:p>
@@ -6648,7 +6648,7 @@
                 <a:ea typeface="Arial" pitchFamily="34" charset="-122"/>
                 <a:cs typeface="Arial" pitchFamily="34" charset="-120"/>
               </a:rPr>
-              <a:t>80.0%</a:t>
+              <a:t>80.5%</a:t>
             </a:r>
             <a:endParaRPr lang="en-US" sz="3200" dirty="0"/>
           </a:p>
@@ -6898,7 +6898,7 @@
                 <a:ea typeface="Arial" pitchFamily="34" charset="-122"/>
                 <a:cs typeface="Arial" pitchFamily="34" charset="-120"/>
               </a:rPr>
-              <a:t>120件</a:t>
+              <a:t>123件</a:t>
             </a:r>
             <a:endParaRPr lang="en-US" sz="3200" dirty="0"/>
           </a:p>
@@ -7319,7 +7319,7 @@
                 <a:ea typeface="Arial" pitchFamily="34" charset="-122"/>
                 <a:cs typeface="Arial" pitchFamily="34" charset="-120"/>
               </a:rPr>
-              <a:t>Trip.com(9.64)が最高スコア。</a:t>
+              <a:t>Trip.com(9.65)が最高スコア。</a:t>
             </a:r>
             <a:endParaRPr lang="en-US" sz="1100" dirty="0"/>
           </a:p>
@@ -7877,7 +7877,7 @@
                           <a:ea typeface="Arial" pitchFamily="34" charset="-122"/>
                           <a:cs typeface="Arial" pitchFamily="34" charset="-120"/>
                         </a:rPr>
-                        <a:t>25</a:t>
+                        <a:t>26</a:t>
                       </a:r>
                       <a:endParaRPr lang="en-US" sz="900" dirty="0">
                         <a:latin typeface="Arial" charset="0"/>
@@ -7945,7 +7945,7 @@
                           <a:ea typeface="Arial" pitchFamily="34" charset="-122"/>
                           <a:cs typeface="Arial" pitchFamily="34" charset="-120"/>
                         </a:rPr>
-                        <a:t>9.64</a:t>
+                        <a:t>9.65</a:t>
                       </a:r>
                       <a:endParaRPr lang="en-US" sz="900" dirty="0">
                         <a:latin typeface="Arial" charset="0"/>
@@ -8081,7 +8081,7 @@
                           <a:ea typeface="Arial" pitchFamily="34" charset="-122"/>
                           <a:cs typeface="Arial" pitchFamily="34" charset="-120"/>
                         </a:rPr>
-                        <a:t>9.64</a:t>
+                        <a:t>9.65</a:t>
                       </a:r>
                       <a:endParaRPr lang="en-US" sz="900" dirty="0">
                         <a:latin typeface="Arial" charset="0"/>
@@ -8493,7 +8493,7 @@
                           <a:ea typeface="Arial" pitchFamily="34" charset="-122"/>
                           <a:cs typeface="Arial" pitchFamily="34" charset="-120"/>
                         </a:rPr>
-                        <a:t>Booking.com</a:t>
+                        <a:t>じゃらん</a:t>
                       </a:r>
                       <a:endParaRPr lang="en-US" sz="900" dirty="0">
                         <a:latin typeface="Arial" charset="0"/>
@@ -8561,7 +8561,7 @@
                           <a:ea typeface="Arial" pitchFamily="34" charset="-122"/>
                           <a:cs typeface="Arial" pitchFamily="34" charset="-120"/>
                         </a:rPr>
-                        <a:t>68</a:t>
+                        <a:t>6</a:t>
                       </a:r>
                       <a:endParaRPr lang="en-US" sz="900" dirty="0">
                         <a:latin typeface="Arial" charset="0"/>
@@ -8629,7 +8629,7 @@
                           <a:ea typeface="Arial" pitchFamily="34" charset="-122"/>
                           <a:cs typeface="Arial" pitchFamily="34" charset="-120"/>
                         </a:rPr>
-                        <a:t>8.44</a:t>
+                        <a:t>4.33</a:t>
                       </a:r>
                       <a:endParaRPr lang="en-US" sz="900" dirty="0">
                         <a:latin typeface="Arial" charset="0"/>
@@ -8677,6 +8677,348 @@
                     </a:lnB>
                     <a:solidFill>
                       <a:srgbClr val="E8EFF8"/>
+                    </a:solidFill>
+                  </a:tcPr>
+                </a:tc>
+                <a:tc>
+                  <a:txBody>
+                    <a:bodyPr/>
+                    <a:lstStyle/>
+                    <a:p>
+                      <a:pPr algn="ctr" indent="0" marL="0">
+                        <a:buNone/>
+                      </a:pPr>
+                      <a:r>
+                        <a:rPr lang="en-US" sz="900" dirty="0">
+                          <a:solidFill>
+                            <a:srgbClr val="000000"/>
+                          </a:solidFill>
+                          <a:latin typeface="Arial" pitchFamily="34" charset="0"/>
+                          <a:ea typeface="Arial" pitchFamily="34" charset="-122"/>
+                          <a:cs typeface="Arial" pitchFamily="34" charset="-120"/>
+                        </a:rPr>
+                        <a:t>/5 (×2)</a:t>
+                      </a:r>
+                      <a:endParaRPr lang="en-US" sz="900" dirty="0">
+                        <a:latin typeface="Arial" charset="0"/>
+                        <a:ea typeface="Arial" charset="0"/>
+                        <a:cs typeface="Arial" charset="0"/>
+                      </a:endParaRPr>
+                    </a:p>
+                  </a:txBody>
+                  <a:tcPr marL="91440" marR="91440" marT="45720" marB="45720">
+                    <a:lnL w="6350" cap="flat" cmpd="sng" algn="ctr">
+                      <a:solidFill>
+                        <a:srgbClr val="CBD5E1"/>
+                      </a:solidFill>
+                      <a:prstDash val="solid"/>
+                      <a:round/>
+                      <a:headEnd type="none" w="med" len="med"/>
+                      <a:tailEnd type="none" w="med" len="med"/>
+                    </a:lnL>
+                    <a:lnR w="6350" cap="flat" cmpd="sng" algn="ctr">
+                      <a:solidFill>
+                        <a:srgbClr val="CBD5E1"/>
+                      </a:solidFill>
+                      <a:prstDash val="solid"/>
+                      <a:round/>
+                      <a:headEnd type="none" w="med" len="med"/>
+                      <a:tailEnd type="none" w="med" len="med"/>
+                    </a:lnR>
+                    <a:lnT w="6350" cap="flat" cmpd="sng" algn="ctr">
+                      <a:solidFill>
+                        <a:srgbClr val="CBD5E1"/>
+                      </a:solidFill>
+                      <a:prstDash val="solid"/>
+                      <a:round/>
+                      <a:headEnd type="none" w="med" len="med"/>
+                      <a:tailEnd type="none" w="med" len="med"/>
+                    </a:lnT>
+                    <a:lnB w="6350" cap="flat" cmpd="sng" algn="ctr">
+                      <a:solidFill>
+                        <a:srgbClr val="CBD5E1"/>
+                      </a:solidFill>
+                      <a:prstDash val="solid"/>
+                      <a:round/>
+                      <a:headEnd type="none" w="med" len="med"/>
+                      <a:tailEnd type="none" w="med" len="med"/>
+                    </a:lnB>
+                    <a:solidFill>
+                      <a:srgbClr val="E8EFF8"/>
+                    </a:solidFill>
+                  </a:tcPr>
+                </a:tc>
+                <a:tc>
+                  <a:txBody>
+                    <a:bodyPr/>
+                    <a:lstStyle/>
+                    <a:p>
+                      <a:pPr algn="ctr" indent="0" marL="0">
+                        <a:buNone/>
+                      </a:pPr>
+                      <a:r>
+                        <a:rPr lang="en-US" sz="900" dirty="0">
+                          <a:solidFill>
+                            <a:srgbClr val="000000"/>
+                          </a:solidFill>
+                          <a:latin typeface="Arial" pitchFamily="34" charset="0"/>
+                          <a:ea typeface="Arial" pitchFamily="34" charset="-122"/>
+                          <a:cs typeface="Arial" pitchFamily="34" charset="-120"/>
+                        </a:rPr>
+                        <a:t>8.67</a:t>
+                      </a:r>
+                      <a:endParaRPr lang="en-US" sz="900" dirty="0">
+                        <a:latin typeface="Arial" charset="0"/>
+                        <a:ea typeface="Arial" charset="0"/>
+                        <a:cs typeface="Arial" charset="0"/>
+                      </a:endParaRPr>
+                    </a:p>
+                  </a:txBody>
+                  <a:tcPr marL="91440" marR="91440" marT="45720" marB="45720">
+                    <a:lnL w="6350" cap="flat" cmpd="sng" algn="ctr">
+                      <a:solidFill>
+                        <a:srgbClr val="CBD5E1"/>
+                      </a:solidFill>
+                      <a:prstDash val="solid"/>
+                      <a:round/>
+                      <a:headEnd type="none" w="med" len="med"/>
+                      <a:tailEnd type="none" w="med" len="med"/>
+                    </a:lnL>
+                    <a:lnR w="6350" cap="flat" cmpd="sng" algn="ctr">
+                      <a:solidFill>
+                        <a:srgbClr val="CBD5E1"/>
+                      </a:solidFill>
+                      <a:prstDash val="solid"/>
+                      <a:round/>
+                      <a:headEnd type="none" w="med" len="med"/>
+                      <a:tailEnd type="none" w="med" len="med"/>
+                    </a:lnR>
+                    <a:lnT w="6350" cap="flat" cmpd="sng" algn="ctr">
+                      <a:solidFill>
+                        <a:srgbClr val="CBD5E1"/>
+                      </a:solidFill>
+                      <a:prstDash val="solid"/>
+                      <a:round/>
+                      <a:headEnd type="none" w="med" len="med"/>
+                      <a:tailEnd type="none" w="med" len="med"/>
+                    </a:lnT>
+                    <a:lnB w="6350" cap="flat" cmpd="sng" algn="ctr">
+                      <a:solidFill>
+                        <a:srgbClr val="CBD5E1"/>
+                      </a:solidFill>
+                      <a:prstDash val="solid"/>
+                      <a:round/>
+                      <a:headEnd type="none" w="med" len="med"/>
+                      <a:tailEnd type="none" w="med" len="med"/>
+                    </a:lnB>
+                    <a:solidFill>
+                      <a:srgbClr val="E8EFF8"/>
+                    </a:solidFill>
+                  </a:tcPr>
+                </a:tc>
+              </a:tr>
+              <a:tr h="201168">
+                <a:tc>
+                  <a:txBody>
+                    <a:bodyPr/>
+                    <a:lstStyle/>
+                    <a:p>
+                      <a:pPr algn="ctr" indent="0" marL="0">
+                        <a:buNone/>
+                      </a:pPr>
+                      <a:r>
+                        <a:rPr lang="en-US" sz="900" dirty="0">
+                          <a:solidFill>
+                            <a:srgbClr val="000000"/>
+                          </a:solidFill>
+                          <a:latin typeface="Arial" pitchFamily="34" charset="0"/>
+                          <a:ea typeface="Arial" pitchFamily="34" charset="-122"/>
+                          <a:cs typeface="Arial" pitchFamily="34" charset="-120"/>
+                        </a:rPr>
+                        <a:t>Booking.com</a:t>
+                      </a:r>
+                      <a:endParaRPr lang="en-US" sz="900" dirty="0">
+                        <a:latin typeface="Arial" charset="0"/>
+                        <a:ea typeface="Arial" charset="0"/>
+                        <a:cs typeface="Arial" charset="0"/>
+                      </a:endParaRPr>
+                    </a:p>
+                  </a:txBody>
+                  <a:tcPr marL="91440" marR="91440" marT="45720" marB="45720">
+                    <a:lnL w="6350" cap="flat" cmpd="sng" algn="ctr">
+                      <a:solidFill>
+                        <a:srgbClr val="CBD5E1"/>
+                      </a:solidFill>
+                      <a:prstDash val="solid"/>
+                      <a:round/>
+                      <a:headEnd type="none" w="med" len="med"/>
+                      <a:tailEnd type="none" w="med" len="med"/>
+                    </a:lnL>
+                    <a:lnR w="6350" cap="flat" cmpd="sng" algn="ctr">
+                      <a:solidFill>
+                        <a:srgbClr val="CBD5E1"/>
+                      </a:solidFill>
+                      <a:prstDash val="solid"/>
+                      <a:round/>
+                      <a:headEnd type="none" w="med" len="med"/>
+                      <a:tailEnd type="none" w="med" len="med"/>
+                    </a:lnR>
+                    <a:lnT w="6350" cap="flat" cmpd="sng" algn="ctr">
+                      <a:solidFill>
+                        <a:srgbClr val="CBD5E1"/>
+                      </a:solidFill>
+                      <a:prstDash val="solid"/>
+                      <a:round/>
+                      <a:headEnd type="none" w="med" len="med"/>
+                      <a:tailEnd type="none" w="med" len="med"/>
+                    </a:lnT>
+                    <a:lnB w="6350" cap="flat" cmpd="sng" algn="ctr">
+                      <a:solidFill>
+                        <a:srgbClr val="CBD5E1"/>
+                      </a:solidFill>
+                      <a:prstDash val="solid"/>
+                      <a:round/>
+                      <a:headEnd type="none" w="med" len="med"/>
+                      <a:tailEnd type="none" w="med" len="med"/>
+                    </a:lnB>
+                    <a:solidFill>
+                      <a:srgbClr val="FFFFFF"/>
+                    </a:solidFill>
+                  </a:tcPr>
+                </a:tc>
+                <a:tc>
+                  <a:txBody>
+                    <a:bodyPr/>
+                    <a:lstStyle/>
+                    <a:p>
+                      <a:pPr algn="ctr" indent="0" marL="0">
+                        <a:buNone/>
+                      </a:pPr>
+                      <a:r>
+                        <a:rPr lang="en-US" sz="900" dirty="0">
+                          <a:solidFill>
+                            <a:srgbClr val="000000"/>
+                          </a:solidFill>
+                          <a:latin typeface="Arial" pitchFamily="34" charset="0"/>
+                          <a:ea typeface="Arial" pitchFamily="34" charset="-122"/>
+                          <a:cs typeface="Arial" pitchFamily="34" charset="-120"/>
+                        </a:rPr>
+                        <a:t>69</a:t>
+                      </a:r>
+                      <a:endParaRPr lang="en-US" sz="900" dirty="0">
+                        <a:latin typeface="Arial" charset="0"/>
+                        <a:ea typeface="Arial" charset="0"/>
+                        <a:cs typeface="Arial" charset="0"/>
+                      </a:endParaRPr>
+                    </a:p>
+                  </a:txBody>
+                  <a:tcPr marL="91440" marR="91440" marT="45720" marB="45720">
+                    <a:lnL w="6350" cap="flat" cmpd="sng" algn="ctr">
+                      <a:solidFill>
+                        <a:srgbClr val="CBD5E1"/>
+                      </a:solidFill>
+                      <a:prstDash val="solid"/>
+                      <a:round/>
+                      <a:headEnd type="none" w="med" len="med"/>
+                      <a:tailEnd type="none" w="med" len="med"/>
+                    </a:lnL>
+                    <a:lnR w="6350" cap="flat" cmpd="sng" algn="ctr">
+                      <a:solidFill>
+                        <a:srgbClr val="CBD5E1"/>
+                      </a:solidFill>
+                      <a:prstDash val="solid"/>
+                      <a:round/>
+                      <a:headEnd type="none" w="med" len="med"/>
+                      <a:tailEnd type="none" w="med" len="med"/>
+                    </a:lnR>
+                    <a:lnT w="6350" cap="flat" cmpd="sng" algn="ctr">
+                      <a:solidFill>
+                        <a:srgbClr val="CBD5E1"/>
+                      </a:solidFill>
+                      <a:prstDash val="solid"/>
+                      <a:round/>
+                      <a:headEnd type="none" w="med" len="med"/>
+                      <a:tailEnd type="none" w="med" len="med"/>
+                    </a:lnT>
+                    <a:lnB w="6350" cap="flat" cmpd="sng" algn="ctr">
+                      <a:solidFill>
+                        <a:srgbClr val="CBD5E1"/>
+                      </a:solidFill>
+                      <a:prstDash val="solid"/>
+                      <a:round/>
+                      <a:headEnd type="none" w="med" len="med"/>
+                      <a:tailEnd type="none" w="med" len="med"/>
+                    </a:lnB>
+                    <a:solidFill>
+                      <a:srgbClr val="FFFFFF"/>
+                    </a:solidFill>
+                  </a:tcPr>
+                </a:tc>
+                <a:tc>
+                  <a:txBody>
+                    <a:bodyPr/>
+                    <a:lstStyle/>
+                    <a:p>
+                      <a:pPr algn="ctr" indent="0" marL="0">
+                        <a:buNone/>
+                      </a:pPr>
+                      <a:r>
+                        <a:rPr lang="en-US" sz="900" dirty="0">
+                          <a:solidFill>
+                            <a:srgbClr val="000000"/>
+                          </a:solidFill>
+                          <a:latin typeface="Arial" pitchFamily="34" charset="0"/>
+                          <a:ea typeface="Arial" pitchFamily="34" charset="-122"/>
+                          <a:cs typeface="Arial" pitchFamily="34" charset="-120"/>
+                        </a:rPr>
+                        <a:t>8.46</a:t>
+                      </a:r>
+                      <a:endParaRPr lang="en-US" sz="900" dirty="0">
+                        <a:latin typeface="Arial" charset="0"/>
+                        <a:ea typeface="Arial" charset="0"/>
+                        <a:cs typeface="Arial" charset="0"/>
+                      </a:endParaRPr>
+                    </a:p>
+                  </a:txBody>
+                  <a:tcPr marL="91440" marR="91440" marT="45720" marB="45720">
+                    <a:lnL w="6350" cap="flat" cmpd="sng" algn="ctr">
+                      <a:solidFill>
+                        <a:srgbClr val="CBD5E1"/>
+                      </a:solidFill>
+                      <a:prstDash val="solid"/>
+                      <a:round/>
+                      <a:headEnd type="none" w="med" len="med"/>
+                      <a:tailEnd type="none" w="med" len="med"/>
+                    </a:lnL>
+                    <a:lnR w="6350" cap="flat" cmpd="sng" algn="ctr">
+                      <a:solidFill>
+                        <a:srgbClr val="CBD5E1"/>
+                      </a:solidFill>
+                      <a:prstDash val="solid"/>
+                      <a:round/>
+                      <a:headEnd type="none" w="med" len="med"/>
+                      <a:tailEnd type="none" w="med" len="med"/>
+                    </a:lnR>
+                    <a:lnT w="6350" cap="flat" cmpd="sng" algn="ctr">
+                      <a:solidFill>
+                        <a:srgbClr val="CBD5E1"/>
+                      </a:solidFill>
+                      <a:prstDash val="solid"/>
+                      <a:round/>
+                      <a:headEnd type="none" w="med" len="med"/>
+                      <a:tailEnd type="none" w="med" len="med"/>
+                    </a:lnT>
+                    <a:lnB w="6350" cap="flat" cmpd="sng" algn="ctr">
+                      <a:solidFill>
+                        <a:srgbClr val="CBD5E1"/>
+                      </a:solidFill>
+                      <a:prstDash val="solid"/>
+                      <a:round/>
+                      <a:headEnd type="none" w="med" len="med"/>
+                      <a:tailEnd type="none" w="med" len="med"/>
+                    </a:lnB>
+                    <a:solidFill>
+                      <a:srgbClr val="FFFFFF"/>
                     </a:solidFill>
                   </a:tcPr>
                 </a:tc>
@@ -8744,144 +9086,6 @@
                       <a:tailEnd type="none" w="med" len="med"/>
                     </a:lnB>
                     <a:solidFill>
-                      <a:srgbClr val="E8EFF8"/>
-                    </a:solidFill>
-                  </a:tcPr>
-                </a:tc>
-                <a:tc>
-                  <a:txBody>
-                    <a:bodyPr/>
-                    <a:lstStyle/>
-                    <a:p>
-                      <a:pPr algn="ctr" indent="0" marL="0">
-                        <a:buNone/>
-                      </a:pPr>
-                      <a:r>
-                        <a:rPr lang="en-US" sz="900" dirty="0">
-                          <a:solidFill>
-                            <a:srgbClr val="000000"/>
-                          </a:solidFill>
-                          <a:latin typeface="Arial" pitchFamily="34" charset="0"/>
-                          <a:ea typeface="Arial" pitchFamily="34" charset="-122"/>
-                          <a:cs typeface="Arial" pitchFamily="34" charset="-120"/>
-                        </a:rPr>
-                        <a:t>8.44</a:t>
-                      </a:r>
-                      <a:endParaRPr lang="en-US" sz="900" dirty="0">
-                        <a:latin typeface="Arial" charset="0"/>
-                        <a:ea typeface="Arial" charset="0"/>
-                        <a:cs typeface="Arial" charset="0"/>
-                      </a:endParaRPr>
-                    </a:p>
-                  </a:txBody>
-                  <a:tcPr marL="91440" marR="91440" marT="45720" marB="45720">
-                    <a:lnL w="6350" cap="flat" cmpd="sng" algn="ctr">
-                      <a:solidFill>
-                        <a:srgbClr val="CBD5E1"/>
-                      </a:solidFill>
-                      <a:prstDash val="solid"/>
-                      <a:round/>
-                      <a:headEnd type="none" w="med" len="med"/>
-                      <a:tailEnd type="none" w="med" len="med"/>
-                    </a:lnL>
-                    <a:lnR w="6350" cap="flat" cmpd="sng" algn="ctr">
-                      <a:solidFill>
-                        <a:srgbClr val="CBD5E1"/>
-                      </a:solidFill>
-                      <a:prstDash val="solid"/>
-                      <a:round/>
-                      <a:headEnd type="none" w="med" len="med"/>
-                      <a:tailEnd type="none" w="med" len="med"/>
-                    </a:lnR>
-                    <a:lnT w="6350" cap="flat" cmpd="sng" algn="ctr">
-                      <a:solidFill>
-                        <a:srgbClr val="CBD5E1"/>
-                      </a:solidFill>
-                      <a:prstDash val="solid"/>
-                      <a:round/>
-                      <a:headEnd type="none" w="med" len="med"/>
-                      <a:tailEnd type="none" w="med" len="med"/>
-                    </a:lnT>
-                    <a:lnB w="6350" cap="flat" cmpd="sng" algn="ctr">
-                      <a:solidFill>
-                        <a:srgbClr val="CBD5E1"/>
-                      </a:solidFill>
-                      <a:prstDash val="solid"/>
-                      <a:round/>
-                      <a:headEnd type="none" w="med" len="med"/>
-                      <a:tailEnd type="none" w="med" len="med"/>
-                    </a:lnB>
-                    <a:solidFill>
-                      <a:srgbClr val="E8EFF8"/>
-                    </a:solidFill>
-                  </a:tcPr>
-                </a:tc>
-              </a:tr>
-              <a:tr h="201168">
-                <a:tc>
-                  <a:txBody>
-                    <a:bodyPr/>
-                    <a:lstStyle/>
-                    <a:p>
-                      <a:pPr algn="ctr" indent="0" marL="0">
-                        <a:buNone/>
-                      </a:pPr>
-                      <a:r>
-                        <a:rPr lang="en-US" sz="900" dirty="0">
-                          <a:solidFill>
-                            <a:srgbClr val="000000"/>
-                          </a:solidFill>
-                          <a:latin typeface="Arial" pitchFamily="34" charset="0"/>
-                          <a:ea typeface="Arial" pitchFamily="34" charset="-122"/>
-                          <a:cs typeface="Arial" pitchFamily="34" charset="-120"/>
-                        </a:rPr>
-                        <a:t>じゃらん</a:t>
-                      </a:r>
-                      <a:endParaRPr lang="en-US" sz="900" dirty="0">
-                        <a:latin typeface="Arial" charset="0"/>
-                        <a:ea typeface="Arial" charset="0"/>
-                        <a:cs typeface="Arial" charset="0"/>
-                      </a:endParaRPr>
-                    </a:p>
-                  </a:txBody>
-                  <a:tcPr marL="91440" marR="91440" marT="45720" marB="45720">
-                    <a:lnL w="6350" cap="flat" cmpd="sng" algn="ctr">
-                      <a:solidFill>
-                        <a:srgbClr val="CBD5E1"/>
-                      </a:solidFill>
-                      <a:prstDash val="solid"/>
-                      <a:round/>
-                      <a:headEnd type="none" w="med" len="med"/>
-                      <a:tailEnd type="none" w="med" len="med"/>
-                    </a:lnL>
-                    <a:lnR w="6350" cap="flat" cmpd="sng" algn="ctr">
-                      <a:solidFill>
-                        <a:srgbClr val="CBD5E1"/>
-                      </a:solidFill>
-                      <a:prstDash val="solid"/>
-                      <a:round/>
-                      <a:headEnd type="none" w="med" len="med"/>
-                      <a:tailEnd type="none" w="med" len="med"/>
-                    </a:lnR>
-                    <a:lnT w="6350" cap="flat" cmpd="sng" algn="ctr">
-                      <a:solidFill>
-                        <a:srgbClr val="CBD5E1"/>
-                      </a:solidFill>
-                      <a:prstDash val="solid"/>
-                      <a:round/>
-                      <a:headEnd type="none" w="med" len="med"/>
-                      <a:tailEnd type="none" w="med" len="med"/>
-                    </a:lnT>
-                    <a:lnB w="6350" cap="flat" cmpd="sng" algn="ctr">
-                      <a:solidFill>
-                        <a:srgbClr val="CBD5E1"/>
-                      </a:solidFill>
-                      <a:prstDash val="solid"/>
-                      <a:round/>
-                      <a:headEnd type="none" w="med" len="med"/>
-                      <a:tailEnd type="none" w="med" len="med"/>
-                    </a:lnB>
-                    <a:solidFill>
                       <a:srgbClr val="FFFFFF"/>
                     </a:solidFill>
                   </a:tcPr>
@@ -8903,211 +9107,7 @@
                           <a:ea typeface="Arial" pitchFamily="34" charset="-122"/>
                           <a:cs typeface="Arial" pitchFamily="34" charset="-120"/>
                         </a:rPr>
-                        <a:t>5</a:t>
-                      </a:r>
-                      <a:endParaRPr lang="en-US" sz="900" dirty="0">
-                        <a:latin typeface="Arial" charset="0"/>
-                        <a:ea typeface="Arial" charset="0"/>
-                        <a:cs typeface="Arial" charset="0"/>
-                      </a:endParaRPr>
-                    </a:p>
-                  </a:txBody>
-                  <a:tcPr marL="91440" marR="91440" marT="45720" marB="45720">
-                    <a:lnL w="6350" cap="flat" cmpd="sng" algn="ctr">
-                      <a:solidFill>
-                        <a:srgbClr val="CBD5E1"/>
-                      </a:solidFill>
-                      <a:prstDash val="solid"/>
-                      <a:round/>
-                      <a:headEnd type="none" w="med" len="med"/>
-                      <a:tailEnd type="none" w="med" len="med"/>
-                    </a:lnL>
-                    <a:lnR w="6350" cap="flat" cmpd="sng" algn="ctr">
-                      <a:solidFill>
-                        <a:srgbClr val="CBD5E1"/>
-                      </a:solidFill>
-                      <a:prstDash val="solid"/>
-                      <a:round/>
-                      <a:headEnd type="none" w="med" len="med"/>
-                      <a:tailEnd type="none" w="med" len="med"/>
-                    </a:lnR>
-                    <a:lnT w="6350" cap="flat" cmpd="sng" algn="ctr">
-                      <a:solidFill>
-                        <a:srgbClr val="CBD5E1"/>
-                      </a:solidFill>
-                      <a:prstDash val="solid"/>
-                      <a:round/>
-                      <a:headEnd type="none" w="med" len="med"/>
-                      <a:tailEnd type="none" w="med" len="med"/>
-                    </a:lnT>
-                    <a:lnB w="6350" cap="flat" cmpd="sng" algn="ctr">
-                      <a:solidFill>
-                        <a:srgbClr val="CBD5E1"/>
-                      </a:solidFill>
-                      <a:prstDash val="solid"/>
-                      <a:round/>
-                      <a:headEnd type="none" w="med" len="med"/>
-                      <a:tailEnd type="none" w="med" len="med"/>
-                    </a:lnB>
-                    <a:solidFill>
-                      <a:srgbClr val="FFFFFF"/>
-                    </a:solidFill>
-                  </a:tcPr>
-                </a:tc>
-                <a:tc>
-                  <a:txBody>
-                    <a:bodyPr/>
-                    <a:lstStyle/>
-                    <a:p>
-                      <a:pPr algn="ctr" indent="0" marL="0">
-                        <a:buNone/>
-                      </a:pPr>
-                      <a:r>
-                        <a:rPr lang="en-US" sz="900" dirty="0">
-                          <a:solidFill>
-                            <a:srgbClr val="000000"/>
-                          </a:solidFill>
-                          <a:latin typeface="Arial" pitchFamily="34" charset="0"/>
-                          <a:ea typeface="Arial" pitchFamily="34" charset="-122"/>
-                          <a:cs typeface="Arial" pitchFamily="34" charset="-120"/>
-                        </a:rPr>
-                        <a:t>4.2</a:t>
-                      </a:r>
-                      <a:endParaRPr lang="en-US" sz="900" dirty="0">
-                        <a:latin typeface="Arial" charset="0"/>
-                        <a:ea typeface="Arial" charset="0"/>
-                        <a:cs typeface="Arial" charset="0"/>
-                      </a:endParaRPr>
-                    </a:p>
-                  </a:txBody>
-                  <a:tcPr marL="91440" marR="91440" marT="45720" marB="45720">
-                    <a:lnL w="6350" cap="flat" cmpd="sng" algn="ctr">
-                      <a:solidFill>
-                        <a:srgbClr val="CBD5E1"/>
-                      </a:solidFill>
-                      <a:prstDash val="solid"/>
-                      <a:round/>
-                      <a:headEnd type="none" w="med" len="med"/>
-                      <a:tailEnd type="none" w="med" len="med"/>
-                    </a:lnL>
-                    <a:lnR w="6350" cap="flat" cmpd="sng" algn="ctr">
-                      <a:solidFill>
-                        <a:srgbClr val="CBD5E1"/>
-                      </a:solidFill>
-                      <a:prstDash val="solid"/>
-                      <a:round/>
-                      <a:headEnd type="none" w="med" len="med"/>
-                      <a:tailEnd type="none" w="med" len="med"/>
-                    </a:lnR>
-                    <a:lnT w="6350" cap="flat" cmpd="sng" algn="ctr">
-                      <a:solidFill>
-                        <a:srgbClr val="CBD5E1"/>
-                      </a:solidFill>
-                      <a:prstDash val="solid"/>
-                      <a:round/>
-                      <a:headEnd type="none" w="med" len="med"/>
-                      <a:tailEnd type="none" w="med" len="med"/>
-                    </a:lnT>
-                    <a:lnB w="6350" cap="flat" cmpd="sng" algn="ctr">
-                      <a:solidFill>
-                        <a:srgbClr val="CBD5E1"/>
-                      </a:solidFill>
-                      <a:prstDash val="solid"/>
-                      <a:round/>
-                      <a:headEnd type="none" w="med" len="med"/>
-                      <a:tailEnd type="none" w="med" len="med"/>
-                    </a:lnB>
-                    <a:solidFill>
-                      <a:srgbClr val="FFFFFF"/>
-                    </a:solidFill>
-                  </a:tcPr>
-                </a:tc>
-                <a:tc>
-                  <a:txBody>
-                    <a:bodyPr/>
-                    <a:lstStyle/>
-                    <a:p>
-                      <a:pPr algn="ctr" indent="0" marL="0">
-                        <a:buNone/>
-                      </a:pPr>
-                      <a:r>
-                        <a:rPr lang="en-US" sz="900" dirty="0">
-                          <a:solidFill>
-                            <a:srgbClr val="000000"/>
-                          </a:solidFill>
-                          <a:latin typeface="Arial" pitchFamily="34" charset="0"/>
-                          <a:ea typeface="Arial" pitchFamily="34" charset="-122"/>
-                          <a:cs typeface="Arial" pitchFamily="34" charset="-120"/>
-                        </a:rPr>
-                        <a:t>/5 (×2)</a:t>
-                      </a:r>
-                      <a:endParaRPr lang="en-US" sz="900" dirty="0">
-                        <a:latin typeface="Arial" charset="0"/>
-                        <a:ea typeface="Arial" charset="0"/>
-                        <a:cs typeface="Arial" charset="0"/>
-                      </a:endParaRPr>
-                    </a:p>
-                  </a:txBody>
-                  <a:tcPr marL="91440" marR="91440" marT="45720" marB="45720">
-                    <a:lnL w="6350" cap="flat" cmpd="sng" algn="ctr">
-                      <a:solidFill>
-                        <a:srgbClr val="CBD5E1"/>
-                      </a:solidFill>
-                      <a:prstDash val="solid"/>
-                      <a:round/>
-                      <a:headEnd type="none" w="med" len="med"/>
-                      <a:tailEnd type="none" w="med" len="med"/>
-                    </a:lnL>
-                    <a:lnR w="6350" cap="flat" cmpd="sng" algn="ctr">
-                      <a:solidFill>
-                        <a:srgbClr val="CBD5E1"/>
-                      </a:solidFill>
-                      <a:prstDash val="solid"/>
-                      <a:round/>
-                      <a:headEnd type="none" w="med" len="med"/>
-                      <a:tailEnd type="none" w="med" len="med"/>
-                    </a:lnR>
-                    <a:lnT w="6350" cap="flat" cmpd="sng" algn="ctr">
-                      <a:solidFill>
-                        <a:srgbClr val="CBD5E1"/>
-                      </a:solidFill>
-                      <a:prstDash val="solid"/>
-                      <a:round/>
-                      <a:headEnd type="none" w="med" len="med"/>
-                      <a:tailEnd type="none" w="med" len="med"/>
-                    </a:lnT>
-                    <a:lnB w="6350" cap="flat" cmpd="sng" algn="ctr">
-                      <a:solidFill>
-                        <a:srgbClr val="CBD5E1"/>
-                      </a:solidFill>
-                      <a:prstDash val="solid"/>
-                      <a:round/>
-                      <a:headEnd type="none" w="med" len="med"/>
-                      <a:tailEnd type="none" w="med" len="med"/>
-                    </a:lnB>
-                    <a:solidFill>
-                      <a:srgbClr val="FFFFFF"/>
-                    </a:solidFill>
-                  </a:tcPr>
-                </a:tc>
-                <a:tc>
-                  <a:txBody>
-                    <a:bodyPr/>
-                    <a:lstStyle/>
-                    <a:p>
-                      <a:pPr algn="ctr" indent="0" marL="0">
-                        <a:buNone/>
-                      </a:pPr>
-                      <a:r>
-                        <a:rPr lang="en-US" sz="900" dirty="0">
-                          <a:solidFill>
-                            <a:srgbClr val="000000"/>
-                          </a:solidFill>
-                          <a:latin typeface="Arial" pitchFamily="34" charset="0"/>
-                          <a:ea typeface="Arial" pitchFamily="34" charset="-122"/>
-                          <a:cs typeface="Arial" pitchFamily="34" charset="-120"/>
-                        </a:rPr>
-                        <a:t>8.4</a:t>
+                        <a:t>8.46</a:t>
                       </a:r>
                       <a:endParaRPr lang="en-US" sz="900" dirty="0">
                         <a:latin typeface="Arial" charset="0"/>
@@ -10199,7 +10199,7 @@
                 <a:ea typeface="Arial" pitchFamily="34" charset="-122"/>
                 <a:cs typeface="Arial" pitchFamily="34" charset="-120"/>
               </a:rPr>
-              <a:t>96件（80.0%）</a:t>
+              <a:t>99件（80.5%）</a:t>
             </a:r>
             <a:endParaRPr lang="en-US" sz="1100" dirty="0"/>
           </a:p>
@@ -10297,7 +10297,7 @@
                 <a:ea typeface="Arial" pitchFamily="34" charset="-122"/>
                 <a:cs typeface="Arial" pitchFamily="34" charset="-120"/>
               </a:rPr>
-              <a:t>23件（19.2%）</a:t>
+              <a:t>23件（18.7%）</a:t>
             </a:r>
             <a:endParaRPr lang="en-US" sz="1100" dirty="0"/>
           </a:p>
@@ -10807,7 +10807,7 @@
                 <a:ea typeface="Arial" pitchFamily="34" charset="-122"/>
                 <a:cs typeface="Arial" pitchFamily="34" charset="-120"/>
               </a:rPr>
-              <a:t>交通方便，購物方便 交通の便が良く、買い物にも便利</a:t>
+              <a:t>乾淨方便，適合商旅出行 清潔で便利、ビジネス旅行者に最適</a:t>
             </a:r>
             <a:endParaRPr lang="en-US" sz="900" dirty="0"/>
           </a:p>
@@ -10846,7 +10846,7 @@
                 <a:ea typeface="Arial" pitchFamily="34" charset="-122"/>
                 <a:cs typeface="Arial" pitchFamily="34" charset="-120"/>
               </a:rPr>
-              <a:t>「附近很方便，很多食肆，有海鮮，打邊爐，拉麵，超級市場，7仔，購物中心很多，還有公仔夾，酒店服務好，乾淨衞生，值得推...」</a:t>
+              <a:t>「交通方便，購物方便 交通の便が良く、買い物にも便利」</a:t>
             </a:r>
             <a:endParaRPr lang="en-US" sz="900" dirty="0"/>
           </a:p>
@@ -11476,7 +11476,7 @@
                 <a:ea typeface="Arial" pitchFamily="34" charset="-122"/>
                 <a:cs typeface="Arial" pitchFamily="34" charset="-120"/>
               </a:rPr>
-              <a:t>ホテルのサービスも良く、清潔で衛生的です</a:t>
+              <a:t>乾淨方便，適合商旅出行 清潔で便利、ビジネス旅行者に最適</a:t>
             </a:r>
             <a:endParaRPr lang="en-US" sz="900" dirty="0"/>
           </a:p>
@@ -11515,7 +11515,7 @@
                 <a:ea typeface="Arial" pitchFamily="34" charset="-122"/>
                 <a:cs typeface="Arial" pitchFamily="34" charset="-120"/>
               </a:rPr>
-              <a:t>「綺麗だった 空調設備があまり良くなかった 空調設備があまり良くなかった」</a:t>
+              <a:t>「ホテルのサービスも良く、清潔で衛生的です」</a:t>
             </a:r>
             <a:endParaRPr lang="en-US" sz="900" dirty="0"/>
           </a:p>

--- a/納品レポート/ホテル別レポート/kawasaki_nikko_口コミ分析レポート.pptx
+++ b/納品レポート/ホテル別レポート/kawasaki_nikko_口コミ分析レポート.pptx
@@ -208,10 +208,10 @@
                 <c:formatCode>General</c:formatCode>
                 <c:ptCount val="6"/>
                 <c:pt idx="0">
-                  <c:v>9.65</c:v>
+                  <c:v>9.83</c:v>
                 </c:pt>
                 <c:pt idx="1">
-                  <c:v>8.8</c:v>
+                  <c:v>9</c:v>
                 </c:pt>
                 <c:pt idx="2">
                   <c:v>8.67</c:v>
@@ -566,10 +566,10 @@
               <c:numCache>
                 <c:ptCount val="3"/>
                 <c:pt idx="0">
-                  <c:v>99</c:v>
+                  <c:v>100</c:v>
                 </c:pt>
                 <c:pt idx="1">
-                  <c:v>23</c:v>
+                  <c:v>22</c:v>
                 </c:pt>
                 <c:pt idx="2">
                   <c:v>1</c:v>
@@ -795,7 +795,7 @@
                 <c:formatCode>General</c:formatCode>
                 <c:ptCount val="7"/>
                 <c:pt idx="0">
-                  <c:v>49</c:v>
+                  <c:v>50</c:v>
                 </c:pt>
                 <c:pt idx="1">
                   <c:v>24</c:v>
@@ -804,7 +804,7 @@
                   <c:v>26</c:v>
                 </c:pt>
                 <c:pt idx="3">
-                  <c:v>11</c:v>
+                  <c:v>10</c:v>
                 </c:pt>
                 <c:pt idx="4">
                   <c:v>10</c:v>
@@ -2784,7 +2784,7 @@
                 <a:ea typeface="Arial" pitchFamily="34" charset="-122"/>
                 <a:cs typeface="Arial" pitchFamily="34" charset="-120"/>
               </a:rPr>
-              <a:t>作成日：2026年3月18日</a:t>
+              <a:t>作成日：2026年3月19日</a:t>
             </a:r>
             <a:endParaRPr lang="en-US" sz="1000" dirty="0"/>
           </a:p>
@@ -3330,7 +3330,7 @@
                           <a:ea typeface="Arial" pitchFamily="34" charset="-122"/>
                           <a:cs typeface="Arial" pitchFamily="34" charset="-120"/>
                         </a:rPr>
-                        <a:t>8.65点</a:t>
+                        <a:t>8.67点</a:t>
                       </a:r>
                       <a:endParaRPr lang="en-US" sz="1000" dirty="0">
                         <a:latin typeface="Arial" charset="0"/>
@@ -3604,7 +3604,7 @@
                           <a:ea typeface="Arial" pitchFamily="34" charset="-122"/>
                           <a:cs typeface="Arial" pitchFamily="34" charset="-120"/>
                         </a:rPr>
-                        <a:t>80.5%</a:t>
+                        <a:t>81.3%</a:t>
                       </a:r>
                       <a:endParaRPr lang="en-US" sz="1000" dirty="0">
                         <a:latin typeface="Arial" charset="0"/>
@@ -5339,7 +5339,7 @@
                 <a:ea typeface="Arial" pitchFamily="34" charset="-122"/>
                 <a:cs typeface="Arial" pitchFamily="34" charset="-120"/>
               </a:rPr>
-              <a:t>8.65</a:t>
+              <a:t>8.67</a:t>
             </a:r>
             <a:endParaRPr lang="en-US" sz="3200" dirty="0"/>
           </a:p>
@@ -5464,7 +5464,7 @@
                 <a:ea typeface="Arial" pitchFamily="34" charset="-122"/>
                 <a:cs typeface="Arial" pitchFamily="34" charset="-120"/>
               </a:rPr>
-              <a:t>80.5%</a:t>
+              <a:t>81.3%</a:t>
             </a:r>
             <a:endParaRPr lang="en-US" sz="3200" dirty="0"/>
           </a:p>
@@ -5902,7 +5902,7 @@
                 <a:ea typeface="Arial" pitchFamily="34" charset="-122"/>
                 <a:cs typeface="Arial" pitchFamily="34" charset="-120"/>
               </a:rPr>
-              <a:t>  ホテルのサービスも良く、清潔で衛生的です</a:t>
+              <a:t>  朝食が非常に美味しく、朝食会場の接客が丁寧で素晴らしかった</a:t>
             </a:r>
             <a:endParaRPr lang="en-US" sz="1100" dirty="0"/>
           </a:p>
@@ -6090,7 +6090,7 @@
                 <a:ea typeface="Arial" pitchFamily="34" charset="-122"/>
                 <a:cs typeface="Arial" pitchFamily="34" charset="-120"/>
               </a:rPr>
-              <a:t>  エアコンは個別じゃないのか、冷風も出ず窓も開かず苦しい思いをしました 天気が良かったのもあって部屋が暑い</a:t>
+              <a:t>  寒がりな私ですが、暖房も自分好みに設定できてよかったです</a:t>
             </a:r>
             <a:endParaRPr lang="en-US" sz="1100" dirty="0"/>
           </a:p>
@@ -6130,7 +6130,7 @@
                 <a:ea typeface="Arial" pitchFamily="34" charset="-122"/>
                 <a:cs typeface="Arial" pitchFamily="34" charset="-120"/>
               </a:rPr>
-              <a:t>  唯一的缺點是可以聽到電車的聲音，但是聲音不大，前台耳塞</a:t>
+              <a:t>  室内の狭さ以外でネガティブな面として気づいたのは、高架を走る京急線の音が聞こえたり、隣室のイビキが聞こえるといった...</a:t>
             </a:r>
             <a:endParaRPr lang="en-US" sz="1100" dirty="0"/>
           </a:p>
@@ -6523,7 +6523,7 @@
                 <a:ea typeface="Arial" pitchFamily="34" charset="-122"/>
                 <a:cs typeface="Arial" pitchFamily="34" charset="-120"/>
               </a:rPr>
-              <a:t>8.65</a:t>
+              <a:t>8.67</a:t>
             </a:r>
             <a:endParaRPr lang="en-US" sz="3200" dirty="0"/>
           </a:p>
@@ -6648,7 +6648,7 @@
                 <a:ea typeface="Arial" pitchFamily="34" charset="-122"/>
                 <a:cs typeface="Arial" pitchFamily="34" charset="-120"/>
               </a:rPr>
-              <a:t>80.5%</a:t>
+              <a:t>81.3%</a:t>
             </a:r>
             <a:endParaRPr lang="en-US" sz="3200" dirty="0"/>
           </a:p>
@@ -7319,7 +7319,7 @@
                 <a:ea typeface="Arial" pitchFamily="34" charset="-122"/>
                 <a:cs typeface="Arial" pitchFamily="34" charset="-120"/>
               </a:rPr>
-              <a:t>Trip.com(9.65)が最高スコア。</a:t>
+              <a:t>Trip.com(9.83)が最高スコア。</a:t>
             </a:r>
             <a:endParaRPr lang="en-US" sz="1100" dirty="0"/>
           </a:p>
@@ -7877,7 +7877,7 @@
                           <a:ea typeface="Arial" pitchFamily="34" charset="-122"/>
                           <a:cs typeface="Arial" pitchFamily="34" charset="-120"/>
                         </a:rPr>
-                        <a:t>26</a:t>
+                        <a:t>24</a:t>
                       </a:r>
                       <a:endParaRPr lang="en-US" sz="900" dirty="0">
                         <a:latin typeface="Arial" charset="0"/>
@@ -7945,7 +7945,7 @@
                           <a:ea typeface="Arial" pitchFamily="34" charset="-122"/>
                           <a:cs typeface="Arial" pitchFamily="34" charset="-120"/>
                         </a:rPr>
-                        <a:t>9.65</a:t>
+                        <a:t>9.83</a:t>
                       </a:r>
                       <a:endParaRPr lang="en-US" sz="900" dirty="0">
                         <a:latin typeface="Arial" charset="0"/>
@@ -8081,7 +8081,7 @@
                           <a:ea typeface="Arial" pitchFamily="34" charset="-122"/>
                           <a:cs typeface="Arial" pitchFamily="34" charset="-120"/>
                         </a:rPr>
-                        <a:t>9.65</a:t>
+                        <a:t>9.83</a:t>
                       </a:r>
                       <a:endParaRPr lang="en-US" sz="900" dirty="0">
                         <a:latin typeface="Arial" charset="0"/>
@@ -8219,7 +8219,7 @@
                           <a:ea typeface="Arial" pitchFamily="34" charset="-122"/>
                           <a:cs typeface="Arial" pitchFamily="34" charset="-120"/>
                         </a:rPr>
-                        <a:t>5</a:t>
+                        <a:t>6</a:t>
                       </a:r>
                       <a:endParaRPr lang="en-US" sz="900" dirty="0">
                         <a:latin typeface="Arial" charset="0"/>
@@ -8287,7 +8287,7 @@
                           <a:ea typeface="Arial" pitchFamily="34" charset="-122"/>
                           <a:cs typeface="Arial" pitchFamily="34" charset="-120"/>
                         </a:rPr>
-                        <a:t>4.4</a:t>
+                        <a:t>4.5</a:t>
                       </a:r>
                       <a:endParaRPr lang="en-US" sz="900" dirty="0">
                         <a:latin typeface="Arial" charset="0"/>
@@ -8423,7 +8423,7 @@
                           <a:ea typeface="Arial" pitchFamily="34" charset="-122"/>
                           <a:cs typeface="Arial" pitchFamily="34" charset="-120"/>
                         </a:rPr>
-                        <a:t>8.8</a:t>
+                        <a:t>9</a:t>
                       </a:r>
                       <a:endParaRPr lang="en-US" sz="900" dirty="0">
                         <a:latin typeface="Arial" charset="0"/>
@@ -8903,7 +8903,7 @@
                           <a:ea typeface="Arial" pitchFamily="34" charset="-122"/>
                           <a:cs typeface="Arial" pitchFamily="34" charset="-120"/>
                         </a:rPr>
-                        <a:t>69</a:t>
+                        <a:t>70</a:t>
                       </a:r>
                       <a:endParaRPr lang="en-US" sz="900" dirty="0">
                         <a:latin typeface="Arial" charset="0"/>
@@ -10199,7 +10199,7 @@
                 <a:ea typeface="Arial" pitchFamily="34" charset="-122"/>
                 <a:cs typeface="Arial" pitchFamily="34" charset="-120"/>
               </a:rPr>
-              <a:t>99件（80.5%）</a:t>
+              <a:t>100件（81.3%）</a:t>
             </a:r>
             <a:endParaRPr lang="en-US" sz="1100" dirty="0"/>
           </a:p>
@@ -10297,7 +10297,7 @@
                 <a:ea typeface="Arial" pitchFamily="34" charset="-122"/>
                 <a:cs typeface="Arial" pitchFamily="34" charset="-120"/>
               </a:rPr>
-              <a:t>23件（18.7%）</a:t>
+              <a:t>22件（17.9%）</a:t>
             </a:r>
             <a:endParaRPr lang="en-US" sz="1100" dirty="0"/>
           </a:p>
@@ -10846,7 +10846,7 @@
                 <a:ea typeface="Arial" pitchFamily="34" charset="-122"/>
                 <a:cs typeface="Arial" pitchFamily="34" charset="-120"/>
               </a:rPr>
-              <a:t>「交通方便，購物方便 交通の便が良く、買い物にも便利」</a:t>
+              <a:t>「駅近で便利でした 部屋も清潔で気持ち良かったです コーヒーやお水があり嬉しかったです 駅近で便利でした 部屋も清潔...」</a:t>
             </a:r>
             <a:endParaRPr lang="en-US" sz="900" dirty="0"/>
           </a:p>
@@ -11030,7 +11030,7 @@
                 <a:ea typeface="Arial" pitchFamily="34" charset="-122"/>
                 <a:cs typeface="Arial" pitchFamily="34" charset="-120"/>
               </a:rPr>
-              <a:t>ホテルのサービスも良く、清潔で衛生的です</a:t>
+              <a:t>朝食が非常に美味しく、朝食会場の接客が丁寧で素晴らしかった</a:t>
             </a:r>
             <a:endParaRPr lang="en-US" sz="900" dirty="0"/>
           </a:p>
@@ -11069,7 +11069,7 @@
                 <a:ea typeface="Arial" pitchFamily="34" charset="-122"/>
                 <a:cs typeface="Arial" pitchFamily="34" charset="-120"/>
               </a:rPr>
-              <a:t>「食事、スタッフのサービス 部屋が狭い、ロケーションが悪い、入り口がわかりにくい 部屋が狭い、ロケーションが悪い、入...」</a:t>
+              <a:t>「ホテルのサービスも良く、清潔で衛生的です」</a:t>
             </a:r>
             <a:endParaRPr lang="en-US" sz="900" dirty="0"/>
           </a:p>
@@ -11515,7 +11515,7 @@
                 <a:ea typeface="Arial" pitchFamily="34" charset="-122"/>
                 <a:cs typeface="Arial" pitchFamily="34" charset="-120"/>
               </a:rPr>
-              <a:t>「ホテルのサービスも良く、清潔で衛生的です」</a:t>
+              <a:t>「駅近で便利でした 部屋も清潔で気持ち良かったです コーヒーやお水があり嬉しかったです 駅近で便利でした 部屋も清潔...」</a:t>
             </a:r>
             <a:endParaRPr lang="en-US" sz="900" dirty="0"/>
           </a:p>
@@ -11699,7 +11699,7 @@
                 <a:ea typeface="Arial" pitchFamily="34" charset="-122"/>
                 <a:cs typeface="Arial" pitchFamily="34" charset="-120"/>
               </a:rPr>
-              <a:t>朝食は茹で魚、パン、アイスクリームなど種類豊富で、味も美味しかったです</a:t>
+              <a:t>朝食が非常に美味しく、朝食会場の接客が丁寧で素晴らしかった</a:t>
             </a:r>
             <a:endParaRPr lang="en-US" sz="900" dirty="0"/>
           </a:p>
@@ -11738,7 +11738,7 @@
                 <a:ea typeface="Arial" pitchFamily="34" charset="-122"/>
                 <a:cs typeface="Arial" pitchFamily="34" charset="-120"/>
               </a:rPr>
-              <a:t>「朝食のその場で焼いて頂くオムレツも変わらず美味しかったです」</a:t>
+              <a:t>「朝食は茹で魚、パン、アイスクリームなど種類豊富で、味も美味しかったです」</a:t>
             </a:r>
             <a:endParaRPr lang="en-US" sz="900" dirty="0"/>
           </a:p>
@@ -12651,7 +12651,7 @@
                           <a:ea typeface="Arial" pitchFamily="34" charset="-122"/>
                           <a:cs typeface="Arial" pitchFamily="34" charset="-120"/>
                         </a:rPr>
-                        <a:t>エアコンは個別じゃないのか、冷風も出ず窓も開かず苦しい思いをしました 天気が良かったのもあって部屋が暑い</a:t>
+                        <a:t>寒がりな私ですが、暖房も自分好みに設定できてよかったです</a:t>
                       </a:r>
                       <a:endParaRPr lang="en-US" sz="900" dirty="0">
                         <a:latin typeface="Arial" charset="0"/>
@@ -12925,7 +12925,7 @@
                           <a:ea typeface="Arial" pitchFamily="34" charset="-122"/>
                           <a:cs typeface="Arial" pitchFamily="34" charset="-120"/>
                         </a:rPr>
-                        <a:t>唯一的缺點是可以聽到電車的聲音，但是聲音不大，前台耳塞</a:t>
+                        <a:t>室内の狭さ以外でネガティブな面として気づいたのは、高架を走る京急線の音が聞こえたり、隣室のイビキが聞こえるといった...</a:t>
                       </a:r>
                       <a:endParaRPr lang="en-US" sz="900" dirty="0">
                         <a:latin typeface="Arial" charset="0"/>
@@ -12993,7 +12993,7 @@
                           <a:ea typeface="Arial" pitchFamily="34" charset="-122"/>
                           <a:cs typeface="Arial" pitchFamily="34" charset="-120"/>
                         </a:rPr>
-                        <a:t>9件</a:t>
+                        <a:t>10件</a:t>
                       </a:r>
                       <a:endParaRPr lang="en-US" sz="900" dirty="0">
                         <a:latin typeface="Arial" charset="0"/>
@@ -13473,7 +13473,7 @@
                           <a:ea typeface="Arial" pitchFamily="34" charset="-122"/>
                           <a:cs typeface="Arial" pitchFamily="34" charset="-120"/>
                         </a:rPr>
-                        <a:t>フロントには使い捨てのバスアメニティ、バスソルト、フェイスマスクなど、必要なものがすべて揃っていました</a:t>
+                        <a:t>それと洋式トイレから僅かに尿臭がしてきたのもマイナスポイントでした</a:t>
                       </a:r>
                       <a:endParaRPr lang="en-US" sz="900" dirty="0">
                         <a:latin typeface="Arial" charset="0"/>
@@ -13541,7 +13541,7 @@
                           <a:ea typeface="Arial" pitchFamily="34" charset="-122"/>
                           <a:cs typeface="Arial" pitchFamily="34" charset="-120"/>
                         </a:rPr>
-                        <a:t>6件</a:t>
+                        <a:t>7件</a:t>
                       </a:r>
                       <a:endParaRPr lang="en-US" sz="900" dirty="0">
                         <a:latin typeface="Arial" charset="0"/>
@@ -13815,7 +13815,7 @@
                           <a:ea typeface="Arial" pitchFamily="34" charset="-122"/>
                           <a:cs typeface="Arial" pitchFamily="34" charset="-120"/>
                         </a:rPr>
-                        <a:t>6件</a:t>
+                        <a:t>5件</a:t>
                       </a:r>
                       <a:endParaRPr lang="en-US" sz="900" dirty="0">
                         <a:latin typeface="Arial" charset="0"/>
@@ -14843,7 +14843,7 @@
                           <a:ea typeface="Arial" pitchFamily="34" charset="-122"/>
                           <a:cs typeface="Arial" pitchFamily="34" charset="-120"/>
                         </a:rPr>
-                        <a:t>関係ないが駅からの道が臭かったです</a:t>
+                        <a:t>それと洋式トイレから僅かに尿臭がしてきたのもマイナスポイントでした</a:t>
                       </a:r>
                       <a:endParaRPr lang="en-US" sz="900" dirty="0">
                         <a:latin typeface="Arial" charset="0"/>
@@ -14911,7 +14911,7 @@
                           <a:ea typeface="Arial" pitchFamily="34" charset="-122"/>
                           <a:cs typeface="Arial" pitchFamily="34" charset="-120"/>
                         </a:rPr>
-                        <a:t>1件</a:t>
+                        <a:t>2件</a:t>
                       </a:r>
                       <a:endParaRPr lang="en-US" sz="900" dirty="0">
                         <a:latin typeface="Arial" charset="0"/>
@@ -15622,177 +15622,6 @@
                 <a:ea typeface="Arial" pitchFamily="34" charset="-122"/>
                 <a:cs typeface="Arial" pitchFamily="34" charset="-120"/>
               </a:rPr>
-              <a:t>清掃品質の向上</a:t>
-            </a:r>
-            <a:endParaRPr lang="en-US" sz="1200" dirty="0"/>
-          </a:p>
-        </p:txBody>
-      </p:sp>
-      <p:sp>
-        <p:nvSpPr>
-          <p:cNvPr id="13" name="Text 11"/>
-          <p:cNvSpPr/>
-          <p:nvPr/>
-        </p:nvSpPr>
-        <p:spPr>
-          <a:xfrm>
-            <a:off x="4800600" y="1600200"/>
-            <a:ext cx="3657600" cy="1188720"/>
-          </a:xfrm>
-          <a:prstGeom prst="rect">
-            <a:avLst/>
-          </a:prstGeom>
-          <a:noFill/>
-          <a:ln/>
-        </p:spPr>
-        <p:txBody>
-          <a:bodyPr wrap="square" lIns="0" tIns="0" rIns="0" bIns="0" rtlCol="0" anchor="ctr"/>
-          <a:lstStyle/>
-          <a:p>
-            <a:pPr marL="342900" indent="-342900">
-              <a:spcAft>
-                <a:spcPts val="300"/>
-              </a:spcAft>
-              <a:buSzPct val="100000"/>
-              <a:buChar char="•"/>
-            </a:pPr>
-            <a:r>
-              <a:rPr lang="en-US" sz="900" dirty="0">
-                <a:solidFill>
-                  <a:srgbClr val="334155"/>
-                </a:solidFill>
-                <a:latin typeface="Arial" pitchFamily="34" charset="0"/>
-                <a:ea typeface="Arial" pitchFamily="34" charset="-122"/>
-                <a:cs typeface="Arial" pitchFamily="34" charset="-120"/>
-              </a:rPr>
-              <a:t>清掃チェックリストの見直しと強化（ベッド下・隅の重点確認）</a:t>
-            </a:r>
-            <a:endParaRPr lang="en-US" sz="900" dirty="0"/>
-          </a:p>
-          <a:p>
-            <a:pPr marL="342900" indent="-342900">
-              <a:spcAft>
-                <a:spcPts val="300"/>
-              </a:spcAft>
-              <a:buSzPct val="100000"/>
-              <a:buChar char="•"/>
-            </a:pPr>
-            <a:r>
-              <a:rPr lang="en-US" sz="900" dirty="0">
-                <a:solidFill>
-                  <a:srgbClr val="334155"/>
-                </a:solidFill>
-                <a:latin typeface="Arial" pitchFamily="34" charset="0"/>
-                <a:ea typeface="Arial" pitchFamily="34" charset="-122"/>
-                <a:cs typeface="Arial" pitchFamily="34" charset="-120"/>
-              </a:rPr>
-              <a:t>清掃後のダブルチェック体制の導入</a:t>
-            </a:r>
-            <a:endParaRPr lang="en-US" sz="900" dirty="0"/>
-          </a:p>
-          <a:p>
-            <a:pPr marL="342900" indent="-342900">
-              <a:spcAft>
-                <a:spcPts val="300"/>
-              </a:spcAft>
-              <a:buSzPct val="100000"/>
-              <a:buChar char="•"/>
-            </a:pPr>
-            <a:r>
-              <a:rPr lang="en-US" sz="900" dirty="0">
-                <a:solidFill>
-                  <a:srgbClr val="334155"/>
-                </a:solidFill>
-                <a:latin typeface="Arial" pitchFamily="34" charset="0"/>
-                <a:ea typeface="Arial" pitchFamily="34" charset="-122"/>
-                <a:cs typeface="Arial" pitchFamily="34" charset="-120"/>
-              </a:rPr>
-              <a:t>清掃スタッフへの再研修実施</a:t>
-            </a:r>
-            <a:endParaRPr lang="en-US" sz="900" dirty="0"/>
-          </a:p>
-        </p:txBody>
-      </p:sp>
-      <p:sp>
-        <p:nvSpPr>
-          <p:cNvPr id="14" name="Shape 12"/>
-          <p:cNvSpPr/>
-          <p:nvPr/>
-        </p:nvSpPr>
-        <p:spPr>
-          <a:xfrm>
-            <a:off x="457200" y="3017520"/>
-            <a:ext cx="3977640" cy="1600200"/>
-          </a:xfrm>
-          <a:prstGeom prst="rect">
-            <a:avLst/>
-          </a:prstGeom>
-          <a:solidFill>
-            <a:srgbClr val="FFFFFF"/>
-          </a:solidFill>
-          <a:ln/>
-          <a:effectLst>
-            <a:outerShdw sx="100000" sy="100000" kx="0" ky="0" algn="bl" rotWithShape="0" blurRad="50800" dist="25400" dir="8100000">
-              <a:srgbClr val="000000">
-                <a:alpha val="10000"/>
-              </a:srgbClr>
-            </a:outerShdw>
-          </a:effectLst>
-        </p:spPr>
-      </p:sp>
-      <p:sp>
-        <p:nvSpPr>
-          <p:cNvPr id="15" name="Shape 13"/>
-          <p:cNvSpPr/>
-          <p:nvPr/>
-        </p:nvSpPr>
-        <p:spPr>
-          <a:xfrm>
-            <a:off x="457200" y="3017520"/>
-            <a:ext cx="54864" cy="1600200"/>
-          </a:xfrm>
-          <a:prstGeom prst="rect">
-            <a:avLst/>
-          </a:prstGeom>
-          <a:solidFill>
-            <a:srgbClr val="3B7DD8"/>
-          </a:solidFill>
-          <a:ln/>
-        </p:spPr>
-      </p:sp>
-      <p:sp>
-        <p:nvSpPr>
-          <p:cNvPr id="16" name="Text 14"/>
-          <p:cNvSpPr/>
-          <p:nvPr/>
-        </p:nvSpPr>
-        <p:spPr>
-          <a:xfrm>
-            <a:off x="594360" y="3063240"/>
-            <a:ext cx="3657600" cy="320040"/>
-          </a:xfrm>
-          <a:prstGeom prst="rect">
-            <a:avLst/>
-          </a:prstGeom>
-          <a:noFill/>
-          <a:ln/>
-        </p:spPr>
-        <p:txBody>
-          <a:bodyPr wrap="square" lIns="0" tIns="0" rIns="0" bIns="0" rtlCol="0" anchor="ctr"/>
-          <a:lstStyle/>
-          <a:p>
-            <a:pPr indent="0" marL="0">
-              <a:buNone/>
-            </a:pPr>
-            <a:r>
-              <a:rPr lang="en-US" sz="1200" b="1" dirty="0">
-                <a:solidFill>
-                  <a:srgbClr val="1A2744"/>
-                </a:solidFill>
-                <a:latin typeface="Arial" pitchFamily="34" charset="0"/>
-                <a:ea typeface="Arial" pitchFamily="34" charset="-122"/>
-                <a:cs typeface="Arial" pitchFamily="34" charset="-120"/>
-              </a:rPr>
               <a:t>朝食サービスの改善</a:t>
             </a:r>
             <a:endParaRPr lang="en-US" sz="1200" dirty="0"/>
@@ -15801,13 +15630,13 @@
       </p:sp>
       <p:sp>
         <p:nvSpPr>
-          <p:cNvPr id="17" name="Text 15"/>
-          <p:cNvSpPr/>
-          <p:nvPr/>
-        </p:nvSpPr>
-        <p:spPr>
-          <a:xfrm>
-            <a:off x="594360" y="3383280"/>
+          <p:cNvPr id="13" name="Text 11"/>
+          <p:cNvSpPr/>
+          <p:nvPr/>
+        </p:nvSpPr>
+        <p:spPr>
+          <a:xfrm>
+            <a:off x="4800600" y="1600200"/>
             <a:ext cx="3657600" cy="1188720"/>
           </a:xfrm>
           <a:prstGeom prst="rect">
@@ -15886,13 +15715,13 @@
       </p:sp>
       <p:sp>
         <p:nvSpPr>
-          <p:cNvPr id="18" name="Shape 16"/>
-          <p:cNvSpPr/>
-          <p:nvPr/>
-        </p:nvSpPr>
-        <p:spPr>
-          <a:xfrm>
-            <a:off x="4663440" y="3017520"/>
+          <p:cNvPr id="14" name="Shape 12"/>
+          <p:cNvSpPr/>
+          <p:nvPr/>
+        </p:nvSpPr>
+        <p:spPr>
+          <a:xfrm>
+            <a:off x="457200" y="3017520"/>
             <a:ext cx="3977640" cy="1600200"/>
           </a:xfrm>
           <a:prstGeom prst="rect">
@@ -15913,13 +15742,13 @@
       </p:sp>
       <p:sp>
         <p:nvSpPr>
-          <p:cNvPr id="19" name="Shape 17"/>
-          <p:cNvSpPr/>
-          <p:nvPr/>
-        </p:nvSpPr>
-        <p:spPr>
-          <a:xfrm>
-            <a:off x="4663440" y="3017520"/>
+          <p:cNvPr id="15" name="Shape 13"/>
+          <p:cNvSpPr/>
+          <p:nvPr/>
+        </p:nvSpPr>
+        <p:spPr>
+          <a:xfrm>
+            <a:off x="457200" y="3017520"/>
             <a:ext cx="54864" cy="1600200"/>
           </a:xfrm>
           <a:prstGeom prst="rect">
@@ -15933,13 +15762,13 @@
       </p:sp>
       <p:sp>
         <p:nvSpPr>
-          <p:cNvPr id="20" name="Text 18"/>
-          <p:cNvSpPr/>
-          <p:nvPr/>
-        </p:nvSpPr>
-        <p:spPr>
-          <a:xfrm>
-            <a:off x="4800600" y="3063240"/>
+          <p:cNvPr id="16" name="Text 14"/>
+          <p:cNvSpPr/>
+          <p:nvPr/>
+        </p:nvSpPr>
+        <p:spPr>
+          <a:xfrm>
+            <a:off x="594360" y="3063240"/>
             <a:ext cx="3657600" cy="320040"/>
           </a:xfrm>
           <a:prstGeom prst="rect">
@@ -15972,13 +15801,13 @@
       </p:sp>
       <p:sp>
         <p:nvSpPr>
-          <p:cNvPr id="21" name="Text 19"/>
-          <p:cNvSpPr/>
-          <p:nvPr/>
-        </p:nvSpPr>
-        <p:spPr>
-          <a:xfrm>
-            <a:off x="4800600" y="3383280"/>
+          <p:cNvPr id="17" name="Text 15"/>
+          <p:cNvSpPr/>
+          <p:nvPr/>
+        </p:nvSpPr>
+        <p:spPr>
+          <a:xfrm>
+            <a:off x="594360" y="3383280"/>
             <a:ext cx="3657600" cy="1188720"/>
           </a:xfrm>
           <a:prstGeom prst="rect">
@@ -16050,6 +15879,177 @@
                 <a:cs typeface="Arial" pitchFamily="34" charset="-120"/>
               </a:rPr>
               <a:t>異常報告があった客室の優先メンテナンス実施</a:t>
+            </a:r>
+            <a:endParaRPr lang="en-US" sz="900" dirty="0"/>
+          </a:p>
+        </p:txBody>
+      </p:sp>
+      <p:sp>
+        <p:nvSpPr>
+          <p:cNvPr id="18" name="Shape 16"/>
+          <p:cNvSpPr/>
+          <p:nvPr/>
+        </p:nvSpPr>
+        <p:spPr>
+          <a:xfrm>
+            <a:off x="4663440" y="3017520"/>
+            <a:ext cx="3977640" cy="1600200"/>
+          </a:xfrm>
+          <a:prstGeom prst="rect">
+            <a:avLst/>
+          </a:prstGeom>
+          <a:solidFill>
+            <a:srgbClr val="FFFFFF"/>
+          </a:solidFill>
+          <a:ln/>
+          <a:effectLst>
+            <a:outerShdw sx="100000" sy="100000" kx="0" ky="0" algn="bl" rotWithShape="0" blurRad="50800" dist="25400" dir="8100000">
+              <a:srgbClr val="000000">
+                <a:alpha val="10000"/>
+              </a:srgbClr>
+            </a:outerShdw>
+          </a:effectLst>
+        </p:spPr>
+      </p:sp>
+      <p:sp>
+        <p:nvSpPr>
+          <p:cNvPr id="19" name="Shape 17"/>
+          <p:cNvSpPr/>
+          <p:nvPr/>
+        </p:nvSpPr>
+        <p:spPr>
+          <a:xfrm>
+            <a:off x="4663440" y="3017520"/>
+            <a:ext cx="54864" cy="1600200"/>
+          </a:xfrm>
+          <a:prstGeom prst="rect">
+            <a:avLst/>
+          </a:prstGeom>
+          <a:solidFill>
+            <a:srgbClr val="3B7DD8"/>
+          </a:solidFill>
+          <a:ln/>
+        </p:spPr>
+      </p:sp>
+      <p:sp>
+        <p:nvSpPr>
+          <p:cNvPr id="20" name="Text 18"/>
+          <p:cNvSpPr/>
+          <p:nvPr/>
+        </p:nvSpPr>
+        <p:spPr>
+          <a:xfrm>
+            <a:off x="4800600" y="3063240"/>
+            <a:ext cx="3657600" cy="320040"/>
+          </a:xfrm>
+          <a:prstGeom prst="rect">
+            <a:avLst/>
+          </a:prstGeom>
+          <a:noFill/>
+          <a:ln/>
+        </p:spPr>
+        <p:txBody>
+          <a:bodyPr wrap="square" lIns="0" tIns="0" rIns="0" bIns="0" rtlCol="0" anchor="ctr"/>
+          <a:lstStyle/>
+          <a:p>
+            <a:pPr indent="0" marL="0">
+              <a:buNone/>
+            </a:pPr>
+            <a:r>
+              <a:rPr lang="en-US" sz="1200" b="1" dirty="0">
+                <a:solidFill>
+                  <a:srgbClr val="1A2744"/>
+                </a:solidFill>
+                <a:latin typeface="Arial" pitchFamily="34" charset="0"/>
+                <a:ea typeface="Arial" pitchFamily="34" charset="-122"/>
+                <a:cs typeface="Arial" pitchFamily="34" charset="-120"/>
+              </a:rPr>
+              <a:t>スタッフ対応品質の統一</a:t>
+            </a:r>
+            <a:endParaRPr lang="en-US" sz="1200" dirty="0"/>
+          </a:p>
+        </p:txBody>
+      </p:sp>
+      <p:sp>
+        <p:nvSpPr>
+          <p:cNvPr id="21" name="Text 19"/>
+          <p:cNvSpPr/>
+          <p:nvPr/>
+        </p:nvSpPr>
+        <p:spPr>
+          <a:xfrm>
+            <a:off x="4800600" y="3383280"/>
+            <a:ext cx="3657600" cy="1188720"/>
+          </a:xfrm>
+          <a:prstGeom prst="rect">
+            <a:avLst/>
+          </a:prstGeom>
+          <a:noFill/>
+          <a:ln/>
+        </p:spPr>
+        <p:txBody>
+          <a:bodyPr wrap="square" lIns="0" tIns="0" rIns="0" bIns="0" rtlCol="0" anchor="ctr"/>
+          <a:lstStyle/>
+          <a:p>
+            <a:pPr marL="342900" indent="-342900">
+              <a:spcAft>
+                <a:spcPts val="300"/>
+              </a:spcAft>
+              <a:buSzPct val="100000"/>
+              <a:buChar char="•"/>
+            </a:pPr>
+            <a:r>
+              <a:rPr lang="en-US" sz="900" dirty="0">
+                <a:solidFill>
+                  <a:srgbClr val="334155"/>
+                </a:solidFill>
+                <a:latin typeface="Arial" pitchFamily="34" charset="0"/>
+                <a:ea typeface="Arial" pitchFamily="34" charset="-122"/>
+                <a:cs typeface="Arial" pitchFamily="34" charset="-120"/>
+              </a:rPr>
+              <a:t>接客マニュアルの見直しと全スタッフへの周知</a:t>
+            </a:r>
+            <a:endParaRPr lang="en-US" sz="900" dirty="0"/>
+          </a:p>
+          <a:p>
+            <a:pPr marL="342900" indent="-342900">
+              <a:spcAft>
+                <a:spcPts val="300"/>
+              </a:spcAft>
+              <a:buSzPct val="100000"/>
+              <a:buChar char="•"/>
+            </a:pPr>
+            <a:r>
+              <a:rPr lang="en-US" sz="900" dirty="0">
+                <a:solidFill>
+                  <a:srgbClr val="334155"/>
+                </a:solidFill>
+                <a:latin typeface="Arial" pitchFamily="34" charset="0"/>
+                <a:ea typeface="Arial" pitchFamily="34" charset="-122"/>
+                <a:cs typeface="Arial" pitchFamily="34" charset="-120"/>
+              </a:rPr>
+              <a:t>ゲストからのクレーム対応フローの明確化</a:t>
+            </a:r>
+            <a:endParaRPr lang="en-US" sz="900" dirty="0"/>
+          </a:p>
+          <a:p>
+            <a:pPr marL="342900" indent="-342900">
+              <a:spcAft>
+                <a:spcPts val="300"/>
+              </a:spcAft>
+              <a:buSzPct val="100000"/>
+              <a:buChar char="•"/>
+            </a:pPr>
+            <a:r>
+              <a:rPr lang="en-US" sz="900" dirty="0">
+                <a:solidFill>
+                  <a:srgbClr val="334155"/>
+                </a:solidFill>
+                <a:latin typeface="Arial" pitchFamily="34" charset="0"/>
+                <a:ea typeface="Arial" pitchFamily="34" charset="-122"/>
+                <a:cs typeface="Arial" pitchFamily="34" charset="-120"/>
+              </a:rPr>
+              <a:t>定期的なCS研修の実施</a:t>
             </a:r>
             <a:endParaRPr lang="en-US" sz="900" dirty="0"/>
           </a:p>

--- a/納品レポート/ホテル別レポート/kawasaki_nikko_口コミ分析レポート.pptx
+++ b/納品レポート/ホテル別レポート/kawasaki_nikko_口コミ分析レポート.pptx
@@ -2784,7 +2784,7 @@
                 <a:ea typeface="Arial" pitchFamily="34" charset="-122"/>
                 <a:cs typeface="Arial" pitchFamily="34" charset="-120"/>
               </a:rPr>
-              <a:t>作成日：2026年3月19日</a:t>
+              <a:t>作成日：2026年3月20日</a:t>
             </a:r>
             <a:endParaRPr lang="en-US" sz="1000" dirty="0"/>
           </a:p>

--- a/納品レポート/ホテル別レポート/kawasaki_nikko_口コミ分析レポート.pptx
+++ b/納品レポート/ホテル別レポート/kawasaki_nikko_口コミ分析レポート.pptx
@@ -183,10 +183,10 @@
                     <c:v>Trip.com</c:v>
                   </c:pt>
                   <c:pt idx="1">
-                    <c:v>楽天トラベル</c:v>
+                    <c:v>じゃらん</c:v>
                   </c:pt>
                   <c:pt idx="2">
-                    <c:v>じゃらん</c:v>
+                    <c:v>楽天トラベル</c:v>
                   </c:pt>
                   <c:pt idx="3">
                     <c:v>Booking.com</c:v>
@@ -208,16 +208,16 @@
                 <c:formatCode>General</c:formatCode>
                 <c:ptCount val="6"/>
                 <c:pt idx="0">
-                  <c:v>9.83</c:v>
+                  <c:v>9.74</c:v>
                 </c:pt>
                 <c:pt idx="1">
                   <c:v>9</c:v>
                 </c:pt>
                 <c:pt idx="2">
-                  <c:v>8.67</c:v>
+                  <c:v>9</c:v>
                 </c:pt>
                 <c:pt idx="3">
-                  <c:v>8.46</c:v>
+                  <c:v>8.51</c:v>
                 </c:pt>
                 <c:pt idx="4">
                   <c:v>7.88</c:v>
@@ -566,10 +566,10 @@
               <c:numCache>
                 <c:ptCount val="3"/>
                 <c:pt idx="0">
-                  <c:v>100</c:v>
+                  <c:v>104</c:v>
                 </c:pt>
                 <c:pt idx="1">
-                  <c:v>22</c:v>
+                  <c:v>23</c:v>
                 </c:pt>
                 <c:pt idx="2">
                   <c:v>1</c:v>
@@ -795,16 +795,16 @@
                 <c:formatCode>General</c:formatCode>
                 <c:ptCount val="7"/>
                 <c:pt idx="0">
-                  <c:v>50</c:v>
+                  <c:v>56</c:v>
                 </c:pt>
                 <c:pt idx="1">
                   <c:v>24</c:v>
                 </c:pt>
                 <c:pt idx="2">
-                  <c:v>26</c:v>
+                  <c:v>24</c:v>
                 </c:pt>
                 <c:pt idx="3">
-                  <c:v>10</c:v>
+                  <c:v>11</c:v>
                 </c:pt>
                 <c:pt idx="4">
                   <c:v>10</c:v>
@@ -2764,7 +2764,7 @@
                 <a:ea typeface="Arial" pitchFamily="34" charset="-122"/>
                 <a:cs typeface="Arial" pitchFamily="34" charset="-120"/>
               </a:rPr>
-              <a:t>レビュー総数：123件（6サイト）</a:t>
+              <a:t>レビュー総数：128件（6サイト）</a:t>
             </a:r>
             <a:endParaRPr lang="en-US" sz="1000" dirty="0"/>
           </a:p>
@@ -2784,7 +2784,7 @@
                 <a:ea typeface="Arial" pitchFamily="34" charset="-122"/>
                 <a:cs typeface="Arial" pitchFamily="34" charset="-120"/>
               </a:rPr>
-              <a:t>作成日：2026年3月20日</a:t>
+              <a:t>作成日：2026年3月21日</a:t>
             </a:r>
             <a:endParaRPr lang="en-US" sz="1000" dirty="0"/>
           </a:p>
@@ -3330,7 +3330,7 @@
                           <a:ea typeface="Arial" pitchFamily="34" charset="-122"/>
                           <a:cs typeface="Arial" pitchFamily="34" charset="-120"/>
                         </a:rPr>
-                        <a:t>8.67点</a:t>
+                        <a:t>8.73点</a:t>
                       </a:r>
                       <a:endParaRPr lang="en-US" sz="1000" dirty="0">
                         <a:latin typeface="Arial" charset="0"/>
@@ -3604,7 +3604,7 @@
                           <a:ea typeface="Arial" pitchFamily="34" charset="-122"/>
                           <a:cs typeface="Arial" pitchFamily="34" charset="-120"/>
                         </a:rPr>
-                        <a:t>81.3%</a:t>
+                        <a:t>81.2%</a:t>
                       </a:r>
                       <a:endParaRPr lang="en-US" sz="1000" dirty="0">
                         <a:latin typeface="Arial" charset="0"/>
@@ -4700,7 +4700,7 @@
                           <a:ea typeface="Arial" pitchFamily="34" charset="-122"/>
                           <a:cs typeface="Arial" pitchFamily="34" charset="-120"/>
                         </a:rPr>
-                        <a:t>約13件/期間</a:t>
+                        <a:t>約14件/期間</a:t>
                       </a:r>
                       <a:endParaRPr lang="en-US" sz="1000" dirty="0">
                         <a:latin typeface="Arial" charset="0"/>
@@ -4768,7 +4768,7 @@
                           <a:ea typeface="Arial" pitchFamily="34" charset="-122"/>
                           <a:cs typeface="Arial" pitchFamily="34" charset="-120"/>
                         </a:rPr>
-                        <a:t>6件以下</a:t>
+                        <a:t>7件以下</a:t>
                       </a:r>
                       <a:endParaRPr lang="en-US" sz="1000" dirty="0">
                         <a:latin typeface="Arial" charset="0"/>
@@ -5339,7 +5339,7 @@
                 <a:ea typeface="Arial" pitchFamily="34" charset="-122"/>
                 <a:cs typeface="Arial" pitchFamily="34" charset="-120"/>
               </a:rPr>
-              <a:t>8.67</a:t>
+              <a:t>8.73</a:t>
             </a:r>
             <a:endParaRPr lang="en-US" sz="3200" dirty="0"/>
           </a:p>
@@ -5464,7 +5464,7 @@
                 <a:ea typeface="Arial" pitchFamily="34" charset="-122"/>
                 <a:cs typeface="Arial" pitchFamily="34" charset="-120"/>
               </a:rPr>
-              <a:t>81.3%</a:t>
+              <a:t>81.2%</a:t>
             </a:r>
             <a:endParaRPr lang="en-US" sz="3200" dirty="0"/>
           </a:p>
@@ -5714,7 +5714,7 @@
                 <a:ea typeface="Arial" pitchFamily="34" charset="-122"/>
                 <a:cs typeface="Arial" pitchFamily="34" charset="-120"/>
               </a:rPr>
-              <a:t>123件</a:t>
+              <a:t>128件</a:t>
             </a:r>
             <a:endParaRPr lang="en-US" sz="3200" dirty="0"/>
           </a:p>
@@ -5862,7 +5862,7 @@
                 <a:ea typeface="Arial" pitchFamily="34" charset="-122"/>
                 <a:cs typeface="Arial" pitchFamily="34" charset="-120"/>
               </a:rPr>
-              <a:t>  乾淨方便，適合商旅出行 清潔で便利、ビジネス旅行者に最適</a:t>
+              <a:t>  川崎駅に近く、コンビニやスーパーなども近隣にある為、非常に便利です</a:t>
             </a:r>
             <a:endParaRPr lang="en-US" sz="1100" dirty="0"/>
           </a:p>
@@ -5902,7 +5902,7 @@
                 <a:ea typeface="Arial" pitchFamily="34" charset="-122"/>
                 <a:cs typeface="Arial" pitchFamily="34" charset="-120"/>
               </a:rPr>
-              <a:t>  朝食が非常に美味しく、朝食会場の接客が丁寧で素晴らしかった</a:t>
+              <a:t>  エアコンは作動せず、フロントデスクは扇風機を使うように勧めてきましたが、気温は上がり続けました…</a:t>
             </a:r>
             <a:endParaRPr lang="en-US" sz="1100" dirty="0"/>
           </a:p>
@@ -5942,7 +5942,7 @@
                 <a:ea typeface="Arial" pitchFamily="34" charset="-122"/>
                 <a:cs typeface="Arial" pitchFamily="34" charset="-120"/>
               </a:rPr>
-              <a:t>  綺麗だった 空調設備があまり良くなかった 空調設備があまり良くなかった</a:t>
+              <a:t>  館内も落ち着いた雰囲気で、快適でした</a:t>
             </a:r>
             <a:endParaRPr lang="en-US" sz="1100" dirty="0"/>
           </a:p>
@@ -6090,7 +6090,7 @@
                 <a:ea typeface="Arial" pitchFamily="34" charset="-122"/>
                 <a:cs typeface="Arial" pitchFamily="34" charset="-120"/>
               </a:rPr>
-              <a:t>  寒がりな私ですが、暖房も自分好みに設定できてよかったです</a:t>
+              <a:t>  エアコンは作動せず、フロントデスクは扇風機を使うように勧めてきましたが、気温は上がり続けました…</a:t>
             </a:r>
             <a:endParaRPr lang="en-US" sz="1100" dirty="0"/>
           </a:p>
@@ -6170,7 +6170,7 @@
                 <a:ea typeface="Arial" pitchFamily="34" charset="-122"/>
                 <a:cs typeface="Arial" pitchFamily="34" charset="-120"/>
               </a:rPr>
-              <a:t>  エアコンは個別じゃないのか、冷風も出ず窓も開かず苦しい思いをしました 天気が良かったのもあって部屋が暑い</a:t>
+              <a:t>  不快だったのは、換気のために部屋の窓を開けることができず、3月なのに部屋が蒸し暑かったことです</a:t>
             </a:r>
             <a:endParaRPr lang="en-US" sz="1100" dirty="0"/>
           </a:p>
@@ -6523,7 +6523,7 @@
                 <a:ea typeface="Arial" pitchFamily="34" charset="-122"/>
                 <a:cs typeface="Arial" pitchFamily="34" charset="-120"/>
               </a:rPr>
-              <a:t>8.67</a:t>
+              <a:t>8.73</a:t>
             </a:r>
             <a:endParaRPr lang="en-US" sz="3200" dirty="0"/>
           </a:p>
@@ -6648,7 +6648,7 @@
                 <a:ea typeface="Arial" pitchFamily="34" charset="-122"/>
                 <a:cs typeface="Arial" pitchFamily="34" charset="-120"/>
               </a:rPr>
-              <a:t>81.3%</a:t>
+              <a:t>81.2%</a:t>
             </a:r>
             <a:endParaRPr lang="en-US" sz="3200" dirty="0"/>
           </a:p>
@@ -6898,7 +6898,7 @@
                 <a:ea typeface="Arial" pitchFamily="34" charset="-122"/>
                 <a:cs typeface="Arial" pitchFamily="34" charset="-120"/>
               </a:rPr>
-              <a:t>123件</a:t>
+              <a:t>128件</a:t>
             </a:r>
             <a:endParaRPr lang="en-US" sz="3200" dirty="0"/>
           </a:p>
@@ -7319,7 +7319,7 @@
                 <a:ea typeface="Arial" pitchFamily="34" charset="-122"/>
                 <a:cs typeface="Arial" pitchFamily="34" charset="-120"/>
               </a:rPr>
-              <a:t>Trip.com(9.83)が最高スコア。</a:t>
+              <a:t>Trip.com(9.74)が最高スコア。</a:t>
             </a:r>
             <a:endParaRPr lang="en-US" sz="1100" dirty="0"/>
           </a:p>
@@ -7877,7 +7877,7 @@
                           <a:ea typeface="Arial" pitchFamily="34" charset="-122"/>
                           <a:cs typeface="Arial" pitchFamily="34" charset="-120"/>
                         </a:rPr>
-                        <a:t>24</a:t>
+                        <a:t>27</a:t>
                       </a:r>
                       <a:endParaRPr lang="en-US" sz="900" dirty="0">
                         <a:latin typeface="Arial" charset="0"/>
@@ -7945,7 +7945,7 @@
                           <a:ea typeface="Arial" pitchFamily="34" charset="-122"/>
                           <a:cs typeface="Arial" pitchFamily="34" charset="-120"/>
                         </a:rPr>
-                        <a:t>9.83</a:t>
+                        <a:t>9.74</a:t>
                       </a:r>
                       <a:endParaRPr lang="en-US" sz="900" dirty="0">
                         <a:latin typeface="Arial" charset="0"/>
@@ -8081,7 +8081,7 @@
                           <a:ea typeface="Arial" pitchFamily="34" charset="-122"/>
                           <a:cs typeface="Arial" pitchFamily="34" charset="-120"/>
                         </a:rPr>
-                        <a:t>9.83</a:t>
+                        <a:t>9.74</a:t>
                       </a:r>
                       <a:endParaRPr lang="en-US" sz="900" dirty="0">
                         <a:latin typeface="Arial" charset="0"/>
@@ -8151,7 +8151,7 @@
                           <a:ea typeface="Arial" pitchFamily="34" charset="-122"/>
                           <a:cs typeface="Arial" pitchFamily="34" charset="-120"/>
                         </a:rPr>
-                        <a:t>楽天トラベル</a:t>
+                        <a:t>じゃらん</a:t>
                       </a:r>
                       <a:endParaRPr lang="en-US" sz="900" dirty="0">
                         <a:latin typeface="Arial" charset="0"/>
@@ -8219,7 +8219,7 @@
                           <a:ea typeface="Arial" pitchFamily="34" charset="-122"/>
                           <a:cs typeface="Arial" pitchFamily="34" charset="-120"/>
                         </a:rPr>
-                        <a:t>6</a:t>
+                        <a:t>8</a:t>
                       </a:r>
                       <a:endParaRPr lang="en-US" sz="900" dirty="0">
                         <a:latin typeface="Arial" charset="0"/>
@@ -8493,7 +8493,7 @@
                           <a:ea typeface="Arial" pitchFamily="34" charset="-122"/>
                           <a:cs typeface="Arial" pitchFamily="34" charset="-120"/>
                         </a:rPr>
-                        <a:t>じゃらん</a:t>
+                        <a:t>楽天トラベル</a:t>
                       </a:r>
                       <a:endParaRPr lang="en-US" sz="900" dirty="0">
                         <a:latin typeface="Arial" charset="0"/>
@@ -8629,7 +8629,7 @@
                           <a:ea typeface="Arial" pitchFamily="34" charset="-122"/>
                           <a:cs typeface="Arial" pitchFamily="34" charset="-120"/>
                         </a:rPr>
-                        <a:t>4.33</a:t>
+                        <a:t>4.5</a:t>
                       </a:r>
                       <a:endParaRPr lang="en-US" sz="900" dirty="0">
                         <a:latin typeface="Arial" charset="0"/>
@@ -8765,7 +8765,7 @@
                           <a:ea typeface="Arial" pitchFamily="34" charset="-122"/>
                           <a:cs typeface="Arial" pitchFamily="34" charset="-120"/>
                         </a:rPr>
-                        <a:t>8.67</a:t>
+                        <a:t>9</a:t>
                       </a:r>
                       <a:endParaRPr lang="en-US" sz="900" dirty="0">
                         <a:latin typeface="Arial" charset="0"/>
@@ -8971,7 +8971,7 @@
                           <a:ea typeface="Arial" pitchFamily="34" charset="-122"/>
                           <a:cs typeface="Arial" pitchFamily="34" charset="-120"/>
                         </a:rPr>
-                        <a:t>8.46</a:t>
+                        <a:t>8.51</a:t>
                       </a:r>
                       <a:endParaRPr lang="en-US" sz="900" dirty="0">
                         <a:latin typeface="Arial" charset="0"/>
@@ -9107,7 +9107,7 @@
                           <a:ea typeface="Arial" pitchFamily="34" charset="-122"/>
                           <a:cs typeface="Arial" pitchFamily="34" charset="-120"/>
                         </a:rPr>
-                        <a:t>8.46</a:t>
+                        <a:t>8.51</a:t>
                       </a:r>
                       <a:endParaRPr lang="en-US" sz="900" dirty="0">
                         <a:latin typeface="Arial" charset="0"/>
@@ -10199,7 +10199,7 @@
                 <a:ea typeface="Arial" pitchFamily="34" charset="-122"/>
                 <a:cs typeface="Arial" pitchFamily="34" charset="-120"/>
               </a:rPr>
-              <a:t>100件（81.3%）</a:t>
+              <a:t>104件（81.2%）</a:t>
             </a:r>
             <a:endParaRPr lang="en-US" sz="1100" dirty="0"/>
           </a:p>
@@ -10297,7 +10297,7 @@
                 <a:ea typeface="Arial" pitchFamily="34" charset="-122"/>
                 <a:cs typeface="Arial" pitchFamily="34" charset="-120"/>
               </a:rPr>
-              <a:t>22件（17.9%）</a:t>
+              <a:t>23件（18.0%）</a:t>
             </a:r>
             <a:endParaRPr lang="en-US" sz="1100" dirty="0"/>
           </a:p>
@@ -10807,6 +10807,898 @@
                 <a:ea typeface="Arial" pitchFamily="34" charset="-122"/>
                 <a:cs typeface="Arial" pitchFamily="34" charset="-120"/>
               </a:rPr>
+              <a:t>川崎駅に近く、コンビニやスーパーなども近隣にある為、非常に便利です</a:t>
+            </a:r>
+            <a:endParaRPr lang="en-US" sz="900" dirty="0"/>
+          </a:p>
+        </p:txBody>
+      </p:sp>
+      <p:sp>
+        <p:nvSpPr>
+          <p:cNvPr id="11" name="Text 9"/>
+          <p:cNvSpPr/>
+          <p:nvPr/>
+        </p:nvSpPr>
+        <p:spPr>
+          <a:xfrm>
+            <a:off x="594360" y="1828800"/>
+            <a:ext cx="2377440" cy="640080"/>
+          </a:xfrm>
+          <a:prstGeom prst="rect">
+            <a:avLst/>
+          </a:prstGeom>
+          <a:noFill/>
+          <a:ln/>
+        </p:spPr>
+        <p:txBody>
+          <a:bodyPr wrap="square" lIns="0" tIns="0" rIns="0" bIns="0" rtlCol="0" anchor="ctr"/>
+          <a:lstStyle/>
+          <a:p>
+            <a:pPr indent="0" marL="0">
+              <a:buNone/>
+            </a:pPr>
+            <a:r>
+              <a:rPr lang="en-US" sz="900" i="1" dirty="0">
+                <a:solidFill>
+                  <a:srgbClr val="3B7DD8"/>
+                </a:solidFill>
+                <a:latin typeface="Arial" pitchFamily="34" charset="0"/>
+                <a:ea typeface="Arial" pitchFamily="34" charset="-122"/>
+                <a:cs typeface="Arial" pitchFamily="34" charset="-120"/>
+              </a:rPr>
+              <a:t>「駅前の立地で凄く便利 わからない わからない」</a:t>
+            </a:r>
+            <a:endParaRPr lang="en-US" sz="900" dirty="0"/>
+          </a:p>
+        </p:txBody>
+      </p:sp>
+      <p:sp>
+        <p:nvSpPr>
+          <p:cNvPr id="12" name="Shape 10"/>
+          <p:cNvSpPr/>
+          <p:nvPr/>
+        </p:nvSpPr>
+        <p:spPr>
+          <a:xfrm>
+            <a:off x="3291840" y="1051560"/>
+            <a:ext cx="2651760" cy="1600200"/>
+          </a:xfrm>
+          <a:prstGeom prst="rect">
+            <a:avLst/>
+          </a:prstGeom>
+          <a:solidFill>
+            <a:srgbClr val="FFFFFF"/>
+          </a:solidFill>
+          <a:ln/>
+          <a:effectLst>
+            <a:outerShdw sx="100000" sy="100000" kx="0" ky="0" algn="bl" rotWithShape="0" blurRad="50800" dist="25400" dir="8100000">
+              <a:srgbClr val="000000">
+                <a:alpha val="10000"/>
+              </a:srgbClr>
+            </a:outerShdw>
+          </a:effectLst>
+        </p:spPr>
+      </p:sp>
+      <p:sp>
+        <p:nvSpPr>
+          <p:cNvPr id="13" name="Shape 11"/>
+          <p:cNvSpPr/>
+          <p:nvPr/>
+        </p:nvSpPr>
+        <p:spPr>
+          <a:xfrm>
+            <a:off x="3291840" y="1051560"/>
+            <a:ext cx="54864" cy="1600200"/>
+          </a:xfrm>
+          <a:prstGeom prst="rect">
+            <a:avLst/>
+          </a:prstGeom>
+          <a:solidFill>
+            <a:srgbClr val="16A34A"/>
+          </a:solidFill>
+          <a:ln/>
+        </p:spPr>
+      </p:sp>
+      <p:sp>
+        <p:nvSpPr>
+          <p:cNvPr id="14" name="Shape 12"/>
+          <p:cNvSpPr/>
+          <p:nvPr/>
+        </p:nvSpPr>
+        <p:spPr>
+          <a:xfrm>
+            <a:off x="5120640" y="1124712"/>
+            <a:ext cx="658368" cy="228600"/>
+          </a:xfrm>
+          <a:prstGeom prst="rect">
+            <a:avLst/>
+          </a:prstGeom>
+          <a:solidFill>
+            <a:srgbClr val="DCFCE7"/>
+          </a:solidFill>
+          <a:ln/>
+        </p:spPr>
+      </p:sp>
+      <p:sp>
+        <p:nvSpPr>
+          <p:cNvPr id="15" name="Text 13"/>
+          <p:cNvSpPr/>
+          <p:nvPr/>
+        </p:nvSpPr>
+        <p:spPr>
+          <a:xfrm>
+            <a:off x="5120640" y="1124712"/>
+            <a:ext cx="658368" cy="228600"/>
+          </a:xfrm>
+          <a:prstGeom prst="rect">
+            <a:avLst/>
+          </a:prstGeom>
+          <a:noFill/>
+          <a:ln/>
+        </p:spPr>
+        <p:txBody>
+          <a:bodyPr wrap="square" lIns="0" tIns="0" rIns="0" bIns="0" rtlCol="0" anchor="ctr"/>
+          <a:lstStyle/>
+          <a:p>
+            <a:pPr algn="ctr" indent="0" marL="0">
+              <a:buNone/>
+            </a:pPr>
+            <a:r>
+              <a:rPr lang="en-US" sz="900" b="1" dirty="0">
+                <a:solidFill>
+                  <a:srgbClr val="16A34A"/>
+                </a:solidFill>
+                <a:latin typeface="Arial" pitchFamily="34" charset="0"/>
+                <a:ea typeface="Arial" pitchFamily="34" charset="-122"/>
+                <a:cs typeface="Arial" pitchFamily="34" charset="-120"/>
+              </a:rPr>
+              <a:t>20件+</a:t>
+            </a:r>
+            <a:endParaRPr lang="en-US" sz="900" dirty="0"/>
+          </a:p>
+        </p:txBody>
+      </p:sp>
+      <p:sp>
+        <p:nvSpPr>
+          <p:cNvPr id="16" name="Text 14"/>
+          <p:cNvSpPr/>
+          <p:nvPr/>
+        </p:nvSpPr>
+        <p:spPr>
+          <a:xfrm>
+            <a:off x="3429000" y="1124712"/>
+            <a:ext cx="1645920" cy="274320"/>
+          </a:xfrm>
+          <a:prstGeom prst="rect">
+            <a:avLst/>
+          </a:prstGeom>
+          <a:noFill/>
+          <a:ln/>
+        </p:spPr>
+        <p:txBody>
+          <a:bodyPr wrap="square" lIns="0" tIns="0" rIns="0" bIns="0" rtlCol="0" anchor="ctr"/>
+          <a:lstStyle/>
+          <a:p>
+            <a:pPr indent="0" marL="0">
+              <a:buNone/>
+            </a:pPr>
+            <a:r>
+              <a:rPr lang="en-US" sz="1300" b="1" dirty="0">
+                <a:solidFill>
+                  <a:srgbClr val="1A2744"/>
+                </a:solidFill>
+                <a:latin typeface="Arial" pitchFamily="34" charset="0"/>
+                <a:ea typeface="Arial" pitchFamily="34" charset="-122"/>
+                <a:cs typeface="Arial" pitchFamily="34" charset="-120"/>
+              </a:rPr>
+              <a:t>スタッフの対応</a:t>
+            </a:r>
+            <a:endParaRPr lang="en-US" sz="1300" dirty="0"/>
+          </a:p>
+        </p:txBody>
+      </p:sp>
+      <p:sp>
+        <p:nvSpPr>
+          <p:cNvPr id="17" name="Text 15"/>
+          <p:cNvSpPr/>
+          <p:nvPr/>
+        </p:nvSpPr>
+        <p:spPr>
+          <a:xfrm>
+            <a:off x="3429000" y="1417320"/>
+            <a:ext cx="2377440" cy="365760"/>
+          </a:xfrm>
+          <a:prstGeom prst="rect">
+            <a:avLst/>
+          </a:prstGeom>
+          <a:noFill/>
+          <a:ln/>
+        </p:spPr>
+        <p:txBody>
+          <a:bodyPr wrap="square" lIns="0" tIns="0" rIns="0" bIns="0" rtlCol="0" anchor="ctr"/>
+          <a:lstStyle/>
+          <a:p>
+            <a:pPr indent="0" marL="0">
+              <a:buNone/>
+            </a:pPr>
+            <a:r>
+              <a:rPr lang="en-US" sz="900" dirty="0">
+                <a:solidFill>
+                  <a:srgbClr val="64748B"/>
+                </a:solidFill>
+                <a:latin typeface="Arial" pitchFamily="34" charset="0"/>
+                <a:ea typeface="Arial" pitchFamily="34" charset="-122"/>
+                <a:cs typeface="Arial" pitchFamily="34" charset="-120"/>
+              </a:rPr>
+              <a:t>エアコンは作動せず、フロントデスクは扇風機を使うように勧めてきましたが、気温は上がり続けました…</a:t>
+            </a:r>
+            <a:endParaRPr lang="en-US" sz="900" dirty="0"/>
+          </a:p>
+        </p:txBody>
+      </p:sp>
+      <p:sp>
+        <p:nvSpPr>
+          <p:cNvPr id="18" name="Text 16"/>
+          <p:cNvSpPr/>
+          <p:nvPr/>
+        </p:nvSpPr>
+        <p:spPr>
+          <a:xfrm>
+            <a:off x="3429000" y="1828800"/>
+            <a:ext cx="2377440" cy="640080"/>
+          </a:xfrm>
+          <a:prstGeom prst="rect">
+            <a:avLst/>
+          </a:prstGeom>
+          <a:noFill/>
+          <a:ln/>
+        </p:spPr>
+        <p:txBody>
+          <a:bodyPr wrap="square" lIns="0" tIns="0" rIns="0" bIns="0" rtlCol="0" anchor="ctr"/>
+          <a:lstStyle/>
+          <a:p>
+            <a:pPr indent="0" marL="0">
+              <a:buNone/>
+            </a:pPr>
+            <a:r>
+              <a:rPr lang="en-US" sz="900" i="1" dirty="0">
+                <a:solidFill>
+                  <a:srgbClr val="3B7DD8"/>
+                </a:solidFill>
+                <a:latin typeface="Arial" pitchFamily="34" charset="0"/>
+                <a:ea typeface="Arial" pitchFamily="34" charset="-122"/>
+                <a:cs typeface="Arial" pitchFamily="34" charset="-120"/>
+              </a:rPr>
+              <a:t>「朝食が非常に美味しく、朝食会場の接客が丁寧で素晴らしかった」</a:t>
+            </a:r>
+            <a:endParaRPr lang="en-US" sz="900" dirty="0"/>
+          </a:p>
+        </p:txBody>
+      </p:sp>
+      <p:sp>
+        <p:nvSpPr>
+          <p:cNvPr id="19" name="Shape 17"/>
+          <p:cNvSpPr/>
+          <p:nvPr/>
+        </p:nvSpPr>
+        <p:spPr>
+          <a:xfrm>
+            <a:off x="6126480" y="1051560"/>
+            <a:ext cx="2651760" cy="1600200"/>
+          </a:xfrm>
+          <a:prstGeom prst="rect">
+            <a:avLst/>
+          </a:prstGeom>
+          <a:solidFill>
+            <a:srgbClr val="FFFFFF"/>
+          </a:solidFill>
+          <a:ln/>
+          <a:effectLst>
+            <a:outerShdw sx="100000" sy="100000" kx="0" ky="0" algn="bl" rotWithShape="0" blurRad="50800" dist="25400" dir="8100000">
+              <a:srgbClr val="000000">
+                <a:alpha val="10000"/>
+              </a:srgbClr>
+            </a:outerShdw>
+          </a:effectLst>
+        </p:spPr>
+      </p:sp>
+      <p:sp>
+        <p:nvSpPr>
+          <p:cNvPr id="20" name="Shape 18"/>
+          <p:cNvSpPr/>
+          <p:nvPr/>
+        </p:nvSpPr>
+        <p:spPr>
+          <a:xfrm>
+            <a:off x="6126480" y="1051560"/>
+            <a:ext cx="54864" cy="1600200"/>
+          </a:xfrm>
+          <a:prstGeom prst="rect">
+            <a:avLst/>
+          </a:prstGeom>
+          <a:solidFill>
+            <a:srgbClr val="16A34A"/>
+          </a:solidFill>
+          <a:ln/>
+        </p:spPr>
+      </p:sp>
+      <p:sp>
+        <p:nvSpPr>
+          <p:cNvPr id="21" name="Shape 19"/>
+          <p:cNvSpPr/>
+          <p:nvPr/>
+        </p:nvSpPr>
+        <p:spPr>
+          <a:xfrm>
+            <a:off x="7955280" y="1124712"/>
+            <a:ext cx="658368" cy="228600"/>
+          </a:xfrm>
+          <a:prstGeom prst="rect">
+            <a:avLst/>
+          </a:prstGeom>
+          <a:solidFill>
+            <a:srgbClr val="DCFCE7"/>
+          </a:solidFill>
+          <a:ln/>
+        </p:spPr>
+      </p:sp>
+      <p:sp>
+        <p:nvSpPr>
+          <p:cNvPr id="22" name="Text 20"/>
+          <p:cNvSpPr/>
+          <p:nvPr/>
+        </p:nvSpPr>
+        <p:spPr>
+          <a:xfrm>
+            <a:off x="7955280" y="1124712"/>
+            <a:ext cx="658368" cy="228600"/>
+          </a:xfrm>
+          <a:prstGeom prst="rect">
+            <a:avLst/>
+          </a:prstGeom>
+          <a:noFill/>
+          <a:ln/>
+        </p:spPr>
+        <p:txBody>
+          <a:bodyPr wrap="square" lIns="0" tIns="0" rIns="0" bIns="0" rtlCol="0" anchor="ctr"/>
+          <a:lstStyle/>
+          <a:p>
+            <a:pPr algn="ctr" indent="0" marL="0">
+              <a:buNone/>
+            </a:pPr>
+            <a:r>
+              <a:rPr lang="en-US" sz="900" b="1" dirty="0">
+                <a:solidFill>
+                  <a:srgbClr val="16A34A"/>
+                </a:solidFill>
+                <a:latin typeface="Arial" pitchFamily="34" charset="0"/>
+                <a:ea typeface="Arial" pitchFamily="34" charset="-122"/>
+                <a:cs typeface="Arial" pitchFamily="34" charset="-120"/>
+              </a:rPr>
+              <a:t>20件+</a:t>
+            </a:r>
+            <a:endParaRPr lang="en-US" sz="900" dirty="0"/>
+          </a:p>
+        </p:txBody>
+      </p:sp>
+      <p:sp>
+        <p:nvSpPr>
+          <p:cNvPr id="23" name="Text 21"/>
+          <p:cNvSpPr/>
+          <p:nvPr/>
+        </p:nvSpPr>
+        <p:spPr>
+          <a:xfrm>
+            <a:off x="6263640" y="1124712"/>
+            <a:ext cx="1645920" cy="274320"/>
+          </a:xfrm>
+          <a:prstGeom prst="rect">
+            <a:avLst/>
+          </a:prstGeom>
+          <a:noFill/>
+          <a:ln/>
+        </p:spPr>
+        <p:txBody>
+          <a:bodyPr wrap="square" lIns="0" tIns="0" rIns="0" bIns="0" rtlCol="0" anchor="ctr"/>
+          <a:lstStyle/>
+          <a:p>
+            <a:pPr indent="0" marL="0">
+              <a:buNone/>
+            </a:pPr>
+            <a:r>
+              <a:rPr lang="en-US" sz="1300" b="1" dirty="0">
+                <a:solidFill>
+                  <a:srgbClr val="1A2744"/>
+                </a:solidFill>
+                <a:latin typeface="Arial" pitchFamily="34" charset="0"/>
+                <a:ea typeface="Arial" pitchFamily="34" charset="-122"/>
+                <a:cs typeface="Arial" pitchFamily="34" charset="-120"/>
+              </a:rPr>
+              <a:t>快適さ・設備</a:t>
+            </a:r>
+            <a:endParaRPr lang="en-US" sz="1300" dirty="0"/>
+          </a:p>
+        </p:txBody>
+      </p:sp>
+      <p:sp>
+        <p:nvSpPr>
+          <p:cNvPr id="24" name="Text 22"/>
+          <p:cNvSpPr/>
+          <p:nvPr/>
+        </p:nvSpPr>
+        <p:spPr>
+          <a:xfrm>
+            <a:off x="6263640" y="1417320"/>
+            <a:ext cx="2377440" cy="365760"/>
+          </a:xfrm>
+          <a:prstGeom prst="rect">
+            <a:avLst/>
+          </a:prstGeom>
+          <a:noFill/>
+          <a:ln/>
+        </p:spPr>
+        <p:txBody>
+          <a:bodyPr wrap="square" lIns="0" tIns="0" rIns="0" bIns="0" rtlCol="0" anchor="ctr"/>
+          <a:lstStyle/>
+          <a:p>
+            <a:pPr indent="0" marL="0">
+              <a:buNone/>
+            </a:pPr>
+            <a:r>
+              <a:rPr lang="en-US" sz="900" dirty="0">
+                <a:solidFill>
+                  <a:srgbClr val="64748B"/>
+                </a:solidFill>
+                <a:latin typeface="Arial" pitchFamily="34" charset="0"/>
+                <a:ea typeface="Arial" pitchFamily="34" charset="-122"/>
+                <a:cs typeface="Arial" pitchFamily="34" charset="-120"/>
+              </a:rPr>
+              <a:t>館内も落ち着いた雰囲気で、快適でした</a:t>
+            </a:r>
+            <a:endParaRPr lang="en-US" sz="900" dirty="0"/>
+          </a:p>
+        </p:txBody>
+      </p:sp>
+      <p:sp>
+        <p:nvSpPr>
+          <p:cNvPr id="25" name="Text 23"/>
+          <p:cNvSpPr/>
+          <p:nvPr/>
+        </p:nvSpPr>
+        <p:spPr>
+          <a:xfrm>
+            <a:off x="6263640" y="1828800"/>
+            <a:ext cx="2377440" cy="640080"/>
+          </a:xfrm>
+          <a:prstGeom prst="rect">
+            <a:avLst/>
+          </a:prstGeom>
+          <a:noFill/>
+          <a:ln/>
+        </p:spPr>
+        <p:txBody>
+          <a:bodyPr wrap="square" lIns="0" tIns="0" rIns="0" bIns="0" rtlCol="0" anchor="ctr"/>
+          <a:lstStyle/>
+          <a:p>
+            <a:pPr indent="0" marL="0">
+              <a:buNone/>
+            </a:pPr>
+            <a:r>
+              <a:rPr lang="en-US" sz="900" i="1" dirty="0">
+                <a:solidFill>
+                  <a:srgbClr val="3B7DD8"/>
+                </a:solidFill>
+                <a:latin typeface="Arial" pitchFamily="34" charset="0"/>
+                <a:ea typeface="Arial" pitchFamily="34" charset="-122"/>
+                <a:cs typeface="Arial" pitchFamily="34" charset="-120"/>
+              </a:rPr>
+              <a:t>「ホテルの設備とサービスは標準以下で、部屋もかなり狭かったのに、大阪や京都の広い部屋と比べて料金はかなり高かったです」</a:t>
+            </a:r>
+            <a:endParaRPr lang="en-US" sz="900" dirty="0"/>
+          </a:p>
+        </p:txBody>
+      </p:sp>
+      <p:sp>
+        <p:nvSpPr>
+          <p:cNvPr id="26" name="Shape 24"/>
+          <p:cNvSpPr/>
+          <p:nvPr/>
+        </p:nvSpPr>
+        <p:spPr>
+          <a:xfrm>
+            <a:off x="457200" y="2880360"/>
+            <a:ext cx="2651760" cy="1600200"/>
+          </a:xfrm>
+          <a:prstGeom prst="rect">
+            <a:avLst/>
+          </a:prstGeom>
+          <a:solidFill>
+            <a:srgbClr val="FFFFFF"/>
+          </a:solidFill>
+          <a:ln/>
+          <a:effectLst>
+            <a:outerShdw sx="100000" sy="100000" kx="0" ky="0" algn="bl" rotWithShape="0" blurRad="50800" dist="25400" dir="8100000">
+              <a:srgbClr val="000000">
+                <a:alpha val="10000"/>
+              </a:srgbClr>
+            </a:outerShdw>
+          </a:effectLst>
+        </p:spPr>
+      </p:sp>
+      <p:sp>
+        <p:nvSpPr>
+          <p:cNvPr id="27" name="Shape 25"/>
+          <p:cNvSpPr/>
+          <p:nvPr/>
+        </p:nvSpPr>
+        <p:spPr>
+          <a:xfrm>
+            <a:off x="457200" y="2880360"/>
+            <a:ext cx="54864" cy="1600200"/>
+          </a:xfrm>
+          <a:prstGeom prst="rect">
+            <a:avLst/>
+          </a:prstGeom>
+          <a:solidFill>
+            <a:srgbClr val="16A34A"/>
+          </a:solidFill>
+          <a:ln/>
+        </p:spPr>
+      </p:sp>
+      <p:sp>
+        <p:nvSpPr>
+          <p:cNvPr id="28" name="Shape 26"/>
+          <p:cNvSpPr/>
+          <p:nvPr/>
+        </p:nvSpPr>
+        <p:spPr>
+          <a:xfrm>
+            <a:off x="2286000" y="2953512"/>
+            <a:ext cx="658368" cy="228600"/>
+          </a:xfrm>
+          <a:prstGeom prst="rect">
+            <a:avLst/>
+          </a:prstGeom>
+          <a:solidFill>
+            <a:srgbClr val="DCFCE7"/>
+          </a:solidFill>
+          <a:ln/>
+        </p:spPr>
+      </p:sp>
+      <p:sp>
+        <p:nvSpPr>
+          <p:cNvPr id="29" name="Text 27"/>
+          <p:cNvSpPr/>
+          <p:nvPr/>
+        </p:nvSpPr>
+        <p:spPr>
+          <a:xfrm>
+            <a:off x="2286000" y="2953512"/>
+            <a:ext cx="658368" cy="228600"/>
+          </a:xfrm>
+          <a:prstGeom prst="rect">
+            <a:avLst/>
+          </a:prstGeom>
+          <a:noFill/>
+          <a:ln/>
+        </p:spPr>
+        <p:txBody>
+          <a:bodyPr wrap="square" lIns="0" tIns="0" rIns="0" bIns="0" rtlCol="0" anchor="ctr"/>
+          <a:lstStyle/>
+          <a:p>
+            <a:pPr algn="ctr" indent="0" marL="0">
+              <a:buNone/>
+            </a:pPr>
+            <a:r>
+              <a:rPr lang="en-US" sz="900" b="1" dirty="0">
+                <a:solidFill>
+                  <a:srgbClr val="16A34A"/>
+                </a:solidFill>
+                <a:latin typeface="Arial" pitchFamily="34" charset="0"/>
+                <a:ea typeface="Arial" pitchFamily="34" charset="-122"/>
+                <a:cs typeface="Arial" pitchFamily="34" charset="-120"/>
+              </a:rPr>
+              <a:t>20件+</a:t>
+            </a:r>
+            <a:endParaRPr lang="en-US" sz="900" dirty="0"/>
+          </a:p>
+        </p:txBody>
+      </p:sp>
+      <p:sp>
+        <p:nvSpPr>
+          <p:cNvPr id="30" name="Text 28"/>
+          <p:cNvSpPr/>
+          <p:nvPr/>
+        </p:nvSpPr>
+        <p:spPr>
+          <a:xfrm>
+            <a:off x="594360" y="2953512"/>
+            <a:ext cx="1645920" cy="274320"/>
+          </a:xfrm>
+          <a:prstGeom prst="rect">
+            <a:avLst/>
+          </a:prstGeom>
+          <a:noFill/>
+          <a:ln/>
+        </p:spPr>
+        <p:txBody>
+          <a:bodyPr wrap="square" lIns="0" tIns="0" rIns="0" bIns="0" rtlCol="0" anchor="ctr"/>
+          <a:lstStyle/>
+          <a:p>
+            <a:pPr indent="0" marL="0">
+              <a:buNone/>
+            </a:pPr>
+            <a:r>
+              <a:rPr lang="en-US" sz="1300" b="1" dirty="0">
+                <a:solidFill>
+                  <a:srgbClr val="1A2744"/>
+                </a:solidFill>
+                <a:latin typeface="Arial" pitchFamily="34" charset="0"/>
+                <a:ea typeface="Arial" pitchFamily="34" charset="-122"/>
+                <a:cs typeface="Arial" pitchFamily="34" charset="-120"/>
+              </a:rPr>
+              <a:t>朝食</a:t>
+            </a:r>
+            <a:endParaRPr lang="en-US" sz="1300" dirty="0"/>
+          </a:p>
+        </p:txBody>
+      </p:sp>
+      <p:sp>
+        <p:nvSpPr>
+          <p:cNvPr id="31" name="Text 29"/>
+          <p:cNvSpPr/>
+          <p:nvPr/>
+        </p:nvSpPr>
+        <p:spPr>
+          <a:xfrm>
+            <a:off x="594360" y="3246120"/>
+            <a:ext cx="2377440" cy="365760"/>
+          </a:xfrm>
+          <a:prstGeom prst="rect">
+            <a:avLst/>
+          </a:prstGeom>
+          <a:noFill/>
+          <a:ln/>
+        </p:spPr>
+        <p:txBody>
+          <a:bodyPr wrap="square" lIns="0" tIns="0" rIns="0" bIns="0" rtlCol="0" anchor="ctr"/>
+          <a:lstStyle/>
+          <a:p>
+            <a:pPr indent="0" marL="0">
+              <a:buNone/>
+            </a:pPr>
+            <a:r>
+              <a:rPr lang="en-US" sz="900" dirty="0">
+                <a:solidFill>
+                  <a:srgbClr val="64748B"/>
+                </a:solidFill>
+                <a:latin typeface="Arial" pitchFamily="34" charset="0"/>
+                <a:ea typeface="Arial" pitchFamily="34" charset="-122"/>
+                <a:cs typeface="Arial" pitchFamily="34" charset="-120"/>
+              </a:rPr>
+              <a:t>朝ごはんが非常に美味しく、フレンチトーストやオムレツ、特製カレーなど多くの種類の中から選ぶことができます</a:t>
+            </a:r>
+            <a:endParaRPr lang="en-US" sz="900" dirty="0"/>
+          </a:p>
+        </p:txBody>
+      </p:sp>
+      <p:sp>
+        <p:nvSpPr>
+          <p:cNvPr id="32" name="Text 30"/>
+          <p:cNvSpPr/>
+          <p:nvPr/>
+        </p:nvSpPr>
+        <p:spPr>
+          <a:xfrm>
+            <a:off x="594360" y="3657600"/>
+            <a:ext cx="2377440" cy="640080"/>
+          </a:xfrm>
+          <a:prstGeom prst="rect">
+            <a:avLst/>
+          </a:prstGeom>
+          <a:noFill/>
+          <a:ln/>
+        </p:spPr>
+        <p:txBody>
+          <a:bodyPr wrap="square" lIns="0" tIns="0" rIns="0" bIns="0" rtlCol="0" anchor="ctr"/>
+          <a:lstStyle/>
+          <a:p>
+            <a:pPr indent="0" marL="0">
+              <a:buNone/>
+            </a:pPr>
+            <a:r>
+              <a:rPr lang="en-US" sz="900" i="1" dirty="0">
+                <a:solidFill>
+                  <a:srgbClr val="3B7DD8"/>
+                </a:solidFill>
+                <a:latin typeface="Arial" pitchFamily="34" charset="0"/>
+                <a:ea typeface="Arial" pitchFamily="34" charset="-122"/>
+                <a:cs typeface="Arial" pitchFamily="34" charset="-120"/>
+              </a:rPr>
+              <a:t>「感覺酒店設施及服務不上檔次，房間也比較小，價格卻比大阪京都的更大面積的房間貴不少 部屋にはボトル入りの水が用意され...」</a:t>
+            </a:r>
+            <a:endParaRPr lang="en-US" sz="900" dirty="0"/>
+          </a:p>
+        </p:txBody>
+      </p:sp>
+      <p:sp>
+        <p:nvSpPr>
+          <p:cNvPr id="33" name="Shape 31"/>
+          <p:cNvSpPr/>
+          <p:nvPr/>
+        </p:nvSpPr>
+        <p:spPr>
+          <a:xfrm>
+            <a:off x="3291840" y="2880360"/>
+            <a:ext cx="2651760" cy="1600200"/>
+          </a:xfrm>
+          <a:prstGeom prst="rect">
+            <a:avLst/>
+          </a:prstGeom>
+          <a:solidFill>
+            <a:srgbClr val="FFFFFF"/>
+          </a:solidFill>
+          <a:ln/>
+          <a:effectLst>
+            <a:outerShdw sx="100000" sy="100000" kx="0" ky="0" algn="bl" rotWithShape="0" blurRad="50800" dist="25400" dir="8100000">
+              <a:srgbClr val="000000">
+                <a:alpha val="10000"/>
+              </a:srgbClr>
+            </a:outerShdw>
+          </a:effectLst>
+        </p:spPr>
+      </p:sp>
+      <p:sp>
+        <p:nvSpPr>
+          <p:cNvPr id="34" name="Shape 32"/>
+          <p:cNvSpPr/>
+          <p:nvPr/>
+        </p:nvSpPr>
+        <p:spPr>
+          <a:xfrm>
+            <a:off x="3291840" y="2880360"/>
+            <a:ext cx="54864" cy="1600200"/>
+          </a:xfrm>
+          <a:prstGeom prst="rect">
+            <a:avLst/>
+          </a:prstGeom>
+          <a:solidFill>
+            <a:srgbClr val="16A34A"/>
+          </a:solidFill>
+          <a:ln/>
+        </p:spPr>
+      </p:sp>
+      <p:sp>
+        <p:nvSpPr>
+          <p:cNvPr id="35" name="Shape 33"/>
+          <p:cNvSpPr/>
+          <p:nvPr/>
+        </p:nvSpPr>
+        <p:spPr>
+          <a:xfrm>
+            <a:off x="5120640" y="2953512"/>
+            <a:ext cx="658368" cy="228600"/>
+          </a:xfrm>
+          <a:prstGeom prst="rect">
+            <a:avLst/>
+          </a:prstGeom>
+          <a:solidFill>
+            <a:srgbClr val="DCFCE7"/>
+          </a:solidFill>
+          <a:ln/>
+        </p:spPr>
+      </p:sp>
+      <p:sp>
+        <p:nvSpPr>
+          <p:cNvPr id="36" name="Text 34"/>
+          <p:cNvSpPr/>
+          <p:nvPr/>
+        </p:nvSpPr>
+        <p:spPr>
+          <a:xfrm>
+            <a:off x="5120640" y="2953512"/>
+            <a:ext cx="658368" cy="228600"/>
+          </a:xfrm>
+          <a:prstGeom prst="rect">
+            <a:avLst/>
+          </a:prstGeom>
+          <a:noFill/>
+          <a:ln/>
+        </p:spPr>
+        <p:txBody>
+          <a:bodyPr wrap="square" lIns="0" tIns="0" rIns="0" bIns="0" rtlCol="0" anchor="ctr"/>
+          <a:lstStyle/>
+          <a:p>
+            <a:pPr algn="ctr" indent="0" marL="0">
+              <a:buNone/>
+            </a:pPr>
+            <a:r>
+              <a:rPr lang="en-US" sz="900" b="1" dirty="0">
+                <a:solidFill>
+                  <a:srgbClr val="16A34A"/>
+                </a:solidFill>
+                <a:latin typeface="Arial" pitchFamily="34" charset="0"/>
+                <a:ea typeface="Arial" pitchFamily="34" charset="-122"/>
+                <a:cs typeface="Arial" pitchFamily="34" charset="-120"/>
+              </a:rPr>
+              <a:t>20件+</a:t>
+            </a:r>
+            <a:endParaRPr lang="en-US" sz="900" dirty="0"/>
+          </a:p>
+        </p:txBody>
+      </p:sp>
+      <p:sp>
+        <p:nvSpPr>
+          <p:cNvPr id="37" name="Text 35"/>
+          <p:cNvSpPr/>
+          <p:nvPr/>
+        </p:nvSpPr>
+        <p:spPr>
+          <a:xfrm>
+            <a:off x="3429000" y="2953512"/>
+            <a:ext cx="1645920" cy="274320"/>
+          </a:xfrm>
+          <a:prstGeom prst="rect">
+            <a:avLst/>
+          </a:prstGeom>
+          <a:noFill/>
+          <a:ln/>
+        </p:spPr>
+        <p:txBody>
+          <a:bodyPr wrap="square" lIns="0" tIns="0" rIns="0" bIns="0" rtlCol="0" anchor="ctr"/>
+          <a:lstStyle/>
+          <a:p>
+            <a:pPr indent="0" marL="0">
+              <a:buNone/>
+            </a:pPr>
+            <a:r>
+              <a:rPr lang="en-US" sz="1300" b="1" dirty="0">
+                <a:solidFill>
+                  <a:srgbClr val="1A2744"/>
+                </a:solidFill>
+                <a:latin typeface="Arial" pitchFamily="34" charset="0"/>
+                <a:ea typeface="Arial" pitchFamily="34" charset="-122"/>
+                <a:cs typeface="Arial" pitchFamily="34" charset="-120"/>
+              </a:rPr>
+              <a:t>清潔さ・清掃</a:t>
+            </a:r>
+            <a:endParaRPr lang="en-US" sz="1300" dirty="0"/>
+          </a:p>
+        </p:txBody>
+      </p:sp>
+      <p:sp>
+        <p:nvSpPr>
+          <p:cNvPr id="38" name="Text 36"/>
+          <p:cNvSpPr/>
+          <p:nvPr/>
+        </p:nvSpPr>
+        <p:spPr>
+          <a:xfrm>
+            <a:off x="3429000" y="3246120"/>
+            <a:ext cx="2377440" cy="365760"/>
+          </a:xfrm>
+          <a:prstGeom prst="rect">
+            <a:avLst/>
+          </a:prstGeom>
+          <a:noFill/>
+          <a:ln/>
+        </p:spPr>
+        <p:txBody>
+          <a:bodyPr wrap="square" lIns="0" tIns="0" rIns="0" bIns="0" rtlCol="0" anchor="ctr"/>
+          <a:lstStyle/>
+          <a:p>
+            <a:pPr indent="0" marL="0">
+              <a:buNone/>
+            </a:pPr>
+            <a:r>
+              <a:rPr lang="en-US" sz="900" dirty="0">
+                <a:solidFill>
+                  <a:srgbClr val="64748B"/>
+                </a:solidFill>
+                <a:latin typeface="Arial" pitchFamily="34" charset="0"/>
+                <a:ea typeface="Arial" pitchFamily="34" charset="-122"/>
+                <a:cs typeface="Arial" pitchFamily="34" charset="-120"/>
+              </a:rPr>
               <a:t>乾淨方便，適合商旅出行 清潔で便利、ビジネス旅行者に最適</a:t>
             </a:r>
             <a:endParaRPr lang="en-US" sz="900" dirty="0"/>
@@ -10815,13 +11707,13 @@
       </p:sp>
       <p:sp>
         <p:nvSpPr>
-          <p:cNvPr id="11" name="Text 9"/>
-          <p:cNvSpPr/>
-          <p:nvPr/>
-        </p:nvSpPr>
-        <p:spPr>
-          <a:xfrm>
-            <a:off x="594360" y="1828800"/>
+          <p:cNvPr id="39" name="Text 37"/>
+          <p:cNvSpPr/>
+          <p:nvPr/>
+        </p:nvSpPr>
+        <p:spPr>
+          <a:xfrm>
+            <a:off x="3429000" y="3657600"/>
             <a:ext cx="2377440" cy="640080"/>
           </a:xfrm>
           <a:prstGeom prst="rect">
@@ -10854,13 +11746,13 @@
       </p:sp>
       <p:sp>
         <p:nvSpPr>
-          <p:cNvPr id="12" name="Shape 10"/>
-          <p:cNvSpPr/>
-          <p:nvPr/>
-        </p:nvSpPr>
-        <p:spPr>
-          <a:xfrm>
-            <a:off x="3291840" y="1051560"/>
+          <p:cNvPr id="40" name="Shape 38"/>
+          <p:cNvSpPr/>
+          <p:nvPr/>
+        </p:nvSpPr>
+        <p:spPr>
+          <a:xfrm>
+            <a:off x="6126480" y="2880360"/>
             <a:ext cx="2651760" cy="1600200"/>
           </a:xfrm>
           <a:prstGeom prst="rect">
@@ -10881,13 +11773,13 @@
       </p:sp>
       <p:sp>
         <p:nvSpPr>
-          <p:cNvPr id="13" name="Shape 11"/>
-          <p:cNvSpPr/>
-          <p:nvPr/>
-        </p:nvSpPr>
-        <p:spPr>
-          <a:xfrm>
-            <a:off x="3291840" y="1051560"/>
+          <p:cNvPr id="41" name="Shape 39"/>
+          <p:cNvSpPr/>
+          <p:nvPr/>
+        </p:nvSpPr>
+        <p:spPr>
+          <a:xfrm>
+            <a:off x="6126480" y="2880360"/>
             <a:ext cx="54864" cy="1600200"/>
           </a:xfrm>
           <a:prstGeom prst="rect">
@@ -10901,13 +11793,13 @@
       </p:sp>
       <p:sp>
         <p:nvSpPr>
-          <p:cNvPr id="14" name="Shape 12"/>
-          <p:cNvSpPr/>
-          <p:nvPr/>
-        </p:nvSpPr>
-        <p:spPr>
-          <a:xfrm>
-            <a:off x="5120640" y="1124712"/>
+          <p:cNvPr id="42" name="Shape 40"/>
+          <p:cNvSpPr/>
+          <p:nvPr/>
+        </p:nvSpPr>
+        <p:spPr>
+          <a:xfrm>
+            <a:off x="7955280" y="2953512"/>
             <a:ext cx="658368" cy="228600"/>
           </a:xfrm>
           <a:prstGeom prst="rect">
@@ -10921,682 +11813,13 @@
       </p:sp>
       <p:sp>
         <p:nvSpPr>
-          <p:cNvPr id="15" name="Text 13"/>
-          <p:cNvSpPr/>
-          <p:nvPr/>
-        </p:nvSpPr>
-        <p:spPr>
-          <a:xfrm>
-            <a:off x="5120640" y="1124712"/>
-            <a:ext cx="658368" cy="228600"/>
-          </a:xfrm>
-          <a:prstGeom prst="rect">
-            <a:avLst/>
-          </a:prstGeom>
-          <a:noFill/>
-          <a:ln/>
-        </p:spPr>
-        <p:txBody>
-          <a:bodyPr wrap="square" lIns="0" tIns="0" rIns="0" bIns="0" rtlCol="0" anchor="ctr"/>
-          <a:lstStyle/>
-          <a:p>
-            <a:pPr algn="ctr" indent="0" marL="0">
-              <a:buNone/>
-            </a:pPr>
-            <a:r>
-              <a:rPr lang="en-US" sz="900" b="1" dirty="0">
-                <a:solidFill>
-                  <a:srgbClr val="16A34A"/>
-                </a:solidFill>
-                <a:latin typeface="Arial" pitchFamily="34" charset="0"/>
-                <a:ea typeface="Arial" pitchFamily="34" charset="-122"/>
-                <a:cs typeface="Arial" pitchFamily="34" charset="-120"/>
-              </a:rPr>
-              <a:t>20件+</a:t>
-            </a:r>
-            <a:endParaRPr lang="en-US" sz="900" dirty="0"/>
-          </a:p>
-        </p:txBody>
-      </p:sp>
-      <p:sp>
-        <p:nvSpPr>
-          <p:cNvPr id="16" name="Text 14"/>
-          <p:cNvSpPr/>
-          <p:nvPr/>
-        </p:nvSpPr>
-        <p:spPr>
-          <a:xfrm>
-            <a:off x="3429000" y="1124712"/>
-            <a:ext cx="1645920" cy="274320"/>
-          </a:xfrm>
-          <a:prstGeom prst="rect">
-            <a:avLst/>
-          </a:prstGeom>
-          <a:noFill/>
-          <a:ln/>
-        </p:spPr>
-        <p:txBody>
-          <a:bodyPr wrap="square" lIns="0" tIns="0" rIns="0" bIns="0" rtlCol="0" anchor="ctr"/>
-          <a:lstStyle/>
-          <a:p>
-            <a:pPr indent="0" marL="0">
-              <a:buNone/>
-            </a:pPr>
-            <a:r>
-              <a:rPr lang="en-US" sz="1300" b="1" dirty="0">
-                <a:solidFill>
-                  <a:srgbClr val="1A2744"/>
-                </a:solidFill>
-                <a:latin typeface="Arial" pitchFamily="34" charset="0"/>
-                <a:ea typeface="Arial" pitchFamily="34" charset="-122"/>
-                <a:cs typeface="Arial" pitchFamily="34" charset="-120"/>
-              </a:rPr>
-              <a:t>スタッフの対応</a:t>
-            </a:r>
-            <a:endParaRPr lang="en-US" sz="1300" dirty="0"/>
-          </a:p>
-        </p:txBody>
-      </p:sp>
-      <p:sp>
-        <p:nvSpPr>
-          <p:cNvPr id="17" name="Text 15"/>
-          <p:cNvSpPr/>
-          <p:nvPr/>
-        </p:nvSpPr>
-        <p:spPr>
-          <a:xfrm>
-            <a:off x="3429000" y="1417320"/>
-            <a:ext cx="2377440" cy="365760"/>
-          </a:xfrm>
-          <a:prstGeom prst="rect">
-            <a:avLst/>
-          </a:prstGeom>
-          <a:noFill/>
-          <a:ln/>
-        </p:spPr>
-        <p:txBody>
-          <a:bodyPr wrap="square" lIns="0" tIns="0" rIns="0" bIns="0" rtlCol="0" anchor="ctr"/>
-          <a:lstStyle/>
-          <a:p>
-            <a:pPr indent="0" marL="0">
-              <a:buNone/>
-            </a:pPr>
-            <a:r>
-              <a:rPr lang="en-US" sz="900" dirty="0">
-                <a:solidFill>
-                  <a:srgbClr val="64748B"/>
-                </a:solidFill>
-                <a:latin typeface="Arial" pitchFamily="34" charset="0"/>
-                <a:ea typeface="Arial" pitchFamily="34" charset="-122"/>
-                <a:cs typeface="Arial" pitchFamily="34" charset="-120"/>
-              </a:rPr>
-              <a:t>朝食が非常に美味しく、朝食会場の接客が丁寧で素晴らしかった</a:t>
-            </a:r>
-            <a:endParaRPr lang="en-US" sz="900" dirty="0"/>
-          </a:p>
-        </p:txBody>
-      </p:sp>
-      <p:sp>
-        <p:nvSpPr>
-          <p:cNvPr id="18" name="Text 16"/>
-          <p:cNvSpPr/>
-          <p:nvPr/>
-        </p:nvSpPr>
-        <p:spPr>
-          <a:xfrm>
-            <a:off x="3429000" y="1828800"/>
-            <a:ext cx="2377440" cy="640080"/>
-          </a:xfrm>
-          <a:prstGeom prst="rect">
-            <a:avLst/>
-          </a:prstGeom>
-          <a:noFill/>
-          <a:ln/>
-        </p:spPr>
-        <p:txBody>
-          <a:bodyPr wrap="square" lIns="0" tIns="0" rIns="0" bIns="0" rtlCol="0" anchor="ctr"/>
-          <a:lstStyle/>
-          <a:p>
-            <a:pPr indent="0" marL="0">
-              <a:buNone/>
-            </a:pPr>
-            <a:r>
-              <a:rPr lang="en-US" sz="900" i="1" dirty="0">
-                <a:solidFill>
-                  <a:srgbClr val="3B7DD8"/>
-                </a:solidFill>
-                <a:latin typeface="Arial" pitchFamily="34" charset="0"/>
-                <a:ea typeface="Arial" pitchFamily="34" charset="-122"/>
-                <a:cs typeface="Arial" pitchFamily="34" charset="-120"/>
-              </a:rPr>
-              <a:t>「ホテルのサービスも良く、清潔で衛生的です」</a:t>
-            </a:r>
-            <a:endParaRPr lang="en-US" sz="900" dirty="0"/>
-          </a:p>
-        </p:txBody>
-      </p:sp>
-      <p:sp>
-        <p:nvSpPr>
-          <p:cNvPr id="19" name="Shape 17"/>
-          <p:cNvSpPr/>
-          <p:nvPr/>
-        </p:nvSpPr>
-        <p:spPr>
-          <a:xfrm>
-            <a:off x="6126480" y="1051560"/>
-            <a:ext cx="2651760" cy="1600200"/>
-          </a:xfrm>
-          <a:prstGeom prst="rect">
-            <a:avLst/>
-          </a:prstGeom>
-          <a:solidFill>
-            <a:srgbClr val="FFFFFF"/>
-          </a:solidFill>
-          <a:ln/>
-          <a:effectLst>
-            <a:outerShdw sx="100000" sy="100000" kx="0" ky="0" algn="bl" rotWithShape="0" blurRad="50800" dist="25400" dir="8100000">
-              <a:srgbClr val="000000">
-                <a:alpha val="10000"/>
-              </a:srgbClr>
-            </a:outerShdw>
-          </a:effectLst>
-        </p:spPr>
-      </p:sp>
-      <p:sp>
-        <p:nvSpPr>
-          <p:cNvPr id="20" name="Shape 18"/>
-          <p:cNvSpPr/>
-          <p:nvPr/>
-        </p:nvSpPr>
-        <p:spPr>
-          <a:xfrm>
-            <a:off x="6126480" y="1051560"/>
-            <a:ext cx="54864" cy="1600200"/>
-          </a:xfrm>
-          <a:prstGeom prst="rect">
-            <a:avLst/>
-          </a:prstGeom>
-          <a:solidFill>
-            <a:srgbClr val="16A34A"/>
-          </a:solidFill>
-          <a:ln/>
-        </p:spPr>
-      </p:sp>
-      <p:sp>
-        <p:nvSpPr>
-          <p:cNvPr id="21" name="Shape 19"/>
-          <p:cNvSpPr/>
-          <p:nvPr/>
-        </p:nvSpPr>
-        <p:spPr>
-          <a:xfrm>
-            <a:off x="7955280" y="1124712"/>
-            <a:ext cx="658368" cy="228600"/>
-          </a:xfrm>
-          <a:prstGeom prst="rect">
-            <a:avLst/>
-          </a:prstGeom>
-          <a:solidFill>
-            <a:srgbClr val="DCFCE7"/>
-          </a:solidFill>
-          <a:ln/>
-        </p:spPr>
-      </p:sp>
-      <p:sp>
-        <p:nvSpPr>
-          <p:cNvPr id="22" name="Text 20"/>
-          <p:cNvSpPr/>
-          <p:nvPr/>
-        </p:nvSpPr>
-        <p:spPr>
-          <a:xfrm>
-            <a:off x="7955280" y="1124712"/>
-            <a:ext cx="658368" cy="228600"/>
-          </a:xfrm>
-          <a:prstGeom prst="rect">
-            <a:avLst/>
-          </a:prstGeom>
-          <a:noFill/>
-          <a:ln/>
-        </p:spPr>
-        <p:txBody>
-          <a:bodyPr wrap="square" lIns="0" tIns="0" rIns="0" bIns="0" rtlCol="0" anchor="ctr"/>
-          <a:lstStyle/>
-          <a:p>
-            <a:pPr algn="ctr" indent="0" marL="0">
-              <a:buNone/>
-            </a:pPr>
-            <a:r>
-              <a:rPr lang="en-US" sz="900" b="1" dirty="0">
-                <a:solidFill>
-                  <a:srgbClr val="16A34A"/>
-                </a:solidFill>
-                <a:latin typeface="Arial" pitchFamily="34" charset="0"/>
-                <a:ea typeface="Arial" pitchFamily="34" charset="-122"/>
-                <a:cs typeface="Arial" pitchFamily="34" charset="-120"/>
-              </a:rPr>
-              <a:t>20件+</a:t>
-            </a:r>
-            <a:endParaRPr lang="en-US" sz="900" dirty="0"/>
-          </a:p>
-        </p:txBody>
-      </p:sp>
-      <p:sp>
-        <p:nvSpPr>
-          <p:cNvPr id="23" name="Text 21"/>
-          <p:cNvSpPr/>
-          <p:nvPr/>
-        </p:nvSpPr>
-        <p:spPr>
-          <a:xfrm>
-            <a:off x="6263640" y="1124712"/>
-            <a:ext cx="1645920" cy="274320"/>
-          </a:xfrm>
-          <a:prstGeom prst="rect">
-            <a:avLst/>
-          </a:prstGeom>
-          <a:noFill/>
-          <a:ln/>
-        </p:spPr>
-        <p:txBody>
-          <a:bodyPr wrap="square" lIns="0" tIns="0" rIns="0" bIns="0" rtlCol="0" anchor="ctr"/>
-          <a:lstStyle/>
-          <a:p>
-            <a:pPr indent="0" marL="0">
-              <a:buNone/>
-            </a:pPr>
-            <a:r>
-              <a:rPr lang="en-US" sz="1300" b="1" dirty="0">
-                <a:solidFill>
-                  <a:srgbClr val="1A2744"/>
-                </a:solidFill>
-                <a:latin typeface="Arial" pitchFamily="34" charset="0"/>
-                <a:ea typeface="Arial" pitchFamily="34" charset="-122"/>
-                <a:cs typeface="Arial" pitchFamily="34" charset="-120"/>
-              </a:rPr>
-              <a:t>快適さ・設備</a:t>
-            </a:r>
-            <a:endParaRPr lang="en-US" sz="1300" dirty="0"/>
-          </a:p>
-        </p:txBody>
-      </p:sp>
-      <p:sp>
-        <p:nvSpPr>
-          <p:cNvPr id="24" name="Text 22"/>
-          <p:cNvSpPr/>
-          <p:nvPr/>
-        </p:nvSpPr>
-        <p:spPr>
-          <a:xfrm>
-            <a:off x="6263640" y="1417320"/>
-            <a:ext cx="2377440" cy="365760"/>
-          </a:xfrm>
-          <a:prstGeom prst="rect">
-            <a:avLst/>
-          </a:prstGeom>
-          <a:noFill/>
-          <a:ln/>
-        </p:spPr>
-        <p:txBody>
-          <a:bodyPr wrap="square" lIns="0" tIns="0" rIns="0" bIns="0" rtlCol="0" anchor="ctr"/>
-          <a:lstStyle/>
-          <a:p>
-            <a:pPr indent="0" marL="0">
-              <a:buNone/>
-            </a:pPr>
-            <a:r>
-              <a:rPr lang="en-US" sz="900" dirty="0">
-                <a:solidFill>
-                  <a:srgbClr val="64748B"/>
-                </a:solidFill>
-                <a:latin typeface="Arial" pitchFamily="34" charset="0"/>
-                <a:ea typeface="Arial" pitchFamily="34" charset="-122"/>
-                <a:cs typeface="Arial" pitchFamily="34" charset="-120"/>
-              </a:rPr>
-              <a:t>綺麗だった 空調設備があまり良くなかった 空調設備があまり良くなかった</a:t>
-            </a:r>
-            <a:endParaRPr lang="en-US" sz="900" dirty="0"/>
-          </a:p>
-        </p:txBody>
-      </p:sp>
-      <p:sp>
-        <p:nvSpPr>
-          <p:cNvPr id="25" name="Text 23"/>
-          <p:cNvSpPr/>
-          <p:nvPr/>
-        </p:nvSpPr>
-        <p:spPr>
-          <a:xfrm>
-            <a:off x="6263640" y="1828800"/>
-            <a:ext cx="2377440" cy="640080"/>
-          </a:xfrm>
-          <a:prstGeom prst="rect">
-            <a:avLst/>
-          </a:prstGeom>
-          <a:noFill/>
-          <a:ln/>
-        </p:spPr>
-        <p:txBody>
-          <a:bodyPr wrap="square" lIns="0" tIns="0" rIns="0" bIns="0" rtlCol="0" anchor="ctr"/>
-          <a:lstStyle/>
-          <a:p>
-            <a:pPr indent="0" marL="0">
-              <a:buNone/>
-            </a:pPr>
-            <a:r>
-              <a:rPr lang="en-US" sz="900" i="1" dirty="0">
-                <a:solidFill>
-                  <a:srgbClr val="3B7DD8"/>
-                </a:solidFill>
-                <a:latin typeface="Arial" pitchFamily="34" charset="0"/>
-                <a:ea typeface="Arial" pitchFamily="34" charset="-122"/>
-                <a:cs typeface="Arial" pitchFamily="34" charset="-120"/>
-              </a:rPr>
-              <a:t>「フロントには使い捨てのバスアメニティ、バスソルト、フェイスマスクなど、必要なものがすべて揃っていました」</a:t>
-            </a:r>
-            <a:endParaRPr lang="en-US" sz="900" dirty="0"/>
-          </a:p>
-        </p:txBody>
-      </p:sp>
-      <p:sp>
-        <p:nvSpPr>
-          <p:cNvPr id="26" name="Shape 24"/>
-          <p:cNvSpPr/>
-          <p:nvPr/>
-        </p:nvSpPr>
-        <p:spPr>
-          <a:xfrm>
-            <a:off x="457200" y="2880360"/>
-            <a:ext cx="2651760" cy="1600200"/>
-          </a:xfrm>
-          <a:prstGeom prst="rect">
-            <a:avLst/>
-          </a:prstGeom>
-          <a:solidFill>
-            <a:srgbClr val="FFFFFF"/>
-          </a:solidFill>
-          <a:ln/>
-          <a:effectLst>
-            <a:outerShdw sx="100000" sy="100000" kx="0" ky="0" algn="bl" rotWithShape="0" blurRad="50800" dist="25400" dir="8100000">
-              <a:srgbClr val="000000">
-                <a:alpha val="10000"/>
-              </a:srgbClr>
-            </a:outerShdw>
-          </a:effectLst>
-        </p:spPr>
-      </p:sp>
-      <p:sp>
-        <p:nvSpPr>
-          <p:cNvPr id="27" name="Shape 25"/>
-          <p:cNvSpPr/>
-          <p:nvPr/>
-        </p:nvSpPr>
-        <p:spPr>
-          <a:xfrm>
-            <a:off x="457200" y="2880360"/>
-            <a:ext cx="54864" cy="1600200"/>
-          </a:xfrm>
-          <a:prstGeom prst="rect">
-            <a:avLst/>
-          </a:prstGeom>
-          <a:solidFill>
-            <a:srgbClr val="16A34A"/>
-          </a:solidFill>
-          <a:ln/>
-        </p:spPr>
-      </p:sp>
-      <p:sp>
-        <p:nvSpPr>
-          <p:cNvPr id="28" name="Shape 26"/>
-          <p:cNvSpPr/>
-          <p:nvPr/>
-        </p:nvSpPr>
-        <p:spPr>
-          <a:xfrm>
-            <a:off x="2286000" y="2953512"/>
-            <a:ext cx="658368" cy="228600"/>
-          </a:xfrm>
-          <a:prstGeom prst="rect">
-            <a:avLst/>
-          </a:prstGeom>
-          <a:solidFill>
-            <a:srgbClr val="DCFCE7"/>
-          </a:solidFill>
-          <a:ln/>
-        </p:spPr>
-      </p:sp>
-      <p:sp>
-        <p:nvSpPr>
-          <p:cNvPr id="29" name="Text 27"/>
-          <p:cNvSpPr/>
-          <p:nvPr/>
-        </p:nvSpPr>
-        <p:spPr>
-          <a:xfrm>
-            <a:off x="2286000" y="2953512"/>
-            <a:ext cx="658368" cy="228600"/>
-          </a:xfrm>
-          <a:prstGeom prst="rect">
-            <a:avLst/>
-          </a:prstGeom>
-          <a:noFill/>
-          <a:ln/>
-        </p:spPr>
-        <p:txBody>
-          <a:bodyPr wrap="square" lIns="0" tIns="0" rIns="0" bIns="0" rtlCol="0" anchor="ctr"/>
-          <a:lstStyle/>
-          <a:p>
-            <a:pPr algn="ctr" indent="0" marL="0">
-              <a:buNone/>
-            </a:pPr>
-            <a:r>
-              <a:rPr lang="en-US" sz="900" b="1" dirty="0">
-                <a:solidFill>
-                  <a:srgbClr val="16A34A"/>
-                </a:solidFill>
-                <a:latin typeface="Arial" pitchFamily="34" charset="0"/>
-                <a:ea typeface="Arial" pitchFamily="34" charset="-122"/>
-                <a:cs typeface="Arial" pitchFamily="34" charset="-120"/>
-              </a:rPr>
-              <a:t>20件+</a:t>
-            </a:r>
-            <a:endParaRPr lang="en-US" sz="900" dirty="0"/>
-          </a:p>
-        </p:txBody>
-      </p:sp>
-      <p:sp>
-        <p:nvSpPr>
-          <p:cNvPr id="30" name="Text 28"/>
-          <p:cNvSpPr/>
-          <p:nvPr/>
-        </p:nvSpPr>
-        <p:spPr>
-          <a:xfrm>
-            <a:off x="594360" y="2953512"/>
-            <a:ext cx="1645920" cy="274320"/>
-          </a:xfrm>
-          <a:prstGeom prst="rect">
-            <a:avLst/>
-          </a:prstGeom>
-          <a:noFill/>
-          <a:ln/>
-        </p:spPr>
-        <p:txBody>
-          <a:bodyPr wrap="square" lIns="0" tIns="0" rIns="0" bIns="0" rtlCol="0" anchor="ctr"/>
-          <a:lstStyle/>
-          <a:p>
-            <a:pPr indent="0" marL="0">
-              <a:buNone/>
-            </a:pPr>
-            <a:r>
-              <a:rPr lang="en-US" sz="1300" b="1" dirty="0">
-                <a:solidFill>
-                  <a:srgbClr val="1A2744"/>
-                </a:solidFill>
-                <a:latin typeface="Arial" pitchFamily="34" charset="0"/>
-                <a:ea typeface="Arial" pitchFamily="34" charset="-122"/>
-                <a:cs typeface="Arial" pitchFamily="34" charset="-120"/>
-              </a:rPr>
-              <a:t>清潔さ・清掃</a:t>
-            </a:r>
-            <a:endParaRPr lang="en-US" sz="1300" dirty="0"/>
-          </a:p>
-        </p:txBody>
-      </p:sp>
-      <p:sp>
-        <p:nvSpPr>
-          <p:cNvPr id="31" name="Text 29"/>
-          <p:cNvSpPr/>
-          <p:nvPr/>
-        </p:nvSpPr>
-        <p:spPr>
-          <a:xfrm>
-            <a:off x="594360" y="3246120"/>
-            <a:ext cx="2377440" cy="365760"/>
-          </a:xfrm>
-          <a:prstGeom prst="rect">
-            <a:avLst/>
-          </a:prstGeom>
-          <a:noFill/>
-          <a:ln/>
-        </p:spPr>
-        <p:txBody>
-          <a:bodyPr wrap="square" lIns="0" tIns="0" rIns="0" bIns="0" rtlCol="0" anchor="ctr"/>
-          <a:lstStyle/>
-          <a:p>
-            <a:pPr indent="0" marL="0">
-              <a:buNone/>
-            </a:pPr>
-            <a:r>
-              <a:rPr lang="en-US" sz="900" dirty="0">
-                <a:solidFill>
-                  <a:srgbClr val="64748B"/>
-                </a:solidFill>
-                <a:latin typeface="Arial" pitchFamily="34" charset="0"/>
-                <a:ea typeface="Arial" pitchFamily="34" charset="-122"/>
-                <a:cs typeface="Arial" pitchFamily="34" charset="-120"/>
-              </a:rPr>
-              <a:t>乾淨方便，適合商旅出行 清潔で便利、ビジネス旅行者に最適</a:t>
-            </a:r>
-            <a:endParaRPr lang="en-US" sz="900" dirty="0"/>
-          </a:p>
-        </p:txBody>
-      </p:sp>
-      <p:sp>
-        <p:nvSpPr>
-          <p:cNvPr id="32" name="Text 30"/>
-          <p:cNvSpPr/>
-          <p:nvPr/>
-        </p:nvSpPr>
-        <p:spPr>
-          <a:xfrm>
-            <a:off x="594360" y="3657600"/>
-            <a:ext cx="2377440" cy="640080"/>
-          </a:xfrm>
-          <a:prstGeom prst="rect">
-            <a:avLst/>
-          </a:prstGeom>
-          <a:noFill/>
-          <a:ln/>
-        </p:spPr>
-        <p:txBody>
-          <a:bodyPr wrap="square" lIns="0" tIns="0" rIns="0" bIns="0" rtlCol="0" anchor="ctr"/>
-          <a:lstStyle/>
-          <a:p>
-            <a:pPr indent="0" marL="0">
-              <a:buNone/>
-            </a:pPr>
-            <a:r>
-              <a:rPr lang="en-US" sz="900" i="1" dirty="0">
-                <a:solidFill>
-                  <a:srgbClr val="3B7DD8"/>
-                </a:solidFill>
-                <a:latin typeface="Arial" pitchFamily="34" charset="0"/>
-                <a:ea typeface="Arial" pitchFamily="34" charset="-122"/>
-                <a:cs typeface="Arial" pitchFamily="34" charset="-120"/>
-              </a:rPr>
-              <a:t>「駅近で便利でした 部屋も清潔で気持ち良かったです コーヒーやお水があり嬉しかったです 駅近で便利でした 部屋も清潔...」</a:t>
-            </a:r>
-            <a:endParaRPr lang="en-US" sz="900" dirty="0"/>
-          </a:p>
-        </p:txBody>
-      </p:sp>
-      <p:sp>
-        <p:nvSpPr>
-          <p:cNvPr id="33" name="Shape 31"/>
-          <p:cNvSpPr/>
-          <p:nvPr/>
-        </p:nvSpPr>
-        <p:spPr>
-          <a:xfrm>
-            <a:off x="3291840" y="2880360"/>
-            <a:ext cx="2651760" cy="1600200"/>
-          </a:xfrm>
-          <a:prstGeom prst="rect">
-            <a:avLst/>
-          </a:prstGeom>
-          <a:solidFill>
-            <a:srgbClr val="FFFFFF"/>
-          </a:solidFill>
-          <a:ln/>
-          <a:effectLst>
-            <a:outerShdw sx="100000" sy="100000" kx="0" ky="0" algn="bl" rotWithShape="0" blurRad="50800" dist="25400" dir="8100000">
-              <a:srgbClr val="000000">
-                <a:alpha val="10000"/>
-              </a:srgbClr>
-            </a:outerShdw>
-          </a:effectLst>
-        </p:spPr>
-      </p:sp>
-      <p:sp>
-        <p:nvSpPr>
-          <p:cNvPr id="34" name="Shape 32"/>
-          <p:cNvSpPr/>
-          <p:nvPr/>
-        </p:nvSpPr>
-        <p:spPr>
-          <a:xfrm>
-            <a:off x="3291840" y="2880360"/>
-            <a:ext cx="54864" cy="1600200"/>
-          </a:xfrm>
-          <a:prstGeom prst="rect">
-            <a:avLst/>
-          </a:prstGeom>
-          <a:solidFill>
-            <a:srgbClr val="16A34A"/>
-          </a:solidFill>
-          <a:ln/>
-        </p:spPr>
-      </p:sp>
-      <p:sp>
-        <p:nvSpPr>
-          <p:cNvPr id="35" name="Shape 33"/>
-          <p:cNvSpPr/>
-          <p:nvPr/>
-        </p:nvSpPr>
-        <p:spPr>
-          <a:xfrm>
-            <a:off x="5120640" y="2953512"/>
-            <a:ext cx="658368" cy="228600"/>
-          </a:xfrm>
-          <a:prstGeom prst="rect">
-            <a:avLst/>
-          </a:prstGeom>
-          <a:solidFill>
-            <a:srgbClr val="DCFCE7"/>
-          </a:solidFill>
-          <a:ln/>
-        </p:spPr>
-      </p:sp>
-      <p:sp>
-        <p:nvSpPr>
-          <p:cNvPr id="36" name="Text 34"/>
-          <p:cNvSpPr/>
-          <p:nvPr/>
-        </p:nvSpPr>
-        <p:spPr>
-          <a:xfrm>
-            <a:off x="5120640" y="2953512"/>
+          <p:cNvPr id="43" name="Text 41"/>
+          <p:cNvSpPr/>
+          <p:nvPr/>
+        </p:nvSpPr>
+        <p:spPr>
+          <a:xfrm>
+            <a:off x="7955280" y="2953512"/>
             <a:ext cx="658368" cy="228600"/>
           </a:xfrm>
           <a:prstGeom prst="rect">
@@ -11629,229 +11852,6 @@
       </p:sp>
       <p:sp>
         <p:nvSpPr>
-          <p:cNvPr id="37" name="Text 35"/>
-          <p:cNvSpPr/>
-          <p:nvPr/>
-        </p:nvSpPr>
-        <p:spPr>
-          <a:xfrm>
-            <a:off x="3429000" y="2953512"/>
-            <a:ext cx="1645920" cy="274320"/>
-          </a:xfrm>
-          <a:prstGeom prst="rect">
-            <a:avLst/>
-          </a:prstGeom>
-          <a:noFill/>
-          <a:ln/>
-        </p:spPr>
-        <p:txBody>
-          <a:bodyPr wrap="square" lIns="0" tIns="0" rIns="0" bIns="0" rtlCol="0" anchor="ctr"/>
-          <a:lstStyle/>
-          <a:p>
-            <a:pPr indent="0" marL="0">
-              <a:buNone/>
-            </a:pPr>
-            <a:r>
-              <a:rPr lang="en-US" sz="1300" b="1" dirty="0">
-                <a:solidFill>
-                  <a:srgbClr val="1A2744"/>
-                </a:solidFill>
-                <a:latin typeface="Arial" pitchFamily="34" charset="0"/>
-                <a:ea typeface="Arial" pitchFamily="34" charset="-122"/>
-                <a:cs typeface="Arial" pitchFamily="34" charset="-120"/>
-              </a:rPr>
-              <a:t>朝食</a:t>
-            </a:r>
-            <a:endParaRPr lang="en-US" sz="1300" dirty="0"/>
-          </a:p>
-        </p:txBody>
-      </p:sp>
-      <p:sp>
-        <p:nvSpPr>
-          <p:cNvPr id="38" name="Text 36"/>
-          <p:cNvSpPr/>
-          <p:nvPr/>
-        </p:nvSpPr>
-        <p:spPr>
-          <a:xfrm>
-            <a:off x="3429000" y="3246120"/>
-            <a:ext cx="2377440" cy="365760"/>
-          </a:xfrm>
-          <a:prstGeom prst="rect">
-            <a:avLst/>
-          </a:prstGeom>
-          <a:noFill/>
-          <a:ln/>
-        </p:spPr>
-        <p:txBody>
-          <a:bodyPr wrap="square" lIns="0" tIns="0" rIns="0" bIns="0" rtlCol="0" anchor="ctr"/>
-          <a:lstStyle/>
-          <a:p>
-            <a:pPr indent="0" marL="0">
-              <a:buNone/>
-            </a:pPr>
-            <a:r>
-              <a:rPr lang="en-US" sz="900" dirty="0">
-                <a:solidFill>
-                  <a:srgbClr val="64748B"/>
-                </a:solidFill>
-                <a:latin typeface="Arial" pitchFamily="34" charset="0"/>
-                <a:ea typeface="Arial" pitchFamily="34" charset="-122"/>
-                <a:cs typeface="Arial" pitchFamily="34" charset="-120"/>
-              </a:rPr>
-              <a:t>朝食が非常に美味しく、朝食会場の接客が丁寧で素晴らしかった</a:t>
-            </a:r>
-            <a:endParaRPr lang="en-US" sz="900" dirty="0"/>
-          </a:p>
-        </p:txBody>
-      </p:sp>
-      <p:sp>
-        <p:nvSpPr>
-          <p:cNvPr id="39" name="Text 37"/>
-          <p:cNvSpPr/>
-          <p:nvPr/>
-        </p:nvSpPr>
-        <p:spPr>
-          <a:xfrm>
-            <a:off x="3429000" y="3657600"/>
-            <a:ext cx="2377440" cy="640080"/>
-          </a:xfrm>
-          <a:prstGeom prst="rect">
-            <a:avLst/>
-          </a:prstGeom>
-          <a:noFill/>
-          <a:ln/>
-        </p:spPr>
-        <p:txBody>
-          <a:bodyPr wrap="square" lIns="0" tIns="0" rIns="0" bIns="0" rtlCol="0" anchor="ctr"/>
-          <a:lstStyle/>
-          <a:p>
-            <a:pPr indent="0" marL="0">
-              <a:buNone/>
-            </a:pPr>
-            <a:r>
-              <a:rPr lang="en-US" sz="900" i="1" dirty="0">
-                <a:solidFill>
-                  <a:srgbClr val="3B7DD8"/>
-                </a:solidFill>
-                <a:latin typeface="Arial" pitchFamily="34" charset="0"/>
-                <a:ea typeface="Arial" pitchFamily="34" charset="-122"/>
-                <a:cs typeface="Arial" pitchFamily="34" charset="-120"/>
-              </a:rPr>
-              <a:t>「朝食は茹で魚、パン、アイスクリームなど種類豊富で、味も美味しかったです」</a:t>
-            </a:r>
-            <a:endParaRPr lang="en-US" sz="900" dirty="0"/>
-          </a:p>
-        </p:txBody>
-      </p:sp>
-      <p:sp>
-        <p:nvSpPr>
-          <p:cNvPr id="40" name="Shape 38"/>
-          <p:cNvSpPr/>
-          <p:nvPr/>
-        </p:nvSpPr>
-        <p:spPr>
-          <a:xfrm>
-            <a:off x="6126480" y="2880360"/>
-            <a:ext cx="2651760" cy="1600200"/>
-          </a:xfrm>
-          <a:prstGeom prst="rect">
-            <a:avLst/>
-          </a:prstGeom>
-          <a:solidFill>
-            <a:srgbClr val="FFFFFF"/>
-          </a:solidFill>
-          <a:ln/>
-          <a:effectLst>
-            <a:outerShdw sx="100000" sy="100000" kx="0" ky="0" algn="bl" rotWithShape="0" blurRad="50800" dist="25400" dir="8100000">
-              <a:srgbClr val="000000">
-                <a:alpha val="10000"/>
-              </a:srgbClr>
-            </a:outerShdw>
-          </a:effectLst>
-        </p:spPr>
-      </p:sp>
-      <p:sp>
-        <p:nvSpPr>
-          <p:cNvPr id="41" name="Shape 39"/>
-          <p:cNvSpPr/>
-          <p:nvPr/>
-        </p:nvSpPr>
-        <p:spPr>
-          <a:xfrm>
-            <a:off x="6126480" y="2880360"/>
-            <a:ext cx="54864" cy="1600200"/>
-          </a:xfrm>
-          <a:prstGeom prst="rect">
-            <a:avLst/>
-          </a:prstGeom>
-          <a:solidFill>
-            <a:srgbClr val="16A34A"/>
-          </a:solidFill>
-          <a:ln/>
-        </p:spPr>
-      </p:sp>
-      <p:sp>
-        <p:nvSpPr>
-          <p:cNvPr id="42" name="Shape 40"/>
-          <p:cNvSpPr/>
-          <p:nvPr/>
-        </p:nvSpPr>
-        <p:spPr>
-          <a:xfrm>
-            <a:off x="7955280" y="2953512"/>
-            <a:ext cx="658368" cy="228600"/>
-          </a:xfrm>
-          <a:prstGeom prst="rect">
-            <a:avLst/>
-          </a:prstGeom>
-          <a:solidFill>
-            <a:srgbClr val="DCFCE7"/>
-          </a:solidFill>
-          <a:ln/>
-        </p:spPr>
-      </p:sp>
-      <p:sp>
-        <p:nvSpPr>
-          <p:cNvPr id="43" name="Text 41"/>
-          <p:cNvSpPr/>
-          <p:nvPr/>
-        </p:nvSpPr>
-        <p:spPr>
-          <a:xfrm>
-            <a:off x="7955280" y="2953512"/>
-            <a:ext cx="658368" cy="228600"/>
-          </a:xfrm>
-          <a:prstGeom prst="rect">
-            <a:avLst/>
-          </a:prstGeom>
-          <a:noFill/>
-          <a:ln/>
-        </p:spPr>
-        <p:txBody>
-          <a:bodyPr wrap="square" lIns="0" tIns="0" rIns="0" bIns="0" rtlCol="0" anchor="ctr"/>
-          <a:lstStyle/>
-          <a:p>
-            <a:pPr algn="ctr" indent="0" marL="0">
-              <a:buNone/>
-            </a:pPr>
-            <a:r>
-              <a:rPr lang="en-US" sz="900" b="1" dirty="0">
-                <a:solidFill>
-                  <a:srgbClr val="16A34A"/>
-                </a:solidFill>
-                <a:latin typeface="Arial" pitchFamily="34" charset="0"/>
-                <a:ea typeface="Arial" pitchFamily="34" charset="-122"/>
-                <a:cs typeface="Arial" pitchFamily="34" charset="-120"/>
-              </a:rPr>
-              <a:t>10件+</a:t>
-            </a:r>
-            <a:endParaRPr lang="en-US" sz="900" dirty="0"/>
-          </a:p>
-        </p:txBody>
-      </p:sp>
-      <p:sp>
-        <p:nvSpPr>
           <p:cNvPr id="44" name="Text 42"/>
           <p:cNvSpPr/>
           <p:nvPr/>
@@ -11922,7 +11922,7 @@
                 <a:ea typeface="Arial" pitchFamily="34" charset="-122"/>
                 <a:cs typeface="Arial" pitchFamily="34" charset="-120"/>
               </a:rPr>
-              <a:t>交通方便，購物方便 交通の便が良く、買い物にも便利</a:t>
+              <a:t>川崎駅に近く、コンビニやスーパーなども近隣にある為、非常に便利です</a:t>
             </a:r>
             <a:endParaRPr lang="en-US" sz="900" dirty="0"/>
           </a:p>
@@ -11961,7 +11961,7 @@
                 <a:ea typeface="Arial" pitchFamily="34" charset="-122"/>
                 <a:cs typeface="Arial" pitchFamily="34" charset="-120"/>
               </a:rPr>
-              <a:t>「附近很方便，很多食肆，有海鮮，打邊爐，拉麵，超級市場，7仔，購物中心很多，還有公仔夾，酒店服務好，乾淨衞生，值得推...」</a:t>
+              <a:t>「交通方便，購物方便 交通の便が良く、買い物にも便利」</a:t>
             </a:r>
             <a:endParaRPr lang="en-US" sz="900" dirty="0"/>
           </a:p>
@@ -12651,7 +12651,7 @@
                           <a:ea typeface="Arial" pitchFamily="34" charset="-122"/>
                           <a:cs typeface="Arial" pitchFamily="34" charset="-120"/>
                         </a:rPr>
-                        <a:t>寒がりな私ですが、暖房も自分好みに設定できてよかったです</a:t>
+                        <a:t>エアコンは作動せず、フロントデスクは扇風機を使うように勧めてきましたが、気温は上がり続けました…</a:t>
                       </a:r>
                       <a:endParaRPr lang="en-US" sz="900" dirty="0">
                         <a:latin typeface="Arial" charset="0"/>
@@ -12719,7 +12719,7 @@
                           <a:ea typeface="Arial" pitchFamily="34" charset="-122"/>
                           <a:cs typeface="Arial" pitchFamily="34" charset="-120"/>
                         </a:rPr>
-                        <a:t>13件</a:t>
+                        <a:t>14件</a:t>
                       </a:r>
                       <a:endParaRPr lang="en-US" sz="900" dirty="0">
                         <a:latin typeface="Arial" charset="0"/>
@@ -13199,7 +13199,7 @@
                           <a:ea typeface="Arial" pitchFamily="34" charset="-122"/>
                           <a:cs typeface="Arial" pitchFamily="34" charset="-120"/>
                         </a:rPr>
-                        <a:t>エアコンは個別じゃないのか、冷風も出ず窓も開かず苦しい思いをしました 天気が良かったのもあって部屋が暑い</a:t>
+                        <a:t>不快だったのは、換気のために部屋の窓を開けることができず、3月なのに部屋が蒸し暑かったことです</a:t>
                       </a:r>
                       <a:endParaRPr lang="en-US" sz="900" dirty="0">
                         <a:latin typeface="Arial" charset="0"/>
@@ -13267,7 +13267,7 @@
                           <a:ea typeface="Arial" pitchFamily="34" charset="-122"/>
                           <a:cs typeface="Arial" pitchFamily="34" charset="-120"/>
                         </a:rPr>
-                        <a:t>8件</a:t>
+                        <a:t>9件</a:t>
                       </a:r>
                       <a:endParaRPr lang="en-US" sz="900" dirty="0">
                         <a:latin typeface="Arial" charset="0"/>
@@ -13679,7 +13679,7 @@
                           <a:ea typeface="Arial" pitchFamily="34" charset="-122"/>
                           <a:cs typeface="Arial" pitchFamily="34" charset="-120"/>
                         </a:rPr>
-                        <a:t>対応・サービスの不満</a:t>
+                        <a:t>朝食の改善要望</a:t>
                       </a:r>
                       <a:endParaRPr lang="en-US" sz="900" dirty="0">
                         <a:latin typeface="Arial" charset="0"/>
@@ -13747,7 +13747,7 @@
                           <a:ea typeface="Arial" pitchFamily="34" charset="-122"/>
                           <a:cs typeface="Arial" pitchFamily="34" charset="-120"/>
                         </a:rPr>
-                        <a:t>夜食のルームサービスは、少し残念かなと</a:t>
+                        <a:t>感覺酒店設施及服務不上檔次，房間也比較小，價格卻比大阪京都的更大面積的房間貴不少 部屋にはボトル入りの水が用意され...</a:t>
                       </a:r>
                       <a:endParaRPr lang="en-US" sz="900" dirty="0">
                         <a:latin typeface="Arial" charset="0"/>
@@ -13953,7 +13953,7 @@
                           <a:ea typeface="Arial" pitchFamily="34" charset="-122"/>
                           <a:cs typeface="Arial" pitchFamily="34" charset="-120"/>
                         </a:rPr>
-                        <a:t>朝食の改善要望</a:t>
+                        <a:t>対応・サービスの不満</a:t>
                       </a:r>
                       <a:endParaRPr lang="en-US" sz="900" dirty="0">
                         <a:latin typeface="Arial" charset="0"/>
@@ -14021,7 +14021,7 @@
                           <a:ea typeface="Arial" pitchFamily="34" charset="-122"/>
                           <a:cs typeface="Arial" pitchFamily="34" charset="-120"/>
                         </a:rPr>
-                        <a:t>朝食が美味しく、和風洋風ともに品数等含めて、とても良かった</a:t>
+                        <a:t>夜食のルームサービスは、少し残念かなと</a:t>
                       </a:r>
                       <a:endParaRPr lang="en-US" sz="900" dirty="0">
                         <a:latin typeface="Arial" charset="0"/>
@@ -14089,7 +14089,7 @@
                           <a:ea typeface="Arial" pitchFamily="34" charset="-122"/>
                           <a:cs typeface="Arial" pitchFamily="34" charset="-120"/>
                         </a:rPr>
-                        <a:t>4件</a:t>
+                        <a:t>5件</a:t>
                       </a:r>
                       <a:endParaRPr lang="en-US" sz="900" dirty="0">
                         <a:latin typeface="Arial" charset="0"/>

--- a/納品レポート/ホテル別レポート/kawasaki_nikko_口コミ分析レポート.pptx
+++ b/納品レポート/ホテル別レポート/kawasaki_nikko_口コミ分析レポート.pptx
@@ -208,7 +208,7 @@
                 <c:formatCode>General</c:formatCode>
                 <c:ptCount val="6"/>
                 <c:pt idx="0">
-                  <c:v>9.74</c:v>
+                  <c:v>9.76</c:v>
                 </c:pt>
                 <c:pt idx="1">
                   <c:v>9</c:v>
@@ -217,10 +217,10 @@
                   <c:v>9</c:v>
                 </c:pt>
                 <c:pt idx="3">
-                  <c:v>8.51</c:v>
+                  <c:v>8.53</c:v>
                 </c:pt>
                 <c:pt idx="4">
-                  <c:v>7.88</c:v>
+                  <c:v>7.53</c:v>
                 </c:pt>
                 <c:pt idx="5">
                   <c:v>7</c:v>
@@ -566,13 +566,13 @@
               <c:numCache>
                 <c:ptCount val="3"/>
                 <c:pt idx="0">
-                  <c:v>104</c:v>
+                  <c:v>105</c:v>
                 </c:pt>
                 <c:pt idx="1">
-                  <c:v>23</c:v>
+                  <c:v>22</c:v>
                 </c:pt>
                 <c:pt idx="2">
-                  <c:v>1</c:v>
+                  <c:v>2</c:v>
                 </c:pt>
               </c:numCache>
             </c:numRef>
@@ -757,11 +757,22 @@
               <a:effectLst/>
             </c:spPr>
           </c:dPt>
+          <c:dPt>
+            <c:idx val="7"/>
+            <c:invertIfNegative val="0"/>
+            <c:bubble3D val="0"/>
+            <c:spPr>
+              <a:solidFill>
+                <a:srgbClr val="DC2626"/>
+              </a:solidFill>
+              <a:effectLst/>
+            </c:spPr>
+          </c:dPt>
           <c:cat>
             <c:multiLvlStrRef>
-              <c:f>Sheet1!$A$2:$A$8</c:f>
+              <c:f>Sheet1!$A$2:$A$9</c:f>
               <c:multiLvlStrCache>
-                <c:ptCount val="7"/>
+                <c:ptCount val="8"/>
                 <c:lvl>
                   <c:pt idx="0">
                     <c:v>10点</c:v>
@@ -784,27 +795,30 @@
                   <c:pt idx="6">
                     <c:v>3点</c:v>
                   </c:pt>
+                  <c:pt idx="7">
+                    <c:v>2点</c:v>
+                  </c:pt>
                 </c:lvl>
               </c:multiLvlStrCache>
             </c:multiLvlStrRef>
           </c:cat>
           <c:val>
             <c:numRef>
-              <c:f>Sheet1!$B$2:$B$8</c:f>
+              <c:f>Sheet1!$B$2:$B$9</c:f>
               <c:numCache>
                 <c:formatCode>General</c:formatCode>
-                <c:ptCount val="7"/>
+                <c:ptCount val="8"/>
                 <c:pt idx="0">
-                  <c:v>56</c:v>
+                  <c:v>58</c:v>
                 </c:pt>
                 <c:pt idx="1">
-                  <c:v>24</c:v>
+                  <c:v>23</c:v>
                 </c:pt>
                 <c:pt idx="2">
                   <c:v>24</c:v>
                 </c:pt>
                 <c:pt idx="3">
-                  <c:v>11</c:v>
+                  <c:v>10</c:v>
                 </c:pt>
                 <c:pt idx="4">
                   <c:v>10</c:v>
@@ -813,6 +827,9 @@
                   <c:v>2</c:v>
                 </c:pt>
                 <c:pt idx="6">
+                  <c:v>1</c:v>
+                </c:pt>
+                <c:pt idx="7">
                   <c:v>1</c:v>
                 </c:pt>
               </c:numCache>
@@ -2764,7 +2781,7 @@
                 <a:ea typeface="Arial" pitchFamily="34" charset="-122"/>
                 <a:cs typeface="Arial" pitchFamily="34" charset="-120"/>
               </a:rPr>
-              <a:t>レビュー総数：128件（6サイト）</a:t>
+              <a:t>レビュー総数：129件（6サイト）</a:t>
             </a:r>
             <a:endParaRPr lang="en-US" sz="1000" dirty="0"/>
           </a:p>
@@ -2784,7 +2801,7 @@
                 <a:ea typeface="Arial" pitchFamily="34" charset="-122"/>
                 <a:cs typeface="Arial" pitchFamily="34" charset="-120"/>
               </a:rPr>
-              <a:t>作成日：2026年3月21日</a:t>
+              <a:t>作成日：2026年3月23日</a:t>
             </a:r>
             <a:endParaRPr lang="en-US" sz="1000" dirty="0"/>
           </a:p>
@@ -3330,7 +3347,7 @@
                           <a:ea typeface="Arial" pitchFamily="34" charset="-122"/>
                           <a:cs typeface="Arial" pitchFamily="34" charset="-120"/>
                         </a:rPr>
-                        <a:t>8.73点</a:t>
+                        <a:t>8.71点</a:t>
                       </a:r>
                       <a:endParaRPr lang="en-US" sz="1000" dirty="0">
                         <a:latin typeface="Arial" charset="0"/>
@@ -3604,7 +3621,7 @@
                           <a:ea typeface="Arial" pitchFamily="34" charset="-122"/>
                           <a:cs typeface="Arial" pitchFamily="34" charset="-120"/>
                         </a:rPr>
-                        <a:t>81.2%</a:t>
+                        <a:t>81.4%</a:t>
                       </a:r>
                       <a:endParaRPr lang="en-US" sz="1000" dirty="0">
                         <a:latin typeface="Arial" charset="0"/>
@@ -3878,7 +3895,7 @@
                           <a:ea typeface="Arial" pitchFamily="34" charset="-122"/>
                           <a:cs typeface="Arial" pitchFamily="34" charset="-120"/>
                         </a:rPr>
-                        <a:t>0.8%</a:t>
+                        <a:t>1.6%</a:t>
                       </a:r>
                       <a:endParaRPr lang="en-US" sz="1000" dirty="0">
                         <a:latin typeface="Arial" charset="0"/>
@@ -5339,7 +5356,7 @@
                 <a:ea typeface="Arial" pitchFamily="34" charset="-122"/>
                 <a:cs typeface="Arial" pitchFamily="34" charset="-120"/>
               </a:rPr>
-              <a:t>8.73</a:t>
+              <a:t>8.71</a:t>
             </a:r>
             <a:endParaRPr lang="en-US" sz="3200" dirty="0"/>
           </a:p>
@@ -5464,7 +5481,7 @@
                 <a:ea typeface="Arial" pitchFamily="34" charset="-122"/>
                 <a:cs typeface="Arial" pitchFamily="34" charset="-120"/>
               </a:rPr>
-              <a:t>81.2%</a:t>
+              <a:t>81.4%</a:t>
             </a:r>
             <a:endParaRPr lang="en-US" sz="3200" dirty="0"/>
           </a:p>
@@ -5589,7 +5606,7 @@
                 <a:ea typeface="Arial" pitchFamily="34" charset="-122"/>
                 <a:cs typeface="Arial" pitchFamily="34" charset="-120"/>
               </a:rPr>
-              <a:t>0.8%</a:t>
+              <a:t>1.6%</a:t>
             </a:r>
             <a:endParaRPr lang="en-US" sz="3200" dirty="0"/>
           </a:p>
@@ -5714,7 +5731,7 @@
                 <a:ea typeface="Arial" pitchFamily="34" charset="-122"/>
                 <a:cs typeface="Arial" pitchFamily="34" charset="-120"/>
               </a:rPr>
-              <a:t>128件</a:t>
+              <a:t>129件</a:t>
             </a:r>
             <a:endParaRPr lang="en-US" sz="3200" dirty="0"/>
           </a:p>
@@ -5862,7 +5879,7 @@
                 <a:ea typeface="Arial" pitchFamily="34" charset="-122"/>
                 <a:cs typeface="Arial" pitchFamily="34" charset="-120"/>
               </a:rPr>
-              <a:t>  川崎駅に近く、コンビニやスーパーなども近隣にある為、非常に便利です</a:t>
+              <a:t>  立地は便利で、川崎駅のすぐそばにあるので見つけやすいです</a:t>
             </a:r>
             <a:endParaRPr lang="en-US" sz="1100" dirty="0"/>
           </a:p>
@@ -5902,7 +5919,7 @@
                 <a:ea typeface="Arial" pitchFamily="34" charset="-122"/>
                 <a:cs typeface="Arial" pitchFamily="34" charset="-120"/>
               </a:rPr>
-              <a:t>  エアコンは作動せず、フロントデスクは扇風機を使うように勧めてきましたが、気温は上がり続けました…</a:t>
+              <a:t>  房間很乾凈整潔，服務員態度熱情且都會英文，很適合出遊選住 部屋は清潔で整頓されており、スタッフは親切で英語も話せた...</a:t>
             </a:r>
             <a:endParaRPr lang="en-US" sz="1100" dirty="0"/>
           </a:p>
@@ -5942,7 +5959,7 @@
                 <a:ea typeface="Arial" pitchFamily="34" charset="-122"/>
                 <a:cs typeface="Arial" pitchFamily="34" charset="-120"/>
               </a:rPr>
-              <a:t>  館内も落ち着いた雰囲気で、快適でした</a:t>
+              <a:t>  アメニティも非常に便利です</a:t>
             </a:r>
             <a:endParaRPr lang="en-US" sz="1100" dirty="0"/>
           </a:p>
@@ -6090,7 +6107,7 @@
                 <a:ea typeface="Arial" pitchFamily="34" charset="-122"/>
                 <a:cs typeface="Arial" pitchFamily="34" charset="-120"/>
               </a:rPr>
-              <a:t>  エアコンは作動せず、フロントデスクは扇風機を使うように勧めてきましたが、気温は上がり続けました…</a:t>
+              <a:t>  エアコンは作動せず、フロントの係員は扇風機を使うように勧めてきましたが、気温は上がり続けました…</a:t>
             </a:r>
             <a:endParaRPr lang="en-US" sz="1100" dirty="0"/>
           </a:p>
@@ -6523,7 +6540,7 @@
                 <a:ea typeface="Arial" pitchFamily="34" charset="-122"/>
                 <a:cs typeface="Arial" pitchFamily="34" charset="-120"/>
               </a:rPr>
-              <a:t>8.73</a:t>
+              <a:t>8.71</a:t>
             </a:r>
             <a:endParaRPr lang="en-US" sz="3200" dirty="0"/>
           </a:p>
@@ -6648,7 +6665,7 @@
                 <a:ea typeface="Arial" pitchFamily="34" charset="-122"/>
                 <a:cs typeface="Arial" pitchFamily="34" charset="-120"/>
               </a:rPr>
-              <a:t>81.2%</a:t>
+              <a:t>81.4%</a:t>
             </a:r>
             <a:endParaRPr lang="en-US" sz="3200" dirty="0"/>
           </a:p>
@@ -6773,7 +6790,7 @@
                 <a:ea typeface="Arial" pitchFamily="34" charset="-122"/>
                 <a:cs typeface="Arial" pitchFamily="34" charset="-120"/>
               </a:rPr>
-              <a:t>0.8%</a:t>
+              <a:t>1.6%</a:t>
             </a:r>
             <a:endParaRPr lang="en-US" sz="3200" dirty="0"/>
           </a:p>
@@ -6898,7 +6915,7 @@
                 <a:ea typeface="Arial" pitchFamily="34" charset="-122"/>
                 <a:cs typeface="Arial" pitchFamily="34" charset="-120"/>
               </a:rPr>
-              <a:t>128件</a:t>
+              <a:t>129件</a:t>
             </a:r>
             <a:endParaRPr lang="en-US" sz="3200" dirty="0"/>
           </a:p>
@@ -7319,7 +7336,7 @@
                 <a:ea typeface="Arial" pitchFamily="34" charset="-122"/>
                 <a:cs typeface="Arial" pitchFamily="34" charset="-120"/>
               </a:rPr>
-              <a:t>Trip.com(9.74)が最高スコア。</a:t>
+              <a:t>Trip.com(9.76)が最高スコア。</a:t>
             </a:r>
             <a:endParaRPr lang="en-US" sz="1100" dirty="0"/>
           </a:p>
@@ -7877,7 +7894,7 @@
                           <a:ea typeface="Arial" pitchFamily="34" charset="-122"/>
                           <a:cs typeface="Arial" pitchFamily="34" charset="-120"/>
                         </a:rPr>
-                        <a:t>27</a:t>
+                        <a:t>29</a:t>
                       </a:r>
                       <a:endParaRPr lang="en-US" sz="900" dirty="0">
                         <a:latin typeface="Arial" charset="0"/>
@@ -7945,7 +7962,7 @@
                           <a:ea typeface="Arial" pitchFamily="34" charset="-122"/>
                           <a:cs typeface="Arial" pitchFamily="34" charset="-120"/>
                         </a:rPr>
-                        <a:t>9.74</a:t>
+                        <a:t>9.76</a:t>
                       </a:r>
                       <a:endParaRPr lang="en-US" sz="900" dirty="0">
                         <a:latin typeface="Arial" charset="0"/>
@@ -8081,7 +8098,7 @@
                           <a:ea typeface="Arial" pitchFamily="34" charset="-122"/>
                           <a:cs typeface="Arial" pitchFamily="34" charset="-120"/>
                         </a:rPr>
-                        <a:t>9.74</a:t>
+                        <a:t>9.76</a:t>
                       </a:r>
                       <a:endParaRPr lang="en-US" sz="900" dirty="0">
                         <a:latin typeface="Arial" charset="0"/>
@@ -8903,7 +8920,7 @@
                           <a:ea typeface="Arial" pitchFamily="34" charset="-122"/>
                           <a:cs typeface="Arial" pitchFamily="34" charset="-120"/>
                         </a:rPr>
-                        <a:t>70</a:t>
+                        <a:t>68</a:t>
                       </a:r>
                       <a:endParaRPr lang="en-US" sz="900" dirty="0">
                         <a:latin typeface="Arial" charset="0"/>
@@ -8971,7 +8988,7 @@
                           <a:ea typeface="Arial" pitchFamily="34" charset="-122"/>
                           <a:cs typeface="Arial" pitchFamily="34" charset="-120"/>
                         </a:rPr>
-                        <a:t>8.51</a:t>
+                        <a:t>8.53</a:t>
                       </a:r>
                       <a:endParaRPr lang="en-US" sz="900" dirty="0">
                         <a:latin typeface="Arial" charset="0"/>
@@ -9107,7 +9124,7 @@
                           <a:ea typeface="Arial" pitchFamily="34" charset="-122"/>
                           <a:cs typeface="Arial" pitchFamily="34" charset="-120"/>
                         </a:rPr>
-                        <a:t>8.51</a:t>
+                        <a:t>8.53</a:t>
                       </a:r>
                       <a:endParaRPr lang="en-US" sz="900" dirty="0">
                         <a:latin typeface="Arial" charset="0"/>
@@ -9245,7 +9262,7 @@
                           <a:ea typeface="Arial" pitchFamily="34" charset="-122"/>
                           <a:cs typeface="Arial" pitchFamily="34" charset="-120"/>
                         </a:rPr>
-                        <a:t>16</a:t>
+                        <a:t>17</a:t>
                       </a:r>
                       <a:endParaRPr lang="en-US" sz="900" dirty="0">
                         <a:latin typeface="Arial" charset="0"/>
@@ -9313,7 +9330,7 @@
                           <a:ea typeface="Arial" pitchFamily="34" charset="-122"/>
                           <a:cs typeface="Arial" pitchFamily="34" charset="-120"/>
                         </a:rPr>
-                        <a:t>3.94</a:t>
+                        <a:t>3.76</a:t>
                       </a:r>
                       <a:endParaRPr lang="en-US" sz="900" dirty="0">
                         <a:latin typeface="Arial" charset="0"/>
@@ -9449,7 +9466,7 @@
                           <a:ea typeface="Arial" pitchFamily="34" charset="-122"/>
                           <a:cs typeface="Arial" pitchFamily="34" charset="-120"/>
                         </a:rPr>
-                        <a:t>7.88</a:t>
+                        <a:t>7.53</a:t>
                       </a:r>
                       <a:endParaRPr lang="en-US" sz="900" dirty="0">
                         <a:latin typeface="Arial" charset="0"/>
@@ -10199,7 +10216,7 @@
                 <a:ea typeface="Arial" pitchFamily="34" charset="-122"/>
                 <a:cs typeface="Arial" pitchFamily="34" charset="-120"/>
               </a:rPr>
-              <a:t>104件（81.2%）</a:t>
+              <a:t>105件（81.4%）</a:t>
             </a:r>
             <a:endParaRPr lang="en-US" sz="1100" dirty="0"/>
           </a:p>
@@ -10297,7 +10314,7 @@
                 <a:ea typeface="Arial" pitchFamily="34" charset="-122"/>
                 <a:cs typeface="Arial" pitchFamily="34" charset="-120"/>
               </a:rPr>
-              <a:t>23件（18.0%）</a:t>
+              <a:t>22件（17.1%）</a:t>
             </a:r>
             <a:endParaRPr lang="en-US" sz="1100" dirty="0"/>
           </a:p>
@@ -10395,7 +10412,7 @@
                 <a:ea typeface="Arial" pitchFamily="34" charset="-122"/>
                 <a:cs typeface="Arial" pitchFamily="34" charset="-120"/>
               </a:rPr>
-              <a:t>1件（0.8%）</a:t>
+              <a:t>2件（1.6%）</a:t>
             </a:r>
             <a:endParaRPr lang="en-US" sz="1100" dirty="0"/>
           </a:p>
@@ -10729,7 +10746,7 @@
                 <a:ea typeface="Arial" pitchFamily="34" charset="-122"/>
                 <a:cs typeface="Arial" pitchFamily="34" charset="-120"/>
               </a:rPr>
-              <a:t>20件+</a:t>
+              <a:t>50件+</a:t>
             </a:r>
             <a:endParaRPr lang="en-US" sz="900" dirty="0"/>
           </a:p>
@@ -10807,7 +10824,7 @@
                 <a:ea typeface="Arial" pitchFamily="34" charset="-122"/>
                 <a:cs typeface="Arial" pitchFamily="34" charset="-120"/>
               </a:rPr>
-              <a:t>川崎駅に近く、コンビニやスーパーなども近隣にある為、非常に便利です</a:t>
+              <a:t>立地は便利で、川崎駅のすぐそばにあるので見つけやすいです</a:t>
             </a:r>
             <a:endParaRPr lang="en-US" sz="900" dirty="0"/>
           </a:p>
@@ -10846,7 +10863,7 @@
                 <a:ea typeface="Arial" pitchFamily="34" charset="-122"/>
                 <a:cs typeface="Arial" pitchFamily="34" charset="-120"/>
               </a:rPr>
-              <a:t>「駅前の立地で凄く便利 わからない わからない」</a:t>
+              <a:t>「立地は便利で、羽田空港からもそう遠くありません」</a:t>
             </a:r>
             <a:endParaRPr lang="en-US" sz="900" dirty="0"/>
           </a:p>
@@ -11030,7 +11047,7 @@
                 <a:ea typeface="Arial" pitchFamily="34" charset="-122"/>
                 <a:cs typeface="Arial" pitchFamily="34" charset="-120"/>
               </a:rPr>
-              <a:t>エアコンは作動せず、フロントデスクは扇風機を使うように勧めてきましたが、気温は上がり続けました…</a:t>
+              <a:t>房間很乾凈整潔，服務員態度熱情且都會英文，很適合出遊選住 部屋は清潔で整頓されており、スタッフは親切で英語も話せた...</a:t>
             </a:r>
             <a:endParaRPr lang="en-US" sz="900" dirty="0"/>
           </a:p>
@@ -11069,7 +11086,7 @@
                 <a:ea typeface="Arial" pitchFamily="34" charset="-122"/>
                 <a:cs typeface="Arial" pitchFamily="34" charset="-120"/>
               </a:rPr>
-              <a:t>「朝食が非常に美味しく、朝食会場の接客が丁寧で素晴らしかった」</a:t>
+              <a:t>「このホテルは非常にケチで、受けたサービスにとても不満です」</a:t>
             </a:r>
             <a:endParaRPr lang="en-US" sz="900" dirty="0"/>
           </a:p>
@@ -11253,7 +11270,7 @@
                 <a:ea typeface="Arial" pitchFamily="34" charset="-122"/>
                 <a:cs typeface="Arial" pitchFamily="34" charset="-120"/>
               </a:rPr>
-              <a:t>館内も落ち着いた雰囲気で、快適でした</a:t>
+              <a:t>アメニティも非常に便利です</a:t>
             </a:r>
             <a:endParaRPr lang="en-US" sz="900" dirty="0"/>
           </a:p>
@@ -11292,7 +11309,7 @@
                 <a:ea typeface="Arial" pitchFamily="34" charset="-122"/>
                 <a:cs typeface="Arial" pitchFamily="34" charset="-120"/>
               </a:rPr>
-              <a:t>「ホテルの設備とサービスは標準以下で、部屋もかなり狭かったのに、大阪や京都の広い部屋と比べて料金はかなり高かったです」</a:t>
+              <a:t>「館内も落ち着いた雰囲気で、快適でした」</a:t>
             </a:r>
             <a:endParaRPr lang="en-US" sz="900" dirty="0"/>
           </a:p>
@@ -11699,7 +11716,7 @@
                 <a:ea typeface="Arial" pitchFamily="34" charset="-122"/>
                 <a:cs typeface="Arial" pitchFamily="34" charset="-120"/>
               </a:rPr>
-              <a:t>乾淨方便，適合商旅出行 清潔で便利、ビジネス旅行者に最適</a:t>
+              <a:t>房間很乾凈整潔，服務員態度熱情且都會英文，很適合出遊選住 部屋は清潔で整頓されており、スタッフは親切で英語も話せた...</a:t>
             </a:r>
             <a:endParaRPr lang="en-US" sz="900" dirty="0"/>
           </a:p>
@@ -11738,7 +11755,7 @@
                 <a:ea typeface="Arial" pitchFamily="34" charset="-122"/>
                 <a:cs typeface="Arial" pitchFamily="34" charset="-120"/>
               </a:rPr>
-              <a:t>「駅近で便利でした 部屋も清潔で気持ち良かったです コーヒーやお水があり嬉しかったです 駅近で便利でした 部屋も清潔...」</a:t>
+              <a:t>「乾淨方便，適合商旅出行 清潔で便利、ビジネス旅行者に最適」</a:t>
             </a:r>
             <a:endParaRPr lang="en-US" sz="900" dirty="0"/>
           </a:p>
@@ -12651,7 +12668,7 @@
                           <a:ea typeface="Arial" pitchFamily="34" charset="-122"/>
                           <a:cs typeface="Arial" pitchFamily="34" charset="-120"/>
                         </a:rPr>
-                        <a:t>エアコンは作動せず、フロントデスクは扇風機を使うように勧めてきましたが、気温は上がり続けました…</a:t>
+                        <a:t>エアコンは作動せず、フロントの係員は扇風機を使うように勧めてきましたが、気温は上がり続けました…</a:t>
                       </a:r>
                       <a:endParaRPr lang="en-US" sz="900" dirty="0">
                         <a:latin typeface="Arial" charset="0"/>
@@ -12993,7 +13010,7 @@
                           <a:ea typeface="Arial" pitchFamily="34" charset="-122"/>
                           <a:cs typeface="Arial" pitchFamily="34" charset="-120"/>
                         </a:rPr>
-                        <a:t>10件</a:t>
+                        <a:t>9件</a:t>
                       </a:r>
                       <a:endParaRPr lang="en-US" sz="900" dirty="0">
                         <a:latin typeface="Arial" charset="0"/>
@@ -13679,7 +13696,7 @@
                           <a:ea typeface="Arial" pitchFamily="34" charset="-122"/>
                           <a:cs typeface="Arial" pitchFamily="34" charset="-120"/>
                         </a:rPr>
-                        <a:t>朝食の改善要望</a:t>
+                        <a:t>対応・サービスの不満</a:t>
                       </a:r>
                       <a:endParaRPr lang="en-US" sz="900" dirty="0">
                         <a:latin typeface="Arial" charset="0"/>
@@ -13747,7 +13764,7 @@
                           <a:ea typeface="Arial" pitchFamily="34" charset="-122"/>
                           <a:cs typeface="Arial" pitchFamily="34" charset="-120"/>
                         </a:rPr>
-                        <a:t>感覺酒店設施及服務不上檔次，房間也比較小，價格卻比大阪京都的更大面積的房間貴不少 部屋にはボトル入りの水が用意され...</a:t>
+                        <a:t>房間很乾凈整潔，服務員態度熱情且都會英文，很適合出遊選住 部屋は清潔で整頓されており、スタッフは親切で英語も話せた...</a:t>
                       </a:r>
                       <a:endParaRPr lang="en-US" sz="900" dirty="0">
                         <a:latin typeface="Arial" charset="0"/>
@@ -13815,7 +13832,7 @@
                           <a:ea typeface="Arial" pitchFamily="34" charset="-122"/>
                           <a:cs typeface="Arial" pitchFamily="34" charset="-120"/>
                         </a:rPr>
-                        <a:t>5件</a:t>
+                        <a:t>6件</a:t>
                       </a:r>
                       <a:endParaRPr lang="en-US" sz="900" dirty="0">
                         <a:latin typeface="Arial" charset="0"/>
@@ -13953,7 +13970,7 @@
                           <a:ea typeface="Arial" pitchFamily="34" charset="-122"/>
                           <a:cs typeface="Arial" pitchFamily="34" charset="-120"/>
                         </a:rPr>
-                        <a:t>対応・サービスの不満</a:t>
+                        <a:t>朝食の改善要望</a:t>
                       </a:r>
                       <a:endParaRPr lang="en-US" sz="900" dirty="0">
                         <a:latin typeface="Arial" charset="0"/>
@@ -14021,7 +14038,7 @@
                           <a:ea typeface="Arial" pitchFamily="34" charset="-122"/>
                           <a:cs typeface="Arial" pitchFamily="34" charset="-120"/>
                         </a:rPr>
-                        <a:t>夜食のルームサービスは、少し残念かなと</a:t>
+                        <a:t>感覺酒店設施及服務不上檔次，房間也比較小，價格卻比大阪京都的更大面積的房間貴不少 部屋にはボトル入りの水が用意され...</a:t>
                       </a:r>
                       <a:endParaRPr lang="en-US" sz="900" dirty="0">
                         <a:latin typeface="Arial" charset="0"/>

--- a/納品レポート/ホテル別レポート/kawasaki_nikko_口コミ分析レポート.pptx
+++ b/納品レポート/ホテル別レポート/kawasaki_nikko_口コミ分析レポート.pptx
@@ -208,19 +208,19 @@
                 <c:formatCode>General</c:formatCode>
                 <c:ptCount val="6"/>
                 <c:pt idx="0">
-                  <c:v>9.76</c:v>
+                  <c:v>9.67</c:v>
                 </c:pt>
                 <c:pt idx="1">
                   <c:v>9</c:v>
                 </c:pt>
                 <c:pt idx="2">
-                  <c:v>9</c:v>
+                  <c:v>8.8</c:v>
                 </c:pt>
                 <c:pt idx="3">
-                  <c:v>8.53</c:v>
+                  <c:v>8.61</c:v>
                 </c:pt>
                 <c:pt idx="4">
-                  <c:v>7.53</c:v>
+                  <c:v>7.22</c:v>
                 </c:pt>
                 <c:pt idx="5">
                   <c:v>7</c:v>
@@ -757,22 +757,11 @@
               <a:effectLst/>
             </c:spPr>
           </c:dPt>
-          <c:dPt>
-            <c:idx val="7"/>
-            <c:invertIfNegative val="0"/>
-            <c:bubble3D val="0"/>
-            <c:spPr>
-              <a:solidFill>
-                <a:srgbClr val="DC2626"/>
-              </a:solidFill>
-              <a:effectLst/>
-            </c:spPr>
-          </c:dPt>
           <c:cat>
             <c:multiLvlStrRef>
-              <c:f>Sheet1!$A$2:$A$9</c:f>
+              <c:f>Sheet1!$A$2:$A$8</c:f>
               <c:multiLvlStrCache>
-                <c:ptCount val="8"/>
+                <c:ptCount val="7"/>
                 <c:lvl>
                   <c:pt idx="0">
                     <c:v>10点</c:v>
@@ -793,9 +782,6 @@
                     <c:v>5点</c:v>
                   </c:pt>
                   <c:pt idx="6">
-                    <c:v>3点</c:v>
-                  </c:pt>
-                  <c:pt idx="7">
                     <c:v>2点</c:v>
                   </c:pt>
                 </c:lvl>
@@ -804,18 +790,18 @@
           </c:cat>
           <c:val>
             <c:numRef>
-              <c:f>Sheet1!$B$2:$B$9</c:f>
+              <c:f>Sheet1!$B$2:$B$8</c:f>
               <c:numCache>
                 <c:formatCode>General</c:formatCode>
-                <c:ptCount val="8"/>
+                <c:ptCount val="7"/>
                 <c:pt idx="0">
-                  <c:v>58</c:v>
+                  <c:v>56</c:v>
                 </c:pt>
                 <c:pt idx="1">
-                  <c:v>23</c:v>
+                  <c:v>24</c:v>
                 </c:pt>
                 <c:pt idx="2">
-                  <c:v>24</c:v>
+                  <c:v>25</c:v>
                 </c:pt>
                 <c:pt idx="3">
                   <c:v>10</c:v>
@@ -827,10 +813,7 @@
                   <c:v>2</c:v>
                 </c:pt>
                 <c:pt idx="6">
-                  <c:v>1</c:v>
-                </c:pt>
-                <c:pt idx="7">
-                  <c:v>1</c:v>
+                  <c:v>2</c:v>
                 </c:pt>
               </c:numCache>
             </c:numRef>
@@ -2801,7 +2784,7 @@
                 <a:ea typeface="Arial" pitchFamily="34" charset="-122"/>
                 <a:cs typeface="Arial" pitchFamily="34" charset="-120"/>
               </a:rPr>
-              <a:t>作成日：2026年3月23日</a:t>
+              <a:t>作成日：2026年3月24日</a:t>
             </a:r>
             <a:endParaRPr lang="en-US" sz="1000" dirty="0"/>
           </a:p>
@@ -3347,7 +3330,7 @@
                           <a:ea typeface="Arial" pitchFamily="34" charset="-122"/>
                           <a:cs typeface="Arial" pitchFamily="34" charset="-120"/>
                         </a:rPr>
-                        <a:t>8.71点</a:t>
+                        <a:t>8.68点</a:t>
                       </a:r>
                       <a:endParaRPr lang="en-US" sz="1000" dirty="0">
                         <a:latin typeface="Arial" charset="0"/>
@@ -5356,7 +5339,7 @@
                 <a:ea typeface="Arial" pitchFamily="34" charset="-122"/>
                 <a:cs typeface="Arial" pitchFamily="34" charset="-120"/>
               </a:rPr>
-              <a:t>8.71</a:t>
+              <a:t>8.68</a:t>
             </a:r>
             <a:endParaRPr lang="en-US" sz="3200" dirty="0"/>
           </a:p>
@@ -5879,7 +5862,7 @@
                 <a:ea typeface="Arial" pitchFamily="34" charset="-122"/>
                 <a:cs typeface="Arial" pitchFamily="34" charset="-120"/>
               </a:rPr>
-              <a:t>  立地は便利で、川崎駅のすぐそばにあるので見つけやすいです</a:t>
+              <a:t>  位置方便，乘JR或京急都可以，酒店早餐ok,如果能夠提供自助洗衣服務就更好 立地は便利で、JR線や京急線が利用できます</a:t>
             </a:r>
             <a:endParaRPr lang="en-US" sz="1100" dirty="0"/>
           </a:p>
@@ -5919,7 +5902,7 @@
                 <a:ea typeface="Arial" pitchFamily="34" charset="-122"/>
                 <a:cs typeface="Arial" pitchFamily="34" charset="-120"/>
               </a:rPr>
-              <a:t>  房間很乾凈整潔，服務員態度熱情且都會英文，很適合出遊選住 部屋は清潔で整頓されており、スタッフは親切で英語も話せた...</a:t>
+              <a:t>  ホテルの朝食はまあまあですが、セルフサービスのランドリー設備があればさらに良いでしょう</a:t>
             </a:r>
             <a:endParaRPr lang="en-US" sz="1100" dirty="0"/>
           </a:p>
@@ -5959,7 +5942,7 @@
                 <a:ea typeface="Arial" pitchFamily="34" charset="-122"/>
                 <a:cs typeface="Arial" pitchFamily="34" charset="-120"/>
               </a:rPr>
-              <a:t>  アメニティも非常に便利です</a:t>
+              <a:t>  ホテルの朝食はまあまあですが、セルフサービスのランドリー設備があればさらに良いでしょう</a:t>
             </a:r>
             <a:endParaRPr lang="en-US" sz="1100" dirty="0"/>
           </a:p>
@@ -6107,7 +6090,7 @@
                 <a:ea typeface="Arial" pitchFamily="34" charset="-122"/>
                 <a:cs typeface="Arial" pitchFamily="34" charset="-120"/>
               </a:rPr>
-              <a:t>  エアコンは作動せず、フロントの係員は扇風機を使うように勧めてきましたが、気温は上がり続けました…</a:t>
+              <a:t>  This hotel is very stingy , I am very unhappy with the se...</a:t>
             </a:r>
             <a:endParaRPr lang="en-US" sz="1100" dirty="0"/>
           </a:p>
@@ -6167,7 +6150,7 @@
                 <a:ea typeface="Arial" pitchFamily="34" charset="-122"/>
                 <a:cs typeface="Arial" pitchFamily="34" charset="-120"/>
               </a:rPr>
-              <a:t>窓・採光 </a:t>
+              <a:t>浴室・水回り </a:t>
             </a:r>
             <a:endParaRPr lang="en-US" sz="1100" dirty="0"/>
           </a:p>
@@ -6187,7 +6170,7 @@
                 <a:ea typeface="Arial" pitchFamily="34" charset="-122"/>
                 <a:cs typeface="Arial" pitchFamily="34" charset="-120"/>
               </a:rPr>
-              <a:t>  不快だったのは、換気のために部屋の窓を開けることができず、3月なのに部屋が蒸し暑かったことです</a:t>
+              <a:t>  「エア51」バスを利用すれば、第3ターミナルまで約40分です</a:t>
             </a:r>
             <a:endParaRPr lang="en-US" sz="1100" dirty="0"/>
           </a:p>
@@ -6540,7 +6523,7 @@
                 <a:ea typeface="Arial" pitchFamily="34" charset="-122"/>
                 <a:cs typeface="Arial" pitchFamily="34" charset="-120"/>
               </a:rPr>
-              <a:t>8.71</a:t>
+              <a:t>8.68</a:t>
             </a:r>
             <a:endParaRPr lang="en-US" sz="3200" dirty="0"/>
           </a:p>
@@ -7336,7 +7319,7 @@
                 <a:ea typeface="Arial" pitchFamily="34" charset="-122"/>
                 <a:cs typeface="Arial" pitchFamily="34" charset="-120"/>
               </a:rPr>
-              <a:t>Trip.com(9.76)が最高スコア。</a:t>
+              <a:t>Trip.com(9.67)が最高スコア。</a:t>
             </a:r>
             <a:endParaRPr lang="en-US" sz="1100" dirty="0"/>
           </a:p>
@@ -7894,7 +7877,7 @@
                           <a:ea typeface="Arial" pitchFamily="34" charset="-122"/>
                           <a:cs typeface="Arial" pitchFamily="34" charset="-120"/>
                         </a:rPr>
-                        <a:t>29</a:t>
+                        <a:t>30</a:t>
                       </a:r>
                       <a:endParaRPr lang="en-US" sz="900" dirty="0">
                         <a:latin typeface="Arial" charset="0"/>
@@ -7962,7 +7945,7 @@
                           <a:ea typeface="Arial" pitchFamily="34" charset="-122"/>
                           <a:cs typeface="Arial" pitchFamily="34" charset="-120"/>
                         </a:rPr>
-                        <a:t>9.76</a:t>
+                        <a:t>9.67</a:t>
                       </a:r>
                       <a:endParaRPr lang="en-US" sz="900" dirty="0">
                         <a:latin typeface="Arial" charset="0"/>
@@ -8098,7 +8081,7 @@
                           <a:ea typeface="Arial" pitchFamily="34" charset="-122"/>
                           <a:cs typeface="Arial" pitchFamily="34" charset="-120"/>
                         </a:rPr>
-                        <a:t>9.76</a:t>
+                        <a:t>9.67</a:t>
                       </a:r>
                       <a:endParaRPr lang="en-US" sz="900" dirty="0">
                         <a:latin typeface="Arial" charset="0"/>
@@ -8578,7 +8561,7 @@
                           <a:ea typeface="Arial" pitchFamily="34" charset="-122"/>
                           <a:cs typeface="Arial" pitchFamily="34" charset="-120"/>
                         </a:rPr>
-                        <a:t>6</a:t>
+                        <a:t>5</a:t>
                       </a:r>
                       <a:endParaRPr lang="en-US" sz="900" dirty="0">
                         <a:latin typeface="Arial" charset="0"/>
@@ -8646,7 +8629,7 @@
                           <a:ea typeface="Arial" pitchFamily="34" charset="-122"/>
                           <a:cs typeface="Arial" pitchFamily="34" charset="-120"/>
                         </a:rPr>
-                        <a:t>4.5</a:t>
+                        <a:t>4.4</a:t>
                       </a:r>
                       <a:endParaRPr lang="en-US" sz="900" dirty="0">
                         <a:latin typeface="Arial" charset="0"/>
@@ -8782,7 +8765,7 @@
                           <a:ea typeface="Arial" pitchFamily="34" charset="-122"/>
                           <a:cs typeface="Arial" pitchFamily="34" charset="-120"/>
                         </a:rPr>
-                        <a:t>9</a:t>
+                        <a:t>8.8</a:t>
                       </a:r>
                       <a:endParaRPr lang="en-US" sz="900" dirty="0">
                         <a:latin typeface="Arial" charset="0"/>
@@ -8920,7 +8903,7 @@
                           <a:ea typeface="Arial" pitchFamily="34" charset="-122"/>
                           <a:cs typeface="Arial" pitchFamily="34" charset="-120"/>
                         </a:rPr>
-                        <a:t>68</a:t>
+                        <a:t>67</a:t>
                       </a:r>
                       <a:endParaRPr lang="en-US" sz="900" dirty="0">
                         <a:latin typeface="Arial" charset="0"/>
@@ -8988,7 +8971,7 @@
                           <a:ea typeface="Arial" pitchFamily="34" charset="-122"/>
                           <a:cs typeface="Arial" pitchFamily="34" charset="-120"/>
                         </a:rPr>
-                        <a:t>8.53</a:t>
+                        <a:t>8.61</a:t>
                       </a:r>
                       <a:endParaRPr lang="en-US" sz="900" dirty="0">
                         <a:latin typeface="Arial" charset="0"/>
@@ -9124,7 +9107,7 @@
                           <a:ea typeface="Arial" pitchFamily="34" charset="-122"/>
                           <a:cs typeface="Arial" pitchFamily="34" charset="-120"/>
                         </a:rPr>
-                        <a:t>8.53</a:t>
+                        <a:t>8.61</a:t>
                       </a:r>
                       <a:endParaRPr lang="en-US" sz="900" dirty="0">
                         <a:latin typeface="Arial" charset="0"/>
@@ -9262,7 +9245,7 @@
                           <a:ea typeface="Arial" pitchFamily="34" charset="-122"/>
                           <a:cs typeface="Arial" pitchFamily="34" charset="-120"/>
                         </a:rPr>
-                        <a:t>17</a:t>
+                        <a:t>18</a:t>
                       </a:r>
                       <a:endParaRPr lang="en-US" sz="900" dirty="0">
                         <a:latin typeface="Arial" charset="0"/>
@@ -9330,7 +9313,7 @@
                           <a:ea typeface="Arial" pitchFamily="34" charset="-122"/>
                           <a:cs typeface="Arial" pitchFamily="34" charset="-120"/>
                         </a:rPr>
-                        <a:t>3.76</a:t>
+                        <a:t>3.61</a:t>
                       </a:r>
                       <a:endParaRPr lang="en-US" sz="900" dirty="0">
                         <a:latin typeface="Arial" charset="0"/>
@@ -9466,7 +9449,7 @@
                           <a:ea typeface="Arial" pitchFamily="34" charset="-122"/>
                           <a:cs typeface="Arial" pitchFamily="34" charset="-120"/>
                         </a:rPr>
-                        <a:t>7.53</a:t>
+                        <a:t>7.22</a:t>
                       </a:r>
                       <a:endParaRPr lang="en-US" sz="900" dirty="0">
                         <a:latin typeface="Arial" charset="0"/>
@@ -10824,7 +10807,7 @@
                 <a:ea typeface="Arial" pitchFamily="34" charset="-122"/>
                 <a:cs typeface="Arial" pitchFamily="34" charset="-120"/>
               </a:rPr>
-              <a:t>立地は便利で、川崎駅のすぐそばにあるので見つけやすいです</a:t>
+              <a:t>位置方便，乘JR或京急都可以，酒店早餐ok,如果能夠提供自助洗衣服務就更好 立地は便利で、JR線や京急線が利用できます</a:t>
             </a:r>
             <a:endParaRPr lang="en-US" sz="900" dirty="0"/>
           </a:p>
@@ -10863,7 +10846,7 @@
                 <a:ea typeface="Arial" pitchFamily="34" charset="-122"/>
                 <a:cs typeface="Arial" pitchFamily="34" charset="-120"/>
               </a:rPr>
-              <a:t>「立地は便利で、羽田空港からもそう遠くありません」</a:t>
+              <a:t>「JR駅のすぐそばに位置し、東京駅まで徒歩わずか20分、羽田空港までは電車で30分です」</a:t>
             </a:r>
             <a:endParaRPr lang="en-US" sz="900" dirty="0"/>
           </a:p>
@@ -11047,7 +11030,7 @@
                 <a:ea typeface="Arial" pitchFamily="34" charset="-122"/>
                 <a:cs typeface="Arial" pitchFamily="34" charset="-120"/>
               </a:rPr>
-              <a:t>房間很乾凈整潔，服務員態度熱情且都會英文，很適合出遊選住 部屋は清潔で整頓されており、スタッフは親切で英語も話せた...</a:t>
+              <a:t>ホテルの朝食はまあまあですが、セルフサービスのランドリー設備があればさらに良いでしょう</a:t>
             </a:r>
             <a:endParaRPr lang="en-US" sz="900" dirty="0"/>
           </a:p>
@@ -11086,7 +11069,7 @@
                 <a:ea typeface="Arial" pitchFamily="34" charset="-122"/>
                 <a:cs typeface="Arial" pitchFamily="34" charset="-120"/>
               </a:rPr>
-              <a:t>「このホテルは非常にケチで、受けたサービスにとても不満です」</a:t>
+              <a:t>「このホテルは一流のサービスを提供しており、スタッフは礼儀正しく、ほとんどのスタッフが英語を話します」</a:t>
             </a:r>
             <a:endParaRPr lang="en-US" sz="900" dirty="0"/>
           </a:p>
@@ -11270,7 +11253,7 @@
                 <a:ea typeface="Arial" pitchFamily="34" charset="-122"/>
                 <a:cs typeface="Arial" pitchFamily="34" charset="-120"/>
               </a:rPr>
-              <a:t>アメニティも非常に便利です</a:t>
+              <a:t>ホテルの朝食はまあまあですが、セルフサービスのランドリー設備があればさらに良いでしょう</a:t>
             </a:r>
             <a:endParaRPr lang="en-US" sz="900" dirty="0"/>
           </a:p>
@@ -11309,7 +11292,7 @@
                 <a:ea typeface="Arial" pitchFamily="34" charset="-122"/>
                 <a:cs typeface="Arial" pitchFamily="34" charset="-120"/>
               </a:rPr>
-              <a:t>「館内も落ち着いた雰囲気で、快適でした」</a:t>
+              <a:t>「客室は15～30平方メートルで、ほとんどの部屋から市街の景色を眺めることができ、広々とした快適な空間となっています」</a:t>
             </a:r>
             <a:endParaRPr lang="en-US" sz="900" dirty="0"/>
           </a:p>
@@ -11493,7 +11476,7 @@
                 <a:ea typeface="Arial" pitchFamily="34" charset="-122"/>
                 <a:cs typeface="Arial" pitchFamily="34" charset="-120"/>
               </a:rPr>
-              <a:t>朝ごはんが非常に美味しく、フレンチトーストやオムレツ、特製カレーなど多くの種類の中から選ぶことができます</a:t>
+              <a:t>ホテルの朝食はまあまあですが、セルフサービスのランドリー設備があればさらに良いでしょう</a:t>
             </a:r>
             <a:endParaRPr lang="en-US" sz="900" dirty="0"/>
           </a:p>
@@ -11532,7 +11515,7 @@
                 <a:ea typeface="Arial" pitchFamily="34" charset="-122"/>
                 <a:cs typeface="Arial" pitchFamily="34" charset="-120"/>
               </a:rPr>
-              <a:t>「感覺酒店設施及服務不上檔次，房間也比較小，價格卻比大阪京都的更大面積的房間貴不少 部屋にはボトル入りの水が用意され...」</a:t>
+              <a:t>「朝ごはんが非常に美味しく、フレンチトーストやオムレツ、特製カレーなど多くの種類の中から選ぶことができます」</a:t>
             </a:r>
             <a:endParaRPr lang="en-US" sz="900" dirty="0"/>
           </a:p>
@@ -11716,7 +11699,7 @@
                 <a:ea typeface="Arial" pitchFamily="34" charset="-122"/>
                 <a:cs typeface="Arial" pitchFamily="34" charset="-120"/>
               </a:rPr>
-              <a:t>房間很乾凈整潔，服務員態度熱情且都會英文，很適合出遊選住 部屋は清潔で整頓されており、スタッフは親切で英語も話せた...</a:t>
+              <a:t>周辺には、行き届いたサービスを提供する魅力的な地元の飲食店をはじめ、多くのレストランがあります</a:t>
             </a:r>
             <a:endParaRPr lang="en-US" sz="900" dirty="0"/>
           </a:p>
@@ -11755,7 +11738,7 @@
                 <a:ea typeface="Arial" pitchFamily="34" charset="-122"/>
                 <a:cs typeface="Arial" pitchFamily="34" charset="-120"/>
               </a:rPr>
-              <a:t>「乾淨方便，適合商旅出行 清潔で便利、ビジネス旅行者に最適」</a:t>
+              <a:t>「房間很乾凈整潔，服務員態度熱情且都會英文，很適合出遊選住 部屋は清潔で整頓されており、スタッフは親切で英語も話せた...」</a:t>
             </a:r>
             <a:endParaRPr lang="en-US" sz="900" dirty="0"/>
           </a:p>
@@ -11939,7 +11922,7 @@
                 <a:ea typeface="Arial" pitchFamily="34" charset="-122"/>
                 <a:cs typeface="Arial" pitchFamily="34" charset="-120"/>
               </a:rPr>
-              <a:t>川崎駅に近く、コンビニやスーパーなども近隣にある為、非常に便利です</a:t>
+              <a:t>周辺には、行き届いたサービスを提供する魅力的な地元の飲食店をはじめ、多くのレストランがあります</a:t>
             </a:r>
             <a:endParaRPr lang="en-US" sz="900" dirty="0"/>
           </a:p>
@@ -11978,7 +11961,7 @@
                 <a:ea typeface="Arial" pitchFamily="34" charset="-122"/>
                 <a:cs typeface="Arial" pitchFamily="34" charset="-120"/>
               </a:rPr>
-              <a:t>「交通方便，購物方便 交通の便が良く、買い物にも便利」</a:t>
+              <a:t>「川崎駅に近く、コンビニやスーパーなども近隣にある為、非常に便利です」</a:t>
             </a:r>
             <a:endParaRPr lang="en-US" sz="900" dirty="0"/>
           </a:p>
@@ -12668,7 +12651,7 @@
                           <a:ea typeface="Arial" pitchFamily="34" charset="-122"/>
                           <a:cs typeface="Arial" pitchFamily="34" charset="-120"/>
                         </a:rPr>
-                        <a:t>エアコンは作動せず、フロントの係員は扇風機を使うように勧めてきましたが、気温は上がり続けました…</a:t>
+                        <a:t>This hotel is very stingy , I am very unhappy with the se...</a:t>
                       </a:r>
                       <a:endParaRPr lang="en-US" sz="900" dirty="0">
                         <a:latin typeface="Arial" charset="0"/>
@@ -13148,7 +13131,7 @@
                           <a:ea typeface="Arial" pitchFamily="34" charset="-122"/>
                           <a:cs typeface="Arial" pitchFamily="34" charset="-120"/>
                         </a:rPr>
-                        <a:t>窓・採光</a:t>
+                        <a:t>浴室・水回り</a:t>
                       </a:r>
                       <a:endParaRPr lang="en-US" sz="900" dirty="0">
                         <a:latin typeface="Arial" charset="0"/>
@@ -13216,7 +13199,7 @@
                           <a:ea typeface="Arial" pitchFamily="34" charset="-122"/>
                           <a:cs typeface="Arial" pitchFamily="34" charset="-120"/>
                         </a:rPr>
-                        <a:t>不快だったのは、換気のために部屋の窓を開けることができず、3月なのに部屋が蒸し暑かったことです</a:t>
+                        <a:t>「エア51」バスを利用すれば、第3ターミナルまで約40分です</a:t>
                       </a:r>
                       <a:endParaRPr lang="en-US" sz="900" dirty="0">
                         <a:latin typeface="Arial" charset="0"/>
@@ -13284,7 +13267,7 @@
                           <a:ea typeface="Arial" pitchFamily="34" charset="-122"/>
                           <a:cs typeface="Arial" pitchFamily="34" charset="-120"/>
                         </a:rPr>
-                        <a:t>9件</a:t>
+                        <a:t>8件</a:t>
                       </a:r>
                       <a:endParaRPr lang="en-US" sz="900" dirty="0">
                         <a:latin typeface="Arial" charset="0"/>
@@ -13422,7 +13405,7 @@
                           <a:ea typeface="Arial" pitchFamily="34" charset="-122"/>
                           <a:cs typeface="Arial" pitchFamily="34" charset="-120"/>
                         </a:rPr>
-                        <a:t>浴室・水回り</a:t>
+                        <a:t>窓・採光</a:t>
                       </a:r>
                       <a:endParaRPr lang="en-US" sz="900" dirty="0">
                         <a:latin typeface="Arial" charset="0"/>
@@ -13490,7 +13473,7 @@
                           <a:ea typeface="Arial" pitchFamily="34" charset="-122"/>
                           <a:cs typeface="Arial" pitchFamily="34" charset="-120"/>
                         </a:rPr>
-                        <a:t>それと洋式トイレから僅かに尿臭がしてきたのもマイナスポイントでした</a:t>
+                        <a:t>不快だったのは、換気のために部屋の窓を開けることができず、3月なのに部屋が蒸し暑かったことです</a:t>
                       </a:r>
                       <a:endParaRPr lang="en-US" sz="900" dirty="0">
                         <a:latin typeface="Arial" charset="0"/>
@@ -13558,7 +13541,7 @@
                           <a:ea typeface="Arial" pitchFamily="34" charset="-122"/>
                           <a:cs typeface="Arial" pitchFamily="34" charset="-120"/>
                         </a:rPr>
-                        <a:t>7件</a:t>
+                        <a:t>8件</a:t>
                       </a:r>
                       <a:endParaRPr lang="en-US" sz="900" dirty="0">
                         <a:latin typeface="Arial" charset="0"/>

--- a/納品レポート/ホテル別レポート/kawasaki_nikko_口コミ分析レポート.pptx
+++ b/納品レポート/ホテル別レポート/kawasaki_nikko_口コミ分析レポート.pptx
@@ -208,7 +208,7 @@
                 <c:formatCode>General</c:formatCode>
                 <c:ptCount val="6"/>
                 <c:pt idx="0">
-                  <c:v>9.67</c:v>
+                  <c:v>9.65</c:v>
                 </c:pt>
                 <c:pt idx="1">
                   <c:v>9</c:v>
@@ -217,7 +217,7 @@
                   <c:v>8.8</c:v>
                 </c:pt>
                 <c:pt idx="3">
-                  <c:v>8.61</c:v>
+                  <c:v>8.67</c:v>
                 </c:pt>
                 <c:pt idx="4">
                   <c:v>7.22</c:v>
@@ -566,10 +566,10 @@
               <c:numCache>
                 <c:ptCount val="3"/>
                 <c:pt idx="0">
-                  <c:v>105</c:v>
+                  <c:v>107</c:v>
                 </c:pt>
                 <c:pt idx="1">
-                  <c:v>22</c:v>
+                  <c:v>21</c:v>
                 </c:pt>
                 <c:pt idx="2">
                   <c:v>2</c:v>
@@ -795,13 +795,13 @@
                 <c:formatCode>General</c:formatCode>
                 <c:ptCount val="7"/>
                 <c:pt idx="0">
-                  <c:v>56</c:v>
+                  <c:v>57</c:v>
                 </c:pt>
                 <c:pt idx="1">
                   <c:v>24</c:v>
                 </c:pt>
                 <c:pt idx="2">
-                  <c:v>25</c:v>
+                  <c:v>26</c:v>
                 </c:pt>
                 <c:pt idx="3">
                   <c:v>10</c:v>
@@ -810,7 +810,7 @@
                   <c:v>10</c:v>
                 </c:pt>
                 <c:pt idx="5">
-                  <c:v>2</c:v>
+                  <c:v>1</c:v>
                 </c:pt>
                 <c:pt idx="6">
                   <c:v>2</c:v>
@@ -2764,7 +2764,7 @@
                 <a:ea typeface="Arial" pitchFamily="34" charset="-122"/>
                 <a:cs typeface="Arial" pitchFamily="34" charset="-120"/>
               </a:rPr>
-              <a:t>レビュー総数：129件（6サイト）</a:t>
+              <a:t>レビュー総数：130件（6サイト）</a:t>
             </a:r>
             <a:endParaRPr lang="en-US" sz="1000" dirty="0"/>
           </a:p>
@@ -2784,7 +2784,7 @@
                 <a:ea typeface="Arial" pitchFamily="34" charset="-122"/>
                 <a:cs typeface="Arial" pitchFamily="34" charset="-120"/>
               </a:rPr>
-              <a:t>作成日：2026年3月24日</a:t>
+              <a:t>作成日：2026年3月25日</a:t>
             </a:r>
             <a:endParaRPr lang="en-US" sz="1000" dirty="0"/>
           </a:p>
@@ -3330,7 +3330,7 @@
                           <a:ea typeface="Arial" pitchFamily="34" charset="-122"/>
                           <a:cs typeface="Arial" pitchFamily="34" charset="-120"/>
                         </a:rPr>
-                        <a:t>8.68点</a:t>
+                        <a:t>8.72点</a:t>
                       </a:r>
                       <a:endParaRPr lang="en-US" sz="1000" dirty="0">
                         <a:latin typeface="Arial" charset="0"/>
@@ -3604,7 +3604,7 @@
                           <a:ea typeface="Arial" pitchFamily="34" charset="-122"/>
                           <a:cs typeface="Arial" pitchFamily="34" charset="-120"/>
                         </a:rPr>
-                        <a:t>81.4%</a:t>
+                        <a:t>82.3%</a:t>
                       </a:r>
                       <a:endParaRPr lang="en-US" sz="1000" dirty="0">
                         <a:latin typeface="Arial" charset="0"/>
@@ -3672,7 +3672,7 @@
                           <a:ea typeface="Arial" pitchFamily="34" charset="-122"/>
                           <a:cs typeface="Arial" pitchFamily="34" charset="-120"/>
                         </a:rPr>
-                        <a:t>86%以上</a:t>
+                        <a:t>87%以上</a:t>
                       </a:r>
                       <a:endParaRPr lang="en-US" sz="1000" dirty="0">
                         <a:latin typeface="Arial" charset="0"/>
@@ -3878,7 +3878,7 @@
                           <a:ea typeface="Arial" pitchFamily="34" charset="-122"/>
                           <a:cs typeface="Arial" pitchFamily="34" charset="-120"/>
                         </a:rPr>
-                        <a:t>1.6%</a:t>
+                        <a:t>1.5%</a:t>
                       </a:r>
                       <a:endParaRPr lang="en-US" sz="1000" dirty="0">
                         <a:latin typeface="Arial" charset="0"/>
@@ -4700,7 +4700,7 @@
                           <a:ea typeface="Arial" pitchFamily="34" charset="-122"/>
                           <a:cs typeface="Arial" pitchFamily="34" charset="-120"/>
                         </a:rPr>
-                        <a:t>約14件/期間</a:t>
+                        <a:t>約13件/期間</a:t>
                       </a:r>
                       <a:endParaRPr lang="en-US" sz="1000" dirty="0">
                         <a:latin typeface="Arial" charset="0"/>
@@ -4768,7 +4768,7 @@
                           <a:ea typeface="Arial" pitchFamily="34" charset="-122"/>
                           <a:cs typeface="Arial" pitchFamily="34" charset="-120"/>
                         </a:rPr>
-                        <a:t>7件以下</a:t>
+                        <a:t>6件以下</a:t>
                       </a:r>
                       <a:endParaRPr lang="en-US" sz="1000" dirty="0">
                         <a:latin typeface="Arial" charset="0"/>
@@ -5339,7 +5339,7 @@
                 <a:ea typeface="Arial" pitchFamily="34" charset="-122"/>
                 <a:cs typeface="Arial" pitchFamily="34" charset="-120"/>
               </a:rPr>
-              <a:t>8.68</a:t>
+              <a:t>8.72</a:t>
             </a:r>
             <a:endParaRPr lang="en-US" sz="3200" dirty="0"/>
           </a:p>
@@ -5464,7 +5464,7 @@
                 <a:ea typeface="Arial" pitchFamily="34" charset="-122"/>
                 <a:cs typeface="Arial" pitchFamily="34" charset="-120"/>
               </a:rPr>
-              <a:t>81.4%</a:t>
+              <a:t>82.3%</a:t>
             </a:r>
             <a:endParaRPr lang="en-US" sz="3200" dirty="0"/>
           </a:p>
@@ -5589,7 +5589,7 @@
                 <a:ea typeface="Arial" pitchFamily="34" charset="-122"/>
                 <a:cs typeface="Arial" pitchFamily="34" charset="-120"/>
               </a:rPr>
-              <a:t>1.6%</a:t>
+              <a:t>1.5%</a:t>
             </a:r>
             <a:endParaRPr lang="en-US" sz="3200" dirty="0"/>
           </a:p>
@@ -5714,7 +5714,7 @@
                 <a:ea typeface="Arial" pitchFamily="34" charset="-122"/>
                 <a:cs typeface="Arial" pitchFamily="34" charset="-120"/>
               </a:rPr>
-              <a:t>129件</a:t>
+              <a:t>130件</a:t>
             </a:r>
             <a:endParaRPr lang="en-US" sz="3200" dirty="0"/>
           </a:p>
@@ -5862,7 +5862,7 @@
                 <a:ea typeface="Arial" pitchFamily="34" charset="-122"/>
                 <a:cs typeface="Arial" pitchFamily="34" charset="-120"/>
               </a:rPr>
-              <a:t>  位置方便，乘JR或京急都可以，酒店早餐ok,如果能夠提供自助洗衣服務就更好 立地は便利で、JR線や京急線が利用できます</a:t>
+              <a:t>  Supermarket open till 10pm is added advantage 立地と利便性</a:t>
             </a:r>
             <a:endParaRPr lang="en-US" sz="1100" dirty="0"/>
           </a:p>
@@ -5902,7 +5902,7 @@
                 <a:ea typeface="Arial" pitchFamily="34" charset="-122"/>
                 <a:cs typeface="Arial" pitchFamily="34" charset="-120"/>
               </a:rPr>
-              <a:t>  ホテルの朝食はまあまあですが、セルフサービスのランドリー設備があればさらに良いでしょう</a:t>
+              <a:t>  しかし、スタッフはとても親切で、チェックする人を手配してくれました</a:t>
             </a:r>
             <a:endParaRPr lang="en-US" sz="1100" dirty="0"/>
           </a:p>
@@ -5942,7 +5942,7 @@
                 <a:ea typeface="Arial" pitchFamily="34" charset="-122"/>
                 <a:cs typeface="Arial" pitchFamily="34" charset="-120"/>
               </a:rPr>
-              <a:t>  ホテルの朝食はまあまあですが、セルフサービスのランドリー設備があればさらに良いでしょう</a:t>
+              <a:t>  2泊目からは快適でしたが、部屋は2人にはちょっと狭かったです</a:t>
             </a:r>
             <a:endParaRPr lang="en-US" sz="1100" dirty="0"/>
           </a:p>
@@ -6130,7 +6130,7 @@
                 <a:ea typeface="Arial" pitchFamily="34" charset="-122"/>
                 <a:cs typeface="Arial" pitchFamily="34" charset="-120"/>
               </a:rPr>
-              <a:t>  室内の狭さ以外でネガティブな面として気づいたのは、高架を走る京急線の音が聞こえたり、隣室のイビキが聞こえるといった...</a:t>
+              <a:t>  高層階からは電車の眺めが素晴らしく、とても良かったのですが、騒音に敏感な方には少し不快かもしれません</a:t>
             </a:r>
             <a:endParaRPr lang="en-US" sz="1100" dirty="0"/>
           </a:p>
@@ -6170,7 +6170,7 @@
                 <a:ea typeface="Arial" pitchFamily="34" charset="-122"/>
                 <a:cs typeface="Arial" pitchFamily="34" charset="-120"/>
               </a:rPr>
-              <a:t>  「エア51」バスを利用すれば、第3ターミナルまで約40分です</a:t>
+              <a:t>  バスルームの設備も少し古く、排水もあまり良くありませんでした</a:t>
             </a:r>
             <a:endParaRPr lang="en-US" sz="1100" dirty="0"/>
           </a:p>
@@ -6523,7 +6523,7 @@
                 <a:ea typeface="Arial" pitchFamily="34" charset="-122"/>
                 <a:cs typeface="Arial" pitchFamily="34" charset="-120"/>
               </a:rPr>
-              <a:t>8.68</a:t>
+              <a:t>8.72</a:t>
             </a:r>
             <a:endParaRPr lang="en-US" sz="3200" dirty="0"/>
           </a:p>
@@ -6648,7 +6648,7 @@
                 <a:ea typeface="Arial" pitchFamily="34" charset="-122"/>
                 <a:cs typeface="Arial" pitchFamily="34" charset="-120"/>
               </a:rPr>
-              <a:t>81.4%</a:t>
+              <a:t>82.3%</a:t>
             </a:r>
             <a:endParaRPr lang="en-US" sz="3200" dirty="0"/>
           </a:p>
@@ -6773,7 +6773,7 @@
                 <a:ea typeface="Arial" pitchFamily="34" charset="-122"/>
                 <a:cs typeface="Arial" pitchFamily="34" charset="-120"/>
               </a:rPr>
-              <a:t>1.6%</a:t>
+              <a:t>1.5%</a:t>
             </a:r>
             <a:endParaRPr lang="en-US" sz="3200" dirty="0"/>
           </a:p>
@@ -6898,7 +6898,7 @@
                 <a:ea typeface="Arial" pitchFamily="34" charset="-122"/>
                 <a:cs typeface="Arial" pitchFamily="34" charset="-120"/>
               </a:rPr>
-              <a:t>129件</a:t>
+              <a:t>130件</a:t>
             </a:r>
             <a:endParaRPr lang="en-US" sz="3200" dirty="0"/>
           </a:p>
@@ -7319,7 +7319,7 @@
                 <a:ea typeface="Arial" pitchFamily="34" charset="-122"/>
                 <a:cs typeface="Arial" pitchFamily="34" charset="-120"/>
               </a:rPr>
-              <a:t>Trip.com(9.67)が最高スコア。</a:t>
+              <a:t>Trip.com(9.65)が最高スコア。</a:t>
             </a:r>
             <a:endParaRPr lang="en-US" sz="1100" dirty="0"/>
           </a:p>
@@ -7877,7 +7877,7 @@
                           <a:ea typeface="Arial" pitchFamily="34" charset="-122"/>
                           <a:cs typeface="Arial" pitchFamily="34" charset="-120"/>
                         </a:rPr>
-                        <a:t>30</a:t>
+                        <a:t>31</a:t>
                       </a:r>
                       <a:endParaRPr lang="en-US" sz="900" dirty="0">
                         <a:latin typeface="Arial" charset="0"/>
@@ -7945,7 +7945,7 @@
                           <a:ea typeface="Arial" pitchFamily="34" charset="-122"/>
                           <a:cs typeface="Arial" pitchFamily="34" charset="-120"/>
                         </a:rPr>
-                        <a:t>9.67</a:t>
+                        <a:t>9.65</a:t>
                       </a:r>
                       <a:endParaRPr lang="en-US" sz="900" dirty="0">
                         <a:latin typeface="Arial" charset="0"/>
@@ -8081,7 +8081,7 @@
                           <a:ea typeface="Arial" pitchFamily="34" charset="-122"/>
                           <a:cs typeface="Arial" pitchFamily="34" charset="-120"/>
                         </a:rPr>
-                        <a:t>9.67</a:t>
+                        <a:t>9.65</a:t>
                       </a:r>
                       <a:endParaRPr lang="en-US" sz="900" dirty="0">
                         <a:latin typeface="Arial" charset="0"/>
@@ -8971,7 +8971,7 @@
                           <a:ea typeface="Arial" pitchFamily="34" charset="-122"/>
                           <a:cs typeface="Arial" pitchFamily="34" charset="-120"/>
                         </a:rPr>
-                        <a:t>8.61</a:t>
+                        <a:t>8.67</a:t>
                       </a:r>
                       <a:endParaRPr lang="en-US" sz="900" dirty="0">
                         <a:latin typeface="Arial" charset="0"/>
@@ -9107,7 +9107,7 @@
                           <a:ea typeface="Arial" pitchFamily="34" charset="-122"/>
                           <a:cs typeface="Arial" pitchFamily="34" charset="-120"/>
                         </a:rPr>
-                        <a:t>8.61</a:t>
+                        <a:t>8.67</a:t>
                       </a:r>
                       <a:endParaRPr lang="en-US" sz="900" dirty="0">
                         <a:latin typeface="Arial" charset="0"/>
@@ -10199,7 +10199,7 @@
                 <a:ea typeface="Arial" pitchFamily="34" charset="-122"/>
                 <a:cs typeface="Arial" pitchFamily="34" charset="-120"/>
               </a:rPr>
-              <a:t>105件（81.4%）</a:t>
+              <a:t>107件（82.3%）</a:t>
             </a:r>
             <a:endParaRPr lang="en-US" sz="1100" dirty="0"/>
           </a:p>
@@ -10297,7 +10297,7 @@
                 <a:ea typeface="Arial" pitchFamily="34" charset="-122"/>
                 <a:cs typeface="Arial" pitchFamily="34" charset="-120"/>
               </a:rPr>
-              <a:t>22件（17.1%）</a:t>
+              <a:t>21件（16.2%）</a:t>
             </a:r>
             <a:endParaRPr lang="en-US" sz="1100" dirty="0"/>
           </a:p>
@@ -10395,7 +10395,7 @@
                 <a:ea typeface="Arial" pitchFamily="34" charset="-122"/>
                 <a:cs typeface="Arial" pitchFamily="34" charset="-120"/>
               </a:rPr>
-              <a:t>2件（1.6%）</a:t>
+              <a:t>2件（1.5%）</a:t>
             </a:r>
             <a:endParaRPr lang="en-US" sz="1100" dirty="0"/>
           </a:p>
@@ -10807,7 +10807,7 @@
                 <a:ea typeface="Arial" pitchFamily="34" charset="-122"/>
                 <a:cs typeface="Arial" pitchFamily="34" charset="-120"/>
               </a:rPr>
-              <a:t>位置方便，乘JR或京急都可以，酒店早餐ok,如果能夠提供自助洗衣服務就更好 立地は便利で、JR線や京急線が利用できます</a:t>
+              <a:t>Supermarket open till 10pm is added advantage 立地と利便性</a:t>
             </a:r>
             <a:endParaRPr lang="en-US" sz="900" dirty="0"/>
           </a:p>
@@ -10846,7 +10846,7 @@
                 <a:ea typeface="Arial" pitchFamily="34" charset="-122"/>
                 <a:cs typeface="Arial" pitchFamily="34" charset="-120"/>
               </a:rPr>
-              <a:t>「JR駅のすぐそばに位置し、東京駅まで徒歩わずか20分、羽田空港までは電車で30分です」</a:t>
+              <a:t>「フライトの遅延でホテルに少し遅れて到着しましたが、駅に近く便利な立地で、羽田空港から京急線で簡単にアクセスできました」</a:t>
             </a:r>
             <a:endParaRPr lang="en-US" sz="900" dirty="0"/>
           </a:p>
@@ -11030,7 +11030,7 @@
                 <a:ea typeface="Arial" pitchFamily="34" charset="-122"/>
                 <a:cs typeface="Arial" pitchFamily="34" charset="-120"/>
               </a:rPr>
-              <a:t>ホテルの朝食はまあまあですが、セルフサービスのランドリー設備があればさらに良いでしょう</a:t>
+              <a:t>しかし、スタッフはとても親切で、チェックする人を手配してくれました</a:t>
             </a:r>
             <a:endParaRPr lang="en-US" sz="900" dirty="0"/>
           </a:p>
@@ -11069,7 +11069,7 @@
                 <a:ea typeface="Arial" pitchFamily="34" charset="-122"/>
                 <a:cs typeface="Arial" pitchFamily="34" charset="-120"/>
               </a:rPr>
-              <a:t>「このホテルは一流のサービスを提供しており、スタッフは礼儀正しく、ほとんどのスタッフが英語を話します」</a:t>
+              <a:t>「ホテルの朝食はまあまあですが、セルフサービスのランドリー設備があればさらに良いでしょう」</a:t>
             </a:r>
             <a:endParaRPr lang="en-US" sz="900" dirty="0"/>
           </a:p>
@@ -11253,7 +11253,7 @@
                 <a:ea typeface="Arial" pitchFamily="34" charset="-122"/>
                 <a:cs typeface="Arial" pitchFamily="34" charset="-120"/>
               </a:rPr>
-              <a:t>ホテルの朝食はまあまあですが、セルフサービスのランドリー設備があればさらに良いでしょう</a:t>
+              <a:t>2泊目からは快適でしたが、部屋は2人にはちょっと狭かったです</a:t>
             </a:r>
             <a:endParaRPr lang="en-US" sz="900" dirty="0"/>
           </a:p>
@@ -11292,7 +11292,7 @@
                 <a:ea typeface="Arial" pitchFamily="34" charset="-122"/>
                 <a:cs typeface="Arial" pitchFamily="34" charset="-120"/>
               </a:rPr>
-              <a:t>「客室は15～30平方メートルで、ほとんどの部屋から市街の景色を眺めることができ、広々とした快適な空間となっています」</a:t>
+              <a:t>「ホテルの朝食はまあまあですが、セルフサービスのランドリー設備があればさらに良いでしょう」</a:t>
             </a:r>
             <a:endParaRPr lang="en-US" sz="900" dirty="0"/>
           </a:p>
@@ -11476,7 +11476,7 @@
                 <a:ea typeface="Arial" pitchFamily="34" charset="-122"/>
                 <a:cs typeface="Arial" pitchFamily="34" charset="-120"/>
               </a:rPr>
-              <a:t>ホテルの朝食はまあまあですが、セルフサービスのランドリー設備があればさらに良いでしょう</a:t>
+              <a:t>朝食を1日追加で購入したのですが、フロントでその旨を伝えたら割引クーポンをもらえました</a:t>
             </a:r>
             <a:endParaRPr lang="en-US" sz="900" dirty="0"/>
           </a:p>
@@ -11515,7 +11515,7 @@
                 <a:ea typeface="Arial" pitchFamily="34" charset="-122"/>
                 <a:cs typeface="Arial" pitchFamily="34" charset="-120"/>
               </a:rPr>
-              <a:t>「朝ごはんが非常に美味しく、フレンチトーストやオムレツ、特製カレーなど多くの種類の中から選ぶことができます」</a:t>
+              <a:t>「ホテルの朝食はまあまあですが、セルフサービスのランドリー設備があればさらに良いでしょう」</a:t>
             </a:r>
             <a:endParaRPr lang="en-US" sz="900" dirty="0"/>
           </a:p>
@@ -11922,7 +11922,7 @@
                 <a:ea typeface="Arial" pitchFamily="34" charset="-122"/>
                 <a:cs typeface="Arial" pitchFamily="34" charset="-120"/>
               </a:rPr>
-              <a:t>周辺には、行き届いたサービスを提供する魅力的な地元の飲食店をはじめ、多くのレストランがあります</a:t>
+              <a:t>Location and convenience</a:t>
             </a:r>
             <a:endParaRPr lang="en-US" sz="900" dirty="0"/>
           </a:p>
@@ -11961,7 +11961,7 @@
                 <a:ea typeface="Arial" pitchFamily="34" charset="-122"/>
                 <a:cs typeface="Arial" pitchFamily="34" charset="-120"/>
               </a:rPr>
-              <a:t>「川崎駅に近く、コンビニやスーパーなども近隣にある為、非常に便利です」</a:t>
+              <a:t>「周辺には、行き届いたサービスを提供する魅力的な地元の飲食店をはじめ、多くのレストランがあります」</a:t>
             </a:r>
             <a:endParaRPr lang="en-US" sz="900" dirty="0"/>
           </a:p>
@@ -12719,7 +12719,7 @@
                           <a:ea typeface="Arial" pitchFamily="34" charset="-122"/>
                           <a:cs typeface="Arial" pitchFamily="34" charset="-120"/>
                         </a:rPr>
-                        <a:t>14件</a:t>
+                        <a:t>13件</a:t>
                       </a:r>
                       <a:endParaRPr lang="en-US" sz="900" dirty="0">
                         <a:latin typeface="Arial" charset="0"/>
@@ -12925,7 +12925,7 @@
                           <a:ea typeface="Arial" pitchFamily="34" charset="-122"/>
                           <a:cs typeface="Arial" pitchFamily="34" charset="-120"/>
                         </a:rPr>
-                        <a:t>室内の狭さ以外でネガティブな面として気づいたのは、高架を走る京急線の音が聞こえたり、隣室のイビキが聞こえるといった...</a:t>
+                        <a:t>高層階からは電車の眺めが素晴らしく、とても良かったのですが、騒音に敏感な方には少し不快かもしれません</a:t>
                       </a:r>
                       <a:endParaRPr lang="en-US" sz="900" dirty="0">
                         <a:latin typeface="Arial" charset="0"/>
@@ -12993,7 +12993,7 @@
                           <a:ea typeface="Arial" pitchFamily="34" charset="-122"/>
                           <a:cs typeface="Arial" pitchFamily="34" charset="-120"/>
                         </a:rPr>
-                        <a:t>9件</a:t>
+                        <a:t>10件</a:t>
                       </a:r>
                       <a:endParaRPr lang="en-US" sz="900" dirty="0">
                         <a:latin typeface="Arial" charset="0"/>
@@ -13199,7 +13199,7 @@
                           <a:ea typeface="Arial" pitchFamily="34" charset="-122"/>
                           <a:cs typeface="Arial" pitchFamily="34" charset="-120"/>
                         </a:rPr>
-                        <a:t>「エア51」バスを利用すれば、第3ターミナルまで約40分です</a:t>
+                        <a:t>バスルームの設備も少し古く、排水もあまり良くありませんでした</a:t>
                       </a:r>
                       <a:endParaRPr lang="en-US" sz="900" dirty="0">
                         <a:latin typeface="Arial" charset="0"/>
@@ -13267,7 +13267,7 @@
                           <a:ea typeface="Arial" pitchFamily="34" charset="-122"/>
                           <a:cs typeface="Arial" pitchFamily="34" charset="-120"/>
                         </a:rPr>
-                        <a:t>8件</a:t>
+                        <a:t>9件</a:t>
                       </a:r>
                       <a:endParaRPr lang="en-US" sz="900" dirty="0">
                         <a:latin typeface="Arial" charset="0"/>

--- a/納品レポート/ホテル別レポート/kawasaki_nikko_口コミ分析レポート.pptx
+++ b/納品レポート/ホテル別レポート/kawasaki_nikko_口コミ分析レポート.pptx
@@ -214,7 +214,7 @@
                   <c:v>9</c:v>
                 </c:pt>
                 <c:pt idx="2">
-                  <c:v>8.8</c:v>
+                  <c:v>9</c:v>
                 </c:pt>
                 <c:pt idx="3">
                   <c:v>8.67</c:v>
@@ -795,10 +795,10 @@
                 <c:formatCode>General</c:formatCode>
                 <c:ptCount val="7"/>
                 <c:pt idx="0">
-                  <c:v>57</c:v>
+                  <c:v>58</c:v>
                 </c:pt>
                 <c:pt idx="1">
-                  <c:v>24</c:v>
+                  <c:v>23</c:v>
                 </c:pt>
                 <c:pt idx="2">
                   <c:v>26</c:v>
@@ -2784,7 +2784,7 @@
                 <a:ea typeface="Arial" pitchFamily="34" charset="-122"/>
                 <a:cs typeface="Arial" pitchFamily="34" charset="-120"/>
               </a:rPr>
-              <a:t>作成日：2026年3月25日</a:t>
+              <a:t>作成日：2026年3月26日</a:t>
             </a:r>
             <a:endParaRPr lang="en-US" sz="1000" dirty="0"/>
           </a:p>
@@ -8561,7 +8561,7 @@
                           <a:ea typeface="Arial" pitchFamily="34" charset="-122"/>
                           <a:cs typeface="Arial" pitchFamily="34" charset="-120"/>
                         </a:rPr>
-                        <a:t>5</a:t>
+                        <a:t>6</a:t>
                       </a:r>
                       <a:endParaRPr lang="en-US" sz="900" dirty="0">
                         <a:latin typeface="Arial" charset="0"/>
@@ -8629,7 +8629,7 @@
                           <a:ea typeface="Arial" pitchFamily="34" charset="-122"/>
                           <a:cs typeface="Arial" pitchFamily="34" charset="-120"/>
                         </a:rPr>
-                        <a:t>4.4</a:t>
+                        <a:t>4.5</a:t>
                       </a:r>
                       <a:endParaRPr lang="en-US" sz="900" dirty="0">
                         <a:latin typeface="Arial" charset="0"/>
@@ -8765,7 +8765,7 @@
                           <a:ea typeface="Arial" pitchFamily="34" charset="-122"/>
                           <a:cs typeface="Arial" pitchFamily="34" charset="-120"/>
                         </a:rPr>
-                        <a:t>8.8</a:t>
+                        <a:t>9</a:t>
                       </a:r>
                       <a:endParaRPr lang="en-US" sz="900" dirty="0">
                         <a:latin typeface="Arial" charset="0"/>
@@ -8903,7 +8903,7 @@
                           <a:ea typeface="Arial" pitchFamily="34" charset="-122"/>
                           <a:cs typeface="Arial" pitchFamily="34" charset="-120"/>
                         </a:rPr>
-                        <a:t>67</a:t>
+                        <a:t>66</a:t>
                       </a:r>
                       <a:endParaRPr lang="en-US" sz="900" dirty="0">
                         <a:latin typeface="Arial" charset="0"/>
@@ -10846,7 +10846,7 @@
                 <a:ea typeface="Arial" pitchFamily="34" charset="-122"/>
                 <a:cs typeface="Arial" pitchFamily="34" charset="-120"/>
               </a:rPr>
-              <a:t>「フライトの遅延でホテルに少し遅れて到着しましたが、駅に近く便利な立地で、羽田空港から京急線で簡単にアクセスできました」</a:t>
+              <a:t>「山口県からきましたが、 駅から激近は、分かりやすくありがたいです」</a:t>
             </a:r>
             <a:endParaRPr lang="en-US" sz="900" dirty="0"/>
           </a:p>
@@ -11699,7 +11699,7 @@
                 <a:ea typeface="Arial" pitchFamily="34" charset="-122"/>
                 <a:cs typeface="Arial" pitchFamily="34" charset="-120"/>
               </a:rPr>
-              <a:t>周辺には、行き届いたサービスを提供する魅力的な地元の飲食店をはじめ、多くのレストランがあります</a:t>
+              <a:t>素泊まりの滞在でしたが、 部屋もとても清潔で、気持ちよく過ごせました</a:t>
             </a:r>
             <a:endParaRPr lang="en-US" sz="900" dirty="0"/>
           </a:p>
@@ -11738,7 +11738,7 @@
                 <a:ea typeface="Arial" pitchFamily="34" charset="-122"/>
                 <a:cs typeface="Arial" pitchFamily="34" charset="-120"/>
               </a:rPr>
-              <a:t>「房間很乾凈整潔，服務員態度熱情且都會英文，很適合出遊選住 部屋は清潔で整頓されており、スタッフは親切で英語も話せた...」</a:t>
+              <a:t>「周辺には、行き届いたサービスを提供する魅力的な地元の飲食店をはじめ、多くのレストランがあります」</a:t>
             </a:r>
             <a:endParaRPr lang="en-US" sz="900" dirty="0"/>
           </a:p>
@@ -13473,7 +13473,7 @@
                           <a:ea typeface="Arial" pitchFamily="34" charset="-122"/>
                           <a:cs typeface="Arial" pitchFamily="34" charset="-120"/>
                         </a:rPr>
-                        <a:t>不快だったのは、換気のために部屋の窓を開けることができず、3月なのに部屋が蒸し暑かったことです</a:t>
+                        <a:t>19階は窓からは夜景がとても綺麗でした</a:t>
                       </a:r>
                       <a:endParaRPr lang="en-US" sz="900" dirty="0">
                         <a:latin typeface="Arial" charset="0"/>
@@ -13541,7 +13541,7 @@
                           <a:ea typeface="Arial" pitchFamily="34" charset="-122"/>
                           <a:cs typeface="Arial" pitchFamily="34" charset="-120"/>
                         </a:rPr>
-                        <a:t>8件</a:t>
+                        <a:t>9件</a:t>
                       </a:r>
                       <a:endParaRPr lang="en-US" sz="900" dirty="0">
                         <a:latin typeface="Arial" charset="0"/>
@@ -14637,7 +14637,7 @@
                           <a:ea typeface="Arial" pitchFamily="34" charset="-122"/>
                           <a:cs typeface="Arial" pitchFamily="34" charset="-120"/>
                         </a:rPr>
-                        <a:t>3件</a:t>
+                        <a:t>2件</a:t>
                       </a:r>
                       <a:endParaRPr lang="en-US" sz="900" dirty="0">
                         <a:latin typeface="Arial" charset="0"/>

--- a/納品レポート/ホテル別レポート/kawasaki_nikko_口コミ分析レポート.pptx
+++ b/納品レポート/ホテル別レポート/kawasaki_nikko_口コミ分析レポート.pptx
@@ -2784,7 +2784,7 @@
                 <a:ea typeface="Arial" pitchFamily="34" charset="-122"/>
                 <a:cs typeface="Arial" pitchFamily="34" charset="-120"/>
               </a:rPr>
-              <a:t>作成日：2026年3月26日</a:t>
+              <a:t>作成日：2026年3月27日</a:t>
             </a:r>
             <a:endParaRPr lang="en-US" sz="1000" dirty="0"/>
           </a:p>

--- a/納品レポート/ホテル別レポート/kawasaki_nikko_口コミ分析レポート.pptx
+++ b/納品レポート/ホテル別レポート/kawasaki_nikko_口コミ分析レポート.pptx
@@ -208,7 +208,7 @@
                 <c:formatCode>General</c:formatCode>
                 <c:ptCount val="6"/>
                 <c:pt idx="0">
-                  <c:v>9.65</c:v>
+                  <c:v>9.63</c:v>
                 </c:pt>
                 <c:pt idx="1">
                   <c:v>9</c:v>
@@ -217,10 +217,10 @@
                   <c:v>9</c:v>
                 </c:pt>
                 <c:pt idx="3">
-                  <c:v>8.67</c:v>
+                  <c:v>8.65</c:v>
                 </c:pt>
                 <c:pt idx="4">
-                  <c:v>7.22</c:v>
+                  <c:v>7.16</c:v>
                 </c:pt>
                 <c:pt idx="5">
                   <c:v>7</c:v>
@@ -566,10 +566,10 @@
               <c:numCache>
                 <c:ptCount val="3"/>
                 <c:pt idx="0">
-                  <c:v>107</c:v>
+                  <c:v>106</c:v>
                 </c:pt>
                 <c:pt idx="1">
-                  <c:v>21</c:v>
+                  <c:v>22</c:v>
                 </c:pt>
                 <c:pt idx="2">
                   <c:v>2</c:v>
@@ -795,10 +795,10 @@
                 <c:formatCode>General</c:formatCode>
                 <c:ptCount val="7"/>
                 <c:pt idx="0">
-                  <c:v>58</c:v>
+                  <c:v>56</c:v>
                 </c:pt>
                 <c:pt idx="1">
-                  <c:v>23</c:v>
+                  <c:v>24</c:v>
                 </c:pt>
                 <c:pt idx="2">
                   <c:v>26</c:v>
@@ -807,7 +807,7 @@
                   <c:v>10</c:v>
                 </c:pt>
                 <c:pt idx="4">
-                  <c:v>10</c:v>
+                  <c:v>11</c:v>
                 </c:pt>
                 <c:pt idx="5">
                   <c:v>1</c:v>
@@ -2784,7 +2784,7 @@
                 <a:ea typeface="Arial" pitchFamily="34" charset="-122"/>
                 <a:cs typeface="Arial" pitchFamily="34" charset="-120"/>
               </a:rPr>
-              <a:t>作成日：2026年3月27日</a:t>
+              <a:t>作成日：2026年3月28日</a:t>
             </a:r>
             <a:endParaRPr lang="en-US" sz="1000" dirty="0"/>
           </a:p>
@@ -3330,7 +3330,7 @@
                           <a:ea typeface="Arial" pitchFamily="34" charset="-122"/>
                           <a:cs typeface="Arial" pitchFamily="34" charset="-120"/>
                         </a:rPr>
-                        <a:t>8.72点</a:t>
+                        <a:t>8.68点</a:t>
                       </a:r>
                       <a:endParaRPr lang="en-US" sz="1000" dirty="0">
                         <a:latin typeface="Arial" charset="0"/>
@@ -3604,7 +3604,7 @@
                           <a:ea typeface="Arial" pitchFamily="34" charset="-122"/>
                           <a:cs typeface="Arial" pitchFamily="34" charset="-120"/>
                         </a:rPr>
-                        <a:t>82.3%</a:t>
+                        <a:t>81.5%</a:t>
                       </a:r>
                       <a:endParaRPr lang="en-US" sz="1000" dirty="0">
                         <a:latin typeface="Arial" charset="0"/>
@@ -5339,7 +5339,7 @@
                 <a:ea typeface="Arial" pitchFamily="34" charset="-122"/>
                 <a:cs typeface="Arial" pitchFamily="34" charset="-120"/>
               </a:rPr>
-              <a:t>8.72</a:t>
+              <a:t>8.68</a:t>
             </a:r>
             <a:endParaRPr lang="en-US" sz="3200" dirty="0"/>
           </a:p>
@@ -5464,7 +5464,7 @@
                 <a:ea typeface="Arial" pitchFamily="34" charset="-122"/>
                 <a:cs typeface="Arial" pitchFamily="34" charset="-120"/>
               </a:rPr>
-              <a:t>82.3%</a:t>
+              <a:t>81.5%</a:t>
             </a:r>
             <a:endParaRPr lang="en-US" sz="3200" dirty="0"/>
           </a:p>
@@ -5862,7 +5862,7 @@
                 <a:ea typeface="Arial" pitchFamily="34" charset="-122"/>
                 <a:cs typeface="Arial" pitchFamily="34" charset="-120"/>
               </a:rPr>
-              <a:t>  Supermarket open till 10pm is added advantage 立地と利便性</a:t>
+              <a:t>  駅前でアクセスは良いのだが、地下駐車場から向かうと、階段の上り下りをせざるを得ないところが多く、車で来る人には面倒かも</a:t>
             </a:r>
             <a:endParaRPr lang="en-US" sz="1100" dirty="0"/>
           </a:p>
@@ -5942,7 +5942,7 @@
                 <a:ea typeface="Arial" pitchFamily="34" charset="-122"/>
                 <a:cs typeface="Arial" pitchFamily="34" charset="-120"/>
               </a:rPr>
-              <a:t>  2泊目からは快適でしたが、部屋は2人にはちょっと狭かったです</a:t>
+              <a:t>  ・駅近で周囲に飲食店も多数ある利便性 ・羽田空港も京急でアクセス便利 ・個人情報の管理が危うい点 ・全体的に設備が...</a:t>
             </a:r>
             <a:endParaRPr lang="en-US" sz="1100" dirty="0"/>
           </a:p>
@@ -6523,7 +6523,7 @@
                 <a:ea typeface="Arial" pitchFamily="34" charset="-122"/>
                 <a:cs typeface="Arial" pitchFamily="34" charset="-120"/>
               </a:rPr>
-              <a:t>8.72</a:t>
+              <a:t>8.68</a:t>
             </a:r>
             <a:endParaRPr lang="en-US" sz="3200" dirty="0"/>
           </a:p>
@@ -6648,7 +6648,7 @@
                 <a:ea typeface="Arial" pitchFamily="34" charset="-122"/>
                 <a:cs typeface="Arial" pitchFamily="34" charset="-120"/>
               </a:rPr>
-              <a:t>82.3%</a:t>
+              <a:t>81.5%</a:t>
             </a:r>
             <a:endParaRPr lang="en-US" sz="3200" dirty="0"/>
           </a:p>
@@ -7319,7 +7319,7 @@
                 <a:ea typeface="Arial" pitchFamily="34" charset="-122"/>
                 <a:cs typeface="Arial" pitchFamily="34" charset="-120"/>
               </a:rPr>
-              <a:t>Trip.com(9.65)が最高スコア。</a:t>
+              <a:t>Trip.com(9.63)が最高スコア。</a:t>
             </a:r>
             <a:endParaRPr lang="en-US" sz="1100" dirty="0"/>
           </a:p>
@@ -7877,7 +7877,7 @@
                           <a:ea typeface="Arial" pitchFamily="34" charset="-122"/>
                           <a:cs typeface="Arial" pitchFamily="34" charset="-120"/>
                         </a:rPr>
-                        <a:t>31</a:t>
+                        <a:t>30</a:t>
                       </a:r>
                       <a:endParaRPr lang="en-US" sz="900" dirty="0">
                         <a:latin typeface="Arial" charset="0"/>
@@ -7945,7 +7945,7 @@
                           <a:ea typeface="Arial" pitchFamily="34" charset="-122"/>
                           <a:cs typeface="Arial" pitchFamily="34" charset="-120"/>
                         </a:rPr>
-                        <a:t>9.65</a:t>
+                        <a:t>9.63</a:t>
                       </a:r>
                       <a:endParaRPr lang="en-US" sz="900" dirty="0">
                         <a:latin typeface="Arial" charset="0"/>
@@ -8081,7 +8081,7 @@
                           <a:ea typeface="Arial" pitchFamily="34" charset="-122"/>
                           <a:cs typeface="Arial" pitchFamily="34" charset="-120"/>
                         </a:rPr>
-                        <a:t>9.65</a:t>
+                        <a:t>9.63</a:t>
                       </a:r>
                       <a:endParaRPr lang="en-US" sz="900" dirty="0">
                         <a:latin typeface="Arial" charset="0"/>
@@ -8971,7 +8971,7 @@
                           <a:ea typeface="Arial" pitchFamily="34" charset="-122"/>
                           <a:cs typeface="Arial" pitchFamily="34" charset="-120"/>
                         </a:rPr>
-                        <a:t>8.67</a:t>
+                        <a:t>8.65</a:t>
                       </a:r>
                       <a:endParaRPr lang="en-US" sz="900" dirty="0">
                         <a:latin typeface="Arial" charset="0"/>
@@ -9107,7 +9107,7 @@
                           <a:ea typeface="Arial" pitchFamily="34" charset="-122"/>
                           <a:cs typeface="Arial" pitchFamily="34" charset="-120"/>
                         </a:rPr>
-                        <a:t>8.67</a:t>
+                        <a:t>8.65</a:t>
                       </a:r>
                       <a:endParaRPr lang="en-US" sz="900" dirty="0">
                         <a:latin typeface="Arial" charset="0"/>
@@ -9245,7 +9245,7 @@
                           <a:ea typeface="Arial" pitchFamily="34" charset="-122"/>
                           <a:cs typeface="Arial" pitchFamily="34" charset="-120"/>
                         </a:rPr>
-                        <a:t>18</a:t>
+                        <a:t>19</a:t>
                       </a:r>
                       <a:endParaRPr lang="en-US" sz="900" dirty="0">
                         <a:latin typeface="Arial" charset="0"/>
@@ -9313,7 +9313,7 @@
                           <a:ea typeface="Arial" pitchFamily="34" charset="-122"/>
                           <a:cs typeface="Arial" pitchFamily="34" charset="-120"/>
                         </a:rPr>
-                        <a:t>3.61</a:t>
+                        <a:t>3.58</a:t>
                       </a:r>
                       <a:endParaRPr lang="en-US" sz="900" dirty="0">
                         <a:latin typeface="Arial" charset="0"/>
@@ -9449,7 +9449,7 @@
                           <a:ea typeface="Arial" pitchFamily="34" charset="-122"/>
                           <a:cs typeface="Arial" pitchFamily="34" charset="-120"/>
                         </a:rPr>
-                        <a:t>7.22</a:t>
+                        <a:t>7.16</a:t>
                       </a:r>
                       <a:endParaRPr lang="en-US" sz="900" dirty="0">
                         <a:latin typeface="Arial" charset="0"/>
@@ -10199,7 +10199,7 @@
                 <a:ea typeface="Arial" pitchFamily="34" charset="-122"/>
                 <a:cs typeface="Arial" pitchFamily="34" charset="-120"/>
               </a:rPr>
-              <a:t>107件（82.3%）</a:t>
+              <a:t>106件（81.5%）</a:t>
             </a:r>
             <a:endParaRPr lang="en-US" sz="1100" dirty="0"/>
           </a:p>
@@ -10297,7 +10297,7 @@
                 <a:ea typeface="Arial" pitchFamily="34" charset="-122"/>
                 <a:cs typeface="Arial" pitchFamily="34" charset="-120"/>
               </a:rPr>
-              <a:t>21件（16.2%）</a:t>
+              <a:t>22件（16.9%）</a:t>
             </a:r>
             <a:endParaRPr lang="en-US" sz="1100" dirty="0"/>
           </a:p>
@@ -10807,7 +10807,7 @@
                 <a:ea typeface="Arial" pitchFamily="34" charset="-122"/>
                 <a:cs typeface="Arial" pitchFamily="34" charset="-120"/>
               </a:rPr>
-              <a:t>Supermarket open till 10pm is added advantage 立地と利便性</a:t>
+              <a:t>駅前でアクセスは良いのだが、地下駐車場から向かうと、階段の上り下りをせざるを得ないところが多く、車で来る人には面倒かも</a:t>
             </a:r>
             <a:endParaRPr lang="en-US" sz="900" dirty="0"/>
           </a:p>
@@ -10846,7 +10846,7 @@
                 <a:ea typeface="Arial" pitchFamily="34" charset="-122"/>
                 <a:cs typeface="Arial" pitchFamily="34" charset="-120"/>
               </a:rPr>
-              <a:t>「山口県からきましたが、 駅から激近は、分かりやすくありがたいです」</a:t>
+              <a:t>「・駅近で周囲に飲食店も多数ある利便性 ・羽田空港も京急でアクセス便利 ・個人情報の管理が危うい点 ・全体的に設備が...」</a:t>
             </a:r>
             <a:endParaRPr lang="en-US" sz="900" dirty="0"/>
           </a:p>
@@ -11253,7 +11253,7 @@
                 <a:ea typeface="Arial" pitchFamily="34" charset="-122"/>
                 <a:cs typeface="Arial" pitchFamily="34" charset="-120"/>
               </a:rPr>
-              <a:t>2泊目からは快適でしたが、部屋は2人にはちょっと狭かったです</a:t>
+              <a:t>・駅近で周囲に飲食店も多数ある利便性 ・羽田空港も京急でアクセス便利 ・個人情報の管理が危うい点 ・全体的に設備が...</a:t>
             </a:r>
             <a:endParaRPr lang="en-US" sz="900" dirty="0"/>
           </a:p>
@@ -11268,6 +11268,452 @@
         <p:spPr>
           <a:xfrm>
             <a:off x="6263640" y="1828800"/>
+            <a:ext cx="2377440" cy="640080"/>
+          </a:xfrm>
+          <a:prstGeom prst="rect">
+            <a:avLst/>
+          </a:prstGeom>
+          <a:noFill/>
+          <a:ln/>
+        </p:spPr>
+        <p:txBody>
+          <a:bodyPr wrap="square" lIns="0" tIns="0" rIns="0" bIns="0" rtlCol="0" anchor="ctr"/>
+          <a:lstStyle/>
+          <a:p>
+            <a:pPr indent="0" marL="0">
+              <a:buNone/>
+            </a:pPr>
+            <a:r>
+              <a:rPr lang="en-US" sz="900" i="1" dirty="0">
+                <a:solidFill>
+                  <a:srgbClr val="3B7DD8"/>
+                </a:solidFill>
+                <a:latin typeface="Arial" pitchFamily="34" charset="0"/>
+                <a:ea typeface="Arial" pitchFamily="34" charset="-122"/>
+                <a:cs typeface="Arial" pitchFamily="34" charset="-120"/>
+              </a:rPr>
+              <a:t>「2泊目からは快適でしたが、部屋は2人にはちょっと狭かったです」</a:t>
+            </a:r>
+            <a:endParaRPr lang="en-US" sz="900" dirty="0"/>
+          </a:p>
+        </p:txBody>
+      </p:sp>
+      <p:sp>
+        <p:nvSpPr>
+          <p:cNvPr id="26" name="Shape 24"/>
+          <p:cNvSpPr/>
+          <p:nvPr/>
+        </p:nvSpPr>
+        <p:spPr>
+          <a:xfrm>
+            <a:off x="457200" y="2880360"/>
+            <a:ext cx="2651760" cy="1600200"/>
+          </a:xfrm>
+          <a:prstGeom prst="rect">
+            <a:avLst/>
+          </a:prstGeom>
+          <a:solidFill>
+            <a:srgbClr val="FFFFFF"/>
+          </a:solidFill>
+          <a:ln/>
+          <a:effectLst>
+            <a:outerShdw sx="100000" sy="100000" kx="0" ky="0" algn="bl" rotWithShape="0" blurRad="50800" dist="25400" dir="8100000">
+              <a:srgbClr val="000000">
+                <a:alpha val="10000"/>
+              </a:srgbClr>
+            </a:outerShdw>
+          </a:effectLst>
+        </p:spPr>
+      </p:sp>
+      <p:sp>
+        <p:nvSpPr>
+          <p:cNvPr id="27" name="Shape 25"/>
+          <p:cNvSpPr/>
+          <p:nvPr/>
+        </p:nvSpPr>
+        <p:spPr>
+          <a:xfrm>
+            <a:off x="457200" y="2880360"/>
+            <a:ext cx="54864" cy="1600200"/>
+          </a:xfrm>
+          <a:prstGeom prst="rect">
+            <a:avLst/>
+          </a:prstGeom>
+          <a:solidFill>
+            <a:srgbClr val="16A34A"/>
+          </a:solidFill>
+          <a:ln/>
+        </p:spPr>
+      </p:sp>
+      <p:sp>
+        <p:nvSpPr>
+          <p:cNvPr id="28" name="Shape 26"/>
+          <p:cNvSpPr/>
+          <p:nvPr/>
+        </p:nvSpPr>
+        <p:spPr>
+          <a:xfrm>
+            <a:off x="2286000" y="2953512"/>
+            <a:ext cx="658368" cy="228600"/>
+          </a:xfrm>
+          <a:prstGeom prst="rect">
+            <a:avLst/>
+          </a:prstGeom>
+          <a:solidFill>
+            <a:srgbClr val="DCFCE7"/>
+          </a:solidFill>
+          <a:ln/>
+        </p:spPr>
+      </p:sp>
+      <p:sp>
+        <p:nvSpPr>
+          <p:cNvPr id="29" name="Text 27"/>
+          <p:cNvSpPr/>
+          <p:nvPr/>
+        </p:nvSpPr>
+        <p:spPr>
+          <a:xfrm>
+            <a:off x="2286000" y="2953512"/>
+            <a:ext cx="658368" cy="228600"/>
+          </a:xfrm>
+          <a:prstGeom prst="rect">
+            <a:avLst/>
+          </a:prstGeom>
+          <a:noFill/>
+          <a:ln/>
+        </p:spPr>
+        <p:txBody>
+          <a:bodyPr wrap="square" lIns="0" tIns="0" rIns="0" bIns="0" rtlCol="0" anchor="ctr"/>
+          <a:lstStyle/>
+          <a:p>
+            <a:pPr algn="ctr" indent="0" marL="0">
+              <a:buNone/>
+            </a:pPr>
+            <a:r>
+              <a:rPr lang="en-US" sz="900" b="1" dirty="0">
+                <a:solidFill>
+                  <a:srgbClr val="16A34A"/>
+                </a:solidFill>
+                <a:latin typeface="Arial" pitchFamily="34" charset="0"/>
+                <a:ea typeface="Arial" pitchFamily="34" charset="-122"/>
+                <a:cs typeface="Arial" pitchFamily="34" charset="-120"/>
+              </a:rPr>
+              <a:t>20件+</a:t>
+            </a:r>
+            <a:endParaRPr lang="en-US" sz="900" dirty="0"/>
+          </a:p>
+        </p:txBody>
+      </p:sp>
+      <p:sp>
+        <p:nvSpPr>
+          <p:cNvPr id="30" name="Text 28"/>
+          <p:cNvSpPr/>
+          <p:nvPr/>
+        </p:nvSpPr>
+        <p:spPr>
+          <a:xfrm>
+            <a:off x="594360" y="2953512"/>
+            <a:ext cx="1645920" cy="274320"/>
+          </a:xfrm>
+          <a:prstGeom prst="rect">
+            <a:avLst/>
+          </a:prstGeom>
+          <a:noFill/>
+          <a:ln/>
+        </p:spPr>
+        <p:txBody>
+          <a:bodyPr wrap="square" lIns="0" tIns="0" rIns="0" bIns="0" rtlCol="0" anchor="ctr"/>
+          <a:lstStyle/>
+          <a:p>
+            <a:pPr indent="0" marL="0">
+              <a:buNone/>
+            </a:pPr>
+            <a:r>
+              <a:rPr lang="en-US" sz="1300" b="1" dirty="0">
+                <a:solidFill>
+                  <a:srgbClr val="1A2744"/>
+                </a:solidFill>
+                <a:latin typeface="Arial" pitchFamily="34" charset="0"/>
+                <a:ea typeface="Arial" pitchFamily="34" charset="-122"/>
+                <a:cs typeface="Arial" pitchFamily="34" charset="-120"/>
+              </a:rPr>
+              <a:t>清潔さ・清掃</a:t>
+            </a:r>
+            <a:endParaRPr lang="en-US" sz="1300" dirty="0"/>
+          </a:p>
+        </p:txBody>
+      </p:sp>
+      <p:sp>
+        <p:nvSpPr>
+          <p:cNvPr id="31" name="Text 29"/>
+          <p:cNvSpPr/>
+          <p:nvPr/>
+        </p:nvSpPr>
+        <p:spPr>
+          <a:xfrm>
+            <a:off x="594360" y="3246120"/>
+            <a:ext cx="2377440" cy="365760"/>
+          </a:xfrm>
+          <a:prstGeom prst="rect">
+            <a:avLst/>
+          </a:prstGeom>
+          <a:noFill/>
+          <a:ln/>
+        </p:spPr>
+        <p:txBody>
+          <a:bodyPr wrap="square" lIns="0" tIns="0" rIns="0" bIns="0" rtlCol="0" anchor="ctr"/>
+          <a:lstStyle/>
+          <a:p>
+            <a:pPr indent="0" marL="0">
+              <a:buNone/>
+            </a:pPr>
+            <a:r>
+              <a:rPr lang="en-US" sz="900" dirty="0">
+                <a:solidFill>
+                  <a:srgbClr val="64748B"/>
+                </a:solidFill>
+                <a:latin typeface="Arial" pitchFamily="34" charset="0"/>
+                <a:ea typeface="Arial" pitchFamily="34" charset="-122"/>
+                <a:cs typeface="Arial" pitchFamily="34" charset="-120"/>
+              </a:rPr>
+              <a:t>新しくはないが十分綺麗です</a:t>
+            </a:r>
+            <a:endParaRPr lang="en-US" sz="900" dirty="0"/>
+          </a:p>
+        </p:txBody>
+      </p:sp>
+      <p:sp>
+        <p:nvSpPr>
+          <p:cNvPr id="32" name="Text 30"/>
+          <p:cNvSpPr/>
+          <p:nvPr/>
+        </p:nvSpPr>
+        <p:spPr>
+          <a:xfrm>
+            <a:off x="594360" y="3657600"/>
+            <a:ext cx="2377440" cy="640080"/>
+          </a:xfrm>
+          <a:prstGeom prst="rect">
+            <a:avLst/>
+          </a:prstGeom>
+          <a:noFill/>
+          <a:ln/>
+        </p:spPr>
+        <p:txBody>
+          <a:bodyPr wrap="square" lIns="0" tIns="0" rIns="0" bIns="0" rtlCol="0" anchor="ctr"/>
+          <a:lstStyle/>
+          <a:p>
+            <a:pPr indent="0" marL="0">
+              <a:buNone/>
+            </a:pPr>
+            <a:r>
+              <a:rPr lang="en-US" sz="900" i="1" dirty="0">
+                <a:solidFill>
+                  <a:srgbClr val="3B7DD8"/>
+                </a:solidFill>
+                <a:latin typeface="Arial" pitchFamily="34" charset="0"/>
+                <a:ea typeface="Arial" pitchFamily="34" charset="-122"/>
+                <a:cs typeface="Arial" pitchFamily="34" charset="-120"/>
+              </a:rPr>
+              <a:t>「素泊まりの滞在でしたが、 部屋もとても清潔で、気持ちよく過ごせました」</a:t>
+            </a:r>
+            <a:endParaRPr lang="en-US" sz="900" dirty="0"/>
+          </a:p>
+        </p:txBody>
+      </p:sp>
+      <p:sp>
+        <p:nvSpPr>
+          <p:cNvPr id="33" name="Shape 31"/>
+          <p:cNvSpPr/>
+          <p:nvPr/>
+        </p:nvSpPr>
+        <p:spPr>
+          <a:xfrm>
+            <a:off x="3291840" y="2880360"/>
+            <a:ext cx="2651760" cy="1600200"/>
+          </a:xfrm>
+          <a:prstGeom prst="rect">
+            <a:avLst/>
+          </a:prstGeom>
+          <a:solidFill>
+            <a:srgbClr val="FFFFFF"/>
+          </a:solidFill>
+          <a:ln/>
+          <a:effectLst>
+            <a:outerShdw sx="100000" sy="100000" kx="0" ky="0" algn="bl" rotWithShape="0" blurRad="50800" dist="25400" dir="8100000">
+              <a:srgbClr val="000000">
+                <a:alpha val="10000"/>
+              </a:srgbClr>
+            </a:outerShdw>
+          </a:effectLst>
+        </p:spPr>
+      </p:sp>
+      <p:sp>
+        <p:nvSpPr>
+          <p:cNvPr id="34" name="Shape 32"/>
+          <p:cNvSpPr/>
+          <p:nvPr/>
+        </p:nvSpPr>
+        <p:spPr>
+          <a:xfrm>
+            <a:off x="3291840" y="2880360"/>
+            <a:ext cx="54864" cy="1600200"/>
+          </a:xfrm>
+          <a:prstGeom prst="rect">
+            <a:avLst/>
+          </a:prstGeom>
+          <a:solidFill>
+            <a:srgbClr val="16A34A"/>
+          </a:solidFill>
+          <a:ln/>
+        </p:spPr>
+      </p:sp>
+      <p:sp>
+        <p:nvSpPr>
+          <p:cNvPr id="35" name="Shape 33"/>
+          <p:cNvSpPr/>
+          <p:nvPr/>
+        </p:nvSpPr>
+        <p:spPr>
+          <a:xfrm>
+            <a:off x="5120640" y="2953512"/>
+            <a:ext cx="658368" cy="228600"/>
+          </a:xfrm>
+          <a:prstGeom prst="rect">
+            <a:avLst/>
+          </a:prstGeom>
+          <a:solidFill>
+            <a:srgbClr val="DCFCE7"/>
+          </a:solidFill>
+          <a:ln/>
+        </p:spPr>
+      </p:sp>
+      <p:sp>
+        <p:nvSpPr>
+          <p:cNvPr id="36" name="Text 34"/>
+          <p:cNvSpPr/>
+          <p:nvPr/>
+        </p:nvSpPr>
+        <p:spPr>
+          <a:xfrm>
+            <a:off x="5120640" y="2953512"/>
+            <a:ext cx="658368" cy="228600"/>
+          </a:xfrm>
+          <a:prstGeom prst="rect">
+            <a:avLst/>
+          </a:prstGeom>
+          <a:noFill/>
+          <a:ln/>
+        </p:spPr>
+        <p:txBody>
+          <a:bodyPr wrap="square" lIns="0" tIns="0" rIns="0" bIns="0" rtlCol="0" anchor="ctr"/>
+          <a:lstStyle/>
+          <a:p>
+            <a:pPr algn="ctr" indent="0" marL="0">
+              <a:buNone/>
+            </a:pPr>
+            <a:r>
+              <a:rPr lang="en-US" sz="900" b="1" dirty="0">
+                <a:solidFill>
+                  <a:srgbClr val="16A34A"/>
+                </a:solidFill>
+                <a:latin typeface="Arial" pitchFamily="34" charset="0"/>
+                <a:ea typeface="Arial" pitchFamily="34" charset="-122"/>
+                <a:cs typeface="Arial" pitchFamily="34" charset="-120"/>
+              </a:rPr>
+              <a:t>20件+</a:t>
+            </a:r>
+            <a:endParaRPr lang="en-US" sz="900" dirty="0"/>
+          </a:p>
+        </p:txBody>
+      </p:sp>
+      <p:sp>
+        <p:nvSpPr>
+          <p:cNvPr id="37" name="Text 35"/>
+          <p:cNvSpPr/>
+          <p:nvPr/>
+        </p:nvSpPr>
+        <p:spPr>
+          <a:xfrm>
+            <a:off x="3429000" y="2953512"/>
+            <a:ext cx="1645920" cy="274320"/>
+          </a:xfrm>
+          <a:prstGeom prst="rect">
+            <a:avLst/>
+          </a:prstGeom>
+          <a:noFill/>
+          <a:ln/>
+        </p:spPr>
+        <p:txBody>
+          <a:bodyPr wrap="square" lIns="0" tIns="0" rIns="0" bIns="0" rtlCol="0" anchor="ctr"/>
+          <a:lstStyle/>
+          <a:p>
+            <a:pPr indent="0" marL="0">
+              <a:buNone/>
+            </a:pPr>
+            <a:r>
+              <a:rPr lang="en-US" sz="1300" b="1" dirty="0">
+                <a:solidFill>
+                  <a:srgbClr val="1A2744"/>
+                </a:solidFill>
+                <a:latin typeface="Arial" pitchFamily="34" charset="0"/>
+                <a:ea typeface="Arial" pitchFamily="34" charset="-122"/>
+                <a:cs typeface="Arial" pitchFamily="34" charset="-120"/>
+              </a:rPr>
+              <a:t>朝食</a:t>
+            </a:r>
+            <a:endParaRPr lang="en-US" sz="1300" dirty="0"/>
+          </a:p>
+        </p:txBody>
+      </p:sp>
+      <p:sp>
+        <p:nvSpPr>
+          <p:cNvPr id="38" name="Text 36"/>
+          <p:cNvSpPr/>
+          <p:nvPr/>
+        </p:nvSpPr>
+        <p:spPr>
+          <a:xfrm>
+            <a:off x="3429000" y="3246120"/>
+            <a:ext cx="2377440" cy="365760"/>
+          </a:xfrm>
+          <a:prstGeom prst="rect">
+            <a:avLst/>
+          </a:prstGeom>
+          <a:noFill/>
+          <a:ln/>
+        </p:spPr>
+        <p:txBody>
+          <a:bodyPr wrap="square" lIns="0" tIns="0" rIns="0" bIns="0" rtlCol="0" anchor="ctr"/>
+          <a:lstStyle/>
+          <a:p>
+            <a:pPr indent="0" marL="0">
+              <a:buNone/>
+            </a:pPr>
+            <a:r>
+              <a:rPr lang="en-US" sz="900" dirty="0">
+                <a:solidFill>
+                  <a:srgbClr val="64748B"/>
+                </a:solidFill>
+                <a:latin typeface="Arial" pitchFamily="34" charset="0"/>
+                <a:ea typeface="Arial" pitchFamily="34" charset="-122"/>
+                <a:cs typeface="Arial" pitchFamily="34" charset="-120"/>
+              </a:rPr>
+              <a:t>朝食を1日追加で購入したのですが、フロントでその旨を伝えたら割引クーポンをもらえました</a:t>
+            </a:r>
+            <a:endParaRPr lang="en-US" sz="900" dirty="0"/>
+          </a:p>
+        </p:txBody>
+      </p:sp>
+      <p:sp>
+        <p:nvSpPr>
+          <p:cNvPr id="39" name="Text 37"/>
+          <p:cNvSpPr/>
+          <p:nvPr/>
+        </p:nvSpPr>
+        <p:spPr>
+          <a:xfrm>
+            <a:off x="3429000" y="3657600"/>
             <a:ext cx="2377440" cy="640080"/>
           </a:xfrm>
           <a:prstGeom prst="rect">
@@ -11300,452 +11746,6 @@
       </p:sp>
       <p:sp>
         <p:nvSpPr>
-          <p:cNvPr id="26" name="Shape 24"/>
-          <p:cNvSpPr/>
-          <p:nvPr/>
-        </p:nvSpPr>
-        <p:spPr>
-          <a:xfrm>
-            <a:off x="457200" y="2880360"/>
-            <a:ext cx="2651760" cy="1600200"/>
-          </a:xfrm>
-          <a:prstGeom prst="rect">
-            <a:avLst/>
-          </a:prstGeom>
-          <a:solidFill>
-            <a:srgbClr val="FFFFFF"/>
-          </a:solidFill>
-          <a:ln/>
-          <a:effectLst>
-            <a:outerShdw sx="100000" sy="100000" kx="0" ky="0" algn="bl" rotWithShape="0" blurRad="50800" dist="25400" dir="8100000">
-              <a:srgbClr val="000000">
-                <a:alpha val="10000"/>
-              </a:srgbClr>
-            </a:outerShdw>
-          </a:effectLst>
-        </p:spPr>
-      </p:sp>
-      <p:sp>
-        <p:nvSpPr>
-          <p:cNvPr id="27" name="Shape 25"/>
-          <p:cNvSpPr/>
-          <p:nvPr/>
-        </p:nvSpPr>
-        <p:spPr>
-          <a:xfrm>
-            <a:off x="457200" y="2880360"/>
-            <a:ext cx="54864" cy="1600200"/>
-          </a:xfrm>
-          <a:prstGeom prst="rect">
-            <a:avLst/>
-          </a:prstGeom>
-          <a:solidFill>
-            <a:srgbClr val="16A34A"/>
-          </a:solidFill>
-          <a:ln/>
-        </p:spPr>
-      </p:sp>
-      <p:sp>
-        <p:nvSpPr>
-          <p:cNvPr id="28" name="Shape 26"/>
-          <p:cNvSpPr/>
-          <p:nvPr/>
-        </p:nvSpPr>
-        <p:spPr>
-          <a:xfrm>
-            <a:off x="2286000" y="2953512"/>
-            <a:ext cx="658368" cy="228600"/>
-          </a:xfrm>
-          <a:prstGeom prst="rect">
-            <a:avLst/>
-          </a:prstGeom>
-          <a:solidFill>
-            <a:srgbClr val="DCFCE7"/>
-          </a:solidFill>
-          <a:ln/>
-        </p:spPr>
-      </p:sp>
-      <p:sp>
-        <p:nvSpPr>
-          <p:cNvPr id="29" name="Text 27"/>
-          <p:cNvSpPr/>
-          <p:nvPr/>
-        </p:nvSpPr>
-        <p:spPr>
-          <a:xfrm>
-            <a:off x="2286000" y="2953512"/>
-            <a:ext cx="658368" cy="228600"/>
-          </a:xfrm>
-          <a:prstGeom prst="rect">
-            <a:avLst/>
-          </a:prstGeom>
-          <a:noFill/>
-          <a:ln/>
-        </p:spPr>
-        <p:txBody>
-          <a:bodyPr wrap="square" lIns="0" tIns="0" rIns="0" bIns="0" rtlCol="0" anchor="ctr"/>
-          <a:lstStyle/>
-          <a:p>
-            <a:pPr algn="ctr" indent="0" marL="0">
-              <a:buNone/>
-            </a:pPr>
-            <a:r>
-              <a:rPr lang="en-US" sz="900" b="1" dirty="0">
-                <a:solidFill>
-                  <a:srgbClr val="16A34A"/>
-                </a:solidFill>
-                <a:latin typeface="Arial" pitchFamily="34" charset="0"/>
-                <a:ea typeface="Arial" pitchFamily="34" charset="-122"/>
-                <a:cs typeface="Arial" pitchFamily="34" charset="-120"/>
-              </a:rPr>
-              <a:t>20件+</a:t>
-            </a:r>
-            <a:endParaRPr lang="en-US" sz="900" dirty="0"/>
-          </a:p>
-        </p:txBody>
-      </p:sp>
-      <p:sp>
-        <p:nvSpPr>
-          <p:cNvPr id="30" name="Text 28"/>
-          <p:cNvSpPr/>
-          <p:nvPr/>
-        </p:nvSpPr>
-        <p:spPr>
-          <a:xfrm>
-            <a:off x="594360" y="2953512"/>
-            <a:ext cx="1645920" cy="274320"/>
-          </a:xfrm>
-          <a:prstGeom prst="rect">
-            <a:avLst/>
-          </a:prstGeom>
-          <a:noFill/>
-          <a:ln/>
-        </p:spPr>
-        <p:txBody>
-          <a:bodyPr wrap="square" lIns="0" tIns="0" rIns="0" bIns="0" rtlCol="0" anchor="ctr"/>
-          <a:lstStyle/>
-          <a:p>
-            <a:pPr indent="0" marL="0">
-              <a:buNone/>
-            </a:pPr>
-            <a:r>
-              <a:rPr lang="en-US" sz="1300" b="1" dirty="0">
-                <a:solidFill>
-                  <a:srgbClr val="1A2744"/>
-                </a:solidFill>
-                <a:latin typeface="Arial" pitchFamily="34" charset="0"/>
-                <a:ea typeface="Arial" pitchFamily="34" charset="-122"/>
-                <a:cs typeface="Arial" pitchFamily="34" charset="-120"/>
-              </a:rPr>
-              <a:t>朝食</a:t>
-            </a:r>
-            <a:endParaRPr lang="en-US" sz="1300" dirty="0"/>
-          </a:p>
-        </p:txBody>
-      </p:sp>
-      <p:sp>
-        <p:nvSpPr>
-          <p:cNvPr id="31" name="Text 29"/>
-          <p:cNvSpPr/>
-          <p:nvPr/>
-        </p:nvSpPr>
-        <p:spPr>
-          <a:xfrm>
-            <a:off x="594360" y="3246120"/>
-            <a:ext cx="2377440" cy="365760"/>
-          </a:xfrm>
-          <a:prstGeom prst="rect">
-            <a:avLst/>
-          </a:prstGeom>
-          <a:noFill/>
-          <a:ln/>
-        </p:spPr>
-        <p:txBody>
-          <a:bodyPr wrap="square" lIns="0" tIns="0" rIns="0" bIns="0" rtlCol="0" anchor="ctr"/>
-          <a:lstStyle/>
-          <a:p>
-            <a:pPr indent="0" marL="0">
-              <a:buNone/>
-            </a:pPr>
-            <a:r>
-              <a:rPr lang="en-US" sz="900" dirty="0">
-                <a:solidFill>
-                  <a:srgbClr val="64748B"/>
-                </a:solidFill>
-                <a:latin typeface="Arial" pitchFamily="34" charset="0"/>
-                <a:ea typeface="Arial" pitchFamily="34" charset="-122"/>
-                <a:cs typeface="Arial" pitchFamily="34" charset="-120"/>
-              </a:rPr>
-              <a:t>朝食を1日追加で購入したのですが、フロントでその旨を伝えたら割引クーポンをもらえました</a:t>
-            </a:r>
-            <a:endParaRPr lang="en-US" sz="900" dirty="0"/>
-          </a:p>
-        </p:txBody>
-      </p:sp>
-      <p:sp>
-        <p:nvSpPr>
-          <p:cNvPr id="32" name="Text 30"/>
-          <p:cNvSpPr/>
-          <p:nvPr/>
-        </p:nvSpPr>
-        <p:spPr>
-          <a:xfrm>
-            <a:off x="594360" y="3657600"/>
-            <a:ext cx="2377440" cy="640080"/>
-          </a:xfrm>
-          <a:prstGeom prst="rect">
-            <a:avLst/>
-          </a:prstGeom>
-          <a:noFill/>
-          <a:ln/>
-        </p:spPr>
-        <p:txBody>
-          <a:bodyPr wrap="square" lIns="0" tIns="0" rIns="0" bIns="0" rtlCol="0" anchor="ctr"/>
-          <a:lstStyle/>
-          <a:p>
-            <a:pPr indent="0" marL="0">
-              <a:buNone/>
-            </a:pPr>
-            <a:r>
-              <a:rPr lang="en-US" sz="900" i="1" dirty="0">
-                <a:solidFill>
-                  <a:srgbClr val="3B7DD8"/>
-                </a:solidFill>
-                <a:latin typeface="Arial" pitchFamily="34" charset="0"/>
-                <a:ea typeface="Arial" pitchFamily="34" charset="-122"/>
-                <a:cs typeface="Arial" pitchFamily="34" charset="-120"/>
-              </a:rPr>
-              <a:t>「ホテルの朝食はまあまあですが、セルフサービスのランドリー設備があればさらに良いでしょう」</a:t>
-            </a:r>
-            <a:endParaRPr lang="en-US" sz="900" dirty="0"/>
-          </a:p>
-        </p:txBody>
-      </p:sp>
-      <p:sp>
-        <p:nvSpPr>
-          <p:cNvPr id="33" name="Shape 31"/>
-          <p:cNvSpPr/>
-          <p:nvPr/>
-        </p:nvSpPr>
-        <p:spPr>
-          <a:xfrm>
-            <a:off x="3291840" y="2880360"/>
-            <a:ext cx="2651760" cy="1600200"/>
-          </a:xfrm>
-          <a:prstGeom prst="rect">
-            <a:avLst/>
-          </a:prstGeom>
-          <a:solidFill>
-            <a:srgbClr val="FFFFFF"/>
-          </a:solidFill>
-          <a:ln/>
-          <a:effectLst>
-            <a:outerShdw sx="100000" sy="100000" kx="0" ky="0" algn="bl" rotWithShape="0" blurRad="50800" dist="25400" dir="8100000">
-              <a:srgbClr val="000000">
-                <a:alpha val="10000"/>
-              </a:srgbClr>
-            </a:outerShdw>
-          </a:effectLst>
-        </p:spPr>
-      </p:sp>
-      <p:sp>
-        <p:nvSpPr>
-          <p:cNvPr id="34" name="Shape 32"/>
-          <p:cNvSpPr/>
-          <p:nvPr/>
-        </p:nvSpPr>
-        <p:spPr>
-          <a:xfrm>
-            <a:off x="3291840" y="2880360"/>
-            <a:ext cx="54864" cy="1600200"/>
-          </a:xfrm>
-          <a:prstGeom prst="rect">
-            <a:avLst/>
-          </a:prstGeom>
-          <a:solidFill>
-            <a:srgbClr val="16A34A"/>
-          </a:solidFill>
-          <a:ln/>
-        </p:spPr>
-      </p:sp>
-      <p:sp>
-        <p:nvSpPr>
-          <p:cNvPr id="35" name="Shape 33"/>
-          <p:cNvSpPr/>
-          <p:nvPr/>
-        </p:nvSpPr>
-        <p:spPr>
-          <a:xfrm>
-            <a:off x="5120640" y="2953512"/>
-            <a:ext cx="658368" cy="228600"/>
-          </a:xfrm>
-          <a:prstGeom prst="rect">
-            <a:avLst/>
-          </a:prstGeom>
-          <a:solidFill>
-            <a:srgbClr val="DCFCE7"/>
-          </a:solidFill>
-          <a:ln/>
-        </p:spPr>
-      </p:sp>
-      <p:sp>
-        <p:nvSpPr>
-          <p:cNvPr id="36" name="Text 34"/>
-          <p:cNvSpPr/>
-          <p:nvPr/>
-        </p:nvSpPr>
-        <p:spPr>
-          <a:xfrm>
-            <a:off x="5120640" y="2953512"/>
-            <a:ext cx="658368" cy="228600"/>
-          </a:xfrm>
-          <a:prstGeom prst="rect">
-            <a:avLst/>
-          </a:prstGeom>
-          <a:noFill/>
-          <a:ln/>
-        </p:spPr>
-        <p:txBody>
-          <a:bodyPr wrap="square" lIns="0" tIns="0" rIns="0" bIns="0" rtlCol="0" anchor="ctr"/>
-          <a:lstStyle/>
-          <a:p>
-            <a:pPr algn="ctr" indent="0" marL="0">
-              <a:buNone/>
-            </a:pPr>
-            <a:r>
-              <a:rPr lang="en-US" sz="900" b="1" dirty="0">
-                <a:solidFill>
-                  <a:srgbClr val="16A34A"/>
-                </a:solidFill>
-                <a:latin typeface="Arial" pitchFamily="34" charset="0"/>
-                <a:ea typeface="Arial" pitchFamily="34" charset="-122"/>
-                <a:cs typeface="Arial" pitchFamily="34" charset="-120"/>
-              </a:rPr>
-              <a:t>20件+</a:t>
-            </a:r>
-            <a:endParaRPr lang="en-US" sz="900" dirty="0"/>
-          </a:p>
-        </p:txBody>
-      </p:sp>
-      <p:sp>
-        <p:nvSpPr>
-          <p:cNvPr id="37" name="Text 35"/>
-          <p:cNvSpPr/>
-          <p:nvPr/>
-        </p:nvSpPr>
-        <p:spPr>
-          <a:xfrm>
-            <a:off x="3429000" y="2953512"/>
-            <a:ext cx="1645920" cy="274320"/>
-          </a:xfrm>
-          <a:prstGeom prst="rect">
-            <a:avLst/>
-          </a:prstGeom>
-          <a:noFill/>
-          <a:ln/>
-        </p:spPr>
-        <p:txBody>
-          <a:bodyPr wrap="square" lIns="0" tIns="0" rIns="0" bIns="0" rtlCol="0" anchor="ctr"/>
-          <a:lstStyle/>
-          <a:p>
-            <a:pPr indent="0" marL="0">
-              <a:buNone/>
-            </a:pPr>
-            <a:r>
-              <a:rPr lang="en-US" sz="1300" b="1" dirty="0">
-                <a:solidFill>
-                  <a:srgbClr val="1A2744"/>
-                </a:solidFill>
-                <a:latin typeface="Arial" pitchFamily="34" charset="0"/>
-                <a:ea typeface="Arial" pitchFamily="34" charset="-122"/>
-                <a:cs typeface="Arial" pitchFamily="34" charset="-120"/>
-              </a:rPr>
-              <a:t>清潔さ・清掃</a:t>
-            </a:r>
-            <a:endParaRPr lang="en-US" sz="1300" dirty="0"/>
-          </a:p>
-        </p:txBody>
-      </p:sp>
-      <p:sp>
-        <p:nvSpPr>
-          <p:cNvPr id="38" name="Text 36"/>
-          <p:cNvSpPr/>
-          <p:nvPr/>
-        </p:nvSpPr>
-        <p:spPr>
-          <a:xfrm>
-            <a:off x="3429000" y="3246120"/>
-            <a:ext cx="2377440" cy="365760"/>
-          </a:xfrm>
-          <a:prstGeom prst="rect">
-            <a:avLst/>
-          </a:prstGeom>
-          <a:noFill/>
-          <a:ln/>
-        </p:spPr>
-        <p:txBody>
-          <a:bodyPr wrap="square" lIns="0" tIns="0" rIns="0" bIns="0" rtlCol="0" anchor="ctr"/>
-          <a:lstStyle/>
-          <a:p>
-            <a:pPr indent="0" marL="0">
-              <a:buNone/>
-            </a:pPr>
-            <a:r>
-              <a:rPr lang="en-US" sz="900" dirty="0">
-                <a:solidFill>
-                  <a:srgbClr val="64748B"/>
-                </a:solidFill>
-                <a:latin typeface="Arial" pitchFamily="34" charset="0"/>
-                <a:ea typeface="Arial" pitchFamily="34" charset="-122"/>
-                <a:cs typeface="Arial" pitchFamily="34" charset="-120"/>
-              </a:rPr>
-              <a:t>素泊まりの滞在でしたが、 部屋もとても清潔で、気持ちよく過ごせました</a:t>
-            </a:r>
-            <a:endParaRPr lang="en-US" sz="900" dirty="0"/>
-          </a:p>
-        </p:txBody>
-      </p:sp>
-      <p:sp>
-        <p:nvSpPr>
-          <p:cNvPr id="39" name="Text 37"/>
-          <p:cNvSpPr/>
-          <p:nvPr/>
-        </p:nvSpPr>
-        <p:spPr>
-          <a:xfrm>
-            <a:off x="3429000" y="3657600"/>
-            <a:ext cx="2377440" cy="640080"/>
-          </a:xfrm>
-          <a:prstGeom prst="rect">
-            <a:avLst/>
-          </a:prstGeom>
-          <a:noFill/>
-          <a:ln/>
-        </p:spPr>
-        <p:txBody>
-          <a:bodyPr wrap="square" lIns="0" tIns="0" rIns="0" bIns="0" rtlCol="0" anchor="ctr"/>
-          <a:lstStyle/>
-          <a:p>
-            <a:pPr indent="0" marL="0">
-              <a:buNone/>
-            </a:pPr>
-            <a:r>
-              <a:rPr lang="en-US" sz="900" i="1" dirty="0">
-                <a:solidFill>
-                  <a:srgbClr val="3B7DD8"/>
-                </a:solidFill>
-                <a:latin typeface="Arial" pitchFamily="34" charset="0"/>
-                <a:ea typeface="Arial" pitchFamily="34" charset="-122"/>
-                <a:cs typeface="Arial" pitchFamily="34" charset="-120"/>
-              </a:rPr>
-              <a:t>「周辺には、行き届いたサービスを提供する魅力的な地元の飲食店をはじめ、多くのレストランがあります」</a:t>
-            </a:r>
-            <a:endParaRPr lang="en-US" sz="900" dirty="0"/>
-          </a:p>
-        </p:txBody>
-      </p:sp>
-      <p:sp>
-        <p:nvSpPr>
           <p:cNvPr id="40" name="Shape 38"/>
           <p:cNvSpPr/>
           <p:nvPr/>
@@ -11922,7 +11922,7 @@
                 <a:ea typeface="Arial" pitchFamily="34" charset="-122"/>
                 <a:cs typeface="Arial" pitchFamily="34" charset="-120"/>
               </a:rPr>
-              <a:t>Location and convenience</a:t>
+              <a:t>・駅近で周囲に飲食店も多数ある利便性 ・羽田空港も京急でアクセス便利 ・個人情報の管理が危うい点 ・全体的に設備が...</a:t>
             </a:r>
             <a:endParaRPr lang="en-US" sz="900" dirty="0"/>
           </a:p>
@@ -11961,7 +11961,7 @@
                 <a:ea typeface="Arial" pitchFamily="34" charset="-122"/>
                 <a:cs typeface="Arial" pitchFamily="34" charset="-120"/>
               </a:rPr>
-              <a:t>「周辺には、行き届いたサービスを提供する魅力的な地元の飲食店をはじめ、多くのレストランがあります」</a:t>
+              <a:t>「Location and convenience」</a:t>
             </a:r>
             <a:endParaRPr lang="en-US" sz="900" dirty="0"/>
           </a:p>
@@ -14295,7 +14295,7 @@
                           <a:ea typeface="Arial" pitchFamily="34" charset="-122"/>
                           <a:cs typeface="Arial" pitchFamily="34" charset="-120"/>
                         </a:rPr>
-                        <a:t>建物自体が古いですが、部屋は清潔で、コーヒーのサービスもあり満足です</a:t>
+                        <a:t>・駅近で周囲に飲食店も多数ある利便性 ・羽田空港も京急でアクセス便利 ・個人情報の管理が危うい点 ・全体的に設備が...</a:t>
                       </a:r>
                       <a:endParaRPr lang="en-US" sz="900" dirty="0">
                         <a:latin typeface="Arial" charset="0"/>
@@ -14363,7 +14363,7 @@
                           <a:ea typeface="Arial" pitchFamily="34" charset="-122"/>
                           <a:cs typeface="Arial" pitchFamily="34" charset="-120"/>
                         </a:rPr>
-                        <a:t>3件</a:t>
+                        <a:t>4件</a:t>
                       </a:r>
                       <a:endParaRPr lang="en-US" sz="900" dirty="0">
                         <a:latin typeface="Arial" charset="0"/>

--- a/納品レポート/ホテル別レポート/kawasaki_nikko_口コミ分析レポート.pptx
+++ b/納品レポート/ホテル別レポート/kawasaki_nikko_口コミ分析レポート.pptx
@@ -228,22 +228,11 @@
               <a:effectLst/>
             </c:spPr>
           </c:dPt>
-          <c:dPt>
-            <c:idx val="5"/>
-            <c:invertIfNegative val="0"/>
-            <c:bubble3D val="0"/>
-            <c:spPr>
-              <a:solidFill>
-                <a:srgbClr val="EA580C"/>
-              </a:solidFill>
-              <a:effectLst/>
-            </c:spPr>
-          </c:dPt>
           <c:cat>
             <c:multiLvlStrRef>
-              <c:f>Sheet1!$A$2:$A$7</c:f>
+              <c:f>Sheet1!$A$2:$A$6</c:f>
               <c:multiLvlStrCache>
-                <c:ptCount val="6"/>
+                <c:ptCount val="5"/>
                 <c:lvl>
                   <c:pt idx="0">
                     <c:v>Trip.com</c:v>
@@ -260,36 +249,30 @@
                   <c:pt idx="4">
                     <c:v>Google</c:v>
                   </c:pt>
-                  <c:pt idx="5">
-                    <c:v>Agoda</c:v>
-                  </c:pt>
                 </c:lvl>
               </c:multiLvlStrCache>
             </c:multiLvlStrRef>
           </c:cat>
           <c:val>
             <c:numRef>
-              <c:f>Sheet1!$B$2:$B$7</c:f>
+              <c:f>Sheet1!$B$2:$B$6</c:f>
               <c:numCache>
                 <c:formatCode>General</c:formatCode>
-                <c:ptCount val="6"/>
+                <c:ptCount val="5"/>
                 <c:pt idx="0">
-                  <c:v>9.63</c:v>
+                  <c:v>9.58</c:v>
                 </c:pt>
                 <c:pt idx="1">
                   <c:v>9</c:v>
                 </c:pt>
                 <c:pt idx="2">
-                  <c:v>9</c:v>
+                  <c:v>8.86</c:v>
                 </c:pt>
                 <c:pt idx="3">
                   <c:v>8.65</c:v>
                 </c:pt>
                 <c:pt idx="4">
-                  <c:v>7.16</c:v>
-                </c:pt>
-                <c:pt idx="5">
-                  <c:v>7</c:v>
+                  <c:v>7.1</c:v>
                 </c:pt>
               </c:numCache>
             </c:numRef>
@@ -614,19 +597,19 @@
                 <c:formatCode>General</c:formatCode>
                 <c:ptCount val="7"/>
                 <c:pt idx="0">
-                  <c:v>56</c:v>
+                  <c:v>57</c:v>
                 </c:pt>
                 <c:pt idx="1">
-                  <c:v>24</c:v>
+                  <c:v>26</c:v>
                 </c:pt>
                 <c:pt idx="2">
-                  <c:v>26</c:v>
+                  <c:v>27</c:v>
                 </c:pt>
                 <c:pt idx="3">
-                  <c:v>10</c:v>
+                  <c:v>9</c:v>
                 </c:pt>
                 <c:pt idx="4">
-                  <c:v>11</c:v>
+                  <c:v>13</c:v>
                 </c:pt>
                 <c:pt idx="5">
                   <c:v>1</c:v>
@@ -2520,7 +2503,7 @@
                 <a:ea typeface="Arial" pitchFamily="34" charset="-122"/>
                 <a:cs typeface="Arial" pitchFamily="34" charset="-120"/>
               </a:rPr>
-              <a:t>レビュー総数：130件</a:t>
+              <a:t>レビュー総数：135件</a:t>
             </a:r>
             <a:endParaRPr lang="en-US" sz="1000" dirty="0"/>
           </a:p>
@@ -2800,7 +2783,7 @@
                 <a:ea typeface="Arial" pitchFamily="34" charset="-122"/>
                 <a:cs typeface="Arial" pitchFamily="34" charset="-120"/>
               </a:rPr>
-              <a:t>川崎日航ホテルは全体平均8.68点（10pt換算）、高評価率81.5%を達成しています。本レポートで示した改善施策を段階的に実施することで、さらなる顧客満足度向上が期待できます。</a:t>
+              <a:t>川崎日航ホテルは全体平均8.67点（10pt換算）、高評価率81.5%を達成しています。本レポートで示した改善施策を段階的に実施することで、さらなる顧客満足度向上が期待できます。</a:t>
             </a:r>
             <a:endParaRPr lang="en-US" sz="1200" dirty="0"/>
           </a:p>
@@ -3237,7 +3220,7 @@
                 <a:ea typeface="Arial" pitchFamily="34" charset="-122"/>
                 <a:cs typeface="Arial" pitchFamily="34" charset="-120"/>
               </a:rPr>
-              <a:t>8.68</a:t>
+              <a:t>8.67</a:t>
             </a:r>
             <a:endParaRPr lang="en-US" sz="2800" dirty="0"/>
           </a:p>
@@ -3591,7 +3574,7 @@
                 <a:ea typeface="Arial" pitchFamily="34" charset="-122"/>
                 <a:cs typeface="Arial" pitchFamily="34" charset="-120"/>
               </a:rPr>
-              <a:t>130件</a:t>
+              <a:t>135件</a:t>
             </a:r>
             <a:endParaRPr lang="en-US" sz="2800" dirty="0"/>
           </a:p>
@@ -4330,7 +4313,7 @@
                           <a:ea typeface="Arial" pitchFamily="34" charset="-122"/>
                           <a:cs typeface="Arial" pitchFamily="34" charset="-120"/>
                         </a:rPr>
-                        <a:t>30</a:t>
+                        <a:t>31</a:t>
                       </a:r>
                       <a:endParaRPr lang="en-US" sz="800" dirty="0">
                         <a:latin typeface="Arial" charset="0"/>
@@ -4398,7 +4381,7 @@
                           <a:ea typeface="Arial" pitchFamily="34" charset="-122"/>
                           <a:cs typeface="Arial" pitchFamily="34" charset="-120"/>
                         </a:rPr>
-                        <a:t>9.63/10</a:t>
+                        <a:t>9.58/10</a:t>
                       </a:r>
                       <a:endParaRPr lang="en-US" sz="800" dirty="0">
                         <a:latin typeface="Arial" charset="0"/>
@@ -4466,7 +4449,7 @@
                           <a:ea typeface="Arial" pitchFamily="34" charset="-122"/>
                           <a:cs typeface="Arial" pitchFamily="34" charset="-120"/>
                         </a:rPr>
-                        <a:t>9.63</a:t>
+                        <a:t>9.58</a:t>
                       </a:r>
                       <a:endParaRPr lang="en-US" sz="800" dirty="0">
                         <a:latin typeface="Arial" charset="0"/>
@@ -5014,7 +4997,7 @@
                           <a:ea typeface="Arial" pitchFamily="34" charset="-122"/>
                           <a:cs typeface="Arial" pitchFamily="34" charset="-120"/>
                         </a:rPr>
-                        <a:t>6</a:t>
+                        <a:t>7</a:t>
                       </a:r>
                       <a:endParaRPr lang="en-US" sz="800" dirty="0">
                         <a:latin typeface="Arial" charset="0"/>
@@ -5082,7 +5065,7 @@
                           <a:ea typeface="Arial" pitchFamily="34" charset="-122"/>
                           <a:cs typeface="Arial" pitchFamily="34" charset="-120"/>
                         </a:rPr>
-                        <a:t>4.50/5</a:t>
+                        <a:t>4.43/5</a:t>
                       </a:r>
                       <a:endParaRPr lang="en-US" sz="800" dirty="0">
                         <a:latin typeface="Arial" charset="0"/>
@@ -5150,7 +5133,7 @@
                           <a:ea typeface="Arial" pitchFamily="34" charset="-122"/>
                           <a:cs typeface="Arial" pitchFamily="34" charset="-120"/>
                         </a:rPr>
-                        <a:t>9.00</a:t>
+                        <a:t>8.86</a:t>
                       </a:r>
                       <a:endParaRPr lang="en-US" sz="800" dirty="0">
                         <a:latin typeface="Arial" charset="0"/>
@@ -5218,7 +5201,7 @@
                           <a:ea typeface="Arial" pitchFamily="34" charset="-122"/>
                           <a:cs typeface="Arial" pitchFamily="34" charset="-120"/>
                         </a:rPr>
-                        <a:t>優秀</a:t>
+                        <a:t>良好</a:t>
                       </a:r>
                       <a:endParaRPr lang="en-US" sz="800" dirty="0">
                         <a:latin typeface="Arial" charset="0"/>
@@ -5356,7 +5339,7 @@
                           <a:ea typeface="Arial" pitchFamily="34" charset="-122"/>
                           <a:cs typeface="Arial" pitchFamily="34" charset="-120"/>
                         </a:rPr>
-                        <a:t>66</a:t>
+                        <a:t>69</a:t>
                       </a:r>
                       <a:endParaRPr lang="en-US" sz="800" dirty="0">
                         <a:latin typeface="Arial" charset="0"/>
@@ -5698,7 +5681,7 @@
                           <a:ea typeface="Arial" pitchFamily="34" charset="-122"/>
                           <a:cs typeface="Arial" pitchFamily="34" charset="-120"/>
                         </a:rPr>
-                        <a:t>19</a:t>
+                        <a:t>20</a:t>
                       </a:r>
                       <a:endParaRPr lang="en-US" sz="800" dirty="0">
                         <a:latin typeface="Arial" charset="0"/>
@@ -5766,7 +5749,7 @@
                           <a:ea typeface="Arial" pitchFamily="34" charset="-122"/>
                           <a:cs typeface="Arial" pitchFamily="34" charset="-120"/>
                         </a:rPr>
-                        <a:t>3.58/5</a:t>
+                        <a:t>3.55/5</a:t>
                       </a:r>
                       <a:endParaRPr lang="en-US" sz="800" dirty="0">
                         <a:latin typeface="Arial" charset="0"/>
@@ -5834,349 +5817,7 @@
                           <a:ea typeface="Arial" pitchFamily="34" charset="-122"/>
                           <a:cs typeface="Arial" pitchFamily="34" charset="-120"/>
                         </a:rPr>
-                        <a:t>7.16</a:t>
-                      </a:r>
-                      <a:endParaRPr lang="en-US" sz="800" dirty="0">
-                        <a:latin typeface="Arial" charset="0"/>
-                        <a:ea typeface="Arial" charset="0"/>
-                        <a:cs typeface="Arial" charset="0"/>
-                      </a:endParaRPr>
-                    </a:p>
-                  </a:txBody>
-                  <a:tcPr marL="91440" marR="91440" marT="45720" marB="45720">
-                    <a:lnL w="6350" cap="flat" cmpd="sng" algn="ctr">
-                      <a:solidFill>
-                        <a:srgbClr val="CCCCCC"/>
-                      </a:solidFill>
-                      <a:prstDash val="solid"/>
-                      <a:round/>
-                      <a:headEnd type="none" w="med" len="med"/>
-                      <a:tailEnd type="none" w="med" len="med"/>
-                    </a:lnL>
-                    <a:lnR w="6350" cap="flat" cmpd="sng" algn="ctr">
-                      <a:solidFill>
-                        <a:srgbClr val="CCCCCC"/>
-                      </a:solidFill>
-                      <a:prstDash val="solid"/>
-                      <a:round/>
-                      <a:headEnd type="none" w="med" len="med"/>
-                      <a:tailEnd type="none" w="med" len="med"/>
-                    </a:lnR>
-                    <a:lnT w="6350" cap="flat" cmpd="sng" algn="ctr">
-                      <a:solidFill>
-                        <a:srgbClr val="CCCCCC"/>
-                      </a:solidFill>
-                      <a:prstDash val="solid"/>
-                      <a:round/>
-                      <a:headEnd type="none" w="med" len="med"/>
-                      <a:tailEnd type="none" w="med" len="med"/>
-                    </a:lnT>
-                    <a:lnB w="6350" cap="flat" cmpd="sng" algn="ctr">
-                      <a:solidFill>
-                        <a:srgbClr val="CCCCCC"/>
-                      </a:solidFill>
-                      <a:prstDash val="solid"/>
-                      <a:round/>
-                      <a:headEnd type="none" w="med" len="med"/>
-                      <a:tailEnd type="none" w="med" len="med"/>
-                    </a:lnB>
-                    <a:solidFill>
-                      <a:srgbClr val="FFFFFF"/>
-                    </a:solidFill>
-                  </a:tcPr>
-                </a:tc>
-                <a:tc>
-                  <a:txBody>
-                    <a:bodyPr/>
-                    <a:lstStyle/>
-                    <a:p>
-                      <a:pPr algn="ctr" indent="0" marL="0">
-                        <a:buNone/>
-                      </a:pPr>
-                      <a:r>
-                        <a:rPr lang="en-US" sz="800" dirty="0">
-                          <a:solidFill>
-                            <a:srgbClr val="000000"/>
-                          </a:solidFill>
-                          <a:latin typeface="Arial" pitchFamily="34" charset="0"/>
-                          <a:ea typeface="Arial" pitchFamily="34" charset="-122"/>
-                          <a:cs typeface="Arial" pitchFamily="34" charset="-120"/>
-                        </a:rPr>
-                        <a:t>概ね良好</a:t>
-                      </a:r>
-                      <a:endParaRPr lang="en-US" sz="800" dirty="0">
-                        <a:latin typeface="Arial" charset="0"/>
-                        <a:ea typeface="Arial" charset="0"/>
-                        <a:cs typeface="Arial" charset="0"/>
-                      </a:endParaRPr>
-                    </a:p>
-                  </a:txBody>
-                  <a:tcPr marL="91440" marR="91440" marT="45720" marB="45720">
-                    <a:lnL w="6350" cap="flat" cmpd="sng" algn="ctr">
-                      <a:solidFill>
-                        <a:srgbClr val="CCCCCC"/>
-                      </a:solidFill>
-                      <a:prstDash val="solid"/>
-                      <a:round/>
-                      <a:headEnd type="none" w="med" len="med"/>
-                      <a:tailEnd type="none" w="med" len="med"/>
-                    </a:lnL>
-                    <a:lnR w="6350" cap="flat" cmpd="sng" algn="ctr">
-                      <a:solidFill>
-                        <a:srgbClr val="CCCCCC"/>
-                      </a:solidFill>
-                      <a:prstDash val="solid"/>
-                      <a:round/>
-                      <a:headEnd type="none" w="med" len="med"/>
-                      <a:tailEnd type="none" w="med" len="med"/>
-                    </a:lnR>
-                    <a:lnT w="6350" cap="flat" cmpd="sng" algn="ctr">
-                      <a:solidFill>
-                        <a:srgbClr val="CCCCCC"/>
-                      </a:solidFill>
-                      <a:prstDash val="solid"/>
-                      <a:round/>
-                      <a:headEnd type="none" w="med" len="med"/>
-                      <a:tailEnd type="none" w="med" len="med"/>
-                    </a:lnT>
-                    <a:lnB w="6350" cap="flat" cmpd="sng" algn="ctr">
-                      <a:solidFill>
-                        <a:srgbClr val="CCCCCC"/>
-                      </a:solidFill>
-                      <a:prstDash val="solid"/>
-                      <a:round/>
-                      <a:headEnd type="none" w="med" len="med"/>
-                      <a:tailEnd type="none" w="med" len="med"/>
-                    </a:lnB>
-                    <a:solidFill>
-                      <a:srgbClr val="FFFFFF"/>
-                    </a:solidFill>
-                  </a:tcPr>
-                </a:tc>
-              </a:tr>
-              <a:tr h="0">
-                <a:tc>
-                  <a:txBody>
-                    <a:bodyPr/>
-                    <a:lstStyle/>
-                    <a:p>
-                      <a:pPr algn="ctr" indent="0" marL="0">
-                        <a:buNone/>
-                      </a:pPr>
-                      <a:r>
-                        <a:rPr lang="en-US" sz="800" dirty="0">
-                          <a:solidFill>
-                            <a:srgbClr val="000000"/>
-                          </a:solidFill>
-                          <a:latin typeface="Arial" pitchFamily="34" charset="0"/>
-                          <a:ea typeface="Arial" pitchFamily="34" charset="-122"/>
-                          <a:cs typeface="Arial" pitchFamily="34" charset="-120"/>
-                        </a:rPr>
-                        <a:t>Agoda</a:t>
-                      </a:r>
-                      <a:endParaRPr lang="en-US" sz="800" dirty="0">
-                        <a:latin typeface="Arial" charset="0"/>
-                        <a:ea typeface="Arial" charset="0"/>
-                        <a:cs typeface="Arial" charset="0"/>
-                      </a:endParaRPr>
-                    </a:p>
-                  </a:txBody>
-                  <a:tcPr marL="91440" marR="91440" marT="45720" marB="45720">
-                    <a:lnL w="6350" cap="flat" cmpd="sng" algn="ctr">
-                      <a:solidFill>
-                        <a:srgbClr val="CCCCCC"/>
-                      </a:solidFill>
-                      <a:prstDash val="solid"/>
-                      <a:round/>
-                      <a:headEnd type="none" w="med" len="med"/>
-                      <a:tailEnd type="none" w="med" len="med"/>
-                    </a:lnL>
-                    <a:lnR w="6350" cap="flat" cmpd="sng" algn="ctr">
-                      <a:solidFill>
-                        <a:srgbClr val="CCCCCC"/>
-                      </a:solidFill>
-                      <a:prstDash val="solid"/>
-                      <a:round/>
-                      <a:headEnd type="none" w="med" len="med"/>
-                      <a:tailEnd type="none" w="med" len="med"/>
-                    </a:lnR>
-                    <a:lnT w="6350" cap="flat" cmpd="sng" algn="ctr">
-                      <a:solidFill>
-                        <a:srgbClr val="CCCCCC"/>
-                      </a:solidFill>
-                      <a:prstDash val="solid"/>
-                      <a:round/>
-                      <a:headEnd type="none" w="med" len="med"/>
-                      <a:tailEnd type="none" w="med" len="med"/>
-                    </a:lnT>
-                    <a:lnB w="6350" cap="flat" cmpd="sng" algn="ctr">
-                      <a:solidFill>
-                        <a:srgbClr val="CCCCCC"/>
-                      </a:solidFill>
-                      <a:prstDash val="solid"/>
-                      <a:round/>
-                      <a:headEnd type="none" w="med" len="med"/>
-                      <a:tailEnd type="none" w="med" len="med"/>
-                    </a:lnB>
-                    <a:solidFill>
-                      <a:srgbClr val="FFFFFF"/>
-                    </a:solidFill>
-                  </a:tcPr>
-                </a:tc>
-                <a:tc>
-                  <a:txBody>
-                    <a:bodyPr/>
-                    <a:lstStyle/>
-                    <a:p>
-                      <a:pPr algn="ctr" indent="0" marL="0">
-                        <a:buNone/>
-                      </a:pPr>
-                      <a:r>
-                        <a:rPr lang="en-US" sz="800" dirty="0">
-                          <a:solidFill>
-                            <a:srgbClr val="000000"/>
-                          </a:solidFill>
-                          <a:latin typeface="Arial" pitchFamily="34" charset="0"/>
-                          <a:ea typeface="Arial" pitchFamily="34" charset="-122"/>
-                          <a:cs typeface="Arial" pitchFamily="34" charset="-120"/>
-                        </a:rPr>
-                        <a:t>1</a:t>
-                      </a:r>
-                      <a:endParaRPr lang="en-US" sz="800" dirty="0">
-                        <a:latin typeface="Arial" charset="0"/>
-                        <a:ea typeface="Arial" charset="0"/>
-                        <a:cs typeface="Arial" charset="0"/>
-                      </a:endParaRPr>
-                    </a:p>
-                  </a:txBody>
-                  <a:tcPr marL="91440" marR="91440" marT="45720" marB="45720">
-                    <a:lnL w="6350" cap="flat" cmpd="sng" algn="ctr">
-                      <a:solidFill>
-                        <a:srgbClr val="CCCCCC"/>
-                      </a:solidFill>
-                      <a:prstDash val="solid"/>
-                      <a:round/>
-                      <a:headEnd type="none" w="med" len="med"/>
-                      <a:tailEnd type="none" w="med" len="med"/>
-                    </a:lnL>
-                    <a:lnR w="6350" cap="flat" cmpd="sng" algn="ctr">
-                      <a:solidFill>
-                        <a:srgbClr val="CCCCCC"/>
-                      </a:solidFill>
-                      <a:prstDash val="solid"/>
-                      <a:round/>
-                      <a:headEnd type="none" w="med" len="med"/>
-                      <a:tailEnd type="none" w="med" len="med"/>
-                    </a:lnR>
-                    <a:lnT w="6350" cap="flat" cmpd="sng" algn="ctr">
-                      <a:solidFill>
-                        <a:srgbClr val="CCCCCC"/>
-                      </a:solidFill>
-                      <a:prstDash val="solid"/>
-                      <a:round/>
-                      <a:headEnd type="none" w="med" len="med"/>
-                      <a:tailEnd type="none" w="med" len="med"/>
-                    </a:lnT>
-                    <a:lnB w="6350" cap="flat" cmpd="sng" algn="ctr">
-                      <a:solidFill>
-                        <a:srgbClr val="CCCCCC"/>
-                      </a:solidFill>
-                      <a:prstDash val="solid"/>
-                      <a:round/>
-                      <a:headEnd type="none" w="med" len="med"/>
-                      <a:tailEnd type="none" w="med" len="med"/>
-                    </a:lnB>
-                    <a:solidFill>
-                      <a:srgbClr val="FFFFFF"/>
-                    </a:solidFill>
-                  </a:tcPr>
-                </a:tc>
-                <a:tc>
-                  <a:txBody>
-                    <a:bodyPr/>
-                    <a:lstStyle/>
-                    <a:p>
-                      <a:pPr algn="ctr" indent="0" marL="0">
-                        <a:buNone/>
-                      </a:pPr>
-                      <a:r>
-                        <a:rPr lang="en-US" sz="800" dirty="0">
-                          <a:solidFill>
-                            <a:srgbClr val="000000"/>
-                          </a:solidFill>
-                          <a:latin typeface="Arial" pitchFamily="34" charset="0"/>
-                          <a:ea typeface="Arial" pitchFamily="34" charset="-122"/>
-                          <a:cs typeface="Arial" pitchFamily="34" charset="-120"/>
-                        </a:rPr>
-                        <a:t>7.00/10</a:t>
-                      </a:r>
-                      <a:endParaRPr lang="en-US" sz="800" dirty="0">
-                        <a:latin typeface="Arial" charset="0"/>
-                        <a:ea typeface="Arial" charset="0"/>
-                        <a:cs typeface="Arial" charset="0"/>
-                      </a:endParaRPr>
-                    </a:p>
-                  </a:txBody>
-                  <a:tcPr marL="91440" marR="91440" marT="45720" marB="45720">
-                    <a:lnL w="6350" cap="flat" cmpd="sng" algn="ctr">
-                      <a:solidFill>
-                        <a:srgbClr val="CCCCCC"/>
-                      </a:solidFill>
-                      <a:prstDash val="solid"/>
-                      <a:round/>
-                      <a:headEnd type="none" w="med" len="med"/>
-                      <a:tailEnd type="none" w="med" len="med"/>
-                    </a:lnL>
-                    <a:lnR w="6350" cap="flat" cmpd="sng" algn="ctr">
-                      <a:solidFill>
-                        <a:srgbClr val="CCCCCC"/>
-                      </a:solidFill>
-                      <a:prstDash val="solid"/>
-                      <a:round/>
-                      <a:headEnd type="none" w="med" len="med"/>
-                      <a:tailEnd type="none" w="med" len="med"/>
-                    </a:lnR>
-                    <a:lnT w="6350" cap="flat" cmpd="sng" algn="ctr">
-                      <a:solidFill>
-                        <a:srgbClr val="CCCCCC"/>
-                      </a:solidFill>
-                      <a:prstDash val="solid"/>
-                      <a:round/>
-                      <a:headEnd type="none" w="med" len="med"/>
-                      <a:tailEnd type="none" w="med" len="med"/>
-                    </a:lnT>
-                    <a:lnB w="6350" cap="flat" cmpd="sng" algn="ctr">
-                      <a:solidFill>
-                        <a:srgbClr val="CCCCCC"/>
-                      </a:solidFill>
-                      <a:prstDash val="solid"/>
-                      <a:round/>
-                      <a:headEnd type="none" w="med" len="med"/>
-                      <a:tailEnd type="none" w="med" len="med"/>
-                    </a:lnB>
-                    <a:solidFill>
-                      <a:srgbClr val="FFFFFF"/>
-                    </a:solidFill>
-                  </a:tcPr>
-                </a:tc>
-                <a:tc>
-                  <a:txBody>
-                    <a:bodyPr/>
-                    <a:lstStyle/>
-                    <a:p>
-                      <a:pPr algn="ctr" indent="0" marL="0">
-                        <a:buNone/>
-                      </a:pPr>
-                      <a:r>
-                        <a:rPr lang="en-US" sz="800" dirty="0">
-                          <a:solidFill>
-                            <a:srgbClr val="000000"/>
-                          </a:solidFill>
-                          <a:latin typeface="Arial" pitchFamily="34" charset="0"/>
-                          <a:ea typeface="Arial" pitchFamily="34" charset="-122"/>
-                          <a:cs typeface="Arial" pitchFamily="34" charset="-120"/>
-                        </a:rPr>
-                        <a:t>7.00</a:t>
+                        <a:t>7.10</a:t>
                       </a:r>
                       <a:endParaRPr lang="en-US" sz="800" dirty="0">
                         <a:latin typeface="Arial" charset="0"/>
@@ -6629,7 +6270,7 @@
                 <a:ea typeface="Arial" pitchFamily="34" charset="-122"/>
                 <a:cs typeface="Arial" pitchFamily="34" charset="-120"/>
               </a:rPr>
-              <a:t>106件（81.5%）</a:t>
+              <a:t>110件（81.5%）</a:t>
             </a:r>
             <a:endParaRPr lang="en-US" sz="1600" dirty="0"/>
           </a:p>
@@ -6727,7 +6368,7 @@
                 <a:ea typeface="Arial" pitchFamily="34" charset="-122"/>
                 <a:cs typeface="Arial" pitchFamily="34" charset="-120"/>
               </a:rPr>
-              <a:t>22件（16.9%）</a:t>
+              <a:t>23件（17.0%）</a:t>
             </a:r>
             <a:endParaRPr lang="en-US" sz="1600" dirty="0"/>
           </a:p>
@@ -6987,7 +6628,7 @@
                 <a:ea typeface="Arial" pitchFamily="34" charset="-122"/>
                 <a:cs typeface="Arial" pitchFamily="34" charset="-120"/>
               </a:rPr>
-              <a:t>高評価レビュー（8-10点: 106件）の分析から、主要な強みテーマを抽出しています。立地・アクセス、客室清潔感、スタッフ対応が高評価の中心的テーマです。</a:t>
+              <a:t>高評価レビュー（8-10点: 110件）の分析から、主要な強みテーマを抽出しています。立地・アクセス、客室清潔感、スタッフ対応が高評価の中心的テーマです。</a:t>
             </a:r>
             <a:endParaRPr lang="en-US" sz="1200" dirty="0"/>
           </a:p>
@@ -7247,7 +6888,7 @@
                 <a:ea typeface="Arial" pitchFamily="34" charset="-122"/>
                 <a:cs typeface="Arial" pitchFamily="34" charset="-120"/>
               </a:rPr>
-              <a:t>低評価・中評価レビュー（24件）から改善課題を優先度別に整理しています。S/A/B/Cの4段階で優先度を設定し、計画的な改善を推進します。</a:t>
+              <a:t>低評価・中評価レビュー（25件）から改善課題を優先度別に整理しています。S/A/B/Cの4段階で優先度を設定し、計画的な改善を推進します。</a:t>
             </a:r>
             <a:endParaRPr lang="en-US" sz="1200" dirty="0"/>
           </a:p>
@@ -8027,7 +7668,7 @@
                 <a:ea typeface="Arial" pitchFamily="34" charset="-122"/>
                 <a:cs typeface="Arial" pitchFamily="34" charset="-120"/>
               </a:rPr>
-              <a:t>全体平均 8.68点 → 目標 9.18点</a:t>
+              <a:t>全体平均 8.67点 → 目標 9.17点</a:t>
             </a:r>
             <a:endParaRPr lang="en-US" sz="1200" dirty="0"/>
           </a:p>

--- a/納品レポート/ホテル別レポート/kawasaki_nikko_口コミ分析レポート.pptx
+++ b/納品レポート/ホテル別レポート/kawasaki_nikko_口コミ分析レポート.pptx
@@ -263,13 +263,13 @@
                   <c:v>9.58</c:v>
                 </c:pt>
                 <c:pt idx="1">
-                  <c:v>9</c:v>
+                  <c:v>9.43</c:v>
                 </c:pt>
                 <c:pt idx="2">
                   <c:v>8.86</c:v>
                 </c:pt>
                 <c:pt idx="3">
-                  <c:v>8.65</c:v>
+                  <c:v>8.64</c:v>
                 </c:pt>
                 <c:pt idx="4">
                   <c:v>7.1</c:v>
@@ -603,13 +603,13 @@
                   <c:v>26</c:v>
                 </c:pt>
                 <c:pt idx="2">
-                  <c:v>27</c:v>
+                  <c:v>28</c:v>
                 </c:pt>
                 <c:pt idx="3">
                   <c:v>9</c:v>
                 </c:pt>
                 <c:pt idx="4">
-                  <c:v>13</c:v>
+                  <c:v>12</c:v>
                 </c:pt>
                 <c:pt idx="5">
                   <c:v>1</c:v>
@@ -2783,7 +2783,7 @@
                 <a:ea typeface="Arial" pitchFamily="34" charset="-122"/>
                 <a:cs typeface="Arial" pitchFamily="34" charset="-120"/>
               </a:rPr>
-              <a:t>川崎日航ホテルは全体平均8.67点（10pt換算）、高評価率81.5%を達成しています。本レポートで示した改善施策を段階的に実施することで、さらなる顧客満足度向上が期待できます。</a:t>
+              <a:t>川崎日航ホテルは全体平均8.68点（10pt換算）、高評価率82.2%を達成しています。本レポートで示した改善施策を段階的に実施することで、さらなる顧客満足度向上が期待できます。</a:t>
             </a:r>
             <a:endParaRPr lang="en-US" sz="1200" dirty="0"/>
           </a:p>
@@ -3220,7 +3220,7 @@
                 <a:ea typeface="Arial" pitchFamily="34" charset="-122"/>
                 <a:cs typeface="Arial" pitchFamily="34" charset="-120"/>
               </a:rPr>
-              <a:t>8.67</a:t>
+              <a:t>8.68</a:t>
             </a:r>
             <a:endParaRPr lang="en-US" sz="2800" dirty="0"/>
           </a:p>
@@ -3338,7 +3338,7 @@
                 <a:ea typeface="Arial" pitchFamily="34" charset="-122"/>
                 <a:cs typeface="Arial" pitchFamily="34" charset="-120"/>
               </a:rPr>
-              <a:t>81.5%</a:t>
+              <a:t>82.2%</a:t>
             </a:r>
             <a:endParaRPr lang="en-US" sz="2800" dirty="0"/>
           </a:p>
@@ -4655,7 +4655,7 @@
                           <a:ea typeface="Arial" pitchFamily="34" charset="-122"/>
                           <a:cs typeface="Arial" pitchFamily="34" charset="-120"/>
                         </a:rPr>
-                        <a:t>8</a:t>
+                        <a:t>7</a:t>
                       </a:r>
                       <a:endParaRPr lang="en-US" sz="800" dirty="0">
                         <a:latin typeface="Arial" charset="0"/>
@@ -4723,7 +4723,7 @@
                           <a:ea typeface="Arial" pitchFamily="34" charset="-122"/>
                           <a:cs typeface="Arial" pitchFamily="34" charset="-120"/>
                         </a:rPr>
-                        <a:t>4.50/5</a:t>
+                        <a:t>4.71/5</a:t>
                       </a:r>
                       <a:endParaRPr lang="en-US" sz="800" dirty="0">
                         <a:latin typeface="Arial" charset="0"/>
@@ -4791,7 +4791,7 @@
                           <a:ea typeface="Arial" pitchFamily="34" charset="-122"/>
                           <a:cs typeface="Arial" pitchFamily="34" charset="-120"/>
                         </a:rPr>
-                        <a:t>9.00</a:t>
+                        <a:t>9.43</a:t>
                       </a:r>
                       <a:endParaRPr lang="en-US" sz="800" dirty="0">
                         <a:latin typeface="Arial" charset="0"/>
@@ -5339,7 +5339,7 @@
                           <a:ea typeface="Arial" pitchFamily="34" charset="-122"/>
                           <a:cs typeface="Arial" pitchFamily="34" charset="-120"/>
                         </a:rPr>
-                        <a:t>69</a:t>
+                        <a:t>70</a:t>
                       </a:r>
                       <a:endParaRPr lang="en-US" sz="800" dirty="0">
                         <a:latin typeface="Arial" charset="0"/>
@@ -5407,7 +5407,7 @@
                           <a:ea typeface="Arial" pitchFamily="34" charset="-122"/>
                           <a:cs typeface="Arial" pitchFamily="34" charset="-120"/>
                         </a:rPr>
-                        <a:t>8.65/10</a:t>
+                        <a:t>8.64/10</a:t>
                       </a:r>
                       <a:endParaRPr lang="en-US" sz="800" dirty="0">
                         <a:latin typeface="Arial" charset="0"/>
@@ -5475,7 +5475,7 @@
                           <a:ea typeface="Arial" pitchFamily="34" charset="-122"/>
                           <a:cs typeface="Arial" pitchFamily="34" charset="-120"/>
                         </a:rPr>
-                        <a:t>8.65</a:t>
+                        <a:t>8.64</a:t>
                       </a:r>
                       <a:endParaRPr lang="en-US" sz="800" dirty="0">
                         <a:latin typeface="Arial" charset="0"/>
@@ -6270,7 +6270,7 @@
                 <a:ea typeface="Arial" pitchFamily="34" charset="-122"/>
                 <a:cs typeface="Arial" pitchFamily="34" charset="-120"/>
               </a:rPr>
-              <a:t>110件（81.5%）</a:t>
+              <a:t>111件（82.2%）</a:t>
             </a:r>
             <a:endParaRPr lang="en-US" sz="1600" dirty="0"/>
           </a:p>
@@ -6368,7 +6368,7 @@
                 <a:ea typeface="Arial" pitchFamily="34" charset="-122"/>
                 <a:cs typeface="Arial" pitchFamily="34" charset="-120"/>
               </a:rPr>
-              <a:t>23件（17.0%）</a:t>
+              <a:t>22件（16.3%）</a:t>
             </a:r>
             <a:endParaRPr lang="en-US" sz="1600" dirty="0"/>
           </a:p>
@@ -6628,7 +6628,7 @@
                 <a:ea typeface="Arial" pitchFamily="34" charset="-122"/>
                 <a:cs typeface="Arial" pitchFamily="34" charset="-120"/>
               </a:rPr>
-              <a:t>高評価レビュー（8-10点: 110件）の分析から、主要な強みテーマを抽出しています。立地・アクセス、客室清潔感、スタッフ対応が高評価の中心的テーマです。</a:t>
+              <a:t>高評価レビュー（8-10点: 111件）の分析から、主要な強みテーマを抽出しています。立地・アクセス、客室清潔感、スタッフ対応が高評価の中心的テーマです。</a:t>
             </a:r>
             <a:endParaRPr lang="en-US" sz="1200" dirty="0"/>
           </a:p>
@@ -6888,7 +6888,7 @@
                 <a:ea typeface="Arial" pitchFamily="34" charset="-122"/>
                 <a:cs typeface="Arial" pitchFamily="34" charset="-120"/>
               </a:rPr>
-              <a:t>低評価・中評価レビュー（25件）から改善課題を優先度別に整理しています。S/A/B/Cの4段階で優先度を設定し、計画的な改善を推進します。</a:t>
+              <a:t>低評価・中評価レビュー（24件）から改善課題を優先度別に整理しています。S/A/B/Cの4段階で優先度を設定し、計画的な改善を推進します。</a:t>
             </a:r>
             <a:endParaRPr lang="en-US" sz="1200" dirty="0"/>
           </a:p>
@@ -7668,7 +7668,7 @@
                 <a:ea typeface="Arial" pitchFamily="34" charset="-122"/>
                 <a:cs typeface="Arial" pitchFamily="34" charset="-120"/>
               </a:rPr>
-              <a:t>全体平均 8.67点 → 目標 9.17点</a:t>
+              <a:t>全体平均 8.68点 → 目標 9.18点</a:t>
             </a:r>
             <a:endParaRPr lang="en-US" sz="1200" dirty="0"/>
           </a:p>
@@ -7685,7 +7685,7 @@
                 <a:ea typeface="Arial" pitchFamily="34" charset="-122"/>
                 <a:cs typeface="Arial" pitchFamily="34" charset="-120"/>
               </a:rPr>
-              <a:t>高評価率 81.5% → 目標 86.5%</a:t>
+              <a:t>高評価率 82.2% → 目標 87.2%</a:t>
             </a:r>
             <a:endParaRPr lang="en-US" sz="1200" dirty="0"/>
           </a:p>

--- a/納品レポート/ホテル別レポート/kawasaki_nikko_口コミ分析レポート.pptx
+++ b/納品レポート/ホテル別レポート/kawasaki_nikko_口コミ分析レポート.pptx
@@ -241,10 +241,10 @@
                     <c:v>じゃらん</c:v>
                   </c:pt>
                   <c:pt idx="2">
-                    <c:v>楽天トラベル</c:v>
+                    <c:v>Booking.com</c:v>
                   </c:pt>
                   <c:pt idx="3">
-                    <c:v>Booking.com</c:v>
+                    <c:v>楽天トラベル</c:v>
                   </c:pt>
                   <c:pt idx="4">
                     <c:v>Google</c:v>
@@ -260,16 +260,16 @@
                 <c:formatCode>General</c:formatCode>
                 <c:ptCount val="5"/>
                 <c:pt idx="0">
-                  <c:v>9.58</c:v>
+                  <c:v>9.5</c:v>
                 </c:pt>
                 <c:pt idx="1">
                   <c:v>9.43</c:v>
                 </c:pt>
                 <c:pt idx="2">
-                  <c:v>8.86</c:v>
+                  <c:v>8.63</c:v>
                 </c:pt>
                 <c:pt idx="3">
-                  <c:v>8.64</c:v>
+                  <c:v>8.44</c:v>
                 </c:pt>
                 <c:pt idx="4">
                   <c:v>7.1</c:v>
@@ -559,11 +559,22 @@
               <a:effectLst/>
             </c:spPr>
           </c:dPt>
+          <c:dPt>
+            <c:idx val="7"/>
+            <c:invertIfNegative val="0"/>
+            <c:bubble3D val="0"/>
+            <c:spPr>
+              <a:solidFill>
+                <a:srgbClr val="DC2626"/>
+              </a:solidFill>
+              <a:effectLst/>
+            </c:spPr>
+          </c:dPt>
           <c:cat>
             <c:multiLvlStrRef>
-              <c:f>Sheet1!$A$2:$A$8</c:f>
+              <c:f>Sheet1!$A$2:$A$9</c:f>
               <c:multiLvlStrCache>
-                <c:ptCount val="7"/>
+                <c:ptCount val="8"/>
                 <c:lvl>
                   <c:pt idx="0">
                     <c:v>10点</c:v>
@@ -584,6 +595,9 @@
                     <c:v>5点</c:v>
                   </c:pt>
                   <c:pt idx="6">
+                    <c:v>4点</c:v>
+                  </c:pt>
+                  <c:pt idx="7">
                     <c:v>2点</c:v>
                   </c:pt>
                 </c:lvl>
@@ -592,21 +606,21 @@
           </c:cat>
           <c:val>
             <c:numRef>
-              <c:f>Sheet1!$B$2:$B$8</c:f>
+              <c:f>Sheet1!$B$2:$B$9</c:f>
               <c:numCache>
                 <c:formatCode>General</c:formatCode>
-                <c:ptCount val="7"/>
+                <c:ptCount val="8"/>
                 <c:pt idx="0">
-                  <c:v>57</c:v>
+                  <c:v>58</c:v>
                 </c:pt>
                 <c:pt idx="1">
-                  <c:v>26</c:v>
+                  <c:v>24</c:v>
                 </c:pt>
                 <c:pt idx="2">
                   <c:v>28</c:v>
                 </c:pt>
                 <c:pt idx="3">
-                  <c:v>9</c:v>
+                  <c:v>10</c:v>
                 </c:pt>
                 <c:pt idx="4">
                   <c:v>12</c:v>
@@ -615,6 +629,9 @@
                   <c:v>1</c:v>
                 </c:pt>
                 <c:pt idx="6">
+                  <c:v>1</c:v>
+                </c:pt>
+                <c:pt idx="7">
                   <c:v>2</c:v>
                 </c:pt>
               </c:numCache>
@@ -2503,7 +2520,7 @@
                 <a:ea typeface="Arial" pitchFamily="34" charset="-122"/>
                 <a:cs typeface="Arial" pitchFamily="34" charset="-120"/>
               </a:rPr>
-              <a:t>レビュー総数：135件</a:t>
+              <a:t>レビュー総数：136件</a:t>
             </a:r>
             <a:endParaRPr lang="en-US" sz="1000" dirty="0"/>
           </a:p>
@@ -2783,7 +2800,7 @@
                 <a:ea typeface="Arial" pitchFamily="34" charset="-122"/>
                 <a:cs typeface="Arial" pitchFamily="34" charset="-120"/>
               </a:rPr>
-              <a:t>川崎日航ホテルは全体平均8.68点（10pt換算）、高評価率82.2%を達成しています。本レポートで示した改善施策を段階的に実施することで、さらなる顧客満足度向上が期待できます。</a:t>
+              <a:t>川崎日航ホテルは全体平均8.64点（10pt換算）、高評価率80.9%を達成しています。本レポートで示した改善施策を段階的に実施することで、さらなる顧客満足度向上が期待できます。</a:t>
             </a:r>
             <a:endParaRPr lang="en-US" sz="1200" dirty="0"/>
           </a:p>
@@ -3220,7 +3237,7 @@
                 <a:ea typeface="Arial" pitchFamily="34" charset="-122"/>
                 <a:cs typeface="Arial" pitchFamily="34" charset="-120"/>
               </a:rPr>
-              <a:t>8.68</a:t>
+              <a:t>8.64</a:t>
             </a:r>
             <a:endParaRPr lang="en-US" sz="2800" dirty="0"/>
           </a:p>
@@ -3338,7 +3355,7 @@
                 <a:ea typeface="Arial" pitchFamily="34" charset="-122"/>
                 <a:cs typeface="Arial" pitchFamily="34" charset="-120"/>
               </a:rPr>
-              <a:t>82.2%</a:t>
+              <a:t>80.9%</a:t>
             </a:r>
             <a:endParaRPr lang="en-US" sz="2800" dirty="0"/>
           </a:p>
@@ -3456,7 +3473,7 @@
                 <a:ea typeface="Arial" pitchFamily="34" charset="-122"/>
                 <a:cs typeface="Arial" pitchFamily="34" charset="-120"/>
               </a:rPr>
-              <a:t>1.5%</a:t>
+              <a:t>2.2%</a:t>
             </a:r>
             <a:endParaRPr lang="en-US" sz="2800" dirty="0"/>
           </a:p>
@@ -3574,7 +3591,7 @@
                 <a:ea typeface="Arial" pitchFamily="34" charset="-122"/>
                 <a:cs typeface="Arial" pitchFamily="34" charset="-120"/>
               </a:rPr>
-              <a:t>135件</a:t>
+              <a:t>136件</a:t>
             </a:r>
             <a:endParaRPr lang="en-US" sz="2800" dirty="0"/>
           </a:p>
@@ -4313,7 +4330,7 @@
                           <a:ea typeface="Arial" pitchFamily="34" charset="-122"/>
                           <a:cs typeface="Arial" pitchFamily="34" charset="-120"/>
                         </a:rPr>
-                        <a:t>31</a:t>
+                        <a:t>32</a:t>
                       </a:r>
                       <a:endParaRPr lang="en-US" sz="800" dirty="0">
                         <a:latin typeface="Arial" charset="0"/>
@@ -4381,7 +4398,7 @@
                           <a:ea typeface="Arial" pitchFamily="34" charset="-122"/>
                           <a:cs typeface="Arial" pitchFamily="34" charset="-120"/>
                         </a:rPr>
-                        <a:t>9.58/10</a:t>
+                        <a:t>9.50/10</a:t>
                       </a:r>
                       <a:endParaRPr lang="en-US" sz="800" dirty="0">
                         <a:latin typeface="Arial" charset="0"/>
@@ -4449,7 +4466,7 @@
                           <a:ea typeface="Arial" pitchFamily="34" charset="-122"/>
                           <a:cs typeface="Arial" pitchFamily="34" charset="-120"/>
                         </a:rPr>
-                        <a:t>9.58</a:t>
+                        <a:t>9.50</a:t>
                       </a:r>
                       <a:endParaRPr lang="en-US" sz="800" dirty="0">
                         <a:latin typeface="Arial" charset="0"/>
@@ -4929,7 +4946,7 @@
                           <a:ea typeface="Arial" pitchFamily="34" charset="-122"/>
                           <a:cs typeface="Arial" pitchFamily="34" charset="-120"/>
                         </a:rPr>
-                        <a:t>楽天トラベル</a:t>
+                        <a:t>Booking.com</a:t>
                       </a:r>
                       <a:endParaRPr lang="en-US" sz="800" dirty="0">
                         <a:latin typeface="Arial" charset="0"/>
@@ -4997,7 +5014,7 @@
                           <a:ea typeface="Arial" pitchFamily="34" charset="-122"/>
                           <a:cs typeface="Arial" pitchFamily="34" charset="-120"/>
                         </a:rPr>
-                        <a:t>7</a:t>
+                        <a:t>68</a:t>
                       </a:r>
                       <a:endParaRPr lang="en-US" sz="800" dirty="0">
                         <a:latin typeface="Arial" charset="0"/>
@@ -5065,7 +5082,7 @@
                           <a:ea typeface="Arial" pitchFamily="34" charset="-122"/>
                           <a:cs typeface="Arial" pitchFamily="34" charset="-120"/>
                         </a:rPr>
-                        <a:t>4.43/5</a:t>
+                        <a:t>8.63/10</a:t>
                       </a:r>
                       <a:endParaRPr lang="en-US" sz="800" dirty="0">
                         <a:latin typeface="Arial" charset="0"/>
@@ -5133,7 +5150,7 @@
                           <a:ea typeface="Arial" pitchFamily="34" charset="-122"/>
                           <a:cs typeface="Arial" pitchFamily="34" charset="-120"/>
                         </a:rPr>
-                        <a:t>8.86</a:t>
+                        <a:t>8.63</a:t>
                       </a:r>
                       <a:endParaRPr lang="en-US" sz="800" dirty="0">
                         <a:latin typeface="Arial" charset="0"/>
@@ -5271,7 +5288,7 @@
                           <a:ea typeface="Arial" pitchFamily="34" charset="-122"/>
                           <a:cs typeface="Arial" pitchFamily="34" charset="-120"/>
                         </a:rPr>
-                        <a:t>Booking.com</a:t>
+                        <a:t>楽天トラベル</a:t>
                       </a:r>
                       <a:endParaRPr lang="en-US" sz="800" dirty="0">
                         <a:latin typeface="Arial" charset="0"/>
@@ -5339,7 +5356,7 @@
                           <a:ea typeface="Arial" pitchFamily="34" charset="-122"/>
                           <a:cs typeface="Arial" pitchFamily="34" charset="-120"/>
                         </a:rPr>
-                        <a:t>70</a:t>
+                        <a:t>9</a:t>
                       </a:r>
                       <a:endParaRPr lang="en-US" sz="800" dirty="0">
                         <a:latin typeface="Arial" charset="0"/>
@@ -5407,7 +5424,7 @@
                           <a:ea typeface="Arial" pitchFamily="34" charset="-122"/>
                           <a:cs typeface="Arial" pitchFamily="34" charset="-120"/>
                         </a:rPr>
-                        <a:t>8.64/10</a:t>
+                        <a:t>4.22/5</a:t>
                       </a:r>
                       <a:endParaRPr lang="en-US" sz="800" dirty="0">
                         <a:latin typeface="Arial" charset="0"/>
@@ -5475,7 +5492,7 @@
                           <a:ea typeface="Arial" pitchFamily="34" charset="-122"/>
                           <a:cs typeface="Arial" pitchFamily="34" charset="-120"/>
                         </a:rPr>
-                        <a:t>8.64</a:t>
+                        <a:t>8.44</a:t>
                       </a:r>
                       <a:endParaRPr lang="en-US" sz="800" dirty="0">
                         <a:latin typeface="Arial" charset="0"/>
@@ -6270,7 +6287,7 @@
                 <a:ea typeface="Arial" pitchFamily="34" charset="-122"/>
                 <a:cs typeface="Arial" pitchFamily="34" charset="-120"/>
               </a:rPr>
-              <a:t>111件（82.2%）</a:t>
+              <a:t>110件（80.9%）</a:t>
             </a:r>
             <a:endParaRPr lang="en-US" sz="1600" dirty="0"/>
           </a:p>
@@ -6368,7 +6385,7 @@
                 <a:ea typeface="Arial" pitchFamily="34" charset="-122"/>
                 <a:cs typeface="Arial" pitchFamily="34" charset="-120"/>
               </a:rPr>
-              <a:t>22件（16.3%）</a:t>
+              <a:t>23件（16.9%）</a:t>
             </a:r>
             <a:endParaRPr lang="en-US" sz="1600" dirty="0"/>
           </a:p>
@@ -6466,7 +6483,7 @@
                 <a:ea typeface="Arial" pitchFamily="34" charset="-122"/>
                 <a:cs typeface="Arial" pitchFamily="34" charset="-120"/>
               </a:rPr>
-              <a:t>2件（1.5%）</a:t>
+              <a:t>3件（2.2%）</a:t>
             </a:r>
             <a:endParaRPr lang="en-US" sz="1600" dirty="0"/>
           </a:p>
@@ -6628,7 +6645,7 @@
                 <a:ea typeface="Arial" pitchFamily="34" charset="-122"/>
                 <a:cs typeface="Arial" pitchFamily="34" charset="-120"/>
               </a:rPr>
-              <a:t>高評価レビュー（8-10点: 111件）の分析から、主要な強みテーマを抽出しています。立地・アクセス、客室清潔感、スタッフ対応が高評価の中心的テーマです。</a:t>
+              <a:t>高評価レビュー（8-10点: 110件）の分析から、主要な強みテーマを抽出しています。立地・アクセス、客室清潔感、スタッフ対応が高評価の中心的テーマです。</a:t>
             </a:r>
             <a:endParaRPr lang="en-US" sz="1200" dirty="0"/>
           </a:p>
@@ -6888,7 +6905,7 @@
                 <a:ea typeface="Arial" pitchFamily="34" charset="-122"/>
                 <a:cs typeface="Arial" pitchFamily="34" charset="-120"/>
               </a:rPr>
-              <a:t>低評価・中評価レビュー（24件）から改善課題を優先度別に整理しています。S/A/B/Cの4段階で優先度を設定し、計画的な改善を推進します。</a:t>
+              <a:t>低評価・中評価レビュー（26件）から改善課題を優先度別に整理しています。S/A/B/Cの4段階で優先度を設定し、計画的な改善を推進します。</a:t>
             </a:r>
             <a:endParaRPr lang="en-US" sz="1200" dirty="0"/>
           </a:p>
@@ -7668,7 +7685,7 @@
                 <a:ea typeface="Arial" pitchFamily="34" charset="-122"/>
                 <a:cs typeface="Arial" pitchFamily="34" charset="-120"/>
               </a:rPr>
-              <a:t>全体平均 8.68点 → 目標 9.18点</a:t>
+              <a:t>全体平均 8.64点 → 目標 9.14点</a:t>
             </a:r>
             <a:endParaRPr lang="en-US" sz="1200" dirty="0"/>
           </a:p>
@@ -7685,7 +7702,7 @@
                 <a:ea typeface="Arial" pitchFamily="34" charset="-122"/>
                 <a:cs typeface="Arial" pitchFamily="34" charset="-120"/>
               </a:rPr>
-              <a:t>高評価率 82.2% → 目標 87.2%</a:t>
+              <a:t>高評価率 80.9% → 目標 85.9%</a:t>
             </a:r>
             <a:endParaRPr lang="en-US" sz="1200" dirty="0"/>
           </a:p>
@@ -7702,7 +7719,7 @@
                 <a:ea typeface="Arial" pitchFamily="34" charset="-122"/>
                 <a:cs typeface="Arial" pitchFamily="34" charset="-120"/>
               </a:rPr>
-              <a:t>低評価率 1.5% → 目標 0.0%</a:t>
+              <a:t>低評価率 2.2% → 目標 0.2%</a:t>
             </a:r>
             <a:endParaRPr lang="en-US" sz="1200" dirty="0"/>
           </a:p>

--- a/納品レポート/ホテル別レポート/kawasaki_nikko_口コミ分析レポート.pptx
+++ b/納品レポート/ホテル別レポート/kawasaki_nikko_口コミ分析レポート.pptx
@@ -2795,7 +2795,7 @@
                 <a:ea typeface="Arial" pitchFamily="34" charset="-122"/>
                 <a:cs typeface="Arial" pitchFamily="34" charset="-120"/>
               </a:rPr>
-              <a:t>作成日：2026年4月2日</a:t>
+              <a:t>作成日：2026年4月5日</a:t>
             </a:r>
             <a:endParaRPr lang="en-US" sz="1000" dirty="0"/>
           </a:p>
@@ -5913,7 +5913,7 @@
                 <a:ea typeface="Arial" pitchFamily="34" charset="-122"/>
                 <a:cs typeface="Arial" pitchFamily="34" charset="-120"/>
               </a:rPr>
-              <a:t>  ホテルのフロントデスクの対応も良く、客室設備は清潔で整頓されており、快適な滞在ができます</a:t>
+              <a:t>  ホテルのフロントの対応も良く、客室設備は清潔で整頓されており、快適な滞在ができます</a:t>
             </a:r>
             <a:endParaRPr lang="en-US" sz="1100" dirty="0"/>
           </a:p>
@@ -5953,7 +5953,7 @@
                 <a:ea typeface="Arial" pitchFamily="34" charset="-122"/>
                 <a:cs typeface="Arial" pitchFamily="34" charset="-120"/>
               </a:rPr>
-              <a:t>  ホテルのフロントデスクの対応も良く、客室設備は清潔で整頓されており、快適な滞在ができます</a:t>
+              <a:t>  ホテルのフロントの対応も良く、客室設備は清潔で整頓されており、快適な滞在ができます</a:t>
             </a:r>
             <a:endParaRPr lang="en-US" sz="1100" dirty="0"/>
           </a:p>
@@ -10699,7 +10699,7 @@
                 <a:ea typeface="Arial" pitchFamily="34" charset="-122"/>
                 <a:cs typeface="Arial" pitchFamily="34" charset="-120"/>
               </a:rPr>
-              <a:t>ホテルのフロントデスクの対応も良く、客室設備は清潔で整頓されており、快適な滞在ができます</a:t>
+              <a:t>ホテルのフロントの対応も良く、客室設備は清潔で整頓されており、快適な滞在ができます</a:t>
             </a:r>
             <a:endParaRPr lang="en-US" sz="900" dirty="0"/>
           </a:p>
@@ -10922,7 +10922,7 @@
                 <a:ea typeface="Arial" pitchFamily="34" charset="-122"/>
                 <a:cs typeface="Arial" pitchFamily="34" charset="-120"/>
               </a:rPr>
-              <a:t>ホテルのフロントデスクの対応も良く、客室設備は清潔で整頓されており、快適な滞在ができます</a:t>
+              <a:t>ホテルのフロントの対応も良く、客室設備は清潔で整頓されており、快適な滞在ができます</a:t>
             </a:r>
             <a:endParaRPr lang="en-US" sz="900" dirty="0"/>
           </a:p>
@@ -11184,7 +11184,7 @@
                 <a:ea typeface="Arial" pitchFamily="34" charset="-122"/>
                 <a:cs typeface="Arial" pitchFamily="34" charset="-120"/>
               </a:rPr>
-              <a:t>「ホテルのフロントデスクの対応も良く、客室設備は清潔で整頓されており、快適な滞在ができます」</a:t>
+              <a:t>「ホテルのフロントの対応も良く、客室設備は清潔で整頓されており、快適な滞在ができます」</a:t>
             </a:r>
             <a:endParaRPr lang="en-US" sz="900" dirty="0"/>
           </a:p>

--- a/納品レポート/ホテル別レポート/kawasaki_nikko_口コミ分析レポート.pptx
+++ b/納品レポート/ホテル別レポート/kawasaki_nikko_口コミ分析レポート.pptx
@@ -205,19 +205,19 @@
                 <c:formatCode>General</c:formatCode>
                 <c:ptCount val="5"/>
                 <c:pt idx="0">
-                  <c:v>9.5</c:v>
+                  <c:v>9.33</c:v>
                 </c:pt>
                 <c:pt idx="1">
-                  <c:v>9.43</c:v>
+                  <c:v>9.33</c:v>
                 </c:pt>
                 <c:pt idx="2">
-                  <c:v>8.63</c:v>
+                  <c:v>8.72</c:v>
                 </c:pt>
                 <c:pt idx="3">
-                  <c:v>8.44</c:v>
+                  <c:v>8.57</c:v>
                 </c:pt>
                 <c:pt idx="4">
-                  <c:v>7.1</c:v>
+                  <c:v>6.25</c:v>
                 </c:pt>
               </c:numCache>
             </c:numRef>
@@ -560,10 +560,10 @@
               <c:numCache>
                 <c:ptCount val="3"/>
                 <c:pt idx="0">
-                  <c:v>110</c:v>
+                  <c:v>58</c:v>
                 </c:pt>
                 <c:pt idx="1">
-                  <c:v>23</c:v>
+                  <c:v>10</c:v>
                 </c:pt>
                 <c:pt idx="2">
                   <c:v>3</c:v>
@@ -735,7 +735,7 @@
             <c:bubble3D val="0"/>
             <c:spPr>
               <a:solidFill>
-                <a:srgbClr val="D4A843"/>
+                <a:srgbClr val="DC2626"/>
               </a:solidFill>
               <a:effectLst/>
             </c:spPr>
@@ -751,22 +751,11 @@
               <a:effectLst/>
             </c:spPr>
           </c:dPt>
-          <c:dPt>
-            <c:idx val="7"/>
-            <c:invertIfNegative val="0"/>
-            <c:bubble3D val="0"/>
-            <c:spPr>
-              <a:solidFill>
-                <a:srgbClr val="DC2626"/>
-              </a:solidFill>
-              <a:effectLst/>
-            </c:spPr>
-          </c:dPt>
           <c:cat>
             <c:multiLvlStrRef>
-              <c:f>Sheet1!$A$2:$A$9</c:f>
+              <c:f>Sheet1!$A$2:$A$8</c:f>
               <c:multiLvlStrCache>
-                <c:ptCount val="8"/>
+                <c:ptCount val="7"/>
                 <c:lvl>
                   <c:pt idx="0">
                     <c:v>10点</c:v>
@@ -784,12 +773,9 @@
                     <c:v>6点</c:v>
                   </c:pt>
                   <c:pt idx="5">
-                    <c:v>5点</c:v>
+                    <c:v>4点</c:v>
                   </c:pt>
                   <c:pt idx="6">
-                    <c:v>4点</c:v>
-                  </c:pt>
-                  <c:pt idx="7">
                     <c:v>2点</c:v>
                   </c:pt>
                 </c:lvl>
@@ -798,32 +784,29 @@
           </c:cat>
           <c:val>
             <c:numRef>
-              <c:f>Sheet1!$B$2:$B$9</c:f>
+              <c:f>Sheet1!$B$2:$B$8</c:f>
               <c:numCache>
                 <c:formatCode>General</c:formatCode>
-                <c:ptCount val="8"/>
+                <c:ptCount val="7"/>
                 <c:pt idx="0">
-                  <c:v>58</c:v>
+                  <c:v>33</c:v>
                 </c:pt>
                 <c:pt idx="1">
-                  <c:v>24</c:v>
+                  <c:v>11</c:v>
                 </c:pt>
                 <c:pt idx="2">
-                  <c:v>28</c:v>
+                  <c:v>14</c:v>
                 </c:pt>
                 <c:pt idx="3">
-                  <c:v>10</c:v>
+                  <c:v>6</c:v>
                 </c:pt>
                 <c:pt idx="4">
-                  <c:v>12</c:v>
+                  <c:v>4</c:v>
                 </c:pt>
                 <c:pt idx="5">
                   <c:v>1</c:v>
                 </c:pt>
                 <c:pt idx="6">
-                  <c:v>1</c:v>
-                </c:pt>
-                <c:pt idx="7">
                   <c:v>2</c:v>
                 </c:pt>
               </c:numCache>
@@ -2755,7 +2738,7 @@
                 <a:ea typeface="Arial" pitchFamily="34" charset="-122"/>
                 <a:cs typeface="Arial" pitchFamily="34" charset="-120"/>
               </a:rPr>
-              <a:t>分析対象期間：2026年2月〜3月</a:t>
+              <a:t>分析対象期間：2026年3月</a:t>
             </a:r>
             <a:endParaRPr lang="en-US" sz="1000" dirty="0"/>
           </a:p>
@@ -2775,7 +2758,7 @@
                 <a:ea typeface="Arial" pitchFamily="34" charset="-122"/>
                 <a:cs typeface="Arial" pitchFamily="34" charset="-120"/>
               </a:rPr>
-              <a:t>レビュー総数：136件（5サイト）</a:t>
+              <a:t>レビュー総数：71件（5サイト）</a:t>
             </a:r>
             <a:endParaRPr lang="en-US" sz="1000" dirty="0"/>
           </a:p>
@@ -3341,7 +3324,7 @@
                           <a:ea typeface="Arial" pitchFamily="34" charset="-122"/>
                           <a:cs typeface="Arial" pitchFamily="34" charset="-120"/>
                         </a:rPr>
-                        <a:t>8.64点</a:t>
+                        <a:t>8.66点</a:t>
                       </a:r>
                       <a:endParaRPr lang="en-US" sz="1000" dirty="0">
                         <a:latin typeface="Arial" charset="0"/>
@@ -3409,7 +3392,7 @@
                           <a:ea typeface="Arial" pitchFamily="34" charset="-122"/>
                           <a:cs typeface="Arial" pitchFamily="34" charset="-120"/>
                         </a:rPr>
-                        <a:t>8.9点以上</a:t>
+                        <a:t>9.0点以上</a:t>
                       </a:r>
                       <a:endParaRPr lang="en-US" sz="1000" dirty="0">
                         <a:latin typeface="Arial" charset="0"/>
@@ -3615,7 +3598,7 @@
                           <a:ea typeface="Arial" pitchFamily="34" charset="-122"/>
                           <a:cs typeface="Arial" pitchFamily="34" charset="-120"/>
                         </a:rPr>
-                        <a:t>80.9%</a:t>
+                        <a:t>81.7%</a:t>
                       </a:r>
                       <a:endParaRPr lang="en-US" sz="1000" dirty="0">
                         <a:latin typeface="Arial" charset="0"/>
@@ -3683,7 +3666,7 @@
                           <a:ea typeface="Arial" pitchFamily="34" charset="-122"/>
                           <a:cs typeface="Arial" pitchFamily="34" charset="-120"/>
                         </a:rPr>
-                        <a:t>86%以上</a:t>
+                        <a:t>87%以上</a:t>
                       </a:r>
                       <a:endParaRPr lang="en-US" sz="1000" dirty="0">
                         <a:latin typeface="Arial" charset="0"/>
@@ -3889,7 +3872,7 @@
                           <a:ea typeface="Arial" pitchFamily="34" charset="-122"/>
                           <a:cs typeface="Arial" pitchFamily="34" charset="-120"/>
                         </a:rPr>
-                        <a:t>2.2%</a:t>
+                        <a:t>4.2%</a:t>
                       </a:r>
                       <a:endParaRPr lang="en-US" sz="1000" dirty="0">
                         <a:latin typeface="Arial" charset="0"/>
@@ -3957,7 +3940,7 @@
                           <a:ea typeface="Arial" pitchFamily="34" charset="-122"/>
                           <a:cs typeface="Arial" pitchFamily="34" charset="-120"/>
                         </a:rPr>
-                        <a:t>0%以下</a:t>
+                        <a:t>1%以下</a:t>
                       </a:r>
                       <a:endParaRPr lang="en-US" sz="1000" dirty="0">
                         <a:latin typeface="Arial" charset="0"/>
@@ -4163,7 +4146,7 @@
                           <a:ea typeface="Arial" pitchFamily="34" charset="-122"/>
                           <a:cs typeface="Arial" pitchFamily="34" charset="-120"/>
                         </a:rPr>
-                        <a:t>7.1点</a:t>
+                        <a:t>6.3点</a:t>
                       </a:r>
                       <a:endParaRPr lang="en-US" sz="1000" dirty="0">
                         <a:latin typeface="Arial" charset="0"/>
@@ -4231,7 +4214,7 @@
                           <a:ea typeface="Arial" pitchFamily="34" charset="-122"/>
                           <a:cs typeface="Arial" pitchFamily="34" charset="-120"/>
                         </a:rPr>
-                        <a:t>8.1点以上</a:t>
+                        <a:t>7.3点以上</a:t>
                       </a:r>
                       <a:endParaRPr lang="en-US" sz="1000" dirty="0">
                         <a:latin typeface="Arial" charset="0"/>
@@ -4711,7 +4694,7 @@
                           <a:ea typeface="Arial" pitchFamily="34" charset="-122"/>
                           <a:cs typeface="Arial" pitchFamily="34" charset="-120"/>
                         </a:rPr>
-                        <a:t>約15件/期間</a:t>
+                        <a:t>約9件/期間</a:t>
                       </a:r>
                       <a:endParaRPr lang="en-US" sz="1000" dirty="0">
                         <a:latin typeface="Arial" charset="0"/>
@@ -4779,7 +4762,7 @@
                           <a:ea typeface="Arial" pitchFamily="34" charset="-122"/>
                           <a:cs typeface="Arial" pitchFamily="34" charset="-120"/>
                         </a:rPr>
-                        <a:t>7件以下</a:t>
+                        <a:t>4件以下</a:t>
                       </a:r>
                       <a:endParaRPr lang="en-US" sz="1000" dirty="0">
                         <a:latin typeface="Arial" charset="0"/>
@@ -5350,7 +5333,7 @@
                 <a:ea typeface="Arial" pitchFamily="34" charset="-122"/>
                 <a:cs typeface="Arial" pitchFamily="34" charset="-120"/>
               </a:rPr>
-              <a:t>8.64</a:t>
+              <a:t>8.66</a:t>
             </a:r>
             <a:endParaRPr lang="en-US" sz="3200" dirty="0"/>
           </a:p>
@@ -5475,7 +5458,7 @@
                 <a:ea typeface="Arial" pitchFamily="34" charset="-122"/>
                 <a:cs typeface="Arial" pitchFamily="34" charset="-120"/>
               </a:rPr>
-              <a:t>80.9%</a:t>
+              <a:t>81.7%</a:t>
             </a:r>
             <a:endParaRPr lang="en-US" sz="3200" dirty="0"/>
           </a:p>
@@ -5600,7 +5583,7 @@
                 <a:ea typeface="Arial" pitchFamily="34" charset="-122"/>
                 <a:cs typeface="Arial" pitchFamily="34" charset="-120"/>
               </a:rPr>
-              <a:t>2.2%</a:t>
+              <a:t>4.2%</a:t>
             </a:r>
             <a:endParaRPr lang="en-US" sz="3200" dirty="0"/>
           </a:p>
@@ -5725,7 +5708,7 @@
                 <a:ea typeface="Arial" pitchFamily="34" charset="-122"/>
                 <a:cs typeface="Arial" pitchFamily="34" charset="-120"/>
               </a:rPr>
-              <a:t>136件</a:t>
+              <a:t>71件</a:t>
             </a:r>
             <a:endParaRPr lang="en-US" sz="3200" dirty="0"/>
           </a:p>
@@ -6121,6 +6104,46 @@
                 <a:ea typeface="Arial" pitchFamily="34" charset="-122"/>
                 <a:cs typeface="Arial" pitchFamily="34" charset="-120"/>
               </a:rPr>
+              <a:t>窓・採光 </a:t>
+            </a:r>
+            <a:endParaRPr lang="en-US" sz="1100" dirty="0"/>
+          </a:p>
+          <a:p>
+            <a:pPr indent="0" marL="0">
+              <a:spcAft>
+                <a:spcPts val="200"/>
+              </a:spcAft>
+              <a:buNone/>
+            </a:pPr>
+            <a:r>
+              <a:rPr lang="en-US" sz="900" dirty="0">
+                <a:solidFill>
+                  <a:srgbClr val="64748B"/>
+                </a:solidFill>
+                <a:latin typeface="Arial" pitchFamily="34" charset="0"/>
+                <a:ea typeface="Arial" pitchFamily="34" charset="-122"/>
+                <a:cs typeface="Arial" pitchFamily="34" charset="-120"/>
+              </a:rPr>
+              <a:t>  19階は窓からは夜景がとても綺麗でした</a:t>
+            </a:r>
+            <a:endParaRPr lang="en-US" sz="1100" dirty="0"/>
+          </a:p>
+          <a:p>
+            <a:pPr indent="0" marL="0">
+              <a:spcAft>
+                <a:spcPts val="200"/>
+              </a:spcAft>
+              <a:buNone/>
+            </a:pPr>
+            <a:r>
+              <a:rPr lang="en-US" sz="1100" b="1" dirty="0">
+                <a:solidFill>
+                  <a:srgbClr val="334155"/>
+                </a:solidFill>
+                <a:latin typeface="Arial" pitchFamily="34" charset="0"/>
+                <a:ea typeface="Arial" pitchFamily="34" charset="-122"/>
+                <a:cs typeface="Arial" pitchFamily="34" charset="-120"/>
+              </a:rPr>
               <a:t>浴室・水回り </a:t>
             </a:r>
             <a:endParaRPr lang="en-US" sz="1100" dirty="0"/>
@@ -6142,46 +6165,6 @@
                 <a:cs typeface="Arial" pitchFamily="34" charset="-120"/>
               </a:rPr>
               <a:t>  ホテルは川崎駅のすぐそばに位置し、近くにはバスターミナルやショッピングモールがいくつかあり、水族館も隣接しているた...</a:t>
-            </a:r>
-            <a:endParaRPr lang="en-US" sz="1100" dirty="0"/>
-          </a:p>
-          <a:p>
-            <a:pPr indent="0" marL="0">
-              <a:spcAft>
-                <a:spcPts val="200"/>
-              </a:spcAft>
-              <a:buNone/>
-            </a:pPr>
-            <a:r>
-              <a:rPr lang="en-US" sz="1100" b="1" dirty="0">
-                <a:solidFill>
-                  <a:srgbClr val="334155"/>
-                </a:solidFill>
-                <a:latin typeface="Arial" pitchFamily="34" charset="0"/>
-                <a:ea typeface="Arial" pitchFamily="34" charset="-122"/>
-                <a:cs typeface="Arial" pitchFamily="34" charset="-120"/>
-              </a:rPr>
-              <a:t>防音性能 </a:t>
-            </a:r>
-            <a:endParaRPr lang="en-US" sz="1100" dirty="0"/>
-          </a:p>
-          <a:p>
-            <a:pPr indent="0" marL="0">
-              <a:spcAft>
-                <a:spcPts val="200"/>
-              </a:spcAft>
-              <a:buNone/>
-            </a:pPr>
-            <a:r>
-              <a:rPr lang="en-US" sz="900" dirty="0">
-                <a:solidFill>
-                  <a:srgbClr val="64748B"/>
-                </a:solidFill>
-                <a:latin typeface="Arial" pitchFamily="34" charset="0"/>
-                <a:ea typeface="Arial" pitchFamily="34" charset="-122"/>
-                <a:cs typeface="Arial" pitchFamily="34" charset="-120"/>
-              </a:rPr>
-              <a:t>  高層階からは電車の眺めが素晴らしく、とても良かったのですが、騒音に敏感な方には少し不快かもしれません</a:t>
             </a:r>
             <a:endParaRPr lang="en-US" sz="1100" dirty="0"/>
           </a:p>
@@ -6534,7 +6517,7 @@
                 <a:ea typeface="Arial" pitchFamily="34" charset="-122"/>
                 <a:cs typeface="Arial" pitchFamily="34" charset="-120"/>
               </a:rPr>
-              <a:t>8.64</a:t>
+              <a:t>8.66</a:t>
             </a:r>
             <a:endParaRPr lang="en-US" sz="3200" dirty="0"/>
           </a:p>
@@ -6659,7 +6642,7 @@
                 <a:ea typeface="Arial" pitchFamily="34" charset="-122"/>
                 <a:cs typeface="Arial" pitchFamily="34" charset="-120"/>
               </a:rPr>
-              <a:t>80.9%</a:t>
+              <a:t>81.7%</a:t>
             </a:r>
             <a:endParaRPr lang="en-US" sz="3200" dirty="0"/>
           </a:p>
@@ -6784,7 +6767,7 @@
                 <a:ea typeface="Arial" pitchFamily="34" charset="-122"/>
                 <a:cs typeface="Arial" pitchFamily="34" charset="-120"/>
               </a:rPr>
-              <a:t>2.2%</a:t>
+              <a:t>4.2%</a:t>
             </a:r>
             <a:endParaRPr lang="en-US" sz="3200" dirty="0"/>
           </a:p>
@@ -6909,7 +6892,7 @@
                 <a:ea typeface="Arial" pitchFamily="34" charset="-122"/>
                 <a:cs typeface="Arial" pitchFamily="34" charset="-120"/>
               </a:rPr>
-              <a:t>136件</a:t>
+              <a:t>71件</a:t>
             </a:r>
             <a:endParaRPr lang="en-US" sz="3200" dirty="0"/>
           </a:p>
@@ -7330,7 +7313,7 @@
                 <a:ea typeface="Arial" pitchFamily="34" charset="-122"/>
                 <a:cs typeface="Arial" pitchFamily="34" charset="-120"/>
               </a:rPr>
-              <a:t>Trip.com(9.50)が最高スコア。</a:t>
+              <a:t>じゃらん(9.33)が最高スコア。</a:t>
             </a:r>
             <a:endParaRPr lang="en-US" sz="1100" dirty="0"/>
           </a:p>
@@ -7379,7 +7362,7 @@
                 <a:ea typeface="Arial" pitchFamily="34" charset="-122"/>
                 <a:cs typeface="Arial" pitchFamily="34" charset="-120"/>
               </a:rPr>
-              <a:t>Google(7.1)が相対的に低い。口コミ返信の強化が急務</a:t>
+              <a:t>Google(6.3)が相対的に低い。口コミ返信の強化が急務</a:t>
             </a:r>
             <a:endParaRPr lang="en-US" sz="1100" dirty="0"/>
           </a:p>
@@ -7888,7 +7871,7 @@
                           <a:ea typeface="Arial" pitchFamily="34" charset="-122"/>
                           <a:cs typeface="Arial" pitchFamily="34" charset="-120"/>
                         </a:rPr>
-                        <a:t>32</a:t>
+                        <a:t>21</a:t>
                       </a:r>
                       <a:endParaRPr lang="en-US" sz="900" dirty="0">
                         <a:latin typeface="Arial" charset="0"/>
@@ -7956,7 +7939,7 @@
                           <a:ea typeface="Arial" pitchFamily="34" charset="-122"/>
                           <a:cs typeface="Arial" pitchFamily="34" charset="-120"/>
                         </a:rPr>
-                        <a:t>9.5</a:t>
+                        <a:t>9.33</a:t>
                       </a:r>
                       <a:endParaRPr lang="en-US" sz="900" dirty="0">
                         <a:latin typeface="Arial" charset="0"/>
@@ -8092,7 +8075,7 @@
                           <a:ea typeface="Arial" pitchFamily="34" charset="-122"/>
                           <a:cs typeface="Arial" pitchFamily="34" charset="-120"/>
                         </a:rPr>
-                        <a:t>9.5</a:t>
+                        <a:t>9.33</a:t>
                       </a:r>
                       <a:endParaRPr lang="en-US" sz="900" dirty="0">
                         <a:latin typeface="Arial" charset="0"/>
@@ -8230,7 +8213,7 @@
                           <a:ea typeface="Arial" pitchFamily="34" charset="-122"/>
                           <a:cs typeface="Arial" pitchFamily="34" charset="-120"/>
                         </a:rPr>
-                        <a:t>7</a:t>
+                        <a:t>6</a:t>
                       </a:r>
                       <a:endParaRPr lang="en-US" sz="900" dirty="0">
                         <a:latin typeface="Arial" charset="0"/>
@@ -8298,7 +8281,7 @@
                           <a:ea typeface="Arial" pitchFamily="34" charset="-122"/>
                           <a:cs typeface="Arial" pitchFamily="34" charset="-120"/>
                         </a:rPr>
-                        <a:t>4.71</a:t>
+                        <a:t>4.67</a:t>
                       </a:r>
                       <a:endParaRPr lang="en-US" sz="900" dirty="0">
                         <a:latin typeface="Arial" charset="0"/>
@@ -8434,7 +8417,7 @@
                           <a:ea typeface="Arial" pitchFamily="34" charset="-122"/>
                           <a:cs typeface="Arial" pitchFamily="34" charset="-120"/>
                         </a:rPr>
-                        <a:t>9.43</a:t>
+                        <a:t>9.33</a:t>
                       </a:r>
                       <a:endParaRPr lang="en-US" sz="900" dirty="0">
                         <a:latin typeface="Arial" charset="0"/>
@@ -8572,7 +8555,7 @@
                           <a:ea typeface="Arial" pitchFamily="34" charset="-122"/>
                           <a:cs typeface="Arial" pitchFamily="34" charset="-120"/>
                         </a:rPr>
-                        <a:t>68</a:t>
+                        <a:t>29</a:t>
                       </a:r>
                       <a:endParaRPr lang="en-US" sz="900" dirty="0">
                         <a:latin typeface="Arial" charset="0"/>
@@ -8640,7 +8623,7 @@
                           <a:ea typeface="Arial" pitchFamily="34" charset="-122"/>
                           <a:cs typeface="Arial" pitchFamily="34" charset="-120"/>
                         </a:rPr>
-                        <a:t>8.63</a:t>
+                        <a:t>8.72</a:t>
                       </a:r>
                       <a:endParaRPr lang="en-US" sz="900" dirty="0">
                         <a:latin typeface="Arial" charset="0"/>
@@ -8776,7 +8759,7 @@
                           <a:ea typeface="Arial" pitchFamily="34" charset="-122"/>
                           <a:cs typeface="Arial" pitchFamily="34" charset="-120"/>
                         </a:rPr>
-                        <a:t>8.63</a:t>
+                        <a:t>8.72</a:t>
                       </a:r>
                       <a:endParaRPr lang="en-US" sz="900" dirty="0">
                         <a:latin typeface="Arial" charset="0"/>
@@ -8914,7 +8897,7 @@
                           <a:ea typeface="Arial" pitchFamily="34" charset="-122"/>
                           <a:cs typeface="Arial" pitchFamily="34" charset="-120"/>
                         </a:rPr>
-                        <a:t>9</a:t>
+                        <a:t>7</a:t>
                       </a:r>
                       <a:endParaRPr lang="en-US" sz="900" dirty="0">
                         <a:latin typeface="Arial" charset="0"/>
@@ -8982,7 +8965,7 @@
                           <a:ea typeface="Arial" pitchFamily="34" charset="-122"/>
                           <a:cs typeface="Arial" pitchFamily="34" charset="-120"/>
                         </a:rPr>
-                        <a:t>4.22</a:t>
+                        <a:t>4.29</a:t>
                       </a:r>
                       <a:endParaRPr lang="en-US" sz="900" dirty="0">
                         <a:latin typeface="Arial" charset="0"/>
@@ -9118,7 +9101,7 @@
                           <a:ea typeface="Arial" pitchFamily="34" charset="-122"/>
                           <a:cs typeface="Arial" pitchFamily="34" charset="-120"/>
                         </a:rPr>
-                        <a:t>8.44</a:t>
+                        <a:t>8.57</a:t>
                       </a:r>
                       <a:endParaRPr lang="en-US" sz="900" dirty="0">
                         <a:latin typeface="Arial" charset="0"/>
@@ -9256,7 +9239,7 @@
                           <a:ea typeface="Arial" pitchFamily="34" charset="-122"/>
                           <a:cs typeface="Arial" pitchFamily="34" charset="-120"/>
                         </a:rPr>
-                        <a:t>20</a:t>
+                        <a:t>8</a:t>
                       </a:r>
                       <a:endParaRPr lang="en-US" sz="900" dirty="0">
                         <a:latin typeface="Arial" charset="0"/>
@@ -9324,7 +9307,7 @@
                           <a:ea typeface="Arial" pitchFamily="34" charset="-122"/>
                           <a:cs typeface="Arial" pitchFamily="34" charset="-120"/>
                         </a:rPr>
-                        <a:t>3.55</a:t>
+                        <a:t>3.12</a:t>
                       </a:r>
                       <a:endParaRPr lang="en-US" sz="900" dirty="0">
                         <a:latin typeface="Arial" charset="0"/>
@@ -9460,7 +9443,7 @@
                           <a:ea typeface="Arial" pitchFamily="34" charset="-122"/>
                           <a:cs typeface="Arial" pitchFamily="34" charset="-120"/>
                         </a:rPr>
-                        <a:t>7.1</a:t>
+                        <a:t>6.25</a:t>
                       </a:r>
                       <a:endParaRPr lang="en-US" sz="900" dirty="0">
                         <a:latin typeface="Arial" charset="0"/>
@@ -9868,7 +9851,7 @@
                 <a:ea typeface="Arial" pitchFamily="34" charset="-122"/>
                 <a:cs typeface="Arial" pitchFamily="34" charset="-120"/>
               </a:rPr>
-              <a:t>110件（80.9%）</a:t>
+              <a:t>58件（81.7%）</a:t>
             </a:r>
             <a:endParaRPr lang="en-US" sz="1100" dirty="0"/>
           </a:p>
@@ -9966,7 +9949,7 @@
                 <a:ea typeface="Arial" pitchFamily="34" charset="-122"/>
                 <a:cs typeface="Arial" pitchFamily="34" charset="-120"/>
               </a:rPr>
-              <a:t>23件（16.9%）</a:t>
+              <a:t>10件（14.1%）</a:t>
             </a:r>
             <a:endParaRPr lang="en-US" sz="1100" dirty="0"/>
           </a:p>
@@ -10064,7 +10047,7 @@
                 <a:ea typeface="Arial" pitchFamily="34" charset="-122"/>
                 <a:cs typeface="Arial" pitchFamily="34" charset="-120"/>
               </a:rPr>
-              <a:t>3件（2.2%）</a:t>
+              <a:t>3件（4.2%）</a:t>
             </a:r>
             <a:endParaRPr lang="en-US" sz="1100" dirty="0"/>
           </a:p>
@@ -10398,7 +10381,7 @@
                 <a:ea typeface="Arial" pitchFamily="34" charset="-122"/>
                 <a:cs typeface="Arial" pitchFamily="34" charset="-120"/>
               </a:rPr>
-              <a:t>50件+</a:t>
+              <a:t>20件+</a:t>
             </a:r>
             <a:endParaRPr lang="en-US" sz="900" dirty="0"/>
           </a:p>
@@ -10844,7 +10827,7 @@
                 <a:ea typeface="Arial" pitchFamily="34" charset="-122"/>
                 <a:cs typeface="Arial" pitchFamily="34" charset="-120"/>
               </a:rPr>
-              <a:t>20件+</a:t>
+              <a:t>10件+</a:t>
             </a:r>
             <a:endParaRPr lang="en-US" sz="900" dirty="0"/>
           </a:p>
@@ -11067,7 +11050,7 @@
                 <a:ea typeface="Arial" pitchFamily="34" charset="-122"/>
                 <a:cs typeface="Arial" pitchFamily="34" charset="-120"/>
               </a:rPr>
-              <a:t>20件+</a:t>
+              <a:t>10件+</a:t>
             </a:r>
             <a:endParaRPr lang="en-US" sz="900" dirty="0"/>
           </a:p>
@@ -11082,6 +11065,229 @@
         <p:spPr>
           <a:xfrm>
             <a:off x="594360" y="2953512"/>
+            <a:ext cx="1645920" cy="274320"/>
+          </a:xfrm>
+          <a:prstGeom prst="rect">
+            <a:avLst/>
+          </a:prstGeom>
+          <a:noFill/>
+          <a:ln/>
+        </p:spPr>
+        <p:txBody>
+          <a:bodyPr wrap="square" lIns="0" tIns="0" rIns="0" bIns="0" rtlCol="0" anchor="ctr"/>
+          <a:lstStyle/>
+          <a:p>
+            <a:pPr indent="0" marL="0">
+              <a:buNone/>
+            </a:pPr>
+            <a:r>
+              <a:rPr lang="en-US" sz="1300" b="1" dirty="0">
+                <a:solidFill>
+                  <a:srgbClr val="1A2744"/>
+                </a:solidFill>
+                <a:latin typeface="Arial" pitchFamily="34" charset="0"/>
+                <a:ea typeface="Arial" pitchFamily="34" charset="-122"/>
+                <a:cs typeface="Arial" pitchFamily="34" charset="-120"/>
+              </a:rPr>
+              <a:t>朝食</a:t>
+            </a:r>
+            <a:endParaRPr lang="en-US" sz="1300" dirty="0"/>
+          </a:p>
+        </p:txBody>
+      </p:sp>
+      <p:sp>
+        <p:nvSpPr>
+          <p:cNvPr id="31" name="Text 29"/>
+          <p:cNvSpPr/>
+          <p:nvPr/>
+        </p:nvSpPr>
+        <p:spPr>
+          <a:xfrm>
+            <a:off x="594360" y="3246120"/>
+            <a:ext cx="2377440" cy="365760"/>
+          </a:xfrm>
+          <a:prstGeom prst="rect">
+            <a:avLst/>
+          </a:prstGeom>
+          <a:noFill/>
+          <a:ln/>
+        </p:spPr>
+        <p:txBody>
+          <a:bodyPr wrap="square" lIns="0" tIns="0" rIns="0" bIns="0" rtlCol="0" anchor="ctr"/>
+          <a:lstStyle/>
+          <a:p>
+            <a:pPr indent="0" marL="0">
+              <a:buNone/>
+            </a:pPr>
+            <a:r>
+              <a:rPr lang="en-US" sz="900" dirty="0">
+                <a:solidFill>
+                  <a:srgbClr val="64748B"/>
+                </a:solidFill>
+                <a:latin typeface="Arial" pitchFamily="34" charset="0"/>
+                <a:ea typeface="Arial" pitchFamily="34" charset="-122"/>
+                <a:cs typeface="Arial" pitchFamily="34" charset="-120"/>
+              </a:rPr>
+              <a:t>朝食は種類豊富で、サービスも良く、部屋は静かで、立地も非常に便利です</a:t>
+            </a:r>
+            <a:endParaRPr lang="en-US" sz="900" dirty="0"/>
+          </a:p>
+        </p:txBody>
+      </p:sp>
+      <p:sp>
+        <p:nvSpPr>
+          <p:cNvPr id="32" name="Text 30"/>
+          <p:cNvSpPr/>
+          <p:nvPr/>
+        </p:nvSpPr>
+        <p:spPr>
+          <a:xfrm>
+            <a:off x="594360" y="3657600"/>
+            <a:ext cx="2377440" cy="640080"/>
+          </a:xfrm>
+          <a:prstGeom prst="rect">
+            <a:avLst/>
+          </a:prstGeom>
+          <a:noFill/>
+          <a:ln/>
+        </p:spPr>
+        <p:txBody>
+          <a:bodyPr wrap="square" lIns="0" tIns="0" rIns="0" bIns="0" rtlCol="0" anchor="ctr"/>
+          <a:lstStyle/>
+          <a:p>
+            <a:pPr indent="0" marL="0">
+              <a:buNone/>
+            </a:pPr>
+            <a:r>
+              <a:rPr lang="en-US" sz="900" i="1" dirty="0">
+                <a:solidFill>
+                  <a:srgbClr val="3B7DD8"/>
+                </a:solidFill>
+                <a:latin typeface="Arial" pitchFamily="34" charset="0"/>
+                <a:ea typeface="Arial" pitchFamily="34" charset="-122"/>
+                <a:cs typeface="Arial" pitchFamily="34" charset="-120"/>
+              </a:rPr>
+              <a:t>「朝食を1日追加で購入したのですが、フロントでその旨を伝えたら割引クーポンをもらえました」</a:t>
+            </a:r>
+            <a:endParaRPr lang="en-US" sz="900" dirty="0"/>
+          </a:p>
+        </p:txBody>
+      </p:sp>
+      <p:sp>
+        <p:nvSpPr>
+          <p:cNvPr id="33" name="Shape 31"/>
+          <p:cNvSpPr/>
+          <p:nvPr/>
+        </p:nvSpPr>
+        <p:spPr>
+          <a:xfrm>
+            <a:off x="3291840" y="2880360"/>
+            <a:ext cx="2651760" cy="1600200"/>
+          </a:xfrm>
+          <a:prstGeom prst="rect">
+            <a:avLst/>
+          </a:prstGeom>
+          <a:solidFill>
+            <a:srgbClr val="FFFFFF"/>
+          </a:solidFill>
+          <a:ln/>
+          <a:effectLst>
+            <a:outerShdw sx="100000" sy="100000" kx="0" ky="0" algn="bl" rotWithShape="0" blurRad="50800" dist="25400" dir="8100000">
+              <a:srgbClr val="000000">
+                <a:alpha val="10000"/>
+              </a:srgbClr>
+            </a:outerShdw>
+          </a:effectLst>
+        </p:spPr>
+      </p:sp>
+      <p:sp>
+        <p:nvSpPr>
+          <p:cNvPr id="34" name="Shape 32"/>
+          <p:cNvSpPr/>
+          <p:nvPr/>
+        </p:nvSpPr>
+        <p:spPr>
+          <a:xfrm>
+            <a:off x="3291840" y="2880360"/>
+            <a:ext cx="54864" cy="1600200"/>
+          </a:xfrm>
+          <a:prstGeom prst="rect">
+            <a:avLst/>
+          </a:prstGeom>
+          <a:solidFill>
+            <a:srgbClr val="16A34A"/>
+          </a:solidFill>
+          <a:ln/>
+        </p:spPr>
+      </p:sp>
+      <p:sp>
+        <p:nvSpPr>
+          <p:cNvPr id="35" name="Shape 33"/>
+          <p:cNvSpPr/>
+          <p:nvPr/>
+        </p:nvSpPr>
+        <p:spPr>
+          <a:xfrm>
+            <a:off x="5120640" y="2953512"/>
+            <a:ext cx="658368" cy="228600"/>
+          </a:xfrm>
+          <a:prstGeom prst="rect">
+            <a:avLst/>
+          </a:prstGeom>
+          <a:solidFill>
+            <a:srgbClr val="DCFCE7"/>
+          </a:solidFill>
+          <a:ln/>
+        </p:spPr>
+      </p:sp>
+      <p:sp>
+        <p:nvSpPr>
+          <p:cNvPr id="36" name="Text 34"/>
+          <p:cNvSpPr/>
+          <p:nvPr/>
+        </p:nvSpPr>
+        <p:spPr>
+          <a:xfrm>
+            <a:off x="5120640" y="2953512"/>
+            <a:ext cx="658368" cy="228600"/>
+          </a:xfrm>
+          <a:prstGeom prst="rect">
+            <a:avLst/>
+          </a:prstGeom>
+          <a:noFill/>
+          <a:ln/>
+        </p:spPr>
+        <p:txBody>
+          <a:bodyPr wrap="square" lIns="0" tIns="0" rIns="0" bIns="0" rtlCol="0" anchor="ctr"/>
+          <a:lstStyle/>
+          <a:p>
+            <a:pPr algn="ctr" indent="0" marL="0">
+              <a:buNone/>
+            </a:pPr>
+            <a:r>
+              <a:rPr lang="en-US" sz="900" b="1" dirty="0">
+                <a:solidFill>
+                  <a:srgbClr val="16A34A"/>
+                </a:solidFill>
+                <a:latin typeface="Arial" pitchFamily="34" charset="0"/>
+                <a:ea typeface="Arial" pitchFamily="34" charset="-122"/>
+                <a:cs typeface="Arial" pitchFamily="34" charset="-120"/>
+              </a:rPr>
+              <a:t>10件+</a:t>
+            </a:r>
+            <a:endParaRPr lang="en-US" sz="900" dirty="0"/>
+          </a:p>
+        </p:txBody>
+      </p:sp>
+      <p:sp>
+        <p:nvSpPr>
+          <p:cNvPr id="37" name="Text 35"/>
+          <p:cNvSpPr/>
+          <p:nvPr/>
+        </p:nvSpPr>
+        <p:spPr>
+          <a:xfrm>
+            <a:off x="3429000" y="2953512"/>
             <a:ext cx="1645920" cy="274320"/>
           </a:xfrm>
           <a:prstGeom prst="rect">
@@ -11114,13 +11320,13 @@
       </p:sp>
       <p:sp>
         <p:nvSpPr>
-          <p:cNvPr id="31" name="Text 29"/>
-          <p:cNvSpPr/>
-          <p:nvPr/>
-        </p:nvSpPr>
-        <p:spPr>
-          <a:xfrm>
-            <a:off x="594360" y="3246120"/>
+          <p:cNvPr id="38" name="Text 36"/>
+          <p:cNvSpPr/>
+          <p:nvPr/>
+        </p:nvSpPr>
+        <p:spPr>
+          <a:xfrm>
+            <a:off x="3429000" y="3246120"/>
             <a:ext cx="2377440" cy="365760"/>
           </a:xfrm>
           <a:prstGeom prst="rect">
@@ -11153,13 +11359,13 @@
       </p:sp>
       <p:sp>
         <p:nvSpPr>
-          <p:cNvPr id="32" name="Text 30"/>
-          <p:cNvSpPr/>
-          <p:nvPr/>
-        </p:nvSpPr>
-        <p:spPr>
-          <a:xfrm>
-            <a:off x="594360" y="3657600"/>
+          <p:cNvPr id="39" name="Text 37"/>
+          <p:cNvSpPr/>
+          <p:nvPr/>
+        </p:nvSpPr>
+        <p:spPr>
+          <a:xfrm>
+            <a:off x="3429000" y="3657600"/>
             <a:ext cx="2377440" cy="640080"/>
           </a:xfrm>
           <a:prstGeom prst="rect">
@@ -11185,229 +11391,6 @@
                 <a:cs typeface="Arial" pitchFamily="34" charset="-120"/>
               </a:rPr>
               <a:t>「ホテルのフロントの対応も良く、客室設備は清潔で整頓されており、快適な滞在ができます」</a:t>
-            </a:r>
-            <a:endParaRPr lang="en-US" sz="900" dirty="0"/>
-          </a:p>
-        </p:txBody>
-      </p:sp>
-      <p:sp>
-        <p:nvSpPr>
-          <p:cNvPr id="33" name="Shape 31"/>
-          <p:cNvSpPr/>
-          <p:nvPr/>
-        </p:nvSpPr>
-        <p:spPr>
-          <a:xfrm>
-            <a:off x="3291840" y="2880360"/>
-            <a:ext cx="2651760" cy="1600200"/>
-          </a:xfrm>
-          <a:prstGeom prst="rect">
-            <a:avLst/>
-          </a:prstGeom>
-          <a:solidFill>
-            <a:srgbClr val="FFFFFF"/>
-          </a:solidFill>
-          <a:ln/>
-          <a:effectLst>
-            <a:outerShdw sx="100000" sy="100000" kx="0" ky="0" algn="bl" rotWithShape="0" blurRad="50800" dist="25400" dir="8100000">
-              <a:srgbClr val="000000">
-                <a:alpha val="10000"/>
-              </a:srgbClr>
-            </a:outerShdw>
-          </a:effectLst>
-        </p:spPr>
-      </p:sp>
-      <p:sp>
-        <p:nvSpPr>
-          <p:cNvPr id="34" name="Shape 32"/>
-          <p:cNvSpPr/>
-          <p:nvPr/>
-        </p:nvSpPr>
-        <p:spPr>
-          <a:xfrm>
-            <a:off x="3291840" y="2880360"/>
-            <a:ext cx="54864" cy="1600200"/>
-          </a:xfrm>
-          <a:prstGeom prst="rect">
-            <a:avLst/>
-          </a:prstGeom>
-          <a:solidFill>
-            <a:srgbClr val="16A34A"/>
-          </a:solidFill>
-          <a:ln/>
-        </p:spPr>
-      </p:sp>
-      <p:sp>
-        <p:nvSpPr>
-          <p:cNvPr id="35" name="Shape 33"/>
-          <p:cNvSpPr/>
-          <p:nvPr/>
-        </p:nvSpPr>
-        <p:spPr>
-          <a:xfrm>
-            <a:off x="5120640" y="2953512"/>
-            <a:ext cx="658368" cy="228600"/>
-          </a:xfrm>
-          <a:prstGeom prst="rect">
-            <a:avLst/>
-          </a:prstGeom>
-          <a:solidFill>
-            <a:srgbClr val="DCFCE7"/>
-          </a:solidFill>
-          <a:ln/>
-        </p:spPr>
-      </p:sp>
-      <p:sp>
-        <p:nvSpPr>
-          <p:cNvPr id="36" name="Text 34"/>
-          <p:cNvSpPr/>
-          <p:nvPr/>
-        </p:nvSpPr>
-        <p:spPr>
-          <a:xfrm>
-            <a:off x="5120640" y="2953512"/>
-            <a:ext cx="658368" cy="228600"/>
-          </a:xfrm>
-          <a:prstGeom prst="rect">
-            <a:avLst/>
-          </a:prstGeom>
-          <a:noFill/>
-          <a:ln/>
-        </p:spPr>
-        <p:txBody>
-          <a:bodyPr wrap="square" lIns="0" tIns="0" rIns="0" bIns="0" rtlCol="0" anchor="ctr"/>
-          <a:lstStyle/>
-          <a:p>
-            <a:pPr algn="ctr" indent="0" marL="0">
-              <a:buNone/>
-            </a:pPr>
-            <a:r>
-              <a:rPr lang="en-US" sz="900" b="1" dirty="0">
-                <a:solidFill>
-                  <a:srgbClr val="16A34A"/>
-                </a:solidFill>
-                <a:latin typeface="Arial" pitchFamily="34" charset="0"/>
-                <a:ea typeface="Arial" pitchFamily="34" charset="-122"/>
-                <a:cs typeface="Arial" pitchFamily="34" charset="-120"/>
-              </a:rPr>
-              <a:t>20件+</a:t>
-            </a:r>
-            <a:endParaRPr lang="en-US" sz="900" dirty="0"/>
-          </a:p>
-        </p:txBody>
-      </p:sp>
-      <p:sp>
-        <p:nvSpPr>
-          <p:cNvPr id="37" name="Text 35"/>
-          <p:cNvSpPr/>
-          <p:nvPr/>
-        </p:nvSpPr>
-        <p:spPr>
-          <a:xfrm>
-            <a:off x="3429000" y="2953512"/>
-            <a:ext cx="1645920" cy="274320"/>
-          </a:xfrm>
-          <a:prstGeom prst="rect">
-            <a:avLst/>
-          </a:prstGeom>
-          <a:noFill/>
-          <a:ln/>
-        </p:spPr>
-        <p:txBody>
-          <a:bodyPr wrap="square" lIns="0" tIns="0" rIns="0" bIns="0" rtlCol="0" anchor="ctr"/>
-          <a:lstStyle/>
-          <a:p>
-            <a:pPr indent="0" marL="0">
-              <a:buNone/>
-            </a:pPr>
-            <a:r>
-              <a:rPr lang="en-US" sz="1300" b="1" dirty="0">
-                <a:solidFill>
-                  <a:srgbClr val="1A2744"/>
-                </a:solidFill>
-                <a:latin typeface="Arial" pitchFamily="34" charset="0"/>
-                <a:ea typeface="Arial" pitchFamily="34" charset="-122"/>
-                <a:cs typeface="Arial" pitchFamily="34" charset="-120"/>
-              </a:rPr>
-              <a:t>朝食</a:t>
-            </a:r>
-            <a:endParaRPr lang="en-US" sz="1300" dirty="0"/>
-          </a:p>
-        </p:txBody>
-      </p:sp>
-      <p:sp>
-        <p:nvSpPr>
-          <p:cNvPr id="38" name="Text 36"/>
-          <p:cNvSpPr/>
-          <p:nvPr/>
-        </p:nvSpPr>
-        <p:spPr>
-          <a:xfrm>
-            <a:off x="3429000" y="3246120"/>
-            <a:ext cx="2377440" cy="365760"/>
-          </a:xfrm>
-          <a:prstGeom prst="rect">
-            <a:avLst/>
-          </a:prstGeom>
-          <a:noFill/>
-          <a:ln/>
-        </p:spPr>
-        <p:txBody>
-          <a:bodyPr wrap="square" lIns="0" tIns="0" rIns="0" bIns="0" rtlCol="0" anchor="ctr"/>
-          <a:lstStyle/>
-          <a:p>
-            <a:pPr indent="0" marL="0">
-              <a:buNone/>
-            </a:pPr>
-            <a:r>
-              <a:rPr lang="en-US" sz="900" dirty="0">
-                <a:solidFill>
-                  <a:srgbClr val="64748B"/>
-                </a:solidFill>
-                <a:latin typeface="Arial" pitchFamily="34" charset="0"/>
-                <a:ea typeface="Arial" pitchFamily="34" charset="-122"/>
-                <a:cs typeface="Arial" pitchFamily="34" charset="-120"/>
-              </a:rPr>
-              <a:t>朝食は種類豊富で、サービスも良く、部屋は静かで、立地も非常に便利です</a:t>
-            </a:r>
-            <a:endParaRPr lang="en-US" sz="900" dirty="0"/>
-          </a:p>
-        </p:txBody>
-      </p:sp>
-      <p:sp>
-        <p:nvSpPr>
-          <p:cNvPr id="39" name="Text 37"/>
-          <p:cNvSpPr/>
-          <p:nvPr/>
-        </p:nvSpPr>
-        <p:spPr>
-          <a:xfrm>
-            <a:off x="3429000" y="3657600"/>
-            <a:ext cx="2377440" cy="640080"/>
-          </a:xfrm>
-          <a:prstGeom prst="rect">
-            <a:avLst/>
-          </a:prstGeom>
-          <a:noFill/>
-          <a:ln/>
-        </p:spPr>
-        <p:txBody>
-          <a:bodyPr wrap="square" lIns="0" tIns="0" rIns="0" bIns="0" rtlCol="0" anchor="ctr"/>
-          <a:lstStyle/>
-          <a:p>
-            <a:pPr indent="0" marL="0">
-              <a:buNone/>
-            </a:pPr>
-            <a:r>
-              <a:rPr lang="en-US" sz="900" i="1" dirty="0">
-                <a:solidFill>
-                  <a:srgbClr val="3B7DD8"/>
-                </a:solidFill>
-                <a:latin typeface="Arial" pitchFamily="34" charset="0"/>
-                <a:ea typeface="Arial" pitchFamily="34" charset="-122"/>
-                <a:cs typeface="Arial" pitchFamily="34" charset="-120"/>
-              </a:rPr>
-              <a:t>「朝食を1日追加で購入したのですが、フロントでその旨を伝えたら割引クーポンをもらえました」</a:t>
             </a:r>
             <a:endParaRPr lang="en-US" sz="900" dirty="0"/>
           </a:p>
@@ -12388,7 +12371,7 @@
                           <a:ea typeface="Arial" pitchFamily="34" charset="-122"/>
                           <a:cs typeface="Arial" pitchFamily="34" charset="-120"/>
                         </a:rPr>
-                        <a:t>15件</a:t>
+                        <a:t>9件</a:t>
                       </a:r>
                       <a:endParaRPr lang="en-US" sz="900" dirty="0">
                         <a:latin typeface="Arial" charset="0"/>
@@ -12526,7 +12509,7 @@
                           <a:ea typeface="Arial" pitchFamily="34" charset="-122"/>
                           <a:cs typeface="Arial" pitchFamily="34" charset="-120"/>
                         </a:rPr>
-                        <a:t>浴室・水回り</a:t>
+                        <a:t>窓・採光</a:t>
                       </a:r>
                       <a:endParaRPr lang="en-US" sz="900" dirty="0">
                         <a:latin typeface="Arial" charset="0"/>
@@ -12594,7 +12577,7 @@
                           <a:ea typeface="Arial" pitchFamily="34" charset="-122"/>
                           <a:cs typeface="Arial" pitchFamily="34" charset="-120"/>
                         </a:rPr>
-                        <a:t>ホテルは川崎駅のすぐそばに位置し、近くにはバスターミナルやショッピングモールがいくつかあり、水族館も隣接しているた...</a:t>
+                        <a:t>19階は窓からは夜景がとても綺麗でした</a:t>
                       </a:r>
                       <a:endParaRPr lang="en-US" sz="900" dirty="0">
                         <a:latin typeface="Arial" charset="0"/>
@@ -12662,7 +12645,7 @@
                           <a:ea typeface="Arial" pitchFamily="34" charset="-122"/>
                           <a:cs typeface="Arial" pitchFamily="34" charset="-120"/>
                         </a:rPr>
-                        <a:t>10件</a:t>
+                        <a:t>6件</a:t>
                       </a:r>
                       <a:endParaRPr lang="en-US" sz="900" dirty="0">
                         <a:latin typeface="Arial" charset="0"/>
@@ -12800,7 +12783,7 @@
                           <a:ea typeface="Arial" pitchFamily="34" charset="-122"/>
                           <a:cs typeface="Arial" pitchFamily="34" charset="-120"/>
                         </a:rPr>
-                        <a:t>防音性能</a:t>
+                        <a:t>浴室・水回り</a:t>
                       </a:r>
                       <a:endParaRPr lang="en-US" sz="900" dirty="0">
                         <a:latin typeface="Arial" charset="0"/>
@@ -12868,7 +12851,7 @@
                           <a:ea typeface="Arial" pitchFamily="34" charset="-122"/>
                           <a:cs typeface="Arial" pitchFamily="34" charset="-120"/>
                         </a:rPr>
-                        <a:t>高層階からは電車の眺めが素晴らしく、とても良かったのですが、騒音に敏感な方には少し不快かもしれません</a:t>
+                        <a:t>ホテルは川崎駅のすぐそばに位置し、近くにはバスターミナルやショッピングモールがいくつかあり、水族館も隣接しているた...</a:t>
                       </a:r>
                       <a:endParaRPr lang="en-US" sz="900" dirty="0">
                         <a:latin typeface="Arial" charset="0"/>
@@ -12936,7 +12919,7 @@
                           <a:ea typeface="Arial" pitchFamily="34" charset="-122"/>
                           <a:cs typeface="Arial" pitchFamily="34" charset="-120"/>
                         </a:rPr>
-                        <a:t>9件</a:t>
+                        <a:t>5件</a:t>
                       </a:r>
                       <a:endParaRPr lang="en-US" sz="900" dirty="0">
                         <a:latin typeface="Arial" charset="0"/>
@@ -13074,7 +13057,7 @@
                           <a:ea typeface="Arial" pitchFamily="34" charset="-122"/>
                           <a:cs typeface="Arial" pitchFamily="34" charset="-120"/>
                         </a:rPr>
-                        <a:t>窓・採光</a:t>
+                        <a:t>設備の老朽化</a:t>
                       </a:r>
                       <a:endParaRPr lang="en-US" sz="900" dirty="0">
                         <a:latin typeface="Arial" charset="0"/>
@@ -13142,7 +13125,7 @@
                           <a:ea typeface="Arial" pitchFamily="34" charset="-122"/>
                           <a:cs typeface="Arial" pitchFamily="34" charset="-120"/>
                         </a:rPr>
-                        <a:t>19階は窓からは夜景がとても綺麗でした</a:t>
+                        <a:t>部屋の空調は全館空調が機能せず（間違いなく老朽化）全くダメでした</a:t>
                       </a:r>
                       <a:endParaRPr lang="en-US" sz="900" dirty="0">
                         <a:latin typeface="Arial" charset="0"/>
@@ -13210,7 +13193,7 @@
                           <a:ea typeface="Arial" pitchFamily="34" charset="-122"/>
                           <a:cs typeface="Arial" pitchFamily="34" charset="-120"/>
                         </a:rPr>
-                        <a:t>9件</a:t>
+                        <a:t>4件</a:t>
                       </a:r>
                       <a:endParaRPr lang="en-US" sz="900" dirty="0">
                         <a:latin typeface="Arial" charset="0"/>
@@ -13348,7 +13331,7 @@
                           <a:ea typeface="Arial" pitchFamily="34" charset="-122"/>
                           <a:cs typeface="Arial" pitchFamily="34" charset="-120"/>
                         </a:rPr>
-                        <a:t>対応・サービスの不満</a:t>
+                        <a:t>防音性能</a:t>
                       </a:r>
                       <a:endParaRPr lang="en-US" sz="900" dirty="0">
                         <a:latin typeface="Arial" charset="0"/>
@@ -13416,7 +13399,7 @@
                           <a:ea typeface="Arial" pitchFamily="34" charset="-122"/>
                           <a:cs typeface="Arial" pitchFamily="34" charset="-120"/>
                         </a:rPr>
-                        <a:t>酒店櫃檯服務態度良好</a:t>
+                        <a:t>高層階からは電車の眺めが素晴らしく、とても良かったのですが、騒音に敏感な方には少し不快かもしれません</a:t>
                       </a:r>
                       <a:endParaRPr lang="en-US" sz="900" dirty="0">
                         <a:latin typeface="Arial" charset="0"/>
@@ -13484,7 +13467,7 @@
                           <a:ea typeface="Arial" pitchFamily="34" charset="-122"/>
                           <a:cs typeface="Arial" pitchFamily="34" charset="-120"/>
                         </a:rPr>
-                        <a:t>8件</a:t>
+                        <a:t>4件</a:t>
                       </a:r>
                       <a:endParaRPr lang="en-US" sz="900" dirty="0">
                         <a:latin typeface="Arial" charset="0"/>
@@ -13622,7 +13605,7 @@
                           <a:ea typeface="Arial" pitchFamily="34" charset="-122"/>
                           <a:cs typeface="Arial" pitchFamily="34" charset="-120"/>
                         </a:rPr>
-                        <a:t>設備の老朽化</a:t>
+                        <a:t>対応・サービスの不満</a:t>
                       </a:r>
                       <a:endParaRPr lang="en-US" sz="900" dirty="0">
                         <a:latin typeface="Arial" charset="0"/>
@@ -13690,7 +13673,7 @@
                           <a:ea typeface="Arial" pitchFamily="34" charset="-122"/>
                           <a:cs typeface="Arial" pitchFamily="34" charset="-120"/>
                         </a:rPr>
-                        <a:t>部屋の空調は全館空調が機能せず（間違いなく老朽化）全くダメでした</a:t>
+                        <a:t>酒店櫃檯服務態度良好</a:t>
                       </a:r>
                       <a:endParaRPr lang="en-US" sz="900" dirty="0">
                         <a:latin typeface="Arial" charset="0"/>
@@ -13758,7 +13741,7 @@
                           <a:ea typeface="Arial" pitchFamily="34" charset="-122"/>
                           <a:cs typeface="Arial" pitchFamily="34" charset="-120"/>
                         </a:rPr>
-                        <a:t>6件</a:t>
+                        <a:t>4件</a:t>
                       </a:r>
                       <a:endParaRPr lang="en-US" sz="900" dirty="0">
                         <a:latin typeface="Arial" charset="0"/>
@@ -14032,7 +14015,7 @@
                           <a:ea typeface="Arial" pitchFamily="34" charset="-122"/>
                           <a:cs typeface="Arial" pitchFamily="34" charset="-120"/>
                         </a:rPr>
-                        <a:t>4件</a:t>
+                        <a:t>3件</a:t>
                       </a:r>
                       <a:endParaRPr lang="en-US" sz="900" dirty="0">
                         <a:latin typeface="Arial" charset="0"/>
@@ -14306,7 +14289,7 @@
                           <a:ea typeface="Arial" pitchFamily="34" charset="-122"/>
                           <a:cs typeface="Arial" pitchFamily="34" charset="-120"/>
                         </a:rPr>
-                        <a:t>2件</a:t>
+                        <a:t>1件</a:t>
                       </a:r>
                       <a:endParaRPr lang="en-US" sz="900" dirty="0">
                         <a:latin typeface="Arial" charset="0"/>
@@ -14580,7 +14563,7 @@
                           <a:ea typeface="Arial" pitchFamily="34" charset="-122"/>
                           <a:cs typeface="Arial" pitchFamily="34" charset="-120"/>
                         </a:rPr>
-                        <a:t>2件</a:t>
+                        <a:t>1件</a:t>
                       </a:r>
                       <a:endParaRPr lang="en-US" sz="900" dirty="0">
                         <a:latin typeface="Arial" charset="0"/>

--- a/納品レポート/ホテル別レポート/kawasaki_nikko_口コミ分析レポート.pptx
+++ b/納品レポート/ホテル別レポート/kawasaki_nikko_口コミ分析レポート.pptx
@@ -205,19 +205,19 @@
                 <c:formatCode>General</c:formatCode>
                 <c:ptCount val="5"/>
                 <c:pt idx="0">
-                  <c:v>9.33</c:v>
+                  <c:v>9.5</c:v>
                 </c:pt>
                 <c:pt idx="1">
-                  <c:v>9.33</c:v>
+                  <c:v>9.43</c:v>
                 </c:pt>
                 <c:pt idx="2">
-                  <c:v>8.72</c:v>
+                  <c:v>8.63</c:v>
                 </c:pt>
                 <c:pt idx="3">
-                  <c:v>8.57</c:v>
+                  <c:v>8.44</c:v>
                 </c:pt>
                 <c:pt idx="4">
-                  <c:v>6.25</c:v>
+                  <c:v>7.1</c:v>
                 </c:pt>
               </c:numCache>
             </c:numRef>
@@ -560,10 +560,10 @@
               <c:numCache>
                 <c:ptCount val="3"/>
                 <c:pt idx="0">
-                  <c:v>58</c:v>
+                  <c:v>110</c:v>
                 </c:pt>
                 <c:pt idx="1">
-                  <c:v>10</c:v>
+                  <c:v>23</c:v>
                 </c:pt>
                 <c:pt idx="2">
                   <c:v>3</c:v>
@@ -735,7 +735,7 @@
             <c:bubble3D val="0"/>
             <c:spPr>
               <a:solidFill>
-                <a:srgbClr val="DC2626"/>
+                <a:srgbClr val="D4A843"/>
               </a:solidFill>
               <a:effectLst/>
             </c:spPr>
@@ -751,11 +751,22 @@
               <a:effectLst/>
             </c:spPr>
           </c:dPt>
+          <c:dPt>
+            <c:idx val="7"/>
+            <c:invertIfNegative val="0"/>
+            <c:bubble3D val="0"/>
+            <c:spPr>
+              <a:solidFill>
+                <a:srgbClr val="DC2626"/>
+              </a:solidFill>
+              <a:effectLst/>
+            </c:spPr>
+          </c:dPt>
           <c:cat>
             <c:multiLvlStrRef>
-              <c:f>Sheet1!$A$2:$A$8</c:f>
+              <c:f>Sheet1!$A$2:$A$9</c:f>
               <c:multiLvlStrCache>
-                <c:ptCount val="7"/>
+                <c:ptCount val="8"/>
                 <c:lvl>
                   <c:pt idx="0">
                     <c:v>10点</c:v>
@@ -773,9 +784,12 @@
                     <c:v>6点</c:v>
                   </c:pt>
                   <c:pt idx="5">
+                    <c:v>5点</c:v>
+                  </c:pt>
+                  <c:pt idx="6">
                     <c:v>4点</c:v>
                   </c:pt>
-                  <c:pt idx="6">
+                  <c:pt idx="7">
                     <c:v>2点</c:v>
                   </c:pt>
                 </c:lvl>
@@ -784,29 +798,32 @@
           </c:cat>
           <c:val>
             <c:numRef>
-              <c:f>Sheet1!$B$2:$B$8</c:f>
+              <c:f>Sheet1!$B$2:$B$9</c:f>
               <c:numCache>
                 <c:formatCode>General</c:formatCode>
-                <c:ptCount val="7"/>
+                <c:ptCount val="8"/>
                 <c:pt idx="0">
-                  <c:v>33</c:v>
+                  <c:v>58</c:v>
                 </c:pt>
                 <c:pt idx="1">
-                  <c:v>11</c:v>
+                  <c:v>24</c:v>
                 </c:pt>
                 <c:pt idx="2">
-                  <c:v>14</c:v>
+                  <c:v>28</c:v>
                 </c:pt>
                 <c:pt idx="3">
-                  <c:v>6</c:v>
+                  <c:v>10</c:v>
                 </c:pt>
                 <c:pt idx="4">
-                  <c:v>4</c:v>
+                  <c:v>12</c:v>
                 </c:pt>
                 <c:pt idx="5">
                   <c:v>1</c:v>
                 </c:pt>
                 <c:pt idx="6">
+                  <c:v>1</c:v>
+                </c:pt>
+                <c:pt idx="7">
                   <c:v>2</c:v>
                 </c:pt>
               </c:numCache>
@@ -2738,7 +2755,7 @@
                 <a:ea typeface="Arial" pitchFamily="34" charset="-122"/>
                 <a:cs typeface="Arial" pitchFamily="34" charset="-120"/>
               </a:rPr>
-              <a:t>分析対象期間：2026年3月</a:t>
+              <a:t>分析対象期間：2026年2月〜3月</a:t>
             </a:r>
             <a:endParaRPr lang="en-US" sz="1000" dirty="0"/>
           </a:p>
@@ -2758,7 +2775,7 @@
                 <a:ea typeface="Arial" pitchFamily="34" charset="-122"/>
                 <a:cs typeface="Arial" pitchFamily="34" charset="-120"/>
               </a:rPr>
-              <a:t>レビュー総数：71件（5サイト）</a:t>
+              <a:t>レビュー総数：136件（5サイト）</a:t>
             </a:r>
             <a:endParaRPr lang="en-US" sz="1000" dirty="0"/>
           </a:p>
@@ -3324,7 +3341,7 @@
                           <a:ea typeface="Arial" pitchFamily="34" charset="-122"/>
                           <a:cs typeface="Arial" pitchFamily="34" charset="-120"/>
                         </a:rPr>
-                        <a:t>8.66点</a:t>
+                        <a:t>8.64点</a:t>
                       </a:r>
                       <a:endParaRPr lang="en-US" sz="1000" dirty="0">
                         <a:latin typeface="Arial" charset="0"/>
@@ -3392,7 +3409,7 @@
                           <a:ea typeface="Arial" pitchFamily="34" charset="-122"/>
                           <a:cs typeface="Arial" pitchFamily="34" charset="-120"/>
                         </a:rPr>
-                        <a:t>9.0点以上</a:t>
+                        <a:t>8.9点以上</a:t>
                       </a:r>
                       <a:endParaRPr lang="en-US" sz="1000" dirty="0">
                         <a:latin typeface="Arial" charset="0"/>
@@ -3598,7 +3615,7 @@
                           <a:ea typeface="Arial" pitchFamily="34" charset="-122"/>
                           <a:cs typeface="Arial" pitchFamily="34" charset="-120"/>
                         </a:rPr>
-                        <a:t>81.7%</a:t>
+                        <a:t>80.9%</a:t>
                       </a:r>
                       <a:endParaRPr lang="en-US" sz="1000" dirty="0">
                         <a:latin typeface="Arial" charset="0"/>
@@ -3666,7 +3683,7 @@
                           <a:ea typeface="Arial" pitchFamily="34" charset="-122"/>
                           <a:cs typeface="Arial" pitchFamily="34" charset="-120"/>
                         </a:rPr>
-                        <a:t>87%以上</a:t>
+                        <a:t>86%以上</a:t>
                       </a:r>
                       <a:endParaRPr lang="en-US" sz="1000" dirty="0">
                         <a:latin typeface="Arial" charset="0"/>
@@ -3872,7 +3889,7 @@
                           <a:ea typeface="Arial" pitchFamily="34" charset="-122"/>
                           <a:cs typeface="Arial" pitchFamily="34" charset="-120"/>
                         </a:rPr>
-                        <a:t>4.2%</a:t>
+                        <a:t>2.2%</a:t>
                       </a:r>
                       <a:endParaRPr lang="en-US" sz="1000" dirty="0">
                         <a:latin typeface="Arial" charset="0"/>
@@ -3940,7 +3957,7 @@
                           <a:ea typeface="Arial" pitchFamily="34" charset="-122"/>
                           <a:cs typeface="Arial" pitchFamily="34" charset="-120"/>
                         </a:rPr>
-                        <a:t>1%以下</a:t>
+                        <a:t>0%以下</a:t>
                       </a:r>
                       <a:endParaRPr lang="en-US" sz="1000" dirty="0">
                         <a:latin typeface="Arial" charset="0"/>
@@ -4146,7 +4163,7 @@
                           <a:ea typeface="Arial" pitchFamily="34" charset="-122"/>
                           <a:cs typeface="Arial" pitchFamily="34" charset="-120"/>
                         </a:rPr>
-                        <a:t>6.3点</a:t>
+                        <a:t>7.1点</a:t>
                       </a:r>
                       <a:endParaRPr lang="en-US" sz="1000" dirty="0">
                         <a:latin typeface="Arial" charset="0"/>
@@ -4214,7 +4231,7 @@
                           <a:ea typeface="Arial" pitchFamily="34" charset="-122"/>
                           <a:cs typeface="Arial" pitchFamily="34" charset="-120"/>
                         </a:rPr>
-                        <a:t>7.3点以上</a:t>
+                        <a:t>8.1点以上</a:t>
                       </a:r>
                       <a:endParaRPr lang="en-US" sz="1000" dirty="0">
                         <a:latin typeface="Arial" charset="0"/>
@@ -4694,7 +4711,7 @@
                           <a:ea typeface="Arial" pitchFamily="34" charset="-122"/>
                           <a:cs typeface="Arial" pitchFamily="34" charset="-120"/>
                         </a:rPr>
-                        <a:t>約9件/期間</a:t>
+                        <a:t>約15件/期間</a:t>
                       </a:r>
                       <a:endParaRPr lang="en-US" sz="1000" dirty="0">
                         <a:latin typeface="Arial" charset="0"/>
@@ -4762,7 +4779,7 @@
                           <a:ea typeface="Arial" pitchFamily="34" charset="-122"/>
                           <a:cs typeface="Arial" pitchFamily="34" charset="-120"/>
                         </a:rPr>
-                        <a:t>4件以下</a:t>
+                        <a:t>7件以下</a:t>
                       </a:r>
                       <a:endParaRPr lang="en-US" sz="1000" dirty="0">
                         <a:latin typeface="Arial" charset="0"/>
@@ -5333,7 +5350,7 @@
                 <a:ea typeface="Arial" pitchFamily="34" charset="-122"/>
                 <a:cs typeface="Arial" pitchFamily="34" charset="-120"/>
               </a:rPr>
-              <a:t>8.66</a:t>
+              <a:t>8.64</a:t>
             </a:r>
             <a:endParaRPr lang="en-US" sz="3200" dirty="0"/>
           </a:p>
@@ -5458,7 +5475,7 @@
                 <a:ea typeface="Arial" pitchFamily="34" charset="-122"/>
                 <a:cs typeface="Arial" pitchFamily="34" charset="-120"/>
               </a:rPr>
-              <a:t>81.7%</a:t>
+              <a:t>80.9%</a:t>
             </a:r>
             <a:endParaRPr lang="en-US" sz="3200" dirty="0"/>
           </a:p>
@@ -5583,7 +5600,7 @@
                 <a:ea typeface="Arial" pitchFamily="34" charset="-122"/>
                 <a:cs typeface="Arial" pitchFamily="34" charset="-120"/>
               </a:rPr>
-              <a:t>4.2%</a:t>
+              <a:t>2.2%</a:t>
             </a:r>
             <a:endParaRPr lang="en-US" sz="3200" dirty="0"/>
           </a:p>
@@ -5708,7 +5725,7 @@
                 <a:ea typeface="Arial" pitchFamily="34" charset="-122"/>
                 <a:cs typeface="Arial" pitchFamily="34" charset="-120"/>
               </a:rPr>
-              <a:t>71件</a:t>
+              <a:t>136件</a:t>
             </a:r>
             <a:endParaRPr lang="en-US" sz="3200" dirty="0"/>
           </a:p>
@@ -6104,46 +6121,6 @@
                 <a:ea typeface="Arial" pitchFamily="34" charset="-122"/>
                 <a:cs typeface="Arial" pitchFamily="34" charset="-120"/>
               </a:rPr>
-              <a:t>窓・採光 </a:t>
-            </a:r>
-            <a:endParaRPr lang="en-US" sz="1100" dirty="0"/>
-          </a:p>
-          <a:p>
-            <a:pPr indent="0" marL="0">
-              <a:spcAft>
-                <a:spcPts val="200"/>
-              </a:spcAft>
-              <a:buNone/>
-            </a:pPr>
-            <a:r>
-              <a:rPr lang="en-US" sz="900" dirty="0">
-                <a:solidFill>
-                  <a:srgbClr val="64748B"/>
-                </a:solidFill>
-                <a:latin typeface="Arial" pitchFamily="34" charset="0"/>
-                <a:ea typeface="Arial" pitchFamily="34" charset="-122"/>
-                <a:cs typeface="Arial" pitchFamily="34" charset="-120"/>
-              </a:rPr>
-              <a:t>  19階は窓からは夜景がとても綺麗でした</a:t>
-            </a:r>
-            <a:endParaRPr lang="en-US" sz="1100" dirty="0"/>
-          </a:p>
-          <a:p>
-            <a:pPr indent="0" marL="0">
-              <a:spcAft>
-                <a:spcPts val="200"/>
-              </a:spcAft>
-              <a:buNone/>
-            </a:pPr>
-            <a:r>
-              <a:rPr lang="en-US" sz="1100" b="1" dirty="0">
-                <a:solidFill>
-                  <a:srgbClr val="334155"/>
-                </a:solidFill>
-                <a:latin typeface="Arial" pitchFamily="34" charset="0"/>
-                <a:ea typeface="Arial" pitchFamily="34" charset="-122"/>
-                <a:cs typeface="Arial" pitchFamily="34" charset="-120"/>
-              </a:rPr>
               <a:t>浴室・水回り </a:t>
             </a:r>
             <a:endParaRPr lang="en-US" sz="1100" dirty="0"/>
@@ -6165,6 +6142,46 @@
                 <a:cs typeface="Arial" pitchFamily="34" charset="-120"/>
               </a:rPr>
               <a:t>  ホテルは川崎駅のすぐそばに位置し、近くにはバスターミナルやショッピングモールがいくつかあり、水族館も隣接しているた...</a:t>
+            </a:r>
+            <a:endParaRPr lang="en-US" sz="1100" dirty="0"/>
+          </a:p>
+          <a:p>
+            <a:pPr indent="0" marL="0">
+              <a:spcAft>
+                <a:spcPts val="200"/>
+              </a:spcAft>
+              <a:buNone/>
+            </a:pPr>
+            <a:r>
+              <a:rPr lang="en-US" sz="1100" b="1" dirty="0">
+                <a:solidFill>
+                  <a:srgbClr val="334155"/>
+                </a:solidFill>
+                <a:latin typeface="Arial" pitchFamily="34" charset="0"/>
+                <a:ea typeface="Arial" pitchFamily="34" charset="-122"/>
+                <a:cs typeface="Arial" pitchFamily="34" charset="-120"/>
+              </a:rPr>
+              <a:t>防音性能 </a:t>
+            </a:r>
+            <a:endParaRPr lang="en-US" sz="1100" dirty="0"/>
+          </a:p>
+          <a:p>
+            <a:pPr indent="0" marL="0">
+              <a:spcAft>
+                <a:spcPts val="200"/>
+              </a:spcAft>
+              <a:buNone/>
+            </a:pPr>
+            <a:r>
+              <a:rPr lang="en-US" sz="900" dirty="0">
+                <a:solidFill>
+                  <a:srgbClr val="64748B"/>
+                </a:solidFill>
+                <a:latin typeface="Arial" pitchFamily="34" charset="0"/>
+                <a:ea typeface="Arial" pitchFamily="34" charset="-122"/>
+                <a:cs typeface="Arial" pitchFamily="34" charset="-120"/>
+              </a:rPr>
+              <a:t>  高層階からは電車の眺めが素晴らしく、とても良かったのですが、騒音に敏感な方には少し不快かもしれません</a:t>
             </a:r>
             <a:endParaRPr lang="en-US" sz="1100" dirty="0"/>
           </a:p>
@@ -6517,7 +6534,7 @@
                 <a:ea typeface="Arial" pitchFamily="34" charset="-122"/>
                 <a:cs typeface="Arial" pitchFamily="34" charset="-120"/>
               </a:rPr>
-              <a:t>8.66</a:t>
+              <a:t>8.64</a:t>
             </a:r>
             <a:endParaRPr lang="en-US" sz="3200" dirty="0"/>
           </a:p>
@@ -6642,7 +6659,7 @@
                 <a:ea typeface="Arial" pitchFamily="34" charset="-122"/>
                 <a:cs typeface="Arial" pitchFamily="34" charset="-120"/>
               </a:rPr>
-              <a:t>81.7%</a:t>
+              <a:t>80.9%</a:t>
             </a:r>
             <a:endParaRPr lang="en-US" sz="3200" dirty="0"/>
           </a:p>
@@ -6767,7 +6784,7 @@
                 <a:ea typeface="Arial" pitchFamily="34" charset="-122"/>
                 <a:cs typeface="Arial" pitchFamily="34" charset="-120"/>
               </a:rPr>
-              <a:t>4.2%</a:t>
+              <a:t>2.2%</a:t>
             </a:r>
             <a:endParaRPr lang="en-US" sz="3200" dirty="0"/>
           </a:p>
@@ -6892,7 +6909,7 @@
                 <a:ea typeface="Arial" pitchFamily="34" charset="-122"/>
                 <a:cs typeface="Arial" pitchFamily="34" charset="-120"/>
               </a:rPr>
-              <a:t>71件</a:t>
+              <a:t>136件</a:t>
             </a:r>
             <a:endParaRPr lang="en-US" sz="3200" dirty="0"/>
           </a:p>
@@ -7313,7 +7330,7 @@
                 <a:ea typeface="Arial" pitchFamily="34" charset="-122"/>
                 <a:cs typeface="Arial" pitchFamily="34" charset="-120"/>
               </a:rPr>
-              <a:t>じゃらん(9.33)が最高スコア。</a:t>
+              <a:t>Trip.com(9.50)が最高スコア。</a:t>
             </a:r>
             <a:endParaRPr lang="en-US" sz="1100" dirty="0"/>
           </a:p>
@@ -7362,7 +7379,7 @@
                 <a:ea typeface="Arial" pitchFamily="34" charset="-122"/>
                 <a:cs typeface="Arial" pitchFamily="34" charset="-120"/>
               </a:rPr>
-              <a:t>Google(6.3)が相対的に低い。口コミ返信の強化が急務</a:t>
+              <a:t>Google(7.1)が相対的に低い。口コミ返信の強化が急務</a:t>
             </a:r>
             <a:endParaRPr lang="en-US" sz="1100" dirty="0"/>
           </a:p>
@@ -7871,7 +7888,7 @@
                           <a:ea typeface="Arial" pitchFamily="34" charset="-122"/>
                           <a:cs typeface="Arial" pitchFamily="34" charset="-120"/>
                         </a:rPr>
-                        <a:t>21</a:t>
+                        <a:t>32</a:t>
                       </a:r>
                       <a:endParaRPr lang="en-US" sz="900" dirty="0">
                         <a:latin typeface="Arial" charset="0"/>
@@ -7939,7 +7956,7 @@
                           <a:ea typeface="Arial" pitchFamily="34" charset="-122"/>
                           <a:cs typeface="Arial" pitchFamily="34" charset="-120"/>
                         </a:rPr>
-                        <a:t>9.33</a:t>
+                        <a:t>9.5</a:t>
                       </a:r>
                       <a:endParaRPr lang="en-US" sz="900" dirty="0">
                         <a:latin typeface="Arial" charset="0"/>
@@ -8075,7 +8092,7 @@
                           <a:ea typeface="Arial" pitchFamily="34" charset="-122"/>
                           <a:cs typeface="Arial" pitchFamily="34" charset="-120"/>
                         </a:rPr>
-                        <a:t>9.33</a:t>
+                        <a:t>9.5</a:t>
                       </a:r>
                       <a:endParaRPr lang="en-US" sz="900" dirty="0">
                         <a:latin typeface="Arial" charset="0"/>
@@ -8213,7 +8230,7 @@
                           <a:ea typeface="Arial" pitchFamily="34" charset="-122"/>
                           <a:cs typeface="Arial" pitchFamily="34" charset="-120"/>
                         </a:rPr>
-                        <a:t>6</a:t>
+                        <a:t>7</a:t>
                       </a:r>
                       <a:endParaRPr lang="en-US" sz="900" dirty="0">
                         <a:latin typeface="Arial" charset="0"/>
@@ -8281,7 +8298,7 @@
                           <a:ea typeface="Arial" pitchFamily="34" charset="-122"/>
                           <a:cs typeface="Arial" pitchFamily="34" charset="-120"/>
                         </a:rPr>
-                        <a:t>4.67</a:t>
+                        <a:t>4.71</a:t>
                       </a:r>
                       <a:endParaRPr lang="en-US" sz="900" dirty="0">
                         <a:latin typeface="Arial" charset="0"/>
@@ -8417,7 +8434,7 @@
                           <a:ea typeface="Arial" pitchFamily="34" charset="-122"/>
                           <a:cs typeface="Arial" pitchFamily="34" charset="-120"/>
                         </a:rPr>
-                        <a:t>9.33</a:t>
+                        <a:t>9.43</a:t>
                       </a:r>
                       <a:endParaRPr lang="en-US" sz="900" dirty="0">
                         <a:latin typeface="Arial" charset="0"/>
@@ -8555,7 +8572,7 @@
                           <a:ea typeface="Arial" pitchFamily="34" charset="-122"/>
                           <a:cs typeface="Arial" pitchFamily="34" charset="-120"/>
                         </a:rPr>
-                        <a:t>29</a:t>
+                        <a:t>68</a:t>
                       </a:r>
                       <a:endParaRPr lang="en-US" sz="900" dirty="0">
                         <a:latin typeface="Arial" charset="0"/>
@@ -8623,7 +8640,7 @@
                           <a:ea typeface="Arial" pitchFamily="34" charset="-122"/>
                           <a:cs typeface="Arial" pitchFamily="34" charset="-120"/>
                         </a:rPr>
-                        <a:t>8.72</a:t>
+                        <a:t>8.63</a:t>
                       </a:r>
                       <a:endParaRPr lang="en-US" sz="900" dirty="0">
                         <a:latin typeface="Arial" charset="0"/>
@@ -8759,7 +8776,7 @@
                           <a:ea typeface="Arial" pitchFamily="34" charset="-122"/>
                           <a:cs typeface="Arial" pitchFamily="34" charset="-120"/>
                         </a:rPr>
-                        <a:t>8.72</a:t>
+                        <a:t>8.63</a:t>
                       </a:r>
                       <a:endParaRPr lang="en-US" sz="900" dirty="0">
                         <a:latin typeface="Arial" charset="0"/>
@@ -8897,7 +8914,7 @@
                           <a:ea typeface="Arial" pitchFamily="34" charset="-122"/>
                           <a:cs typeface="Arial" pitchFamily="34" charset="-120"/>
                         </a:rPr>
-                        <a:t>7</a:t>
+                        <a:t>9</a:t>
                       </a:r>
                       <a:endParaRPr lang="en-US" sz="900" dirty="0">
                         <a:latin typeface="Arial" charset="0"/>
@@ -8965,7 +8982,7 @@
                           <a:ea typeface="Arial" pitchFamily="34" charset="-122"/>
                           <a:cs typeface="Arial" pitchFamily="34" charset="-120"/>
                         </a:rPr>
-                        <a:t>4.29</a:t>
+                        <a:t>4.22</a:t>
                       </a:r>
                       <a:endParaRPr lang="en-US" sz="900" dirty="0">
                         <a:latin typeface="Arial" charset="0"/>
@@ -9101,7 +9118,7 @@
                           <a:ea typeface="Arial" pitchFamily="34" charset="-122"/>
                           <a:cs typeface="Arial" pitchFamily="34" charset="-120"/>
                         </a:rPr>
-                        <a:t>8.57</a:t>
+                        <a:t>8.44</a:t>
                       </a:r>
                       <a:endParaRPr lang="en-US" sz="900" dirty="0">
                         <a:latin typeface="Arial" charset="0"/>
@@ -9239,7 +9256,7 @@
                           <a:ea typeface="Arial" pitchFamily="34" charset="-122"/>
                           <a:cs typeface="Arial" pitchFamily="34" charset="-120"/>
                         </a:rPr>
-                        <a:t>8</a:t>
+                        <a:t>20</a:t>
                       </a:r>
                       <a:endParaRPr lang="en-US" sz="900" dirty="0">
                         <a:latin typeface="Arial" charset="0"/>
@@ -9307,7 +9324,7 @@
                           <a:ea typeface="Arial" pitchFamily="34" charset="-122"/>
                           <a:cs typeface="Arial" pitchFamily="34" charset="-120"/>
                         </a:rPr>
-                        <a:t>3.12</a:t>
+                        <a:t>3.55</a:t>
                       </a:r>
                       <a:endParaRPr lang="en-US" sz="900" dirty="0">
                         <a:latin typeface="Arial" charset="0"/>
@@ -9443,7 +9460,7 @@
                           <a:ea typeface="Arial" pitchFamily="34" charset="-122"/>
                           <a:cs typeface="Arial" pitchFamily="34" charset="-120"/>
                         </a:rPr>
-                        <a:t>6.25</a:t>
+                        <a:t>7.1</a:t>
                       </a:r>
                       <a:endParaRPr lang="en-US" sz="900" dirty="0">
                         <a:latin typeface="Arial" charset="0"/>
@@ -9851,7 +9868,7 @@
                 <a:ea typeface="Arial" pitchFamily="34" charset="-122"/>
                 <a:cs typeface="Arial" pitchFamily="34" charset="-120"/>
               </a:rPr>
-              <a:t>58件（81.7%）</a:t>
+              <a:t>110件（80.9%）</a:t>
             </a:r>
             <a:endParaRPr lang="en-US" sz="1100" dirty="0"/>
           </a:p>
@@ -9949,7 +9966,7 @@
                 <a:ea typeface="Arial" pitchFamily="34" charset="-122"/>
                 <a:cs typeface="Arial" pitchFamily="34" charset="-120"/>
               </a:rPr>
-              <a:t>10件（14.1%）</a:t>
+              <a:t>23件（16.9%）</a:t>
             </a:r>
             <a:endParaRPr lang="en-US" sz="1100" dirty="0"/>
           </a:p>
@@ -10047,7 +10064,7 @@
                 <a:ea typeface="Arial" pitchFamily="34" charset="-122"/>
                 <a:cs typeface="Arial" pitchFamily="34" charset="-120"/>
               </a:rPr>
-              <a:t>3件（4.2%）</a:t>
+              <a:t>3件（2.2%）</a:t>
             </a:r>
             <a:endParaRPr lang="en-US" sz="1100" dirty="0"/>
           </a:p>
@@ -10381,7 +10398,7 @@
                 <a:ea typeface="Arial" pitchFamily="34" charset="-122"/>
                 <a:cs typeface="Arial" pitchFamily="34" charset="-120"/>
               </a:rPr>
-              <a:t>20件+</a:t>
+              <a:t>50件+</a:t>
             </a:r>
             <a:endParaRPr lang="en-US" sz="900" dirty="0"/>
           </a:p>
@@ -10827,7 +10844,7 @@
                 <a:ea typeface="Arial" pitchFamily="34" charset="-122"/>
                 <a:cs typeface="Arial" pitchFamily="34" charset="-120"/>
               </a:rPr>
-              <a:t>10件+</a:t>
+              <a:t>20件+</a:t>
             </a:r>
             <a:endParaRPr lang="en-US" sz="900" dirty="0"/>
           </a:p>
@@ -11050,7 +11067,7 @@
                 <a:ea typeface="Arial" pitchFamily="34" charset="-122"/>
                 <a:cs typeface="Arial" pitchFamily="34" charset="-120"/>
               </a:rPr>
-              <a:t>10件+</a:t>
+              <a:t>20件+</a:t>
             </a:r>
             <a:endParaRPr lang="en-US" sz="900" dirty="0"/>
           </a:p>
@@ -11065,6 +11082,229 @@
         <p:spPr>
           <a:xfrm>
             <a:off x="594360" y="2953512"/>
+            <a:ext cx="1645920" cy="274320"/>
+          </a:xfrm>
+          <a:prstGeom prst="rect">
+            <a:avLst/>
+          </a:prstGeom>
+          <a:noFill/>
+          <a:ln/>
+        </p:spPr>
+        <p:txBody>
+          <a:bodyPr wrap="square" lIns="0" tIns="0" rIns="0" bIns="0" rtlCol="0" anchor="ctr"/>
+          <a:lstStyle/>
+          <a:p>
+            <a:pPr indent="0" marL="0">
+              <a:buNone/>
+            </a:pPr>
+            <a:r>
+              <a:rPr lang="en-US" sz="1300" b="1" dirty="0">
+                <a:solidFill>
+                  <a:srgbClr val="1A2744"/>
+                </a:solidFill>
+                <a:latin typeface="Arial" pitchFamily="34" charset="0"/>
+                <a:ea typeface="Arial" pitchFamily="34" charset="-122"/>
+                <a:cs typeface="Arial" pitchFamily="34" charset="-120"/>
+              </a:rPr>
+              <a:t>清潔さ・清掃</a:t>
+            </a:r>
+            <a:endParaRPr lang="en-US" sz="1300" dirty="0"/>
+          </a:p>
+        </p:txBody>
+      </p:sp>
+      <p:sp>
+        <p:nvSpPr>
+          <p:cNvPr id="31" name="Text 29"/>
+          <p:cNvSpPr/>
+          <p:nvPr/>
+        </p:nvSpPr>
+        <p:spPr>
+          <a:xfrm>
+            <a:off x="594360" y="3246120"/>
+            <a:ext cx="2377440" cy="365760"/>
+          </a:xfrm>
+          <a:prstGeom prst="rect">
+            <a:avLst/>
+          </a:prstGeom>
+          <a:noFill/>
+          <a:ln/>
+        </p:spPr>
+        <p:txBody>
+          <a:bodyPr wrap="square" lIns="0" tIns="0" rIns="0" bIns="0" rtlCol="0" anchor="ctr"/>
+          <a:lstStyle/>
+          <a:p>
+            <a:pPr indent="0" marL="0">
+              <a:buNone/>
+            </a:pPr>
+            <a:r>
+              <a:rPr lang="en-US" sz="900" dirty="0">
+                <a:solidFill>
+                  <a:srgbClr val="64748B"/>
+                </a:solidFill>
+                <a:latin typeface="Arial" pitchFamily="34" charset="0"/>
+                <a:ea typeface="Arial" pitchFamily="34" charset="-122"/>
+                <a:cs typeface="Arial" pitchFamily="34" charset="-120"/>
+              </a:rPr>
+              <a:t>ホテル内も綺麗でセキュリティも良く安心です</a:t>
+            </a:r>
+            <a:endParaRPr lang="en-US" sz="900" dirty="0"/>
+          </a:p>
+        </p:txBody>
+      </p:sp>
+      <p:sp>
+        <p:nvSpPr>
+          <p:cNvPr id="32" name="Text 30"/>
+          <p:cNvSpPr/>
+          <p:nvPr/>
+        </p:nvSpPr>
+        <p:spPr>
+          <a:xfrm>
+            <a:off x="594360" y="3657600"/>
+            <a:ext cx="2377440" cy="640080"/>
+          </a:xfrm>
+          <a:prstGeom prst="rect">
+            <a:avLst/>
+          </a:prstGeom>
+          <a:noFill/>
+          <a:ln/>
+        </p:spPr>
+        <p:txBody>
+          <a:bodyPr wrap="square" lIns="0" tIns="0" rIns="0" bIns="0" rtlCol="0" anchor="ctr"/>
+          <a:lstStyle/>
+          <a:p>
+            <a:pPr indent="0" marL="0">
+              <a:buNone/>
+            </a:pPr>
+            <a:r>
+              <a:rPr lang="en-US" sz="900" i="1" dirty="0">
+                <a:solidFill>
+                  <a:srgbClr val="3B7DD8"/>
+                </a:solidFill>
+                <a:latin typeface="Arial" pitchFamily="34" charset="0"/>
+                <a:ea typeface="Arial" pitchFamily="34" charset="-122"/>
+                <a:cs typeface="Arial" pitchFamily="34" charset="-120"/>
+              </a:rPr>
+              <a:t>「ホテルのフロントの対応も良く、客室設備は清潔で整頓されており、快適な滞在ができます」</a:t>
+            </a:r>
+            <a:endParaRPr lang="en-US" sz="900" dirty="0"/>
+          </a:p>
+        </p:txBody>
+      </p:sp>
+      <p:sp>
+        <p:nvSpPr>
+          <p:cNvPr id="33" name="Shape 31"/>
+          <p:cNvSpPr/>
+          <p:nvPr/>
+        </p:nvSpPr>
+        <p:spPr>
+          <a:xfrm>
+            <a:off x="3291840" y="2880360"/>
+            <a:ext cx="2651760" cy="1600200"/>
+          </a:xfrm>
+          <a:prstGeom prst="rect">
+            <a:avLst/>
+          </a:prstGeom>
+          <a:solidFill>
+            <a:srgbClr val="FFFFFF"/>
+          </a:solidFill>
+          <a:ln/>
+          <a:effectLst>
+            <a:outerShdw sx="100000" sy="100000" kx="0" ky="0" algn="bl" rotWithShape="0" blurRad="50800" dist="25400" dir="8100000">
+              <a:srgbClr val="000000">
+                <a:alpha val="10000"/>
+              </a:srgbClr>
+            </a:outerShdw>
+          </a:effectLst>
+        </p:spPr>
+      </p:sp>
+      <p:sp>
+        <p:nvSpPr>
+          <p:cNvPr id="34" name="Shape 32"/>
+          <p:cNvSpPr/>
+          <p:nvPr/>
+        </p:nvSpPr>
+        <p:spPr>
+          <a:xfrm>
+            <a:off x="3291840" y="2880360"/>
+            <a:ext cx="54864" cy="1600200"/>
+          </a:xfrm>
+          <a:prstGeom prst="rect">
+            <a:avLst/>
+          </a:prstGeom>
+          <a:solidFill>
+            <a:srgbClr val="16A34A"/>
+          </a:solidFill>
+          <a:ln/>
+        </p:spPr>
+      </p:sp>
+      <p:sp>
+        <p:nvSpPr>
+          <p:cNvPr id="35" name="Shape 33"/>
+          <p:cNvSpPr/>
+          <p:nvPr/>
+        </p:nvSpPr>
+        <p:spPr>
+          <a:xfrm>
+            <a:off x="5120640" y="2953512"/>
+            <a:ext cx="658368" cy="228600"/>
+          </a:xfrm>
+          <a:prstGeom prst="rect">
+            <a:avLst/>
+          </a:prstGeom>
+          <a:solidFill>
+            <a:srgbClr val="DCFCE7"/>
+          </a:solidFill>
+          <a:ln/>
+        </p:spPr>
+      </p:sp>
+      <p:sp>
+        <p:nvSpPr>
+          <p:cNvPr id="36" name="Text 34"/>
+          <p:cNvSpPr/>
+          <p:nvPr/>
+        </p:nvSpPr>
+        <p:spPr>
+          <a:xfrm>
+            <a:off x="5120640" y="2953512"/>
+            <a:ext cx="658368" cy="228600"/>
+          </a:xfrm>
+          <a:prstGeom prst="rect">
+            <a:avLst/>
+          </a:prstGeom>
+          <a:noFill/>
+          <a:ln/>
+        </p:spPr>
+        <p:txBody>
+          <a:bodyPr wrap="square" lIns="0" tIns="0" rIns="0" bIns="0" rtlCol="0" anchor="ctr"/>
+          <a:lstStyle/>
+          <a:p>
+            <a:pPr algn="ctr" indent="0" marL="0">
+              <a:buNone/>
+            </a:pPr>
+            <a:r>
+              <a:rPr lang="en-US" sz="900" b="1" dirty="0">
+                <a:solidFill>
+                  <a:srgbClr val="16A34A"/>
+                </a:solidFill>
+                <a:latin typeface="Arial" pitchFamily="34" charset="0"/>
+                <a:ea typeface="Arial" pitchFamily="34" charset="-122"/>
+                <a:cs typeface="Arial" pitchFamily="34" charset="-120"/>
+              </a:rPr>
+              <a:t>20件+</a:t>
+            </a:r>
+            <a:endParaRPr lang="en-US" sz="900" dirty="0"/>
+          </a:p>
+        </p:txBody>
+      </p:sp>
+      <p:sp>
+        <p:nvSpPr>
+          <p:cNvPr id="37" name="Text 35"/>
+          <p:cNvSpPr/>
+          <p:nvPr/>
+        </p:nvSpPr>
+        <p:spPr>
+          <a:xfrm>
+            <a:off x="3429000" y="2953512"/>
             <a:ext cx="1645920" cy="274320"/>
           </a:xfrm>
           <a:prstGeom prst="rect">
@@ -11097,13 +11337,13 @@
       </p:sp>
       <p:sp>
         <p:nvSpPr>
-          <p:cNvPr id="31" name="Text 29"/>
-          <p:cNvSpPr/>
-          <p:nvPr/>
-        </p:nvSpPr>
-        <p:spPr>
-          <a:xfrm>
-            <a:off x="594360" y="3246120"/>
+          <p:cNvPr id="38" name="Text 36"/>
+          <p:cNvSpPr/>
+          <p:nvPr/>
+        </p:nvSpPr>
+        <p:spPr>
+          <a:xfrm>
+            <a:off x="3429000" y="3246120"/>
             <a:ext cx="2377440" cy="365760"/>
           </a:xfrm>
           <a:prstGeom prst="rect">
@@ -11136,13 +11376,13 @@
       </p:sp>
       <p:sp>
         <p:nvSpPr>
-          <p:cNvPr id="32" name="Text 30"/>
-          <p:cNvSpPr/>
-          <p:nvPr/>
-        </p:nvSpPr>
-        <p:spPr>
-          <a:xfrm>
-            <a:off x="594360" y="3657600"/>
+          <p:cNvPr id="39" name="Text 37"/>
+          <p:cNvSpPr/>
+          <p:nvPr/>
+        </p:nvSpPr>
+        <p:spPr>
+          <a:xfrm>
+            <a:off x="3429000" y="3657600"/>
             <a:ext cx="2377440" cy="640080"/>
           </a:xfrm>
           <a:prstGeom prst="rect">
@@ -11168,229 +11408,6 @@
                 <a:cs typeface="Arial" pitchFamily="34" charset="-120"/>
               </a:rPr>
               <a:t>「朝食を1日追加で購入したのですが、フロントでその旨を伝えたら割引クーポンをもらえました」</a:t>
-            </a:r>
-            <a:endParaRPr lang="en-US" sz="900" dirty="0"/>
-          </a:p>
-        </p:txBody>
-      </p:sp>
-      <p:sp>
-        <p:nvSpPr>
-          <p:cNvPr id="33" name="Shape 31"/>
-          <p:cNvSpPr/>
-          <p:nvPr/>
-        </p:nvSpPr>
-        <p:spPr>
-          <a:xfrm>
-            <a:off x="3291840" y="2880360"/>
-            <a:ext cx="2651760" cy="1600200"/>
-          </a:xfrm>
-          <a:prstGeom prst="rect">
-            <a:avLst/>
-          </a:prstGeom>
-          <a:solidFill>
-            <a:srgbClr val="FFFFFF"/>
-          </a:solidFill>
-          <a:ln/>
-          <a:effectLst>
-            <a:outerShdw sx="100000" sy="100000" kx="0" ky="0" algn="bl" rotWithShape="0" blurRad="50800" dist="25400" dir="8100000">
-              <a:srgbClr val="000000">
-                <a:alpha val="10000"/>
-              </a:srgbClr>
-            </a:outerShdw>
-          </a:effectLst>
-        </p:spPr>
-      </p:sp>
-      <p:sp>
-        <p:nvSpPr>
-          <p:cNvPr id="34" name="Shape 32"/>
-          <p:cNvSpPr/>
-          <p:nvPr/>
-        </p:nvSpPr>
-        <p:spPr>
-          <a:xfrm>
-            <a:off x="3291840" y="2880360"/>
-            <a:ext cx="54864" cy="1600200"/>
-          </a:xfrm>
-          <a:prstGeom prst="rect">
-            <a:avLst/>
-          </a:prstGeom>
-          <a:solidFill>
-            <a:srgbClr val="16A34A"/>
-          </a:solidFill>
-          <a:ln/>
-        </p:spPr>
-      </p:sp>
-      <p:sp>
-        <p:nvSpPr>
-          <p:cNvPr id="35" name="Shape 33"/>
-          <p:cNvSpPr/>
-          <p:nvPr/>
-        </p:nvSpPr>
-        <p:spPr>
-          <a:xfrm>
-            <a:off x="5120640" y="2953512"/>
-            <a:ext cx="658368" cy="228600"/>
-          </a:xfrm>
-          <a:prstGeom prst="rect">
-            <a:avLst/>
-          </a:prstGeom>
-          <a:solidFill>
-            <a:srgbClr val="DCFCE7"/>
-          </a:solidFill>
-          <a:ln/>
-        </p:spPr>
-      </p:sp>
-      <p:sp>
-        <p:nvSpPr>
-          <p:cNvPr id="36" name="Text 34"/>
-          <p:cNvSpPr/>
-          <p:nvPr/>
-        </p:nvSpPr>
-        <p:spPr>
-          <a:xfrm>
-            <a:off x="5120640" y="2953512"/>
-            <a:ext cx="658368" cy="228600"/>
-          </a:xfrm>
-          <a:prstGeom prst="rect">
-            <a:avLst/>
-          </a:prstGeom>
-          <a:noFill/>
-          <a:ln/>
-        </p:spPr>
-        <p:txBody>
-          <a:bodyPr wrap="square" lIns="0" tIns="0" rIns="0" bIns="0" rtlCol="0" anchor="ctr"/>
-          <a:lstStyle/>
-          <a:p>
-            <a:pPr algn="ctr" indent="0" marL="0">
-              <a:buNone/>
-            </a:pPr>
-            <a:r>
-              <a:rPr lang="en-US" sz="900" b="1" dirty="0">
-                <a:solidFill>
-                  <a:srgbClr val="16A34A"/>
-                </a:solidFill>
-                <a:latin typeface="Arial" pitchFamily="34" charset="0"/>
-                <a:ea typeface="Arial" pitchFamily="34" charset="-122"/>
-                <a:cs typeface="Arial" pitchFamily="34" charset="-120"/>
-              </a:rPr>
-              <a:t>10件+</a:t>
-            </a:r>
-            <a:endParaRPr lang="en-US" sz="900" dirty="0"/>
-          </a:p>
-        </p:txBody>
-      </p:sp>
-      <p:sp>
-        <p:nvSpPr>
-          <p:cNvPr id="37" name="Text 35"/>
-          <p:cNvSpPr/>
-          <p:nvPr/>
-        </p:nvSpPr>
-        <p:spPr>
-          <a:xfrm>
-            <a:off x="3429000" y="2953512"/>
-            <a:ext cx="1645920" cy="274320"/>
-          </a:xfrm>
-          <a:prstGeom prst="rect">
-            <a:avLst/>
-          </a:prstGeom>
-          <a:noFill/>
-          <a:ln/>
-        </p:spPr>
-        <p:txBody>
-          <a:bodyPr wrap="square" lIns="0" tIns="0" rIns="0" bIns="0" rtlCol="0" anchor="ctr"/>
-          <a:lstStyle/>
-          <a:p>
-            <a:pPr indent="0" marL="0">
-              <a:buNone/>
-            </a:pPr>
-            <a:r>
-              <a:rPr lang="en-US" sz="1300" b="1" dirty="0">
-                <a:solidFill>
-                  <a:srgbClr val="1A2744"/>
-                </a:solidFill>
-                <a:latin typeface="Arial" pitchFamily="34" charset="0"/>
-                <a:ea typeface="Arial" pitchFamily="34" charset="-122"/>
-                <a:cs typeface="Arial" pitchFamily="34" charset="-120"/>
-              </a:rPr>
-              <a:t>清潔さ・清掃</a:t>
-            </a:r>
-            <a:endParaRPr lang="en-US" sz="1300" dirty="0"/>
-          </a:p>
-        </p:txBody>
-      </p:sp>
-      <p:sp>
-        <p:nvSpPr>
-          <p:cNvPr id="38" name="Text 36"/>
-          <p:cNvSpPr/>
-          <p:nvPr/>
-        </p:nvSpPr>
-        <p:spPr>
-          <a:xfrm>
-            <a:off x="3429000" y="3246120"/>
-            <a:ext cx="2377440" cy="365760"/>
-          </a:xfrm>
-          <a:prstGeom prst="rect">
-            <a:avLst/>
-          </a:prstGeom>
-          <a:noFill/>
-          <a:ln/>
-        </p:spPr>
-        <p:txBody>
-          <a:bodyPr wrap="square" lIns="0" tIns="0" rIns="0" bIns="0" rtlCol="0" anchor="ctr"/>
-          <a:lstStyle/>
-          <a:p>
-            <a:pPr indent="0" marL="0">
-              <a:buNone/>
-            </a:pPr>
-            <a:r>
-              <a:rPr lang="en-US" sz="900" dirty="0">
-                <a:solidFill>
-                  <a:srgbClr val="64748B"/>
-                </a:solidFill>
-                <a:latin typeface="Arial" pitchFamily="34" charset="0"/>
-                <a:ea typeface="Arial" pitchFamily="34" charset="-122"/>
-                <a:cs typeface="Arial" pitchFamily="34" charset="-120"/>
-              </a:rPr>
-              <a:t>ホテル内も綺麗でセキュリティも良く安心です</a:t>
-            </a:r>
-            <a:endParaRPr lang="en-US" sz="900" dirty="0"/>
-          </a:p>
-        </p:txBody>
-      </p:sp>
-      <p:sp>
-        <p:nvSpPr>
-          <p:cNvPr id="39" name="Text 37"/>
-          <p:cNvSpPr/>
-          <p:nvPr/>
-        </p:nvSpPr>
-        <p:spPr>
-          <a:xfrm>
-            <a:off x="3429000" y="3657600"/>
-            <a:ext cx="2377440" cy="640080"/>
-          </a:xfrm>
-          <a:prstGeom prst="rect">
-            <a:avLst/>
-          </a:prstGeom>
-          <a:noFill/>
-          <a:ln/>
-        </p:spPr>
-        <p:txBody>
-          <a:bodyPr wrap="square" lIns="0" tIns="0" rIns="0" bIns="0" rtlCol="0" anchor="ctr"/>
-          <a:lstStyle/>
-          <a:p>
-            <a:pPr indent="0" marL="0">
-              <a:buNone/>
-            </a:pPr>
-            <a:r>
-              <a:rPr lang="en-US" sz="900" i="1" dirty="0">
-                <a:solidFill>
-                  <a:srgbClr val="3B7DD8"/>
-                </a:solidFill>
-                <a:latin typeface="Arial" pitchFamily="34" charset="0"/>
-                <a:ea typeface="Arial" pitchFamily="34" charset="-122"/>
-                <a:cs typeface="Arial" pitchFamily="34" charset="-120"/>
-              </a:rPr>
-              <a:t>「ホテルのフロントの対応も良く、客室設備は清潔で整頓されており、快適な滞在ができます」</a:t>
             </a:r>
             <a:endParaRPr lang="en-US" sz="900" dirty="0"/>
           </a:p>
@@ -12371,7 +12388,7 @@
                           <a:ea typeface="Arial" pitchFamily="34" charset="-122"/>
                           <a:cs typeface="Arial" pitchFamily="34" charset="-120"/>
                         </a:rPr>
-                        <a:t>9件</a:t>
+                        <a:t>15件</a:t>
                       </a:r>
                       <a:endParaRPr lang="en-US" sz="900" dirty="0">
                         <a:latin typeface="Arial" charset="0"/>
@@ -12509,7 +12526,7 @@
                           <a:ea typeface="Arial" pitchFamily="34" charset="-122"/>
                           <a:cs typeface="Arial" pitchFamily="34" charset="-120"/>
                         </a:rPr>
-                        <a:t>窓・採光</a:t>
+                        <a:t>浴室・水回り</a:t>
                       </a:r>
                       <a:endParaRPr lang="en-US" sz="900" dirty="0">
                         <a:latin typeface="Arial" charset="0"/>
@@ -12577,7 +12594,7 @@
                           <a:ea typeface="Arial" pitchFamily="34" charset="-122"/>
                           <a:cs typeface="Arial" pitchFamily="34" charset="-120"/>
                         </a:rPr>
-                        <a:t>19階は窓からは夜景がとても綺麗でした</a:t>
+                        <a:t>ホテルは川崎駅のすぐそばに位置し、近くにはバスターミナルやショッピングモールがいくつかあり、水族館も隣接しているた...</a:t>
                       </a:r>
                       <a:endParaRPr lang="en-US" sz="900" dirty="0">
                         <a:latin typeface="Arial" charset="0"/>
@@ -12645,7 +12662,7 @@
                           <a:ea typeface="Arial" pitchFamily="34" charset="-122"/>
                           <a:cs typeface="Arial" pitchFamily="34" charset="-120"/>
                         </a:rPr>
-                        <a:t>6件</a:t>
+                        <a:t>10件</a:t>
                       </a:r>
                       <a:endParaRPr lang="en-US" sz="900" dirty="0">
                         <a:latin typeface="Arial" charset="0"/>
@@ -12783,7 +12800,7 @@
                           <a:ea typeface="Arial" pitchFamily="34" charset="-122"/>
                           <a:cs typeface="Arial" pitchFamily="34" charset="-120"/>
                         </a:rPr>
-                        <a:t>浴室・水回り</a:t>
+                        <a:t>防音性能</a:t>
                       </a:r>
                       <a:endParaRPr lang="en-US" sz="900" dirty="0">
                         <a:latin typeface="Arial" charset="0"/>
@@ -12851,7 +12868,7 @@
                           <a:ea typeface="Arial" pitchFamily="34" charset="-122"/>
                           <a:cs typeface="Arial" pitchFamily="34" charset="-120"/>
                         </a:rPr>
-                        <a:t>ホテルは川崎駅のすぐそばに位置し、近くにはバスターミナルやショッピングモールがいくつかあり、水族館も隣接しているた...</a:t>
+                        <a:t>高層階からは電車の眺めが素晴らしく、とても良かったのですが、騒音に敏感な方には少し不快かもしれません</a:t>
                       </a:r>
                       <a:endParaRPr lang="en-US" sz="900" dirty="0">
                         <a:latin typeface="Arial" charset="0"/>
@@ -12919,7 +12936,7 @@
                           <a:ea typeface="Arial" pitchFamily="34" charset="-122"/>
                           <a:cs typeface="Arial" pitchFamily="34" charset="-120"/>
                         </a:rPr>
-                        <a:t>5件</a:t>
+                        <a:t>9件</a:t>
                       </a:r>
                       <a:endParaRPr lang="en-US" sz="900" dirty="0">
                         <a:latin typeface="Arial" charset="0"/>
@@ -13057,7 +13074,7 @@
                           <a:ea typeface="Arial" pitchFamily="34" charset="-122"/>
                           <a:cs typeface="Arial" pitchFamily="34" charset="-120"/>
                         </a:rPr>
-                        <a:t>設備の老朽化</a:t>
+                        <a:t>窓・採光</a:t>
                       </a:r>
                       <a:endParaRPr lang="en-US" sz="900" dirty="0">
                         <a:latin typeface="Arial" charset="0"/>
@@ -13125,7 +13142,7 @@
                           <a:ea typeface="Arial" pitchFamily="34" charset="-122"/>
                           <a:cs typeface="Arial" pitchFamily="34" charset="-120"/>
                         </a:rPr>
-                        <a:t>部屋の空調は全館空調が機能せず（間違いなく老朽化）全くダメでした</a:t>
+                        <a:t>19階は窓からは夜景がとても綺麗でした</a:t>
                       </a:r>
                       <a:endParaRPr lang="en-US" sz="900" dirty="0">
                         <a:latin typeface="Arial" charset="0"/>
@@ -13193,7 +13210,7 @@
                           <a:ea typeface="Arial" pitchFamily="34" charset="-122"/>
                           <a:cs typeface="Arial" pitchFamily="34" charset="-120"/>
                         </a:rPr>
-                        <a:t>4件</a:t>
+                        <a:t>9件</a:t>
                       </a:r>
                       <a:endParaRPr lang="en-US" sz="900" dirty="0">
                         <a:latin typeface="Arial" charset="0"/>
@@ -13331,7 +13348,7 @@
                           <a:ea typeface="Arial" pitchFamily="34" charset="-122"/>
                           <a:cs typeface="Arial" pitchFamily="34" charset="-120"/>
                         </a:rPr>
-                        <a:t>防音性能</a:t>
+                        <a:t>対応・サービスの不満</a:t>
                       </a:r>
                       <a:endParaRPr lang="en-US" sz="900" dirty="0">
                         <a:latin typeface="Arial" charset="0"/>
@@ -13399,7 +13416,7 @@
                           <a:ea typeface="Arial" pitchFamily="34" charset="-122"/>
                           <a:cs typeface="Arial" pitchFamily="34" charset="-120"/>
                         </a:rPr>
-                        <a:t>高層階からは電車の眺めが素晴らしく、とても良かったのですが、騒音に敏感な方には少し不快かもしれません</a:t>
+                        <a:t>酒店櫃檯服務態度良好</a:t>
                       </a:r>
                       <a:endParaRPr lang="en-US" sz="900" dirty="0">
                         <a:latin typeface="Arial" charset="0"/>
@@ -13467,7 +13484,7 @@
                           <a:ea typeface="Arial" pitchFamily="34" charset="-122"/>
                           <a:cs typeface="Arial" pitchFamily="34" charset="-120"/>
                         </a:rPr>
-                        <a:t>4件</a:t>
+                        <a:t>8件</a:t>
                       </a:r>
                       <a:endParaRPr lang="en-US" sz="900" dirty="0">
                         <a:latin typeface="Arial" charset="0"/>
@@ -13605,7 +13622,7 @@
                           <a:ea typeface="Arial" pitchFamily="34" charset="-122"/>
                           <a:cs typeface="Arial" pitchFamily="34" charset="-120"/>
                         </a:rPr>
-                        <a:t>対応・サービスの不満</a:t>
+                        <a:t>設備の老朽化</a:t>
                       </a:r>
                       <a:endParaRPr lang="en-US" sz="900" dirty="0">
                         <a:latin typeface="Arial" charset="0"/>
@@ -13673,7 +13690,7 @@
                           <a:ea typeface="Arial" pitchFamily="34" charset="-122"/>
                           <a:cs typeface="Arial" pitchFamily="34" charset="-120"/>
                         </a:rPr>
-                        <a:t>酒店櫃檯服務態度良好</a:t>
+                        <a:t>部屋の空調は全館空調が機能せず（間違いなく老朽化）全くダメでした</a:t>
                       </a:r>
                       <a:endParaRPr lang="en-US" sz="900" dirty="0">
                         <a:latin typeface="Arial" charset="0"/>
@@ -13741,7 +13758,7 @@
                           <a:ea typeface="Arial" pitchFamily="34" charset="-122"/>
                           <a:cs typeface="Arial" pitchFamily="34" charset="-120"/>
                         </a:rPr>
-                        <a:t>4件</a:t>
+                        <a:t>6件</a:t>
                       </a:r>
                       <a:endParaRPr lang="en-US" sz="900" dirty="0">
                         <a:latin typeface="Arial" charset="0"/>
@@ -14015,7 +14032,7 @@
                           <a:ea typeface="Arial" pitchFamily="34" charset="-122"/>
                           <a:cs typeface="Arial" pitchFamily="34" charset="-120"/>
                         </a:rPr>
-                        <a:t>3件</a:t>
+                        <a:t>4件</a:t>
                       </a:r>
                       <a:endParaRPr lang="en-US" sz="900" dirty="0">
                         <a:latin typeface="Arial" charset="0"/>
@@ -14289,7 +14306,7 @@
                           <a:ea typeface="Arial" pitchFamily="34" charset="-122"/>
                           <a:cs typeface="Arial" pitchFamily="34" charset="-120"/>
                         </a:rPr>
-                        <a:t>1件</a:t>
+                        <a:t>2件</a:t>
                       </a:r>
                       <a:endParaRPr lang="en-US" sz="900" dirty="0">
                         <a:latin typeface="Arial" charset="0"/>
@@ -14563,7 +14580,7 @@
                           <a:ea typeface="Arial" pitchFamily="34" charset="-122"/>
                           <a:cs typeface="Arial" pitchFamily="34" charset="-120"/>
                         </a:rPr>
-                        <a:t>1件</a:t>
+                        <a:t>2件</a:t>
                       </a:r>
                       <a:endParaRPr lang="en-US" sz="900" dirty="0">
                         <a:latin typeface="Arial" charset="0"/>

--- a/納品レポート/ホテル別レポート/kawasaki_nikko_口コミ分析レポート.pptx
+++ b/納品レポート/ホテル別レポート/kawasaki_nikko_口コミ分析レポート.pptx
@@ -175,23 +175,26 @@
           </c:dLbls>
           <c:cat>
             <c:multiLvlStrRef>
-              <c:f>Sheet1!$A$2:$A$6</c:f>
+              <c:f>Sheet1!$A$2:$A$7</c:f>
               <c:multiLvlStrCache>
-                <c:ptCount val="5"/>
+                <c:ptCount val="6"/>
                 <c:lvl>
                   <c:pt idx="0">
+                    <c:v>Agoda</c:v>
+                  </c:pt>
+                  <c:pt idx="1">
                     <c:v>Trip.com</c:v>
                   </c:pt>
-                  <c:pt idx="1">
+                  <c:pt idx="2">
                     <c:v>じゃらん</c:v>
                   </c:pt>
-                  <c:pt idx="2">
+                  <c:pt idx="3">
                     <c:v>Booking.com</c:v>
                   </c:pt>
-                  <c:pt idx="3">
+                  <c:pt idx="4">
                     <c:v>楽天トラベル</c:v>
                   </c:pt>
-                  <c:pt idx="4">
+                  <c:pt idx="5">
                     <c:v>Google</c:v>
                   </c:pt>
                 </c:lvl>
@@ -200,24 +203,27 @@
           </c:cat>
           <c:val>
             <c:numRef>
-              <c:f>Sheet1!$B$2:$B$6</c:f>
+              <c:f>Sheet1!$B$2:$B$7</c:f>
               <c:numCache>
                 <c:formatCode>General</c:formatCode>
-                <c:ptCount val="5"/>
+                <c:ptCount val="6"/>
                 <c:pt idx="0">
-                  <c:v>9.5</c:v>
+                  <c:v>10</c:v>
                 </c:pt>
                 <c:pt idx="1">
-                  <c:v>9.43</c:v>
+                  <c:v>9.38</c:v>
                 </c:pt>
                 <c:pt idx="2">
-                  <c:v>8.63</c:v>
+                  <c:v>9.33</c:v>
                 </c:pt>
                 <c:pt idx="3">
-                  <c:v>8.44</c:v>
+                  <c:v>8.65</c:v>
                 </c:pt>
                 <c:pt idx="4">
-                  <c:v>7.1</c:v>
+                  <c:v>8.57</c:v>
+                </c:pt>
+                <c:pt idx="5">
+                  <c:v>6.17</c:v>
                 </c:pt>
               </c:numCache>
             </c:numRef>
@@ -560,10 +566,10 @@
               <c:numCache>
                 <c:ptCount val="3"/>
                 <c:pt idx="0">
-                  <c:v>110</c:v>
+                  <c:v>66</c:v>
                 </c:pt>
                 <c:pt idx="1">
-                  <c:v>23</c:v>
+                  <c:v>15</c:v>
                 </c:pt>
                 <c:pt idx="2">
                   <c:v>3</c:v>
@@ -803,19 +809,19 @@
                 <c:formatCode>General</c:formatCode>
                 <c:ptCount val="8"/>
                 <c:pt idx="0">
-                  <c:v>58</c:v>
+                  <c:v>38</c:v>
                 </c:pt>
                 <c:pt idx="1">
-                  <c:v>24</c:v>
+                  <c:v>12</c:v>
                 </c:pt>
                 <c:pt idx="2">
-                  <c:v>28</c:v>
+                  <c:v>16</c:v>
                 </c:pt>
                 <c:pt idx="3">
-                  <c:v>10</c:v>
+                  <c:v>6</c:v>
                 </c:pt>
                 <c:pt idx="4">
-                  <c:v>12</c:v>
+                  <c:v>8</c:v>
                 </c:pt>
                 <c:pt idx="5">
                   <c:v>1</c:v>
@@ -2755,7 +2761,7 @@
                 <a:ea typeface="Arial" pitchFamily="34" charset="-122"/>
                 <a:cs typeface="Arial" pitchFamily="34" charset="-120"/>
               </a:rPr>
-              <a:t>分析対象期間：2026年2月〜3月</a:t>
+              <a:t>分析対象期間：2026年3月〜4月</a:t>
             </a:r>
             <a:endParaRPr lang="en-US" sz="1000" dirty="0"/>
           </a:p>
@@ -2775,7 +2781,7 @@
                 <a:ea typeface="Arial" pitchFamily="34" charset="-122"/>
                 <a:cs typeface="Arial" pitchFamily="34" charset="-120"/>
               </a:rPr>
-              <a:t>レビュー総数：136件（5サイト）</a:t>
+              <a:t>レビュー総数：84件（6サイト）</a:t>
             </a:r>
             <a:endParaRPr lang="en-US" sz="1000" dirty="0"/>
           </a:p>
@@ -2795,7 +2801,7 @@
                 <a:ea typeface="Arial" pitchFamily="34" charset="-122"/>
                 <a:cs typeface="Arial" pitchFamily="34" charset="-120"/>
               </a:rPr>
-              <a:t>作成日：2026年4月6日</a:t>
+              <a:t>作成日：2026年4月7日</a:t>
             </a:r>
             <a:endParaRPr lang="en-US" sz="1000" dirty="0"/>
           </a:p>
@@ -3341,7 +3347,7 @@
                           <a:ea typeface="Arial" pitchFamily="34" charset="-122"/>
                           <a:cs typeface="Arial" pitchFamily="34" charset="-120"/>
                         </a:rPr>
-                        <a:t>8.64点</a:t>
+                        <a:t>8.56点</a:t>
                       </a:r>
                       <a:endParaRPr lang="en-US" sz="1000" dirty="0">
                         <a:latin typeface="Arial" charset="0"/>
@@ -3615,7 +3621,7 @@
                           <a:ea typeface="Arial" pitchFamily="34" charset="-122"/>
                           <a:cs typeface="Arial" pitchFamily="34" charset="-120"/>
                         </a:rPr>
-                        <a:t>80.9%</a:t>
+                        <a:t>78.6%</a:t>
                       </a:r>
                       <a:endParaRPr lang="en-US" sz="1000" dirty="0">
                         <a:latin typeface="Arial" charset="0"/>
@@ -3683,7 +3689,7 @@
                           <a:ea typeface="Arial" pitchFamily="34" charset="-122"/>
                           <a:cs typeface="Arial" pitchFamily="34" charset="-120"/>
                         </a:rPr>
-                        <a:t>86%以上</a:t>
+                        <a:t>84%以上</a:t>
                       </a:r>
                       <a:endParaRPr lang="en-US" sz="1000" dirty="0">
                         <a:latin typeface="Arial" charset="0"/>
@@ -3889,7 +3895,7 @@
                           <a:ea typeface="Arial" pitchFamily="34" charset="-122"/>
                           <a:cs typeface="Arial" pitchFamily="34" charset="-120"/>
                         </a:rPr>
-                        <a:t>2.2%</a:t>
+                        <a:t>3.6%</a:t>
                       </a:r>
                       <a:endParaRPr lang="en-US" sz="1000" dirty="0">
                         <a:latin typeface="Arial" charset="0"/>
@@ -3957,7 +3963,7 @@
                           <a:ea typeface="Arial" pitchFamily="34" charset="-122"/>
                           <a:cs typeface="Arial" pitchFamily="34" charset="-120"/>
                         </a:rPr>
-                        <a:t>0%以下</a:t>
+                        <a:t>1%以下</a:t>
                       </a:r>
                       <a:endParaRPr lang="en-US" sz="1000" dirty="0">
                         <a:latin typeface="Arial" charset="0"/>
@@ -4163,7 +4169,7 @@
                           <a:ea typeface="Arial" pitchFamily="34" charset="-122"/>
                           <a:cs typeface="Arial" pitchFamily="34" charset="-120"/>
                         </a:rPr>
-                        <a:t>7.1点</a:t>
+                        <a:t>6.2点</a:t>
                       </a:r>
                       <a:endParaRPr lang="en-US" sz="1000" dirty="0">
                         <a:latin typeface="Arial" charset="0"/>
@@ -4231,7 +4237,7 @@
                           <a:ea typeface="Arial" pitchFamily="34" charset="-122"/>
                           <a:cs typeface="Arial" pitchFamily="34" charset="-120"/>
                         </a:rPr>
-                        <a:t>8.1点以上</a:t>
+                        <a:t>7.2点以上</a:t>
                       </a:r>
                       <a:endParaRPr lang="en-US" sz="1000" dirty="0">
                         <a:latin typeface="Arial" charset="0"/>
@@ -4711,7 +4717,7 @@
                           <a:ea typeface="Arial" pitchFamily="34" charset="-122"/>
                           <a:cs typeface="Arial" pitchFamily="34" charset="-120"/>
                         </a:rPr>
-                        <a:t>約15件/期間</a:t>
+                        <a:t>約11件/期間</a:t>
                       </a:r>
                       <a:endParaRPr lang="en-US" sz="1000" dirty="0">
                         <a:latin typeface="Arial" charset="0"/>
@@ -4779,7 +4785,7 @@
                           <a:ea typeface="Arial" pitchFamily="34" charset="-122"/>
                           <a:cs typeface="Arial" pitchFamily="34" charset="-120"/>
                         </a:rPr>
-                        <a:t>7件以下</a:t>
+                        <a:t>5件以下</a:t>
                       </a:r>
                       <a:endParaRPr lang="en-US" sz="1000" dirty="0">
                         <a:latin typeface="Arial" charset="0"/>
@@ -5350,7 +5356,7 @@
                 <a:ea typeface="Arial" pitchFamily="34" charset="-122"/>
                 <a:cs typeface="Arial" pitchFamily="34" charset="-120"/>
               </a:rPr>
-              <a:t>8.64</a:t>
+              <a:t>8.56</a:t>
             </a:r>
             <a:endParaRPr lang="en-US" sz="3200" dirty="0"/>
           </a:p>
@@ -5475,7 +5481,7 @@
                 <a:ea typeface="Arial" pitchFamily="34" charset="-122"/>
                 <a:cs typeface="Arial" pitchFamily="34" charset="-120"/>
               </a:rPr>
-              <a:t>80.9%</a:t>
+              <a:t>78.6%</a:t>
             </a:r>
             <a:endParaRPr lang="en-US" sz="3200" dirty="0"/>
           </a:p>
@@ -5600,7 +5606,7 @@
                 <a:ea typeface="Arial" pitchFamily="34" charset="-122"/>
                 <a:cs typeface="Arial" pitchFamily="34" charset="-120"/>
               </a:rPr>
-              <a:t>2.2%</a:t>
+              <a:t>3.6%</a:t>
             </a:r>
             <a:endParaRPr lang="en-US" sz="3200" dirty="0"/>
           </a:p>
@@ -5725,7 +5731,7 @@
                 <a:ea typeface="Arial" pitchFamily="34" charset="-122"/>
                 <a:cs typeface="Arial" pitchFamily="34" charset="-120"/>
               </a:rPr>
-              <a:t>136件</a:t>
+              <a:t>84件</a:t>
             </a:r>
             <a:endParaRPr lang="en-US" sz="3200" dirty="0"/>
           </a:p>
@@ -5873,7 +5879,7 @@
                 <a:ea typeface="Arial" pitchFamily="34" charset="-122"/>
                 <a:cs typeface="Arial" pitchFamily="34" charset="-120"/>
               </a:rPr>
-              <a:t>  駅のすぐ横にあり立地も良く、周りに飲食店も多く大変便利です</a:t>
+              <a:t>  駅が近くて周りにはなんでも揃ってるので遅い時間も食べ物には困りません</a:t>
             </a:r>
             <a:endParaRPr lang="en-US" sz="1100" dirty="0"/>
           </a:p>
@@ -5913,7 +5919,7 @@
                 <a:ea typeface="Arial" pitchFamily="34" charset="-122"/>
                 <a:cs typeface="Arial" pitchFamily="34" charset="-120"/>
               </a:rPr>
-              <a:t>  ホテルのフロントの対応も良く、客室設備は清潔で整頓されており、快適な滞在ができます</a:t>
+              <a:t>  後から外出する際にロビーにいくと、男性スタッフの方とニコニコ楽しそうにお話をされていて 私もその穏やかな笑顔で対応...</a:t>
             </a:r>
             <a:endParaRPr lang="en-US" sz="1100" dirty="0"/>
           </a:p>
@@ -5933,7 +5939,7 @@
                 <a:ea typeface="Arial" pitchFamily="34" charset="-122"/>
                 <a:cs typeface="Arial" pitchFamily="34" charset="-120"/>
               </a:rPr>
-              <a:t>快適さ・設備 </a:t>
+              <a:t>朝食 </a:t>
             </a:r>
             <a:endParaRPr lang="en-US" sz="1100" dirty="0"/>
           </a:p>
@@ -5953,7 +5959,7 @@
                 <a:ea typeface="Arial" pitchFamily="34" charset="-122"/>
                 <a:cs typeface="Arial" pitchFamily="34" charset="-120"/>
               </a:rPr>
-              <a:t>  ホテルのフロントの対応も良く、客室設備は清潔で整頓されており、快適な滞在ができます</a:t>
+              <a:t>  朝食もとても美味しくて、古いホテルだと思われますが綺麗でそんな事を思わせないくらい素晴らしいです</a:t>
             </a:r>
             <a:endParaRPr lang="en-US" sz="1100" dirty="0"/>
           </a:p>
@@ -6101,7 +6107,7 @@
                 <a:ea typeface="Arial" pitchFamily="34" charset="-122"/>
                 <a:cs typeface="Arial" pitchFamily="34" charset="-120"/>
               </a:rPr>
-              <a:t>  部屋の空調は全館空調が機能せず（間違いなく老朽化）全くダメでした</a:t>
+              <a:t>  ホテルにはセントラル空調があり、ファンを最高速度に設定し、室温を最低の18度にしても、まるで自分が焼かれているよう...</a:t>
             </a:r>
             <a:endParaRPr lang="en-US" sz="1100" dirty="0"/>
           </a:p>
@@ -6141,7 +6147,7 @@
                 <a:ea typeface="Arial" pitchFamily="34" charset="-122"/>
                 <a:cs typeface="Arial" pitchFamily="34" charset="-120"/>
               </a:rPr>
-              <a:t>  ホテルは川崎駅のすぐそばに位置し、近くにはバスターミナルやショッピングモールがいくつかあり、水族館も隣接しているた...</a:t>
+              <a:t>  全体的には許容範囲内だが、浴室の壁には以前の宿泊客の髪の毛が1本だけでなく複数付着しているので、もっと念入りに掃除...</a:t>
             </a:r>
             <a:endParaRPr lang="en-US" sz="1100" dirty="0"/>
           </a:p>
@@ -6161,7 +6167,7 @@
                 <a:ea typeface="Arial" pitchFamily="34" charset="-122"/>
                 <a:cs typeface="Arial" pitchFamily="34" charset="-120"/>
               </a:rPr>
-              <a:t>防音性能 </a:t>
+              <a:t>窓・採光 </a:t>
             </a:r>
             <a:endParaRPr lang="en-US" sz="1100" dirty="0"/>
           </a:p>
@@ -6181,7 +6187,7 @@
                 <a:ea typeface="Arial" pitchFamily="34" charset="-122"/>
                 <a:cs typeface="Arial" pitchFamily="34" charset="-120"/>
               </a:rPr>
-              <a:t>  高層階からは電車の眺めが素晴らしく、とても良かったのですが、騒音に敏感な方には少し不快かもしれません</a:t>
+              <a:t>  団体の方がいたので、混雑してるなら後で来ますと伝えると、静かな窓際に案内してくださりました</a:t>
             </a:r>
             <a:endParaRPr lang="en-US" sz="1100" dirty="0"/>
           </a:p>
@@ -6534,7 +6540,7 @@
                 <a:ea typeface="Arial" pitchFamily="34" charset="-122"/>
                 <a:cs typeface="Arial" pitchFamily="34" charset="-120"/>
               </a:rPr>
-              <a:t>8.64</a:t>
+              <a:t>8.56</a:t>
             </a:r>
             <a:endParaRPr lang="en-US" sz="3200" dirty="0"/>
           </a:p>
@@ -6582,7 +6588,7 @@
             <a:avLst/>
           </a:prstGeom>
           <a:solidFill>
-            <a:srgbClr val="16A34A"/>
+            <a:srgbClr val="D4A843"/>
           </a:solidFill>
           <a:ln/>
         </p:spPr>
@@ -6653,13 +6659,13 @@
             <a:r>
               <a:rPr lang="en-US" sz="3200" b="1" dirty="0">
                 <a:solidFill>
-                  <a:srgbClr val="16A34A"/>
+                  <a:srgbClr val="D4A843"/>
                 </a:solidFill>
                 <a:latin typeface="Arial" pitchFamily="34" charset="0"/>
                 <a:ea typeface="Arial" pitchFamily="34" charset="-122"/>
                 <a:cs typeface="Arial" pitchFamily="34" charset="-120"/>
               </a:rPr>
-              <a:t>80.9%</a:t>
+              <a:t>78.6%</a:t>
             </a:r>
             <a:endParaRPr lang="en-US" sz="3200" dirty="0"/>
           </a:p>
@@ -6784,7 +6790,7 @@
                 <a:ea typeface="Arial" pitchFamily="34" charset="-122"/>
                 <a:cs typeface="Arial" pitchFamily="34" charset="-120"/>
               </a:rPr>
-              <a:t>2.2%</a:t>
+              <a:t>3.6%</a:t>
             </a:r>
             <a:endParaRPr lang="en-US" sz="3200" dirty="0"/>
           </a:p>
@@ -6909,7 +6915,7 @@
                 <a:ea typeface="Arial" pitchFamily="34" charset="-122"/>
                 <a:cs typeface="Arial" pitchFamily="34" charset="-120"/>
               </a:rPr>
-              <a:t>136件</a:t>
+              <a:t>84件</a:t>
             </a:r>
             <a:endParaRPr lang="en-US" sz="3200" dirty="0"/>
           </a:p>
@@ -7330,7 +7336,7 @@
                 <a:ea typeface="Arial" pitchFamily="34" charset="-122"/>
                 <a:cs typeface="Arial" pitchFamily="34" charset="-120"/>
               </a:rPr>
-              <a:t>Trip.com(9.50)が最高スコア。</a:t>
+              <a:t>Agoda(10.00)が最高スコア。</a:t>
             </a:r>
             <a:endParaRPr lang="en-US" sz="1100" dirty="0"/>
           </a:p>
@@ -7379,7 +7385,7 @@
                 <a:ea typeface="Arial" pitchFamily="34" charset="-122"/>
                 <a:cs typeface="Arial" pitchFamily="34" charset="-120"/>
               </a:rPr>
-              <a:t>Google(7.1)が相対的に低い。口コミ返信の強化が急務</a:t>
+              <a:t>Google(6.2)が相対的に低い。口コミ返信の強化が急務</a:t>
             </a:r>
             <a:endParaRPr lang="en-US" sz="1100" dirty="0"/>
           </a:p>
@@ -7820,7 +7826,7 @@
                           <a:ea typeface="Arial" pitchFamily="34" charset="-122"/>
                           <a:cs typeface="Arial" pitchFamily="34" charset="-120"/>
                         </a:rPr>
-                        <a:t>Trip.com</a:t>
+                        <a:t>Agoda</a:t>
                       </a:r>
                       <a:endParaRPr lang="en-US" sz="900" dirty="0">
                         <a:latin typeface="Arial" charset="0"/>
@@ -7888,7 +7894,7 @@
                           <a:ea typeface="Arial" pitchFamily="34" charset="-122"/>
                           <a:cs typeface="Arial" pitchFamily="34" charset="-120"/>
                         </a:rPr>
-                        <a:t>32</a:t>
+                        <a:t>1</a:t>
                       </a:r>
                       <a:endParaRPr lang="en-US" sz="900" dirty="0">
                         <a:latin typeface="Arial" charset="0"/>
@@ -7956,7 +7962,7 @@
                           <a:ea typeface="Arial" pitchFamily="34" charset="-122"/>
                           <a:cs typeface="Arial" pitchFamily="34" charset="-120"/>
                         </a:rPr>
-                        <a:t>9.5</a:t>
+                        <a:t>10</a:t>
                       </a:r>
                       <a:endParaRPr lang="en-US" sz="900" dirty="0">
                         <a:latin typeface="Arial" charset="0"/>
@@ -8092,7 +8098,7 @@
                           <a:ea typeface="Arial" pitchFamily="34" charset="-122"/>
                           <a:cs typeface="Arial" pitchFamily="34" charset="-120"/>
                         </a:rPr>
-                        <a:t>9.5</a:t>
+                        <a:t>10</a:t>
                       </a:r>
                       <a:endParaRPr lang="en-US" sz="900" dirty="0">
                         <a:latin typeface="Arial" charset="0"/>
@@ -8140,6 +8146,348 @@
                     </a:lnB>
                     <a:solidFill>
                       <a:srgbClr val="E8EFF8"/>
+                    </a:solidFill>
+                  </a:tcPr>
+                </a:tc>
+              </a:tr>
+              <a:tr h="201168">
+                <a:tc>
+                  <a:txBody>
+                    <a:bodyPr/>
+                    <a:lstStyle/>
+                    <a:p>
+                      <a:pPr algn="ctr" indent="0" marL="0">
+                        <a:buNone/>
+                      </a:pPr>
+                      <a:r>
+                        <a:rPr lang="en-US" sz="900" dirty="0">
+                          <a:solidFill>
+                            <a:srgbClr val="000000"/>
+                          </a:solidFill>
+                          <a:latin typeface="Arial" pitchFamily="34" charset="0"/>
+                          <a:ea typeface="Arial" pitchFamily="34" charset="-122"/>
+                          <a:cs typeface="Arial" pitchFamily="34" charset="-120"/>
+                        </a:rPr>
+                        <a:t>Trip.com</a:t>
+                      </a:r>
+                      <a:endParaRPr lang="en-US" sz="900" dirty="0">
+                        <a:latin typeface="Arial" charset="0"/>
+                        <a:ea typeface="Arial" charset="0"/>
+                        <a:cs typeface="Arial" charset="0"/>
+                      </a:endParaRPr>
+                    </a:p>
+                  </a:txBody>
+                  <a:tcPr marL="91440" marR="91440" marT="45720" marB="45720">
+                    <a:lnL w="6350" cap="flat" cmpd="sng" algn="ctr">
+                      <a:solidFill>
+                        <a:srgbClr val="CBD5E1"/>
+                      </a:solidFill>
+                      <a:prstDash val="solid"/>
+                      <a:round/>
+                      <a:headEnd type="none" w="med" len="med"/>
+                      <a:tailEnd type="none" w="med" len="med"/>
+                    </a:lnL>
+                    <a:lnR w="6350" cap="flat" cmpd="sng" algn="ctr">
+                      <a:solidFill>
+                        <a:srgbClr val="CBD5E1"/>
+                      </a:solidFill>
+                      <a:prstDash val="solid"/>
+                      <a:round/>
+                      <a:headEnd type="none" w="med" len="med"/>
+                      <a:tailEnd type="none" w="med" len="med"/>
+                    </a:lnR>
+                    <a:lnT w="6350" cap="flat" cmpd="sng" algn="ctr">
+                      <a:solidFill>
+                        <a:srgbClr val="CBD5E1"/>
+                      </a:solidFill>
+                      <a:prstDash val="solid"/>
+                      <a:round/>
+                      <a:headEnd type="none" w="med" len="med"/>
+                      <a:tailEnd type="none" w="med" len="med"/>
+                    </a:lnT>
+                    <a:lnB w="6350" cap="flat" cmpd="sng" algn="ctr">
+                      <a:solidFill>
+                        <a:srgbClr val="CBD5E1"/>
+                      </a:solidFill>
+                      <a:prstDash val="solid"/>
+                      <a:round/>
+                      <a:headEnd type="none" w="med" len="med"/>
+                      <a:tailEnd type="none" w="med" len="med"/>
+                    </a:lnB>
+                    <a:solidFill>
+                      <a:srgbClr val="FFFFFF"/>
+                    </a:solidFill>
+                  </a:tcPr>
+                </a:tc>
+                <a:tc>
+                  <a:txBody>
+                    <a:bodyPr/>
+                    <a:lstStyle/>
+                    <a:p>
+                      <a:pPr algn="ctr" indent="0" marL="0">
+                        <a:buNone/>
+                      </a:pPr>
+                      <a:r>
+                        <a:rPr lang="en-US" sz="900" dirty="0">
+                          <a:solidFill>
+                            <a:srgbClr val="000000"/>
+                          </a:solidFill>
+                          <a:latin typeface="Arial" pitchFamily="34" charset="0"/>
+                          <a:ea typeface="Arial" pitchFamily="34" charset="-122"/>
+                          <a:cs typeface="Arial" pitchFamily="34" charset="-120"/>
+                        </a:rPr>
+                        <a:t>24</a:t>
+                      </a:r>
+                      <a:endParaRPr lang="en-US" sz="900" dirty="0">
+                        <a:latin typeface="Arial" charset="0"/>
+                        <a:ea typeface="Arial" charset="0"/>
+                        <a:cs typeface="Arial" charset="0"/>
+                      </a:endParaRPr>
+                    </a:p>
+                  </a:txBody>
+                  <a:tcPr marL="91440" marR="91440" marT="45720" marB="45720">
+                    <a:lnL w="6350" cap="flat" cmpd="sng" algn="ctr">
+                      <a:solidFill>
+                        <a:srgbClr val="CBD5E1"/>
+                      </a:solidFill>
+                      <a:prstDash val="solid"/>
+                      <a:round/>
+                      <a:headEnd type="none" w="med" len="med"/>
+                      <a:tailEnd type="none" w="med" len="med"/>
+                    </a:lnL>
+                    <a:lnR w="6350" cap="flat" cmpd="sng" algn="ctr">
+                      <a:solidFill>
+                        <a:srgbClr val="CBD5E1"/>
+                      </a:solidFill>
+                      <a:prstDash val="solid"/>
+                      <a:round/>
+                      <a:headEnd type="none" w="med" len="med"/>
+                      <a:tailEnd type="none" w="med" len="med"/>
+                    </a:lnR>
+                    <a:lnT w="6350" cap="flat" cmpd="sng" algn="ctr">
+                      <a:solidFill>
+                        <a:srgbClr val="CBD5E1"/>
+                      </a:solidFill>
+                      <a:prstDash val="solid"/>
+                      <a:round/>
+                      <a:headEnd type="none" w="med" len="med"/>
+                      <a:tailEnd type="none" w="med" len="med"/>
+                    </a:lnT>
+                    <a:lnB w="6350" cap="flat" cmpd="sng" algn="ctr">
+                      <a:solidFill>
+                        <a:srgbClr val="CBD5E1"/>
+                      </a:solidFill>
+                      <a:prstDash val="solid"/>
+                      <a:round/>
+                      <a:headEnd type="none" w="med" len="med"/>
+                      <a:tailEnd type="none" w="med" len="med"/>
+                    </a:lnB>
+                    <a:solidFill>
+                      <a:srgbClr val="FFFFFF"/>
+                    </a:solidFill>
+                  </a:tcPr>
+                </a:tc>
+                <a:tc>
+                  <a:txBody>
+                    <a:bodyPr/>
+                    <a:lstStyle/>
+                    <a:p>
+                      <a:pPr algn="ctr" indent="0" marL="0">
+                        <a:buNone/>
+                      </a:pPr>
+                      <a:r>
+                        <a:rPr lang="en-US" sz="900" dirty="0">
+                          <a:solidFill>
+                            <a:srgbClr val="000000"/>
+                          </a:solidFill>
+                          <a:latin typeface="Arial" pitchFamily="34" charset="0"/>
+                          <a:ea typeface="Arial" pitchFamily="34" charset="-122"/>
+                          <a:cs typeface="Arial" pitchFamily="34" charset="-120"/>
+                        </a:rPr>
+                        <a:t>9.38</a:t>
+                      </a:r>
+                      <a:endParaRPr lang="en-US" sz="900" dirty="0">
+                        <a:latin typeface="Arial" charset="0"/>
+                        <a:ea typeface="Arial" charset="0"/>
+                        <a:cs typeface="Arial" charset="0"/>
+                      </a:endParaRPr>
+                    </a:p>
+                  </a:txBody>
+                  <a:tcPr marL="91440" marR="91440" marT="45720" marB="45720">
+                    <a:lnL w="6350" cap="flat" cmpd="sng" algn="ctr">
+                      <a:solidFill>
+                        <a:srgbClr val="CBD5E1"/>
+                      </a:solidFill>
+                      <a:prstDash val="solid"/>
+                      <a:round/>
+                      <a:headEnd type="none" w="med" len="med"/>
+                      <a:tailEnd type="none" w="med" len="med"/>
+                    </a:lnL>
+                    <a:lnR w="6350" cap="flat" cmpd="sng" algn="ctr">
+                      <a:solidFill>
+                        <a:srgbClr val="CBD5E1"/>
+                      </a:solidFill>
+                      <a:prstDash val="solid"/>
+                      <a:round/>
+                      <a:headEnd type="none" w="med" len="med"/>
+                      <a:tailEnd type="none" w="med" len="med"/>
+                    </a:lnR>
+                    <a:lnT w="6350" cap="flat" cmpd="sng" algn="ctr">
+                      <a:solidFill>
+                        <a:srgbClr val="CBD5E1"/>
+                      </a:solidFill>
+                      <a:prstDash val="solid"/>
+                      <a:round/>
+                      <a:headEnd type="none" w="med" len="med"/>
+                      <a:tailEnd type="none" w="med" len="med"/>
+                    </a:lnT>
+                    <a:lnB w="6350" cap="flat" cmpd="sng" algn="ctr">
+                      <a:solidFill>
+                        <a:srgbClr val="CBD5E1"/>
+                      </a:solidFill>
+                      <a:prstDash val="solid"/>
+                      <a:round/>
+                      <a:headEnd type="none" w="med" len="med"/>
+                      <a:tailEnd type="none" w="med" len="med"/>
+                    </a:lnB>
+                    <a:solidFill>
+                      <a:srgbClr val="FFFFFF"/>
+                    </a:solidFill>
+                  </a:tcPr>
+                </a:tc>
+                <a:tc>
+                  <a:txBody>
+                    <a:bodyPr/>
+                    <a:lstStyle/>
+                    <a:p>
+                      <a:pPr algn="ctr" indent="0" marL="0">
+                        <a:buNone/>
+                      </a:pPr>
+                      <a:r>
+                        <a:rPr lang="en-US" sz="900" dirty="0">
+                          <a:solidFill>
+                            <a:srgbClr val="000000"/>
+                          </a:solidFill>
+                          <a:latin typeface="Arial" pitchFamily="34" charset="0"/>
+                          <a:ea typeface="Arial" pitchFamily="34" charset="-122"/>
+                          <a:cs typeface="Arial" pitchFamily="34" charset="-120"/>
+                        </a:rPr>
+                        <a:t>/10</a:t>
+                      </a:r>
+                      <a:endParaRPr lang="en-US" sz="900" dirty="0">
+                        <a:latin typeface="Arial" charset="0"/>
+                        <a:ea typeface="Arial" charset="0"/>
+                        <a:cs typeface="Arial" charset="0"/>
+                      </a:endParaRPr>
+                    </a:p>
+                  </a:txBody>
+                  <a:tcPr marL="91440" marR="91440" marT="45720" marB="45720">
+                    <a:lnL w="6350" cap="flat" cmpd="sng" algn="ctr">
+                      <a:solidFill>
+                        <a:srgbClr val="CBD5E1"/>
+                      </a:solidFill>
+                      <a:prstDash val="solid"/>
+                      <a:round/>
+                      <a:headEnd type="none" w="med" len="med"/>
+                      <a:tailEnd type="none" w="med" len="med"/>
+                    </a:lnL>
+                    <a:lnR w="6350" cap="flat" cmpd="sng" algn="ctr">
+                      <a:solidFill>
+                        <a:srgbClr val="CBD5E1"/>
+                      </a:solidFill>
+                      <a:prstDash val="solid"/>
+                      <a:round/>
+                      <a:headEnd type="none" w="med" len="med"/>
+                      <a:tailEnd type="none" w="med" len="med"/>
+                    </a:lnR>
+                    <a:lnT w="6350" cap="flat" cmpd="sng" algn="ctr">
+                      <a:solidFill>
+                        <a:srgbClr val="CBD5E1"/>
+                      </a:solidFill>
+                      <a:prstDash val="solid"/>
+                      <a:round/>
+                      <a:headEnd type="none" w="med" len="med"/>
+                      <a:tailEnd type="none" w="med" len="med"/>
+                    </a:lnT>
+                    <a:lnB w="6350" cap="flat" cmpd="sng" algn="ctr">
+                      <a:solidFill>
+                        <a:srgbClr val="CBD5E1"/>
+                      </a:solidFill>
+                      <a:prstDash val="solid"/>
+                      <a:round/>
+                      <a:headEnd type="none" w="med" len="med"/>
+                      <a:tailEnd type="none" w="med" len="med"/>
+                    </a:lnB>
+                    <a:solidFill>
+                      <a:srgbClr val="FFFFFF"/>
+                    </a:solidFill>
+                  </a:tcPr>
+                </a:tc>
+                <a:tc>
+                  <a:txBody>
+                    <a:bodyPr/>
+                    <a:lstStyle/>
+                    <a:p>
+                      <a:pPr algn="ctr" indent="0" marL="0">
+                        <a:buNone/>
+                      </a:pPr>
+                      <a:r>
+                        <a:rPr lang="en-US" sz="900" dirty="0">
+                          <a:solidFill>
+                            <a:srgbClr val="000000"/>
+                          </a:solidFill>
+                          <a:latin typeface="Arial" pitchFamily="34" charset="0"/>
+                          <a:ea typeface="Arial" pitchFamily="34" charset="-122"/>
+                          <a:cs typeface="Arial" pitchFamily="34" charset="-120"/>
+                        </a:rPr>
+                        <a:t>9.38</a:t>
+                      </a:r>
+                      <a:endParaRPr lang="en-US" sz="900" dirty="0">
+                        <a:latin typeface="Arial" charset="0"/>
+                        <a:ea typeface="Arial" charset="0"/>
+                        <a:cs typeface="Arial" charset="0"/>
+                      </a:endParaRPr>
+                    </a:p>
+                  </a:txBody>
+                  <a:tcPr marL="91440" marR="91440" marT="45720" marB="45720">
+                    <a:lnL w="6350" cap="flat" cmpd="sng" algn="ctr">
+                      <a:solidFill>
+                        <a:srgbClr val="CBD5E1"/>
+                      </a:solidFill>
+                      <a:prstDash val="solid"/>
+                      <a:round/>
+                      <a:headEnd type="none" w="med" len="med"/>
+                      <a:tailEnd type="none" w="med" len="med"/>
+                    </a:lnL>
+                    <a:lnR w="6350" cap="flat" cmpd="sng" algn="ctr">
+                      <a:solidFill>
+                        <a:srgbClr val="CBD5E1"/>
+                      </a:solidFill>
+                      <a:prstDash val="solid"/>
+                      <a:round/>
+                      <a:headEnd type="none" w="med" len="med"/>
+                      <a:tailEnd type="none" w="med" len="med"/>
+                    </a:lnR>
+                    <a:lnT w="6350" cap="flat" cmpd="sng" algn="ctr">
+                      <a:solidFill>
+                        <a:srgbClr val="CBD5E1"/>
+                      </a:solidFill>
+                      <a:prstDash val="solid"/>
+                      <a:round/>
+                      <a:headEnd type="none" w="med" len="med"/>
+                      <a:tailEnd type="none" w="med" len="med"/>
+                    </a:lnT>
+                    <a:lnB w="6350" cap="flat" cmpd="sng" algn="ctr">
+                      <a:solidFill>
+                        <a:srgbClr val="CBD5E1"/>
+                      </a:solidFill>
+                      <a:prstDash val="solid"/>
+                      <a:round/>
+                      <a:headEnd type="none" w="med" len="med"/>
+                      <a:tailEnd type="none" w="med" len="med"/>
+                    </a:lnB>
+                    <a:solidFill>
+                      <a:srgbClr val="FFFFFF"/>
                     </a:solidFill>
                   </a:tcPr>
                 </a:tc>
@@ -8209,7 +8557,691 @@
                       <a:tailEnd type="none" w="med" len="med"/>
                     </a:lnB>
                     <a:solidFill>
+                      <a:srgbClr val="E8EFF8"/>
+                    </a:solidFill>
+                  </a:tcPr>
+                </a:tc>
+                <a:tc>
+                  <a:txBody>
+                    <a:bodyPr/>
+                    <a:lstStyle/>
+                    <a:p>
+                      <a:pPr algn="ctr" indent="0" marL="0">
+                        <a:buNone/>
+                      </a:pPr>
+                      <a:r>
+                        <a:rPr lang="en-US" sz="900" dirty="0">
+                          <a:solidFill>
+                            <a:srgbClr val="000000"/>
+                          </a:solidFill>
+                          <a:latin typeface="Arial" pitchFamily="34" charset="0"/>
+                          <a:ea typeface="Arial" pitchFamily="34" charset="-122"/>
+                          <a:cs typeface="Arial" pitchFamily="34" charset="-120"/>
+                        </a:rPr>
+                        <a:t>6</a:t>
+                      </a:r>
+                      <a:endParaRPr lang="en-US" sz="900" dirty="0">
+                        <a:latin typeface="Arial" charset="0"/>
+                        <a:ea typeface="Arial" charset="0"/>
+                        <a:cs typeface="Arial" charset="0"/>
+                      </a:endParaRPr>
+                    </a:p>
+                  </a:txBody>
+                  <a:tcPr marL="91440" marR="91440" marT="45720" marB="45720">
+                    <a:lnL w="6350" cap="flat" cmpd="sng" algn="ctr">
+                      <a:solidFill>
+                        <a:srgbClr val="CBD5E1"/>
+                      </a:solidFill>
+                      <a:prstDash val="solid"/>
+                      <a:round/>
+                      <a:headEnd type="none" w="med" len="med"/>
+                      <a:tailEnd type="none" w="med" len="med"/>
+                    </a:lnL>
+                    <a:lnR w="6350" cap="flat" cmpd="sng" algn="ctr">
+                      <a:solidFill>
+                        <a:srgbClr val="CBD5E1"/>
+                      </a:solidFill>
+                      <a:prstDash val="solid"/>
+                      <a:round/>
+                      <a:headEnd type="none" w="med" len="med"/>
+                      <a:tailEnd type="none" w="med" len="med"/>
+                    </a:lnR>
+                    <a:lnT w="6350" cap="flat" cmpd="sng" algn="ctr">
+                      <a:solidFill>
+                        <a:srgbClr val="CBD5E1"/>
+                      </a:solidFill>
+                      <a:prstDash val="solid"/>
+                      <a:round/>
+                      <a:headEnd type="none" w="med" len="med"/>
+                      <a:tailEnd type="none" w="med" len="med"/>
+                    </a:lnT>
+                    <a:lnB w="6350" cap="flat" cmpd="sng" algn="ctr">
+                      <a:solidFill>
+                        <a:srgbClr val="CBD5E1"/>
+                      </a:solidFill>
+                      <a:prstDash val="solid"/>
+                      <a:round/>
+                      <a:headEnd type="none" w="med" len="med"/>
+                      <a:tailEnd type="none" w="med" len="med"/>
+                    </a:lnB>
+                    <a:solidFill>
+                      <a:srgbClr val="E8EFF8"/>
+                    </a:solidFill>
+                  </a:tcPr>
+                </a:tc>
+                <a:tc>
+                  <a:txBody>
+                    <a:bodyPr/>
+                    <a:lstStyle/>
+                    <a:p>
+                      <a:pPr algn="ctr" indent="0" marL="0">
+                        <a:buNone/>
+                      </a:pPr>
+                      <a:r>
+                        <a:rPr lang="en-US" sz="900" dirty="0">
+                          <a:solidFill>
+                            <a:srgbClr val="000000"/>
+                          </a:solidFill>
+                          <a:latin typeface="Arial" pitchFamily="34" charset="0"/>
+                          <a:ea typeface="Arial" pitchFamily="34" charset="-122"/>
+                          <a:cs typeface="Arial" pitchFamily="34" charset="-120"/>
+                        </a:rPr>
+                        <a:t>4.67</a:t>
+                      </a:r>
+                      <a:endParaRPr lang="en-US" sz="900" dirty="0">
+                        <a:latin typeface="Arial" charset="0"/>
+                        <a:ea typeface="Arial" charset="0"/>
+                        <a:cs typeface="Arial" charset="0"/>
+                      </a:endParaRPr>
+                    </a:p>
+                  </a:txBody>
+                  <a:tcPr marL="91440" marR="91440" marT="45720" marB="45720">
+                    <a:lnL w="6350" cap="flat" cmpd="sng" algn="ctr">
+                      <a:solidFill>
+                        <a:srgbClr val="CBD5E1"/>
+                      </a:solidFill>
+                      <a:prstDash val="solid"/>
+                      <a:round/>
+                      <a:headEnd type="none" w="med" len="med"/>
+                      <a:tailEnd type="none" w="med" len="med"/>
+                    </a:lnL>
+                    <a:lnR w="6350" cap="flat" cmpd="sng" algn="ctr">
+                      <a:solidFill>
+                        <a:srgbClr val="CBD5E1"/>
+                      </a:solidFill>
+                      <a:prstDash val="solid"/>
+                      <a:round/>
+                      <a:headEnd type="none" w="med" len="med"/>
+                      <a:tailEnd type="none" w="med" len="med"/>
+                    </a:lnR>
+                    <a:lnT w="6350" cap="flat" cmpd="sng" algn="ctr">
+                      <a:solidFill>
+                        <a:srgbClr val="CBD5E1"/>
+                      </a:solidFill>
+                      <a:prstDash val="solid"/>
+                      <a:round/>
+                      <a:headEnd type="none" w="med" len="med"/>
+                      <a:tailEnd type="none" w="med" len="med"/>
+                    </a:lnT>
+                    <a:lnB w="6350" cap="flat" cmpd="sng" algn="ctr">
+                      <a:solidFill>
+                        <a:srgbClr val="CBD5E1"/>
+                      </a:solidFill>
+                      <a:prstDash val="solid"/>
+                      <a:round/>
+                      <a:headEnd type="none" w="med" len="med"/>
+                      <a:tailEnd type="none" w="med" len="med"/>
+                    </a:lnB>
+                    <a:solidFill>
+                      <a:srgbClr val="E8EFF8"/>
+                    </a:solidFill>
+                  </a:tcPr>
+                </a:tc>
+                <a:tc>
+                  <a:txBody>
+                    <a:bodyPr/>
+                    <a:lstStyle/>
+                    <a:p>
+                      <a:pPr algn="ctr" indent="0" marL="0">
+                        <a:buNone/>
+                      </a:pPr>
+                      <a:r>
+                        <a:rPr lang="en-US" sz="900" dirty="0">
+                          <a:solidFill>
+                            <a:srgbClr val="000000"/>
+                          </a:solidFill>
+                          <a:latin typeface="Arial" pitchFamily="34" charset="0"/>
+                          <a:ea typeface="Arial" pitchFamily="34" charset="-122"/>
+                          <a:cs typeface="Arial" pitchFamily="34" charset="-120"/>
+                        </a:rPr>
+                        <a:t>/5 (×2)</a:t>
+                      </a:r>
+                      <a:endParaRPr lang="en-US" sz="900" dirty="0">
+                        <a:latin typeface="Arial" charset="0"/>
+                        <a:ea typeface="Arial" charset="0"/>
+                        <a:cs typeface="Arial" charset="0"/>
+                      </a:endParaRPr>
+                    </a:p>
+                  </a:txBody>
+                  <a:tcPr marL="91440" marR="91440" marT="45720" marB="45720">
+                    <a:lnL w="6350" cap="flat" cmpd="sng" algn="ctr">
+                      <a:solidFill>
+                        <a:srgbClr val="CBD5E1"/>
+                      </a:solidFill>
+                      <a:prstDash val="solid"/>
+                      <a:round/>
+                      <a:headEnd type="none" w="med" len="med"/>
+                      <a:tailEnd type="none" w="med" len="med"/>
+                    </a:lnL>
+                    <a:lnR w="6350" cap="flat" cmpd="sng" algn="ctr">
+                      <a:solidFill>
+                        <a:srgbClr val="CBD5E1"/>
+                      </a:solidFill>
+                      <a:prstDash val="solid"/>
+                      <a:round/>
+                      <a:headEnd type="none" w="med" len="med"/>
+                      <a:tailEnd type="none" w="med" len="med"/>
+                    </a:lnR>
+                    <a:lnT w="6350" cap="flat" cmpd="sng" algn="ctr">
+                      <a:solidFill>
+                        <a:srgbClr val="CBD5E1"/>
+                      </a:solidFill>
+                      <a:prstDash val="solid"/>
+                      <a:round/>
+                      <a:headEnd type="none" w="med" len="med"/>
+                      <a:tailEnd type="none" w="med" len="med"/>
+                    </a:lnT>
+                    <a:lnB w="6350" cap="flat" cmpd="sng" algn="ctr">
+                      <a:solidFill>
+                        <a:srgbClr val="CBD5E1"/>
+                      </a:solidFill>
+                      <a:prstDash val="solid"/>
+                      <a:round/>
+                      <a:headEnd type="none" w="med" len="med"/>
+                      <a:tailEnd type="none" w="med" len="med"/>
+                    </a:lnB>
+                    <a:solidFill>
+                      <a:srgbClr val="E8EFF8"/>
+                    </a:solidFill>
+                  </a:tcPr>
+                </a:tc>
+                <a:tc>
+                  <a:txBody>
+                    <a:bodyPr/>
+                    <a:lstStyle/>
+                    <a:p>
+                      <a:pPr algn="ctr" indent="0" marL="0">
+                        <a:buNone/>
+                      </a:pPr>
+                      <a:r>
+                        <a:rPr lang="en-US" sz="900" dirty="0">
+                          <a:solidFill>
+                            <a:srgbClr val="000000"/>
+                          </a:solidFill>
+                          <a:latin typeface="Arial" pitchFamily="34" charset="0"/>
+                          <a:ea typeface="Arial" pitchFamily="34" charset="-122"/>
+                          <a:cs typeface="Arial" pitchFamily="34" charset="-120"/>
+                        </a:rPr>
+                        <a:t>9.33</a:t>
+                      </a:r>
+                      <a:endParaRPr lang="en-US" sz="900" dirty="0">
+                        <a:latin typeface="Arial" charset="0"/>
+                        <a:ea typeface="Arial" charset="0"/>
+                        <a:cs typeface="Arial" charset="0"/>
+                      </a:endParaRPr>
+                    </a:p>
+                  </a:txBody>
+                  <a:tcPr marL="91440" marR="91440" marT="45720" marB="45720">
+                    <a:lnL w="6350" cap="flat" cmpd="sng" algn="ctr">
+                      <a:solidFill>
+                        <a:srgbClr val="CBD5E1"/>
+                      </a:solidFill>
+                      <a:prstDash val="solid"/>
+                      <a:round/>
+                      <a:headEnd type="none" w="med" len="med"/>
+                      <a:tailEnd type="none" w="med" len="med"/>
+                    </a:lnL>
+                    <a:lnR w="6350" cap="flat" cmpd="sng" algn="ctr">
+                      <a:solidFill>
+                        <a:srgbClr val="CBD5E1"/>
+                      </a:solidFill>
+                      <a:prstDash val="solid"/>
+                      <a:round/>
+                      <a:headEnd type="none" w="med" len="med"/>
+                      <a:tailEnd type="none" w="med" len="med"/>
+                    </a:lnR>
+                    <a:lnT w="6350" cap="flat" cmpd="sng" algn="ctr">
+                      <a:solidFill>
+                        <a:srgbClr val="CBD5E1"/>
+                      </a:solidFill>
+                      <a:prstDash val="solid"/>
+                      <a:round/>
+                      <a:headEnd type="none" w="med" len="med"/>
+                      <a:tailEnd type="none" w="med" len="med"/>
+                    </a:lnT>
+                    <a:lnB w="6350" cap="flat" cmpd="sng" algn="ctr">
+                      <a:solidFill>
+                        <a:srgbClr val="CBD5E1"/>
+                      </a:solidFill>
+                      <a:prstDash val="solid"/>
+                      <a:round/>
+                      <a:headEnd type="none" w="med" len="med"/>
+                      <a:tailEnd type="none" w="med" len="med"/>
+                    </a:lnB>
+                    <a:solidFill>
+                      <a:srgbClr val="E8EFF8"/>
+                    </a:solidFill>
+                  </a:tcPr>
+                </a:tc>
+              </a:tr>
+              <a:tr h="201168">
+                <a:tc>
+                  <a:txBody>
+                    <a:bodyPr/>
+                    <a:lstStyle/>
+                    <a:p>
+                      <a:pPr algn="ctr" indent="0" marL="0">
+                        <a:buNone/>
+                      </a:pPr>
+                      <a:r>
+                        <a:rPr lang="en-US" sz="900" dirty="0">
+                          <a:solidFill>
+                            <a:srgbClr val="000000"/>
+                          </a:solidFill>
+                          <a:latin typeface="Arial" pitchFamily="34" charset="0"/>
+                          <a:ea typeface="Arial" pitchFamily="34" charset="-122"/>
+                          <a:cs typeface="Arial" pitchFamily="34" charset="-120"/>
+                        </a:rPr>
+                        <a:t>Booking.com</a:t>
+                      </a:r>
+                      <a:endParaRPr lang="en-US" sz="900" dirty="0">
+                        <a:latin typeface="Arial" charset="0"/>
+                        <a:ea typeface="Arial" charset="0"/>
+                        <a:cs typeface="Arial" charset="0"/>
+                      </a:endParaRPr>
+                    </a:p>
+                  </a:txBody>
+                  <a:tcPr marL="91440" marR="91440" marT="45720" marB="45720">
+                    <a:lnL w="6350" cap="flat" cmpd="sng" algn="ctr">
+                      <a:solidFill>
+                        <a:srgbClr val="CBD5E1"/>
+                      </a:solidFill>
+                      <a:prstDash val="solid"/>
+                      <a:round/>
+                      <a:headEnd type="none" w="med" len="med"/>
+                      <a:tailEnd type="none" w="med" len="med"/>
+                    </a:lnL>
+                    <a:lnR w="6350" cap="flat" cmpd="sng" algn="ctr">
+                      <a:solidFill>
+                        <a:srgbClr val="CBD5E1"/>
+                      </a:solidFill>
+                      <a:prstDash val="solid"/>
+                      <a:round/>
+                      <a:headEnd type="none" w="med" len="med"/>
+                      <a:tailEnd type="none" w="med" len="med"/>
+                    </a:lnR>
+                    <a:lnT w="6350" cap="flat" cmpd="sng" algn="ctr">
+                      <a:solidFill>
+                        <a:srgbClr val="CBD5E1"/>
+                      </a:solidFill>
+                      <a:prstDash val="solid"/>
+                      <a:round/>
+                      <a:headEnd type="none" w="med" len="med"/>
+                      <a:tailEnd type="none" w="med" len="med"/>
+                    </a:lnT>
+                    <a:lnB w="6350" cap="flat" cmpd="sng" algn="ctr">
+                      <a:solidFill>
+                        <a:srgbClr val="CBD5E1"/>
+                      </a:solidFill>
+                      <a:prstDash val="solid"/>
+                      <a:round/>
+                      <a:headEnd type="none" w="med" len="med"/>
+                      <a:tailEnd type="none" w="med" len="med"/>
+                    </a:lnB>
+                    <a:solidFill>
                       <a:srgbClr val="FFFFFF"/>
+                    </a:solidFill>
+                  </a:tcPr>
+                </a:tc>
+                <a:tc>
+                  <a:txBody>
+                    <a:bodyPr/>
+                    <a:lstStyle/>
+                    <a:p>
+                      <a:pPr algn="ctr" indent="0" marL="0">
+                        <a:buNone/>
+                      </a:pPr>
+                      <a:r>
+                        <a:rPr lang="en-US" sz="900" dirty="0">
+                          <a:solidFill>
+                            <a:srgbClr val="000000"/>
+                          </a:solidFill>
+                          <a:latin typeface="Arial" pitchFamily="34" charset="0"/>
+                          <a:ea typeface="Arial" pitchFamily="34" charset="-122"/>
+                          <a:cs typeface="Arial" pitchFamily="34" charset="-120"/>
+                        </a:rPr>
+                        <a:t>34</a:t>
+                      </a:r>
+                      <a:endParaRPr lang="en-US" sz="900" dirty="0">
+                        <a:latin typeface="Arial" charset="0"/>
+                        <a:ea typeface="Arial" charset="0"/>
+                        <a:cs typeface="Arial" charset="0"/>
+                      </a:endParaRPr>
+                    </a:p>
+                  </a:txBody>
+                  <a:tcPr marL="91440" marR="91440" marT="45720" marB="45720">
+                    <a:lnL w="6350" cap="flat" cmpd="sng" algn="ctr">
+                      <a:solidFill>
+                        <a:srgbClr val="CBD5E1"/>
+                      </a:solidFill>
+                      <a:prstDash val="solid"/>
+                      <a:round/>
+                      <a:headEnd type="none" w="med" len="med"/>
+                      <a:tailEnd type="none" w="med" len="med"/>
+                    </a:lnL>
+                    <a:lnR w="6350" cap="flat" cmpd="sng" algn="ctr">
+                      <a:solidFill>
+                        <a:srgbClr val="CBD5E1"/>
+                      </a:solidFill>
+                      <a:prstDash val="solid"/>
+                      <a:round/>
+                      <a:headEnd type="none" w="med" len="med"/>
+                      <a:tailEnd type="none" w="med" len="med"/>
+                    </a:lnR>
+                    <a:lnT w="6350" cap="flat" cmpd="sng" algn="ctr">
+                      <a:solidFill>
+                        <a:srgbClr val="CBD5E1"/>
+                      </a:solidFill>
+                      <a:prstDash val="solid"/>
+                      <a:round/>
+                      <a:headEnd type="none" w="med" len="med"/>
+                      <a:tailEnd type="none" w="med" len="med"/>
+                    </a:lnT>
+                    <a:lnB w="6350" cap="flat" cmpd="sng" algn="ctr">
+                      <a:solidFill>
+                        <a:srgbClr val="CBD5E1"/>
+                      </a:solidFill>
+                      <a:prstDash val="solid"/>
+                      <a:round/>
+                      <a:headEnd type="none" w="med" len="med"/>
+                      <a:tailEnd type="none" w="med" len="med"/>
+                    </a:lnB>
+                    <a:solidFill>
+                      <a:srgbClr val="FFFFFF"/>
+                    </a:solidFill>
+                  </a:tcPr>
+                </a:tc>
+                <a:tc>
+                  <a:txBody>
+                    <a:bodyPr/>
+                    <a:lstStyle/>
+                    <a:p>
+                      <a:pPr algn="ctr" indent="0" marL="0">
+                        <a:buNone/>
+                      </a:pPr>
+                      <a:r>
+                        <a:rPr lang="en-US" sz="900" dirty="0">
+                          <a:solidFill>
+                            <a:srgbClr val="000000"/>
+                          </a:solidFill>
+                          <a:latin typeface="Arial" pitchFamily="34" charset="0"/>
+                          <a:ea typeface="Arial" pitchFamily="34" charset="-122"/>
+                          <a:cs typeface="Arial" pitchFamily="34" charset="-120"/>
+                        </a:rPr>
+                        <a:t>8.65</a:t>
+                      </a:r>
+                      <a:endParaRPr lang="en-US" sz="900" dirty="0">
+                        <a:latin typeface="Arial" charset="0"/>
+                        <a:ea typeface="Arial" charset="0"/>
+                        <a:cs typeface="Arial" charset="0"/>
+                      </a:endParaRPr>
+                    </a:p>
+                  </a:txBody>
+                  <a:tcPr marL="91440" marR="91440" marT="45720" marB="45720">
+                    <a:lnL w="6350" cap="flat" cmpd="sng" algn="ctr">
+                      <a:solidFill>
+                        <a:srgbClr val="CBD5E1"/>
+                      </a:solidFill>
+                      <a:prstDash val="solid"/>
+                      <a:round/>
+                      <a:headEnd type="none" w="med" len="med"/>
+                      <a:tailEnd type="none" w="med" len="med"/>
+                    </a:lnL>
+                    <a:lnR w="6350" cap="flat" cmpd="sng" algn="ctr">
+                      <a:solidFill>
+                        <a:srgbClr val="CBD5E1"/>
+                      </a:solidFill>
+                      <a:prstDash val="solid"/>
+                      <a:round/>
+                      <a:headEnd type="none" w="med" len="med"/>
+                      <a:tailEnd type="none" w="med" len="med"/>
+                    </a:lnR>
+                    <a:lnT w="6350" cap="flat" cmpd="sng" algn="ctr">
+                      <a:solidFill>
+                        <a:srgbClr val="CBD5E1"/>
+                      </a:solidFill>
+                      <a:prstDash val="solid"/>
+                      <a:round/>
+                      <a:headEnd type="none" w="med" len="med"/>
+                      <a:tailEnd type="none" w="med" len="med"/>
+                    </a:lnT>
+                    <a:lnB w="6350" cap="flat" cmpd="sng" algn="ctr">
+                      <a:solidFill>
+                        <a:srgbClr val="CBD5E1"/>
+                      </a:solidFill>
+                      <a:prstDash val="solid"/>
+                      <a:round/>
+                      <a:headEnd type="none" w="med" len="med"/>
+                      <a:tailEnd type="none" w="med" len="med"/>
+                    </a:lnB>
+                    <a:solidFill>
+                      <a:srgbClr val="FFFFFF"/>
+                    </a:solidFill>
+                  </a:tcPr>
+                </a:tc>
+                <a:tc>
+                  <a:txBody>
+                    <a:bodyPr/>
+                    <a:lstStyle/>
+                    <a:p>
+                      <a:pPr algn="ctr" indent="0" marL="0">
+                        <a:buNone/>
+                      </a:pPr>
+                      <a:r>
+                        <a:rPr lang="en-US" sz="900" dirty="0">
+                          <a:solidFill>
+                            <a:srgbClr val="000000"/>
+                          </a:solidFill>
+                          <a:latin typeface="Arial" pitchFamily="34" charset="0"/>
+                          <a:ea typeface="Arial" pitchFamily="34" charset="-122"/>
+                          <a:cs typeface="Arial" pitchFamily="34" charset="-120"/>
+                        </a:rPr>
+                        <a:t>/10</a:t>
+                      </a:r>
+                      <a:endParaRPr lang="en-US" sz="900" dirty="0">
+                        <a:latin typeface="Arial" charset="0"/>
+                        <a:ea typeface="Arial" charset="0"/>
+                        <a:cs typeface="Arial" charset="0"/>
+                      </a:endParaRPr>
+                    </a:p>
+                  </a:txBody>
+                  <a:tcPr marL="91440" marR="91440" marT="45720" marB="45720">
+                    <a:lnL w="6350" cap="flat" cmpd="sng" algn="ctr">
+                      <a:solidFill>
+                        <a:srgbClr val="CBD5E1"/>
+                      </a:solidFill>
+                      <a:prstDash val="solid"/>
+                      <a:round/>
+                      <a:headEnd type="none" w="med" len="med"/>
+                      <a:tailEnd type="none" w="med" len="med"/>
+                    </a:lnL>
+                    <a:lnR w="6350" cap="flat" cmpd="sng" algn="ctr">
+                      <a:solidFill>
+                        <a:srgbClr val="CBD5E1"/>
+                      </a:solidFill>
+                      <a:prstDash val="solid"/>
+                      <a:round/>
+                      <a:headEnd type="none" w="med" len="med"/>
+                      <a:tailEnd type="none" w="med" len="med"/>
+                    </a:lnR>
+                    <a:lnT w="6350" cap="flat" cmpd="sng" algn="ctr">
+                      <a:solidFill>
+                        <a:srgbClr val="CBD5E1"/>
+                      </a:solidFill>
+                      <a:prstDash val="solid"/>
+                      <a:round/>
+                      <a:headEnd type="none" w="med" len="med"/>
+                      <a:tailEnd type="none" w="med" len="med"/>
+                    </a:lnT>
+                    <a:lnB w="6350" cap="flat" cmpd="sng" algn="ctr">
+                      <a:solidFill>
+                        <a:srgbClr val="CBD5E1"/>
+                      </a:solidFill>
+                      <a:prstDash val="solid"/>
+                      <a:round/>
+                      <a:headEnd type="none" w="med" len="med"/>
+                      <a:tailEnd type="none" w="med" len="med"/>
+                    </a:lnB>
+                    <a:solidFill>
+                      <a:srgbClr val="FFFFFF"/>
+                    </a:solidFill>
+                  </a:tcPr>
+                </a:tc>
+                <a:tc>
+                  <a:txBody>
+                    <a:bodyPr/>
+                    <a:lstStyle/>
+                    <a:p>
+                      <a:pPr algn="ctr" indent="0" marL="0">
+                        <a:buNone/>
+                      </a:pPr>
+                      <a:r>
+                        <a:rPr lang="en-US" sz="900" dirty="0">
+                          <a:solidFill>
+                            <a:srgbClr val="000000"/>
+                          </a:solidFill>
+                          <a:latin typeface="Arial" pitchFamily="34" charset="0"/>
+                          <a:ea typeface="Arial" pitchFamily="34" charset="-122"/>
+                          <a:cs typeface="Arial" pitchFamily="34" charset="-120"/>
+                        </a:rPr>
+                        <a:t>8.65</a:t>
+                      </a:r>
+                      <a:endParaRPr lang="en-US" sz="900" dirty="0">
+                        <a:latin typeface="Arial" charset="0"/>
+                        <a:ea typeface="Arial" charset="0"/>
+                        <a:cs typeface="Arial" charset="0"/>
+                      </a:endParaRPr>
+                    </a:p>
+                  </a:txBody>
+                  <a:tcPr marL="91440" marR="91440" marT="45720" marB="45720">
+                    <a:lnL w="6350" cap="flat" cmpd="sng" algn="ctr">
+                      <a:solidFill>
+                        <a:srgbClr val="CBD5E1"/>
+                      </a:solidFill>
+                      <a:prstDash val="solid"/>
+                      <a:round/>
+                      <a:headEnd type="none" w="med" len="med"/>
+                      <a:tailEnd type="none" w="med" len="med"/>
+                    </a:lnL>
+                    <a:lnR w="6350" cap="flat" cmpd="sng" algn="ctr">
+                      <a:solidFill>
+                        <a:srgbClr val="CBD5E1"/>
+                      </a:solidFill>
+                      <a:prstDash val="solid"/>
+                      <a:round/>
+                      <a:headEnd type="none" w="med" len="med"/>
+                      <a:tailEnd type="none" w="med" len="med"/>
+                    </a:lnR>
+                    <a:lnT w="6350" cap="flat" cmpd="sng" algn="ctr">
+                      <a:solidFill>
+                        <a:srgbClr val="CBD5E1"/>
+                      </a:solidFill>
+                      <a:prstDash val="solid"/>
+                      <a:round/>
+                      <a:headEnd type="none" w="med" len="med"/>
+                      <a:tailEnd type="none" w="med" len="med"/>
+                    </a:lnT>
+                    <a:lnB w="6350" cap="flat" cmpd="sng" algn="ctr">
+                      <a:solidFill>
+                        <a:srgbClr val="CBD5E1"/>
+                      </a:solidFill>
+                      <a:prstDash val="solid"/>
+                      <a:round/>
+                      <a:headEnd type="none" w="med" len="med"/>
+                      <a:tailEnd type="none" w="med" len="med"/>
+                    </a:lnB>
+                    <a:solidFill>
+                      <a:srgbClr val="FFFFFF"/>
+                    </a:solidFill>
+                  </a:tcPr>
+                </a:tc>
+              </a:tr>
+              <a:tr h="201168">
+                <a:tc>
+                  <a:txBody>
+                    <a:bodyPr/>
+                    <a:lstStyle/>
+                    <a:p>
+                      <a:pPr algn="ctr" indent="0" marL="0">
+                        <a:buNone/>
+                      </a:pPr>
+                      <a:r>
+                        <a:rPr lang="en-US" sz="900" dirty="0">
+                          <a:solidFill>
+                            <a:srgbClr val="000000"/>
+                          </a:solidFill>
+                          <a:latin typeface="Arial" pitchFamily="34" charset="0"/>
+                          <a:ea typeface="Arial" pitchFamily="34" charset="-122"/>
+                          <a:cs typeface="Arial" pitchFamily="34" charset="-120"/>
+                        </a:rPr>
+                        <a:t>楽天トラベル</a:t>
+                      </a:r>
+                      <a:endParaRPr lang="en-US" sz="900" dirty="0">
+                        <a:latin typeface="Arial" charset="0"/>
+                        <a:ea typeface="Arial" charset="0"/>
+                        <a:cs typeface="Arial" charset="0"/>
+                      </a:endParaRPr>
+                    </a:p>
+                  </a:txBody>
+                  <a:tcPr marL="91440" marR="91440" marT="45720" marB="45720">
+                    <a:lnL w="6350" cap="flat" cmpd="sng" algn="ctr">
+                      <a:solidFill>
+                        <a:srgbClr val="CBD5E1"/>
+                      </a:solidFill>
+                      <a:prstDash val="solid"/>
+                      <a:round/>
+                      <a:headEnd type="none" w="med" len="med"/>
+                      <a:tailEnd type="none" w="med" len="med"/>
+                    </a:lnL>
+                    <a:lnR w="6350" cap="flat" cmpd="sng" algn="ctr">
+                      <a:solidFill>
+                        <a:srgbClr val="CBD5E1"/>
+                      </a:solidFill>
+                      <a:prstDash val="solid"/>
+                      <a:round/>
+                      <a:headEnd type="none" w="med" len="med"/>
+                      <a:tailEnd type="none" w="med" len="med"/>
+                    </a:lnR>
+                    <a:lnT w="6350" cap="flat" cmpd="sng" algn="ctr">
+                      <a:solidFill>
+                        <a:srgbClr val="CBD5E1"/>
+                      </a:solidFill>
+                      <a:prstDash val="solid"/>
+                      <a:round/>
+                      <a:headEnd type="none" w="med" len="med"/>
+                      <a:tailEnd type="none" w="med" len="med"/>
+                    </a:lnT>
+                    <a:lnB w="6350" cap="flat" cmpd="sng" algn="ctr">
+                      <a:solidFill>
+                        <a:srgbClr val="CBD5E1"/>
+                      </a:solidFill>
+                      <a:prstDash val="solid"/>
+                      <a:round/>
+                      <a:headEnd type="none" w="med" len="med"/>
+                      <a:tailEnd type="none" w="med" len="med"/>
+                    </a:lnB>
+                    <a:solidFill>
+                      <a:srgbClr val="E8EFF8"/>
                     </a:solidFill>
                   </a:tcPr>
                 </a:tc>
@@ -8277,6 +9309,280 @@
                       <a:tailEnd type="none" w="med" len="med"/>
                     </a:lnB>
                     <a:solidFill>
+                      <a:srgbClr val="E8EFF8"/>
+                    </a:solidFill>
+                  </a:tcPr>
+                </a:tc>
+                <a:tc>
+                  <a:txBody>
+                    <a:bodyPr/>
+                    <a:lstStyle/>
+                    <a:p>
+                      <a:pPr algn="ctr" indent="0" marL="0">
+                        <a:buNone/>
+                      </a:pPr>
+                      <a:r>
+                        <a:rPr lang="en-US" sz="900" dirty="0">
+                          <a:solidFill>
+                            <a:srgbClr val="000000"/>
+                          </a:solidFill>
+                          <a:latin typeface="Arial" pitchFamily="34" charset="0"/>
+                          <a:ea typeface="Arial" pitchFamily="34" charset="-122"/>
+                          <a:cs typeface="Arial" pitchFamily="34" charset="-120"/>
+                        </a:rPr>
+                        <a:t>4.29</a:t>
+                      </a:r>
+                      <a:endParaRPr lang="en-US" sz="900" dirty="0">
+                        <a:latin typeface="Arial" charset="0"/>
+                        <a:ea typeface="Arial" charset="0"/>
+                        <a:cs typeface="Arial" charset="0"/>
+                      </a:endParaRPr>
+                    </a:p>
+                  </a:txBody>
+                  <a:tcPr marL="91440" marR="91440" marT="45720" marB="45720">
+                    <a:lnL w="6350" cap="flat" cmpd="sng" algn="ctr">
+                      <a:solidFill>
+                        <a:srgbClr val="CBD5E1"/>
+                      </a:solidFill>
+                      <a:prstDash val="solid"/>
+                      <a:round/>
+                      <a:headEnd type="none" w="med" len="med"/>
+                      <a:tailEnd type="none" w="med" len="med"/>
+                    </a:lnL>
+                    <a:lnR w="6350" cap="flat" cmpd="sng" algn="ctr">
+                      <a:solidFill>
+                        <a:srgbClr val="CBD5E1"/>
+                      </a:solidFill>
+                      <a:prstDash val="solid"/>
+                      <a:round/>
+                      <a:headEnd type="none" w="med" len="med"/>
+                      <a:tailEnd type="none" w="med" len="med"/>
+                    </a:lnR>
+                    <a:lnT w="6350" cap="flat" cmpd="sng" algn="ctr">
+                      <a:solidFill>
+                        <a:srgbClr val="CBD5E1"/>
+                      </a:solidFill>
+                      <a:prstDash val="solid"/>
+                      <a:round/>
+                      <a:headEnd type="none" w="med" len="med"/>
+                      <a:tailEnd type="none" w="med" len="med"/>
+                    </a:lnT>
+                    <a:lnB w="6350" cap="flat" cmpd="sng" algn="ctr">
+                      <a:solidFill>
+                        <a:srgbClr val="CBD5E1"/>
+                      </a:solidFill>
+                      <a:prstDash val="solid"/>
+                      <a:round/>
+                      <a:headEnd type="none" w="med" len="med"/>
+                      <a:tailEnd type="none" w="med" len="med"/>
+                    </a:lnB>
+                    <a:solidFill>
+                      <a:srgbClr val="E8EFF8"/>
+                    </a:solidFill>
+                  </a:tcPr>
+                </a:tc>
+                <a:tc>
+                  <a:txBody>
+                    <a:bodyPr/>
+                    <a:lstStyle/>
+                    <a:p>
+                      <a:pPr algn="ctr" indent="0" marL="0">
+                        <a:buNone/>
+                      </a:pPr>
+                      <a:r>
+                        <a:rPr lang="en-US" sz="900" dirty="0">
+                          <a:solidFill>
+                            <a:srgbClr val="000000"/>
+                          </a:solidFill>
+                          <a:latin typeface="Arial" pitchFamily="34" charset="0"/>
+                          <a:ea typeface="Arial" pitchFamily="34" charset="-122"/>
+                          <a:cs typeface="Arial" pitchFamily="34" charset="-120"/>
+                        </a:rPr>
+                        <a:t>/5 (×2)</a:t>
+                      </a:r>
+                      <a:endParaRPr lang="en-US" sz="900" dirty="0">
+                        <a:latin typeface="Arial" charset="0"/>
+                        <a:ea typeface="Arial" charset="0"/>
+                        <a:cs typeface="Arial" charset="0"/>
+                      </a:endParaRPr>
+                    </a:p>
+                  </a:txBody>
+                  <a:tcPr marL="91440" marR="91440" marT="45720" marB="45720">
+                    <a:lnL w="6350" cap="flat" cmpd="sng" algn="ctr">
+                      <a:solidFill>
+                        <a:srgbClr val="CBD5E1"/>
+                      </a:solidFill>
+                      <a:prstDash val="solid"/>
+                      <a:round/>
+                      <a:headEnd type="none" w="med" len="med"/>
+                      <a:tailEnd type="none" w="med" len="med"/>
+                    </a:lnL>
+                    <a:lnR w="6350" cap="flat" cmpd="sng" algn="ctr">
+                      <a:solidFill>
+                        <a:srgbClr val="CBD5E1"/>
+                      </a:solidFill>
+                      <a:prstDash val="solid"/>
+                      <a:round/>
+                      <a:headEnd type="none" w="med" len="med"/>
+                      <a:tailEnd type="none" w="med" len="med"/>
+                    </a:lnR>
+                    <a:lnT w="6350" cap="flat" cmpd="sng" algn="ctr">
+                      <a:solidFill>
+                        <a:srgbClr val="CBD5E1"/>
+                      </a:solidFill>
+                      <a:prstDash val="solid"/>
+                      <a:round/>
+                      <a:headEnd type="none" w="med" len="med"/>
+                      <a:tailEnd type="none" w="med" len="med"/>
+                    </a:lnT>
+                    <a:lnB w="6350" cap="flat" cmpd="sng" algn="ctr">
+                      <a:solidFill>
+                        <a:srgbClr val="CBD5E1"/>
+                      </a:solidFill>
+                      <a:prstDash val="solid"/>
+                      <a:round/>
+                      <a:headEnd type="none" w="med" len="med"/>
+                      <a:tailEnd type="none" w="med" len="med"/>
+                    </a:lnB>
+                    <a:solidFill>
+                      <a:srgbClr val="E8EFF8"/>
+                    </a:solidFill>
+                  </a:tcPr>
+                </a:tc>
+                <a:tc>
+                  <a:txBody>
+                    <a:bodyPr/>
+                    <a:lstStyle/>
+                    <a:p>
+                      <a:pPr algn="ctr" indent="0" marL="0">
+                        <a:buNone/>
+                      </a:pPr>
+                      <a:r>
+                        <a:rPr lang="en-US" sz="900" dirty="0">
+                          <a:solidFill>
+                            <a:srgbClr val="000000"/>
+                          </a:solidFill>
+                          <a:latin typeface="Arial" pitchFamily="34" charset="0"/>
+                          <a:ea typeface="Arial" pitchFamily="34" charset="-122"/>
+                          <a:cs typeface="Arial" pitchFamily="34" charset="-120"/>
+                        </a:rPr>
+                        <a:t>8.57</a:t>
+                      </a:r>
+                      <a:endParaRPr lang="en-US" sz="900" dirty="0">
+                        <a:latin typeface="Arial" charset="0"/>
+                        <a:ea typeface="Arial" charset="0"/>
+                        <a:cs typeface="Arial" charset="0"/>
+                      </a:endParaRPr>
+                    </a:p>
+                  </a:txBody>
+                  <a:tcPr marL="91440" marR="91440" marT="45720" marB="45720">
+                    <a:lnL w="6350" cap="flat" cmpd="sng" algn="ctr">
+                      <a:solidFill>
+                        <a:srgbClr val="CBD5E1"/>
+                      </a:solidFill>
+                      <a:prstDash val="solid"/>
+                      <a:round/>
+                      <a:headEnd type="none" w="med" len="med"/>
+                      <a:tailEnd type="none" w="med" len="med"/>
+                    </a:lnL>
+                    <a:lnR w="6350" cap="flat" cmpd="sng" algn="ctr">
+                      <a:solidFill>
+                        <a:srgbClr val="CBD5E1"/>
+                      </a:solidFill>
+                      <a:prstDash val="solid"/>
+                      <a:round/>
+                      <a:headEnd type="none" w="med" len="med"/>
+                      <a:tailEnd type="none" w="med" len="med"/>
+                    </a:lnR>
+                    <a:lnT w="6350" cap="flat" cmpd="sng" algn="ctr">
+                      <a:solidFill>
+                        <a:srgbClr val="CBD5E1"/>
+                      </a:solidFill>
+                      <a:prstDash val="solid"/>
+                      <a:round/>
+                      <a:headEnd type="none" w="med" len="med"/>
+                      <a:tailEnd type="none" w="med" len="med"/>
+                    </a:lnT>
+                    <a:lnB w="6350" cap="flat" cmpd="sng" algn="ctr">
+                      <a:solidFill>
+                        <a:srgbClr val="CBD5E1"/>
+                      </a:solidFill>
+                      <a:prstDash val="solid"/>
+                      <a:round/>
+                      <a:headEnd type="none" w="med" len="med"/>
+                      <a:tailEnd type="none" w="med" len="med"/>
+                    </a:lnB>
+                    <a:solidFill>
+                      <a:srgbClr val="E8EFF8"/>
+                    </a:solidFill>
+                  </a:tcPr>
+                </a:tc>
+              </a:tr>
+              <a:tr h="201168">
+                <a:tc>
+                  <a:txBody>
+                    <a:bodyPr/>
+                    <a:lstStyle/>
+                    <a:p>
+                      <a:pPr algn="ctr" indent="0" marL="0">
+                        <a:buNone/>
+                      </a:pPr>
+                      <a:r>
+                        <a:rPr lang="en-US" sz="900" dirty="0">
+                          <a:solidFill>
+                            <a:srgbClr val="000000"/>
+                          </a:solidFill>
+                          <a:latin typeface="Arial" pitchFamily="34" charset="0"/>
+                          <a:ea typeface="Arial" pitchFamily="34" charset="-122"/>
+                          <a:cs typeface="Arial" pitchFamily="34" charset="-120"/>
+                        </a:rPr>
+                        <a:t>Google</a:t>
+                      </a:r>
+                      <a:endParaRPr lang="en-US" sz="900" dirty="0">
+                        <a:latin typeface="Arial" charset="0"/>
+                        <a:ea typeface="Arial" charset="0"/>
+                        <a:cs typeface="Arial" charset="0"/>
+                      </a:endParaRPr>
+                    </a:p>
+                  </a:txBody>
+                  <a:tcPr marL="91440" marR="91440" marT="45720" marB="45720">
+                    <a:lnL w="6350" cap="flat" cmpd="sng" algn="ctr">
+                      <a:solidFill>
+                        <a:srgbClr val="CBD5E1"/>
+                      </a:solidFill>
+                      <a:prstDash val="solid"/>
+                      <a:round/>
+                      <a:headEnd type="none" w="med" len="med"/>
+                      <a:tailEnd type="none" w="med" len="med"/>
+                    </a:lnL>
+                    <a:lnR w="6350" cap="flat" cmpd="sng" algn="ctr">
+                      <a:solidFill>
+                        <a:srgbClr val="CBD5E1"/>
+                      </a:solidFill>
+                      <a:prstDash val="solid"/>
+                      <a:round/>
+                      <a:headEnd type="none" w="med" len="med"/>
+                      <a:tailEnd type="none" w="med" len="med"/>
+                    </a:lnR>
+                    <a:lnT w="6350" cap="flat" cmpd="sng" algn="ctr">
+                      <a:solidFill>
+                        <a:srgbClr val="CBD5E1"/>
+                      </a:solidFill>
+                      <a:prstDash val="solid"/>
+                      <a:round/>
+                      <a:headEnd type="none" w="med" len="med"/>
+                      <a:tailEnd type="none" w="med" len="med"/>
+                    </a:lnT>
+                    <a:lnB w="6350" cap="flat" cmpd="sng" algn="ctr">
+                      <a:solidFill>
+                        <a:srgbClr val="CBD5E1"/>
+                      </a:solidFill>
+                      <a:prstDash val="solid"/>
+                      <a:round/>
+                      <a:headEnd type="none" w="med" len="med"/>
+                      <a:tailEnd type="none" w="med" len="med"/>
+                    </a:lnB>
+                    <a:solidFill>
                       <a:srgbClr val="FFFFFF"/>
                     </a:solidFill>
                   </a:tcPr>
@@ -8298,7 +9604,75 @@
                           <a:ea typeface="Arial" pitchFamily="34" charset="-122"/>
                           <a:cs typeface="Arial" pitchFamily="34" charset="-120"/>
                         </a:rPr>
-                        <a:t>4.71</a:t>
+                        <a:t>12</a:t>
+                      </a:r>
+                      <a:endParaRPr lang="en-US" sz="900" dirty="0">
+                        <a:latin typeface="Arial" charset="0"/>
+                        <a:ea typeface="Arial" charset="0"/>
+                        <a:cs typeface="Arial" charset="0"/>
+                      </a:endParaRPr>
+                    </a:p>
+                  </a:txBody>
+                  <a:tcPr marL="91440" marR="91440" marT="45720" marB="45720">
+                    <a:lnL w="6350" cap="flat" cmpd="sng" algn="ctr">
+                      <a:solidFill>
+                        <a:srgbClr val="CBD5E1"/>
+                      </a:solidFill>
+                      <a:prstDash val="solid"/>
+                      <a:round/>
+                      <a:headEnd type="none" w="med" len="med"/>
+                      <a:tailEnd type="none" w="med" len="med"/>
+                    </a:lnL>
+                    <a:lnR w="6350" cap="flat" cmpd="sng" algn="ctr">
+                      <a:solidFill>
+                        <a:srgbClr val="CBD5E1"/>
+                      </a:solidFill>
+                      <a:prstDash val="solid"/>
+                      <a:round/>
+                      <a:headEnd type="none" w="med" len="med"/>
+                      <a:tailEnd type="none" w="med" len="med"/>
+                    </a:lnR>
+                    <a:lnT w="6350" cap="flat" cmpd="sng" algn="ctr">
+                      <a:solidFill>
+                        <a:srgbClr val="CBD5E1"/>
+                      </a:solidFill>
+                      <a:prstDash val="solid"/>
+                      <a:round/>
+                      <a:headEnd type="none" w="med" len="med"/>
+                      <a:tailEnd type="none" w="med" len="med"/>
+                    </a:lnT>
+                    <a:lnB w="6350" cap="flat" cmpd="sng" algn="ctr">
+                      <a:solidFill>
+                        <a:srgbClr val="CBD5E1"/>
+                      </a:solidFill>
+                      <a:prstDash val="solid"/>
+                      <a:round/>
+                      <a:headEnd type="none" w="med" len="med"/>
+                      <a:tailEnd type="none" w="med" len="med"/>
+                    </a:lnB>
+                    <a:solidFill>
+                      <a:srgbClr val="FFFFFF"/>
+                    </a:solidFill>
+                  </a:tcPr>
+                </a:tc>
+                <a:tc>
+                  <a:txBody>
+                    <a:bodyPr/>
+                    <a:lstStyle/>
+                    <a:p>
+                      <a:pPr algn="ctr" indent="0" marL="0">
+                        <a:buNone/>
+                      </a:pPr>
+                      <a:r>
+                        <a:rPr lang="en-US" sz="900" dirty="0">
+                          <a:solidFill>
+                            <a:srgbClr val="000000"/>
+                          </a:solidFill>
+                          <a:latin typeface="Arial" pitchFamily="34" charset="0"/>
+                          <a:ea typeface="Arial" pitchFamily="34" charset="-122"/>
+                          <a:cs typeface="Arial" pitchFamily="34" charset="-120"/>
+                        </a:rPr>
+                        <a:t>3.08</a:t>
                       </a:r>
                       <a:endParaRPr lang="en-US" sz="900" dirty="0">
                         <a:latin typeface="Arial" charset="0"/>
@@ -8434,7 +9808,7 @@
                           <a:ea typeface="Arial" pitchFamily="34" charset="-122"/>
                           <a:cs typeface="Arial" pitchFamily="34" charset="-120"/>
                         </a:rPr>
-                        <a:t>9.43</a:t>
+                        <a:t>6.17</a:t>
                       </a:r>
                       <a:endParaRPr lang="en-US" sz="900" dirty="0">
                         <a:latin typeface="Arial" charset="0"/>
@@ -8482,1032 +9856,6 @@
                     </a:lnB>
                     <a:solidFill>
                       <a:srgbClr val="FFFFFF"/>
-                    </a:solidFill>
-                  </a:tcPr>
-                </a:tc>
-              </a:tr>
-              <a:tr h="201168">
-                <a:tc>
-                  <a:txBody>
-                    <a:bodyPr/>
-                    <a:lstStyle/>
-                    <a:p>
-                      <a:pPr algn="ctr" indent="0" marL="0">
-                        <a:buNone/>
-                      </a:pPr>
-                      <a:r>
-                        <a:rPr lang="en-US" sz="900" dirty="0">
-                          <a:solidFill>
-                            <a:srgbClr val="000000"/>
-                          </a:solidFill>
-                          <a:latin typeface="Arial" pitchFamily="34" charset="0"/>
-                          <a:ea typeface="Arial" pitchFamily="34" charset="-122"/>
-                          <a:cs typeface="Arial" pitchFamily="34" charset="-120"/>
-                        </a:rPr>
-                        <a:t>Booking.com</a:t>
-                      </a:r>
-                      <a:endParaRPr lang="en-US" sz="900" dirty="0">
-                        <a:latin typeface="Arial" charset="0"/>
-                        <a:ea typeface="Arial" charset="0"/>
-                        <a:cs typeface="Arial" charset="0"/>
-                      </a:endParaRPr>
-                    </a:p>
-                  </a:txBody>
-                  <a:tcPr marL="91440" marR="91440" marT="45720" marB="45720">
-                    <a:lnL w="6350" cap="flat" cmpd="sng" algn="ctr">
-                      <a:solidFill>
-                        <a:srgbClr val="CBD5E1"/>
-                      </a:solidFill>
-                      <a:prstDash val="solid"/>
-                      <a:round/>
-                      <a:headEnd type="none" w="med" len="med"/>
-                      <a:tailEnd type="none" w="med" len="med"/>
-                    </a:lnL>
-                    <a:lnR w="6350" cap="flat" cmpd="sng" algn="ctr">
-                      <a:solidFill>
-                        <a:srgbClr val="CBD5E1"/>
-                      </a:solidFill>
-                      <a:prstDash val="solid"/>
-                      <a:round/>
-                      <a:headEnd type="none" w="med" len="med"/>
-                      <a:tailEnd type="none" w="med" len="med"/>
-                    </a:lnR>
-                    <a:lnT w="6350" cap="flat" cmpd="sng" algn="ctr">
-                      <a:solidFill>
-                        <a:srgbClr val="CBD5E1"/>
-                      </a:solidFill>
-                      <a:prstDash val="solid"/>
-                      <a:round/>
-                      <a:headEnd type="none" w="med" len="med"/>
-                      <a:tailEnd type="none" w="med" len="med"/>
-                    </a:lnT>
-                    <a:lnB w="6350" cap="flat" cmpd="sng" algn="ctr">
-                      <a:solidFill>
-                        <a:srgbClr val="CBD5E1"/>
-                      </a:solidFill>
-                      <a:prstDash val="solid"/>
-                      <a:round/>
-                      <a:headEnd type="none" w="med" len="med"/>
-                      <a:tailEnd type="none" w="med" len="med"/>
-                    </a:lnB>
-                    <a:solidFill>
-                      <a:srgbClr val="E8EFF8"/>
-                    </a:solidFill>
-                  </a:tcPr>
-                </a:tc>
-                <a:tc>
-                  <a:txBody>
-                    <a:bodyPr/>
-                    <a:lstStyle/>
-                    <a:p>
-                      <a:pPr algn="ctr" indent="0" marL="0">
-                        <a:buNone/>
-                      </a:pPr>
-                      <a:r>
-                        <a:rPr lang="en-US" sz="900" dirty="0">
-                          <a:solidFill>
-                            <a:srgbClr val="000000"/>
-                          </a:solidFill>
-                          <a:latin typeface="Arial" pitchFamily="34" charset="0"/>
-                          <a:ea typeface="Arial" pitchFamily="34" charset="-122"/>
-                          <a:cs typeface="Arial" pitchFamily="34" charset="-120"/>
-                        </a:rPr>
-                        <a:t>68</a:t>
-                      </a:r>
-                      <a:endParaRPr lang="en-US" sz="900" dirty="0">
-                        <a:latin typeface="Arial" charset="0"/>
-                        <a:ea typeface="Arial" charset="0"/>
-                        <a:cs typeface="Arial" charset="0"/>
-                      </a:endParaRPr>
-                    </a:p>
-                  </a:txBody>
-                  <a:tcPr marL="91440" marR="91440" marT="45720" marB="45720">
-                    <a:lnL w="6350" cap="flat" cmpd="sng" algn="ctr">
-                      <a:solidFill>
-                        <a:srgbClr val="CBD5E1"/>
-                      </a:solidFill>
-                      <a:prstDash val="solid"/>
-                      <a:round/>
-                      <a:headEnd type="none" w="med" len="med"/>
-                      <a:tailEnd type="none" w="med" len="med"/>
-                    </a:lnL>
-                    <a:lnR w="6350" cap="flat" cmpd="sng" algn="ctr">
-                      <a:solidFill>
-                        <a:srgbClr val="CBD5E1"/>
-                      </a:solidFill>
-                      <a:prstDash val="solid"/>
-                      <a:round/>
-                      <a:headEnd type="none" w="med" len="med"/>
-                      <a:tailEnd type="none" w="med" len="med"/>
-                    </a:lnR>
-                    <a:lnT w="6350" cap="flat" cmpd="sng" algn="ctr">
-                      <a:solidFill>
-                        <a:srgbClr val="CBD5E1"/>
-                      </a:solidFill>
-                      <a:prstDash val="solid"/>
-                      <a:round/>
-                      <a:headEnd type="none" w="med" len="med"/>
-                      <a:tailEnd type="none" w="med" len="med"/>
-                    </a:lnT>
-                    <a:lnB w="6350" cap="flat" cmpd="sng" algn="ctr">
-                      <a:solidFill>
-                        <a:srgbClr val="CBD5E1"/>
-                      </a:solidFill>
-                      <a:prstDash val="solid"/>
-                      <a:round/>
-                      <a:headEnd type="none" w="med" len="med"/>
-                      <a:tailEnd type="none" w="med" len="med"/>
-                    </a:lnB>
-                    <a:solidFill>
-                      <a:srgbClr val="E8EFF8"/>
-                    </a:solidFill>
-                  </a:tcPr>
-                </a:tc>
-                <a:tc>
-                  <a:txBody>
-                    <a:bodyPr/>
-                    <a:lstStyle/>
-                    <a:p>
-                      <a:pPr algn="ctr" indent="0" marL="0">
-                        <a:buNone/>
-                      </a:pPr>
-                      <a:r>
-                        <a:rPr lang="en-US" sz="900" dirty="0">
-                          <a:solidFill>
-                            <a:srgbClr val="000000"/>
-                          </a:solidFill>
-                          <a:latin typeface="Arial" pitchFamily="34" charset="0"/>
-                          <a:ea typeface="Arial" pitchFamily="34" charset="-122"/>
-                          <a:cs typeface="Arial" pitchFamily="34" charset="-120"/>
-                        </a:rPr>
-                        <a:t>8.63</a:t>
-                      </a:r>
-                      <a:endParaRPr lang="en-US" sz="900" dirty="0">
-                        <a:latin typeface="Arial" charset="0"/>
-                        <a:ea typeface="Arial" charset="0"/>
-                        <a:cs typeface="Arial" charset="0"/>
-                      </a:endParaRPr>
-                    </a:p>
-                  </a:txBody>
-                  <a:tcPr marL="91440" marR="91440" marT="45720" marB="45720">
-                    <a:lnL w="6350" cap="flat" cmpd="sng" algn="ctr">
-                      <a:solidFill>
-                        <a:srgbClr val="CBD5E1"/>
-                      </a:solidFill>
-                      <a:prstDash val="solid"/>
-                      <a:round/>
-                      <a:headEnd type="none" w="med" len="med"/>
-                      <a:tailEnd type="none" w="med" len="med"/>
-                    </a:lnL>
-                    <a:lnR w="6350" cap="flat" cmpd="sng" algn="ctr">
-                      <a:solidFill>
-                        <a:srgbClr val="CBD5E1"/>
-                      </a:solidFill>
-                      <a:prstDash val="solid"/>
-                      <a:round/>
-                      <a:headEnd type="none" w="med" len="med"/>
-                      <a:tailEnd type="none" w="med" len="med"/>
-                    </a:lnR>
-                    <a:lnT w="6350" cap="flat" cmpd="sng" algn="ctr">
-                      <a:solidFill>
-                        <a:srgbClr val="CBD5E1"/>
-                      </a:solidFill>
-                      <a:prstDash val="solid"/>
-                      <a:round/>
-                      <a:headEnd type="none" w="med" len="med"/>
-                      <a:tailEnd type="none" w="med" len="med"/>
-                    </a:lnT>
-                    <a:lnB w="6350" cap="flat" cmpd="sng" algn="ctr">
-                      <a:solidFill>
-                        <a:srgbClr val="CBD5E1"/>
-                      </a:solidFill>
-                      <a:prstDash val="solid"/>
-                      <a:round/>
-                      <a:headEnd type="none" w="med" len="med"/>
-                      <a:tailEnd type="none" w="med" len="med"/>
-                    </a:lnB>
-                    <a:solidFill>
-                      <a:srgbClr val="E8EFF8"/>
-                    </a:solidFill>
-                  </a:tcPr>
-                </a:tc>
-                <a:tc>
-                  <a:txBody>
-                    <a:bodyPr/>
-                    <a:lstStyle/>
-                    <a:p>
-                      <a:pPr algn="ctr" indent="0" marL="0">
-                        <a:buNone/>
-                      </a:pPr>
-                      <a:r>
-                        <a:rPr lang="en-US" sz="900" dirty="0">
-                          <a:solidFill>
-                            <a:srgbClr val="000000"/>
-                          </a:solidFill>
-                          <a:latin typeface="Arial" pitchFamily="34" charset="0"/>
-                          <a:ea typeface="Arial" pitchFamily="34" charset="-122"/>
-                          <a:cs typeface="Arial" pitchFamily="34" charset="-120"/>
-                        </a:rPr>
-                        <a:t>/10</a:t>
-                      </a:r>
-                      <a:endParaRPr lang="en-US" sz="900" dirty="0">
-                        <a:latin typeface="Arial" charset="0"/>
-                        <a:ea typeface="Arial" charset="0"/>
-                        <a:cs typeface="Arial" charset="0"/>
-                      </a:endParaRPr>
-                    </a:p>
-                  </a:txBody>
-                  <a:tcPr marL="91440" marR="91440" marT="45720" marB="45720">
-                    <a:lnL w="6350" cap="flat" cmpd="sng" algn="ctr">
-                      <a:solidFill>
-                        <a:srgbClr val="CBD5E1"/>
-                      </a:solidFill>
-                      <a:prstDash val="solid"/>
-                      <a:round/>
-                      <a:headEnd type="none" w="med" len="med"/>
-                      <a:tailEnd type="none" w="med" len="med"/>
-                    </a:lnL>
-                    <a:lnR w="6350" cap="flat" cmpd="sng" algn="ctr">
-                      <a:solidFill>
-                        <a:srgbClr val="CBD5E1"/>
-                      </a:solidFill>
-                      <a:prstDash val="solid"/>
-                      <a:round/>
-                      <a:headEnd type="none" w="med" len="med"/>
-                      <a:tailEnd type="none" w="med" len="med"/>
-                    </a:lnR>
-                    <a:lnT w="6350" cap="flat" cmpd="sng" algn="ctr">
-                      <a:solidFill>
-                        <a:srgbClr val="CBD5E1"/>
-                      </a:solidFill>
-                      <a:prstDash val="solid"/>
-                      <a:round/>
-                      <a:headEnd type="none" w="med" len="med"/>
-                      <a:tailEnd type="none" w="med" len="med"/>
-                    </a:lnT>
-                    <a:lnB w="6350" cap="flat" cmpd="sng" algn="ctr">
-                      <a:solidFill>
-                        <a:srgbClr val="CBD5E1"/>
-                      </a:solidFill>
-                      <a:prstDash val="solid"/>
-                      <a:round/>
-                      <a:headEnd type="none" w="med" len="med"/>
-                      <a:tailEnd type="none" w="med" len="med"/>
-                    </a:lnB>
-                    <a:solidFill>
-                      <a:srgbClr val="E8EFF8"/>
-                    </a:solidFill>
-                  </a:tcPr>
-                </a:tc>
-                <a:tc>
-                  <a:txBody>
-                    <a:bodyPr/>
-                    <a:lstStyle/>
-                    <a:p>
-                      <a:pPr algn="ctr" indent="0" marL="0">
-                        <a:buNone/>
-                      </a:pPr>
-                      <a:r>
-                        <a:rPr lang="en-US" sz="900" dirty="0">
-                          <a:solidFill>
-                            <a:srgbClr val="000000"/>
-                          </a:solidFill>
-                          <a:latin typeface="Arial" pitchFamily="34" charset="0"/>
-                          <a:ea typeface="Arial" pitchFamily="34" charset="-122"/>
-                          <a:cs typeface="Arial" pitchFamily="34" charset="-120"/>
-                        </a:rPr>
-                        <a:t>8.63</a:t>
-                      </a:r>
-                      <a:endParaRPr lang="en-US" sz="900" dirty="0">
-                        <a:latin typeface="Arial" charset="0"/>
-                        <a:ea typeface="Arial" charset="0"/>
-                        <a:cs typeface="Arial" charset="0"/>
-                      </a:endParaRPr>
-                    </a:p>
-                  </a:txBody>
-                  <a:tcPr marL="91440" marR="91440" marT="45720" marB="45720">
-                    <a:lnL w="6350" cap="flat" cmpd="sng" algn="ctr">
-                      <a:solidFill>
-                        <a:srgbClr val="CBD5E1"/>
-                      </a:solidFill>
-                      <a:prstDash val="solid"/>
-                      <a:round/>
-                      <a:headEnd type="none" w="med" len="med"/>
-                      <a:tailEnd type="none" w="med" len="med"/>
-                    </a:lnL>
-                    <a:lnR w="6350" cap="flat" cmpd="sng" algn="ctr">
-                      <a:solidFill>
-                        <a:srgbClr val="CBD5E1"/>
-                      </a:solidFill>
-                      <a:prstDash val="solid"/>
-                      <a:round/>
-                      <a:headEnd type="none" w="med" len="med"/>
-                      <a:tailEnd type="none" w="med" len="med"/>
-                    </a:lnR>
-                    <a:lnT w="6350" cap="flat" cmpd="sng" algn="ctr">
-                      <a:solidFill>
-                        <a:srgbClr val="CBD5E1"/>
-                      </a:solidFill>
-                      <a:prstDash val="solid"/>
-                      <a:round/>
-                      <a:headEnd type="none" w="med" len="med"/>
-                      <a:tailEnd type="none" w="med" len="med"/>
-                    </a:lnT>
-                    <a:lnB w="6350" cap="flat" cmpd="sng" algn="ctr">
-                      <a:solidFill>
-                        <a:srgbClr val="CBD5E1"/>
-                      </a:solidFill>
-                      <a:prstDash val="solid"/>
-                      <a:round/>
-                      <a:headEnd type="none" w="med" len="med"/>
-                      <a:tailEnd type="none" w="med" len="med"/>
-                    </a:lnB>
-                    <a:solidFill>
-                      <a:srgbClr val="E8EFF8"/>
-                    </a:solidFill>
-                  </a:tcPr>
-                </a:tc>
-              </a:tr>
-              <a:tr h="201168">
-                <a:tc>
-                  <a:txBody>
-                    <a:bodyPr/>
-                    <a:lstStyle/>
-                    <a:p>
-                      <a:pPr algn="ctr" indent="0" marL="0">
-                        <a:buNone/>
-                      </a:pPr>
-                      <a:r>
-                        <a:rPr lang="en-US" sz="900" dirty="0">
-                          <a:solidFill>
-                            <a:srgbClr val="000000"/>
-                          </a:solidFill>
-                          <a:latin typeface="Arial" pitchFamily="34" charset="0"/>
-                          <a:ea typeface="Arial" pitchFamily="34" charset="-122"/>
-                          <a:cs typeface="Arial" pitchFamily="34" charset="-120"/>
-                        </a:rPr>
-                        <a:t>楽天トラベル</a:t>
-                      </a:r>
-                      <a:endParaRPr lang="en-US" sz="900" dirty="0">
-                        <a:latin typeface="Arial" charset="0"/>
-                        <a:ea typeface="Arial" charset="0"/>
-                        <a:cs typeface="Arial" charset="0"/>
-                      </a:endParaRPr>
-                    </a:p>
-                  </a:txBody>
-                  <a:tcPr marL="91440" marR="91440" marT="45720" marB="45720">
-                    <a:lnL w="6350" cap="flat" cmpd="sng" algn="ctr">
-                      <a:solidFill>
-                        <a:srgbClr val="CBD5E1"/>
-                      </a:solidFill>
-                      <a:prstDash val="solid"/>
-                      <a:round/>
-                      <a:headEnd type="none" w="med" len="med"/>
-                      <a:tailEnd type="none" w="med" len="med"/>
-                    </a:lnL>
-                    <a:lnR w="6350" cap="flat" cmpd="sng" algn="ctr">
-                      <a:solidFill>
-                        <a:srgbClr val="CBD5E1"/>
-                      </a:solidFill>
-                      <a:prstDash val="solid"/>
-                      <a:round/>
-                      <a:headEnd type="none" w="med" len="med"/>
-                      <a:tailEnd type="none" w="med" len="med"/>
-                    </a:lnR>
-                    <a:lnT w="6350" cap="flat" cmpd="sng" algn="ctr">
-                      <a:solidFill>
-                        <a:srgbClr val="CBD5E1"/>
-                      </a:solidFill>
-                      <a:prstDash val="solid"/>
-                      <a:round/>
-                      <a:headEnd type="none" w="med" len="med"/>
-                      <a:tailEnd type="none" w="med" len="med"/>
-                    </a:lnT>
-                    <a:lnB w="6350" cap="flat" cmpd="sng" algn="ctr">
-                      <a:solidFill>
-                        <a:srgbClr val="CBD5E1"/>
-                      </a:solidFill>
-                      <a:prstDash val="solid"/>
-                      <a:round/>
-                      <a:headEnd type="none" w="med" len="med"/>
-                      <a:tailEnd type="none" w="med" len="med"/>
-                    </a:lnB>
-                    <a:solidFill>
-                      <a:srgbClr val="FFFFFF"/>
-                    </a:solidFill>
-                  </a:tcPr>
-                </a:tc>
-                <a:tc>
-                  <a:txBody>
-                    <a:bodyPr/>
-                    <a:lstStyle/>
-                    <a:p>
-                      <a:pPr algn="ctr" indent="0" marL="0">
-                        <a:buNone/>
-                      </a:pPr>
-                      <a:r>
-                        <a:rPr lang="en-US" sz="900" dirty="0">
-                          <a:solidFill>
-                            <a:srgbClr val="000000"/>
-                          </a:solidFill>
-                          <a:latin typeface="Arial" pitchFamily="34" charset="0"/>
-                          <a:ea typeface="Arial" pitchFamily="34" charset="-122"/>
-                          <a:cs typeface="Arial" pitchFamily="34" charset="-120"/>
-                        </a:rPr>
-                        <a:t>9</a:t>
-                      </a:r>
-                      <a:endParaRPr lang="en-US" sz="900" dirty="0">
-                        <a:latin typeface="Arial" charset="0"/>
-                        <a:ea typeface="Arial" charset="0"/>
-                        <a:cs typeface="Arial" charset="0"/>
-                      </a:endParaRPr>
-                    </a:p>
-                  </a:txBody>
-                  <a:tcPr marL="91440" marR="91440" marT="45720" marB="45720">
-                    <a:lnL w="6350" cap="flat" cmpd="sng" algn="ctr">
-                      <a:solidFill>
-                        <a:srgbClr val="CBD5E1"/>
-                      </a:solidFill>
-                      <a:prstDash val="solid"/>
-                      <a:round/>
-                      <a:headEnd type="none" w="med" len="med"/>
-                      <a:tailEnd type="none" w="med" len="med"/>
-                    </a:lnL>
-                    <a:lnR w="6350" cap="flat" cmpd="sng" algn="ctr">
-                      <a:solidFill>
-                        <a:srgbClr val="CBD5E1"/>
-                      </a:solidFill>
-                      <a:prstDash val="solid"/>
-                      <a:round/>
-                      <a:headEnd type="none" w="med" len="med"/>
-                      <a:tailEnd type="none" w="med" len="med"/>
-                    </a:lnR>
-                    <a:lnT w="6350" cap="flat" cmpd="sng" algn="ctr">
-                      <a:solidFill>
-                        <a:srgbClr val="CBD5E1"/>
-                      </a:solidFill>
-                      <a:prstDash val="solid"/>
-                      <a:round/>
-                      <a:headEnd type="none" w="med" len="med"/>
-                      <a:tailEnd type="none" w="med" len="med"/>
-                    </a:lnT>
-                    <a:lnB w="6350" cap="flat" cmpd="sng" algn="ctr">
-                      <a:solidFill>
-                        <a:srgbClr val="CBD5E1"/>
-                      </a:solidFill>
-                      <a:prstDash val="solid"/>
-                      <a:round/>
-                      <a:headEnd type="none" w="med" len="med"/>
-                      <a:tailEnd type="none" w="med" len="med"/>
-                    </a:lnB>
-                    <a:solidFill>
-                      <a:srgbClr val="FFFFFF"/>
-                    </a:solidFill>
-                  </a:tcPr>
-                </a:tc>
-                <a:tc>
-                  <a:txBody>
-                    <a:bodyPr/>
-                    <a:lstStyle/>
-                    <a:p>
-                      <a:pPr algn="ctr" indent="0" marL="0">
-                        <a:buNone/>
-                      </a:pPr>
-                      <a:r>
-                        <a:rPr lang="en-US" sz="900" dirty="0">
-                          <a:solidFill>
-                            <a:srgbClr val="000000"/>
-                          </a:solidFill>
-                          <a:latin typeface="Arial" pitchFamily="34" charset="0"/>
-                          <a:ea typeface="Arial" pitchFamily="34" charset="-122"/>
-                          <a:cs typeface="Arial" pitchFamily="34" charset="-120"/>
-                        </a:rPr>
-                        <a:t>4.22</a:t>
-                      </a:r>
-                      <a:endParaRPr lang="en-US" sz="900" dirty="0">
-                        <a:latin typeface="Arial" charset="0"/>
-                        <a:ea typeface="Arial" charset="0"/>
-                        <a:cs typeface="Arial" charset="0"/>
-                      </a:endParaRPr>
-                    </a:p>
-                  </a:txBody>
-                  <a:tcPr marL="91440" marR="91440" marT="45720" marB="45720">
-                    <a:lnL w="6350" cap="flat" cmpd="sng" algn="ctr">
-                      <a:solidFill>
-                        <a:srgbClr val="CBD5E1"/>
-                      </a:solidFill>
-                      <a:prstDash val="solid"/>
-                      <a:round/>
-                      <a:headEnd type="none" w="med" len="med"/>
-                      <a:tailEnd type="none" w="med" len="med"/>
-                    </a:lnL>
-                    <a:lnR w="6350" cap="flat" cmpd="sng" algn="ctr">
-                      <a:solidFill>
-                        <a:srgbClr val="CBD5E1"/>
-                      </a:solidFill>
-                      <a:prstDash val="solid"/>
-                      <a:round/>
-                      <a:headEnd type="none" w="med" len="med"/>
-                      <a:tailEnd type="none" w="med" len="med"/>
-                    </a:lnR>
-                    <a:lnT w="6350" cap="flat" cmpd="sng" algn="ctr">
-                      <a:solidFill>
-                        <a:srgbClr val="CBD5E1"/>
-                      </a:solidFill>
-                      <a:prstDash val="solid"/>
-                      <a:round/>
-                      <a:headEnd type="none" w="med" len="med"/>
-                      <a:tailEnd type="none" w="med" len="med"/>
-                    </a:lnT>
-                    <a:lnB w="6350" cap="flat" cmpd="sng" algn="ctr">
-                      <a:solidFill>
-                        <a:srgbClr val="CBD5E1"/>
-                      </a:solidFill>
-                      <a:prstDash val="solid"/>
-                      <a:round/>
-                      <a:headEnd type="none" w="med" len="med"/>
-                      <a:tailEnd type="none" w="med" len="med"/>
-                    </a:lnB>
-                    <a:solidFill>
-                      <a:srgbClr val="FFFFFF"/>
-                    </a:solidFill>
-                  </a:tcPr>
-                </a:tc>
-                <a:tc>
-                  <a:txBody>
-                    <a:bodyPr/>
-                    <a:lstStyle/>
-                    <a:p>
-                      <a:pPr algn="ctr" indent="0" marL="0">
-                        <a:buNone/>
-                      </a:pPr>
-                      <a:r>
-                        <a:rPr lang="en-US" sz="900" dirty="0">
-                          <a:solidFill>
-                            <a:srgbClr val="000000"/>
-                          </a:solidFill>
-                          <a:latin typeface="Arial" pitchFamily="34" charset="0"/>
-                          <a:ea typeface="Arial" pitchFamily="34" charset="-122"/>
-                          <a:cs typeface="Arial" pitchFamily="34" charset="-120"/>
-                        </a:rPr>
-                        <a:t>/5 (×2)</a:t>
-                      </a:r>
-                      <a:endParaRPr lang="en-US" sz="900" dirty="0">
-                        <a:latin typeface="Arial" charset="0"/>
-                        <a:ea typeface="Arial" charset="0"/>
-                        <a:cs typeface="Arial" charset="0"/>
-                      </a:endParaRPr>
-                    </a:p>
-                  </a:txBody>
-                  <a:tcPr marL="91440" marR="91440" marT="45720" marB="45720">
-                    <a:lnL w="6350" cap="flat" cmpd="sng" algn="ctr">
-                      <a:solidFill>
-                        <a:srgbClr val="CBD5E1"/>
-                      </a:solidFill>
-                      <a:prstDash val="solid"/>
-                      <a:round/>
-                      <a:headEnd type="none" w="med" len="med"/>
-                      <a:tailEnd type="none" w="med" len="med"/>
-                    </a:lnL>
-                    <a:lnR w="6350" cap="flat" cmpd="sng" algn="ctr">
-                      <a:solidFill>
-                        <a:srgbClr val="CBD5E1"/>
-                      </a:solidFill>
-                      <a:prstDash val="solid"/>
-                      <a:round/>
-                      <a:headEnd type="none" w="med" len="med"/>
-                      <a:tailEnd type="none" w="med" len="med"/>
-                    </a:lnR>
-                    <a:lnT w="6350" cap="flat" cmpd="sng" algn="ctr">
-                      <a:solidFill>
-                        <a:srgbClr val="CBD5E1"/>
-                      </a:solidFill>
-                      <a:prstDash val="solid"/>
-                      <a:round/>
-                      <a:headEnd type="none" w="med" len="med"/>
-                      <a:tailEnd type="none" w="med" len="med"/>
-                    </a:lnT>
-                    <a:lnB w="6350" cap="flat" cmpd="sng" algn="ctr">
-                      <a:solidFill>
-                        <a:srgbClr val="CBD5E1"/>
-                      </a:solidFill>
-                      <a:prstDash val="solid"/>
-                      <a:round/>
-                      <a:headEnd type="none" w="med" len="med"/>
-                      <a:tailEnd type="none" w="med" len="med"/>
-                    </a:lnB>
-                    <a:solidFill>
-                      <a:srgbClr val="FFFFFF"/>
-                    </a:solidFill>
-                  </a:tcPr>
-                </a:tc>
-                <a:tc>
-                  <a:txBody>
-                    <a:bodyPr/>
-                    <a:lstStyle/>
-                    <a:p>
-                      <a:pPr algn="ctr" indent="0" marL="0">
-                        <a:buNone/>
-                      </a:pPr>
-                      <a:r>
-                        <a:rPr lang="en-US" sz="900" dirty="0">
-                          <a:solidFill>
-                            <a:srgbClr val="000000"/>
-                          </a:solidFill>
-                          <a:latin typeface="Arial" pitchFamily="34" charset="0"/>
-                          <a:ea typeface="Arial" pitchFamily="34" charset="-122"/>
-                          <a:cs typeface="Arial" pitchFamily="34" charset="-120"/>
-                        </a:rPr>
-                        <a:t>8.44</a:t>
-                      </a:r>
-                      <a:endParaRPr lang="en-US" sz="900" dirty="0">
-                        <a:latin typeface="Arial" charset="0"/>
-                        <a:ea typeface="Arial" charset="0"/>
-                        <a:cs typeface="Arial" charset="0"/>
-                      </a:endParaRPr>
-                    </a:p>
-                  </a:txBody>
-                  <a:tcPr marL="91440" marR="91440" marT="45720" marB="45720">
-                    <a:lnL w="6350" cap="flat" cmpd="sng" algn="ctr">
-                      <a:solidFill>
-                        <a:srgbClr val="CBD5E1"/>
-                      </a:solidFill>
-                      <a:prstDash val="solid"/>
-                      <a:round/>
-                      <a:headEnd type="none" w="med" len="med"/>
-                      <a:tailEnd type="none" w="med" len="med"/>
-                    </a:lnL>
-                    <a:lnR w="6350" cap="flat" cmpd="sng" algn="ctr">
-                      <a:solidFill>
-                        <a:srgbClr val="CBD5E1"/>
-                      </a:solidFill>
-                      <a:prstDash val="solid"/>
-                      <a:round/>
-                      <a:headEnd type="none" w="med" len="med"/>
-                      <a:tailEnd type="none" w="med" len="med"/>
-                    </a:lnR>
-                    <a:lnT w="6350" cap="flat" cmpd="sng" algn="ctr">
-                      <a:solidFill>
-                        <a:srgbClr val="CBD5E1"/>
-                      </a:solidFill>
-                      <a:prstDash val="solid"/>
-                      <a:round/>
-                      <a:headEnd type="none" w="med" len="med"/>
-                      <a:tailEnd type="none" w="med" len="med"/>
-                    </a:lnT>
-                    <a:lnB w="6350" cap="flat" cmpd="sng" algn="ctr">
-                      <a:solidFill>
-                        <a:srgbClr val="CBD5E1"/>
-                      </a:solidFill>
-                      <a:prstDash val="solid"/>
-                      <a:round/>
-                      <a:headEnd type="none" w="med" len="med"/>
-                      <a:tailEnd type="none" w="med" len="med"/>
-                    </a:lnB>
-                    <a:solidFill>
-                      <a:srgbClr val="FFFFFF"/>
-                    </a:solidFill>
-                  </a:tcPr>
-                </a:tc>
-              </a:tr>
-              <a:tr h="201168">
-                <a:tc>
-                  <a:txBody>
-                    <a:bodyPr/>
-                    <a:lstStyle/>
-                    <a:p>
-                      <a:pPr algn="ctr" indent="0" marL="0">
-                        <a:buNone/>
-                      </a:pPr>
-                      <a:r>
-                        <a:rPr lang="en-US" sz="900" dirty="0">
-                          <a:solidFill>
-                            <a:srgbClr val="000000"/>
-                          </a:solidFill>
-                          <a:latin typeface="Arial" pitchFamily="34" charset="0"/>
-                          <a:ea typeface="Arial" pitchFamily="34" charset="-122"/>
-                          <a:cs typeface="Arial" pitchFamily="34" charset="-120"/>
-                        </a:rPr>
-                        <a:t>Google</a:t>
-                      </a:r>
-                      <a:endParaRPr lang="en-US" sz="900" dirty="0">
-                        <a:latin typeface="Arial" charset="0"/>
-                        <a:ea typeface="Arial" charset="0"/>
-                        <a:cs typeface="Arial" charset="0"/>
-                      </a:endParaRPr>
-                    </a:p>
-                  </a:txBody>
-                  <a:tcPr marL="91440" marR="91440" marT="45720" marB="45720">
-                    <a:lnL w="6350" cap="flat" cmpd="sng" algn="ctr">
-                      <a:solidFill>
-                        <a:srgbClr val="CBD5E1"/>
-                      </a:solidFill>
-                      <a:prstDash val="solid"/>
-                      <a:round/>
-                      <a:headEnd type="none" w="med" len="med"/>
-                      <a:tailEnd type="none" w="med" len="med"/>
-                    </a:lnL>
-                    <a:lnR w="6350" cap="flat" cmpd="sng" algn="ctr">
-                      <a:solidFill>
-                        <a:srgbClr val="CBD5E1"/>
-                      </a:solidFill>
-                      <a:prstDash val="solid"/>
-                      <a:round/>
-                      <a:headEnd type="none" w="med" len="med"/>
-                      <a:tailEnd type="none" w="med" len="med"/>
-                    </a:lnR>
-                    <a:lnT w="6350" cap="flat" cmpd="sng" algn="ctr">
-                      <a:solidFill>
-                        <a:srgbClr val="CBD5E1"/>
-                      </a:solidFill>
-                      <a:prstDash val="solid"/>
-                      <a:round/>
-                      <a:headEnd type="none" w="med" len="med"/>
-                      <a:tailEnd type="none" w="med" len="med"/>
-                    </a:lnT>
-                    <a:lnB w="6350" cap="flat" cmpd="sng" algn="ctr">
-                      <a:solidFill>
-                        <a:srgbClr val="CBD5E1"/>
-                      </a:solidFill>
-                      <a:prstDash val="solid"/>
-                      <a:round/>
-                      <a:headEnd type="none" w="med" len="med"/>
-                      <a:tailEnd type="none" w="med" len="med"/>
-                    </a:lnB>
-                    <a:solidFill>
-                      <a:srgbClr val="E8EFF8"/>
-                    </a:solidFill>
-                  </a:tcPr>
-                </a:tc>
-                <a:tc>
-                  <a:txBody>
-                    <a:bodyPr/>
-                    <a:lstStyle/>
-                    <a:p>
-                      <a:pPr algn="ctr" indent="0" marL="0">
-                        <a:buNone/>
-                      </a:pPr>
-                      <a:r>
-                        <a:rPr lang="en-US" sz="900" dirty="0">
-                          <a:solidFill>
-                            <a:srgbClr val="000000"/>
-                          </a:solidFill>
-                          <a:latin typeface="Arial" pitchFamily="34" charset="0"/>
-                          <a:ea typeface="Arial" pitchFamily="34" charset="-122"/>
-                          <a:cs typeface="Arial" pitchFamily="34" charset="-120"/>
-                        </a:rPr>
-                        <a:t>20</a:t>
-                      </a:r>
-                      <a:endParaRPr lang="en-US" sz="900" dirty="0">
-                        <a:latin typeface="Arial" charset="0"/>
-                        <a:ea typeface="Arial" charset="0"/>
-                        <a:cs typeface="Arial" charset="0"/>
-                      </a:endParaRPr>
-                    </a:p>
-                  </a:txBody>
-                  <a:tcPr marL="91440" marR="91440" marT="45720" marB="45720">
-                    <a:lnL w="6350" cap="flat" cmpd="sng" algn="ctr">
-                      <a:solidFill>
-                        <a:srgbClr val="CBD5E1"/>
-                      </a:solidFill>
-                      <a:prstDash val="solid"/>
-                      <a:round/>
-                      <a:headEnd type="none" w="med" len="med"/>
-                      <a:tailEnd type="none" w="med" len="med"/>
-                    </a:lnL>
-                    <a:lnR w="6350" cap="flat" cmpd="sng" algn="ctr">
-                      <a:solidFill>
-                        <a:srgbClr val="CBD5E1"/>
-                      </a:solidFill>
-                      <a:prstDash val="solid"/>
-                      <a:round/>
-                      <a:headEnd type="none" w="med" len="med"/>
-                      <a:tailEnd type="none" w="med" len="med"/>
-                    </a:lnR>
-                    <a:lnT w="6350" cap="flat" cmpd="sng" algn="ctr">
-                      <a:solidFill>
-                        <a:srgbClr val="CBD5E1"/>
-                      </a:solidFill>
-                      <a:prstDash val="solid"/>
-                      <a:round/>
-                      <a:headEnd type="none" w="med" len="med"/>
-                      <a:tailEnd type="none" w="med" len="med"/>
-                    </a:lnT>
-                    <a:lnB w="6350" cap="flat" cmpd="sng" algn="ctr">
-                      <a:solidFill>
-                        <a:srgbClr val="CBD5E1"/>
-                      </a:solidFill>
-                      <a:prstDash val="solid"/>
-                      <a:round/>
-                      <a:headEnd type="none" w="med" len="med"/>
-                      <a:tailEnd type="none" w="med" len="med"/>
-                    </a:lnB>
-                    <a:solidFill>
-                      <a:srgbClr val="E8EFF8"/>
-                    </a:solidFill>
-                  </a:tcPr>
-                </a:tc>
-                <a:tc>
-                  <a:txBody>
-                    <a:bodyPr/>
-                    <a:lstStyle/>
-                    <a:p>
-                      <a:pPr algn="ctr" indent="0" marL="0">
-                        <a:buNone/>
-                      </a:pPr>
-                      <a:r>
-                        <a:rPr lang="en-US" sz="900" dirty="0">
-                          <a:solidFill>
-                            <a:srgbClr val="000000"/>
-                          </a:solidFill>
-                          <a:latin typeface="Arial" pitchFamily="34" charset="0"/>
-                          <a:ea typeface="Arial" pitchFamily="34" charset="-122"/>
-                          <a:cs typeface="Arial" pitchFamily="34" charset="-120"/>
-                        </a:rPr>
-                        <a:t>3.55</a:t>
-                      </a:r>
-                      <a:endParaRPr lang="en-US" sz="900" dirty="0">
-                        <a:latin typeface="Arial" charset="0"/>
-                        <a:ea typeface="Arial" charset="0"/>
-                        <a:cs typeface="Arial" charset="0"/>
-                      </a:endParaRPr>
-                    </a:p>
-                  </a:txBody>
-                  <a:tcPr marL="91440" marR="91440" marT="45720" marB="45720">
-                    <a:lnL w="6350" cap="flat" cmpd="sng" algn="ctr">
-                      <a:solidFill>
-                        <a:srgbClr val="CBD5E1"/>
-                      </a:solidFill>
-                      <a:prstDash val="solid"/>
-                      <a:round/>
-                      <a:headEnd type="none" w="med" len="med"/>
-                      <a:tailEnd type="none" w="med" len="med"/>
-                    </a:lnL>
-                    <a:lnR w="6350" cap="flat" cmpd="sng" algn="ctr">
-                      <a:solidFill>
-                        <a:srgbClr val="CBD5E1"/>
-                      </a:solidFill>
-                      <a:prstDash val="solid"/>
-                      <a:round/>
-                      <a:headEnd type="none" w="med" len="med"/>
-                      <a:tailEnd type="none" w="med" len="med"/>
-                    </a:lnR>
-                    <a:lnT w="6350" cap="flat" cmpd="sng" algn="ctr">
-                      <a:solidFill>
-                        <a:srgbClr val="CBD5E1"/>
-                      </a:solidFill>
-                      <a:prstDash val="solid"/>
-                      <a:round/>
-                      <a:headEnd type="none" w="med" len="med"/>
-                      <a:tailEnd type="none" w="med" len="med"/>
-                    </a:lnT>
-                    <a:lnB w="6350" cap="flat" cmpd="sng" algn="ctr">
-                      <a:solidFill>
-                        <a:srgbClr val="CBD5E1"/>
-                      </a:solidFill>
-                      <a:prstDash val="solid"/>
-                      <a:round/>
-                      <a:headEnd type="none" w="med" len="med"/>
-                      <a:tailEnd type="none" w="med" len="med"/>
-                    </a:lnB>
-                    <a:solidFill>
-                      <a:srgbClr val="E8EFF8"/>
-                    </a:solidFill>
-                  </a:tcPr>
-                </a:tc>
-                <a:tc>
-                  <a:txBody>
-                    <a:bodyPr/>
-                    <a:lstStyle/>
-                    <a:p>
-                      <a:pPr algn="ctr" indent="0" marL="0">
-                        <a:buNone/>
-                      </a:pPr>
-                      <a:r>
-                        <a:rPr lang="en-US" sz="900" dirty="0">
-                          <a:solidFill>
-                            <a:srgbClr val="000000"/>
-                          </a:solidFill>
-                          <a:latin typeface="Arial" pitchFamily="34" charset="0"/>
-                          <a:ea typeface="Arial" pitchFamily="34" charset="-122"/>
-                          <a:cs typeface="Arial" pitchFamily="34" charset="-120"/>
-                        </a:rPr>
-                        <a:t>/5 (×2)</a:t>
-                      </a:r>
-                      <a:endParaRPr lang="en-US" sz="900" dirty="0">
-                        <a:latin typeface="Arial" charset="0"/>
-                        <a:ea typeface="Arial" charset="0"/>
-                        <a:cs typeface="Arial" charset="0"/>
-                      </a:endParaRPr>
-                    </a:p>
-                  </a:txBody>
-                  <a:tcPr marL="91440" marR="91440" marT="45720" marB="45720">
-                    <a:lnL w="6350" cap="flat" cmpd="sng" algn="ctr">
-                      <a:solidFill>
-                        <a:srgbClr val="CBD5E1"/>
-                      </a:solidFill>
-                      <a:prstDash val="solid"/>
-                      <a:round/>
-                      <a:headEnd type="none" w="med" len="med"/>
-                      <a:tailEnd type="none" w="med" len="med"/>
-                    </a:lnL>
-                    <a:lnR w="6350" cap="flat" cmpd="sng" algn="ctr">
-                      <a:solidFill>
-                        <a:srgbClr val="CBD5E1"/>
-                      </a:solidFill>
-                      <a:prstDash val="solid"/>
-                      <a:round/>
-                      <a:headEnd type="none" w="med" len="med"/>
-                      <a:tailEnd type="none" w="med" len="med"/>
-                    </a:lnR>
-                    <a:lnT w="6350" cap="flat" cmpd="sng" algn="ctr">
-                      <a:solidFill>
-                        <a:srgbClr val="CBD5E1"/>
-                      </a:solidFill>
-                      <a:prstDash val="solid"/>
-                      <a:round/>
-                      <a:headEnd type="none" w="med" len="med"/>
-                      <a:tailEnd type="none" w="med" len="med"/>
-                    </a:lnT>
-                    <a:lnB w="6350" cap="flat" cmpd="sng" algn="ctr">
-                      <a:solidFill>
-                        <a:srgbClr val="CBD5E1"/>
-                      </a:solidFill>
-                      <a:prstDash val="solid"/>
-                      <a:round/>
-                      <a:headEnd type="none" w="med" len="med"/>
-                      <a:tailEnd type="none" w="med" len="med"/>
-                    </a:lnB>
-                    <a:solidFill>
-                      <a:srgbClr val="E8EFF8"/>
-                    </a:solidFill>
-                  </a:tcPr>
-                </a:tc>
-                <a:tc>
-                  <a:txBody>
-                    <a:bodyPr/>
-                    <a:lstStyle/>
-                    <a:p>
-                      <a:pPr algn="ctr" indent="0" marL="0">
-                        <a:buNone/>
-                      </a:pPr>
-                      <a:r>
-                        <a:rPr lang="en-US" sz="900" dirty="0">
-                          <a:solidFill>
-                            <a:srgbClr val="000000"/>
-                          </a:solidFill>
-                          <a:latin typeface="Arial" pitchFamily="34" charset="0"/>
-                          <a:ea typeface="Arial" pitchFamily="34" charset="-122"/>
-                          <a:cs typeface="Arial" pitchFamily="34" charset="-120"/>
-                        </a:rPr>
-                        <a:t>7.1</a:t>
-                      </a:r>
-                      <a:endParaRPr lang="en-US" sz="900" dirty="0">
-                        <a:latin typeface="Arial" charset="0"/>
-                        <a:ea typeface="Arial" charset="0"/>
-                        <a:cs typeface="Arial" charset="0"/>
-                      </a:endParaRPr>
-                    </a:p>
-                  </a:txBody>
-                  <a:tcPr marL="91440" marR="91440" marT="45720" marB="45720">
-                    <a:lnL w="6350" cap="flat" cmpd="sng" algn="ctr">
-                      <a:solidFill>
-                        <a:srgbClr val="CBD5E1"/>
-                      </a:solidFill>
-                      <a:prstDash val="solid"/>
-                      <a:round/>
-                      <a:headEnd type="none" w="med" len="med"/>
-                      <a:tailEnd type="none" w="med" len="med"/>
-                    </a:lnL>
-                    <a:lnR w="6350" cap="flat" cmpd="sng" algn="ctr">
-                      <a:solidFill>
-                        <a:srgbClr val="CBD5E1"/>
-                      </a:solidFill>
-                      <a:prstDash val="solid"/>
-                      <a:round/>
-                      <a:headEnd type="none" w="med" len="med"/>
-                      <a:tailEnd type="none" w="med" len="med"/>
-                    </a:lnR>
-                    <a:lnT w="6350" cap="flat" cmpd="sng" algn="ctr">
-                      <a:solidFill>
-                        <a:srgbClr val="CBD5E1"/>
-                      </a:solidFill>
-                      <a:prstDash val="solid"/>
-                      <a:round/>
-                      <a:headEnd type="none" w="med" len="med"/>
-                      <a:tailEnd type="none" w="med" len="med"/>
-                    </a:lnT>
-                    <a:lnB w="6350" cap="flat" cmpd="sng" algn="ctr">
-                      <a:solidFill>
-                        <a:srgbClr val="CBD5E1"/>
-                      </a:solidFill>
-                      <a:prstDash val="solid"/>
-                      <a:round/>
-                      <a:headEnd type="none" w="med" len="med"/>
-                      <a:tailEnd type="none" w="med" len="med"/>
-                    </a:lnB>
-                    <a:solidFill>
-                      <a:srgbClr val="E8EFF8"/>
                     </a:solidFill>
                   </a:tcPr>
                 </a:tc>
@@ -9868,7 +10216,7 @@
                 <a:ea typeface="Arial" pitchFamily="34" charset="-122"/>
                 <a:cs typeface="Arial" pitchFamily="34" charset="-120"/>
               </a:rPr>
-              <a:t>110件（80.9%）</a:t>
+              <a:t>66件（78.6%）</a:t>
             </a:r>
             <a:endParaRPr lang="en-US" sz="1100" dirty="0"/>
           </a:p>
@@ -9966,7 +10314,7 @@
                 <a:ea typeface="Arial" pitchFamily="34" charset="-122"/>
                 <a:cs typeface="Arial" pitchFamily="34" charset="-120"/>
               </a:rPr>
-              <a:t>23件（16.9%）</a:t>
+              <a:t>15件（17.9%）</a:t>
             </a:r>
             <a:endParaRPr lang="en-US" sz="1100" dirty="0"/>
           </a:p>
@@ -10064,7 +10412,7 @@
                 <a:ea typeface="Arial" pitchFamily="34" charset="-122"/>
                 <a:cs typeface="Arial" pitchFamily="34" charset="-120"/>
               </a:rPr>
-              <a:t>3件（2.2%）</a:t>
+              <a:t>3件（3.6%）</a:t>
             </a:r>
             <a:endParaRPr lang="en-US" sz="1100" dirty="0"/>
           </a:p>
@@ -10398,7 +10746,7 @@
                 <a:ea typeface="Arial" pitchFamily="34" charset="-122"/>
                 <a:cs typeface="Arial" pitchFamily="34" charset="-120"/>
               </a:rPr>
-              <a:t>50件+</a:t>
+              <a:t>20件+</a:t>
             </a:r>
             <a:endParaRPr lang="en-US" sz="900" dirty="0"/>
           </a:p>
@@ -10476,7 +10824,7 @@
                 <a:ea typeface="Arial" pitchFamily="34" charset="-122"/>
                 <a:cs typeface="Arial" pitchFamily="34" charset="-120"/>
               </a:rPr>
-              <a:t>駅のすぐ横にあり立地も良く、周りに飲食店も多く大変便利です</a:t>
+              <a:t>駅が近くて周りにはなんでも揃ってるので遅い時間も食べ物には困りません</a:t>
             </a:r>
             <a:endParaRPr lang="en-US" sz="900" dirty="0"/>
           </a:p>
@@ -10515,7 +10863,7 @@
                 <a:ea typeface="Arial" pitchFamily="34" charset="-122"/>
                 <a:cs typeface="Arial" pitchFamily="34" charset="-120"/>
               </a:rPr>
-              <a:t>「ホテルは川崎駅のすぐそばに位置し、近くにはバスターミナルやショッピングモールがいくつかあり、水族館も隣接しているた...」</a:t>
+              <a:t>「Good location 立地が良い」</a:t>
             </a:r>
             <a:endParaRPr lang="en-US" sz="900" dirty="0"/>
           </a:p>
@@ -10699,7 +11047,7 @@
                 <a:ea typeface="Arial" pitchFamily="34" charset="-122"/>
                 <a:cs typeface="Arial" pitchFamily="34" charset="-120"/>
               </a:rPr>
-              <a:t>ホテルのフロントの対応も良く、客室設備は清潔で整頓されており、快適な滞在ができます</a:t>
+              <a:t>後から外出する際にロビーにいくと、男性スタッフの方とニコニコ楽しそうにお話をされていて 私もその穏やかな笑顔で対応...</a:t>
             </a:r>
             <a:endParaRPr lang="en-US" sz="900" dirty="0"/>
           </a:p>
@@ -10738,7 +11086,7 @@
                 <a:ea typeface="Arial" pitchFamily="34" charset="-122"/>
                 <a:cs typeface="Arial" pitchFamily="34" charset="-120"/>
               </a:rPr>
-              <a:t>「朝食は種類豊富で、サービスも良く、部屋は静かで、立地も非常に便利です」</a:t>
+              <a:t>「ホテルのフロントの対応も良く、客室設備は清潔で整頓されており、快適な滞在ができます」</a:t>
             </a:r>
             <a:endParaRPr lang="en-US" sz="900" dirty="0"/>
           </a:p>
@@ -10883,6 +11231,452 @@
                 <a:ea typeface="Arial" pitchFamily="34" charset="-122"/>
                 <a:cs typeface="Arial" pitchFamily="34" charset="-120"/>
               </a:rPr>
+              <a:t>朝食</a:t>
+            </a:r>
+            <a:endParaRPr lang="en-US" sz="1300" dirty="0"/>
+          </a:p>
+        </p:txBody>
+      </p:sp>
+      <p:sp>
+        <p:nvSpPr>
+          <p:cNvPr id="24" name="Text 22"/>
+          <p:cNvSpPr/>
+          <p:nvPr/>
+        </p:nvSpPr>
+        <p:spPr>
+          <a:xfrm>
+            <a:off x="6263640" y="1417320"/>
+            <a:ext cx="2377440" cy="365760"/>
+          </a:xfrm>
+          <a:prstGeom prst="rect">
+            <a:avLst/>
+          </a:prstGeom>
+          <a:noFill/>
+          <a:ln/>
+        </p:spPr>
+        <p:txBody>
+          <a:bodyPr wrap="square" lIns="0" tIns="0" rIns="0" bIns="0" rtlCol="0" anchor="ctr"/>
+          <a:lstStyle/>
+          <a:p>
+            <a:pPr indent="0" marL="0">
+              <a:buNone/>
+            </a:pPr>
+            <a:r>
+              <a:rPr lang="en-US" sz="900" dirty="0">
+                <a:solidFill>
+                  <a:srgbClr val="64748B"/>
+                </a:solidFill>
+                <a:latin typeface="Arial" pitchFamily="34" charset="0"/>
+                <a:ea typeface="Arial" pitchFamily="34" charset="-122"/>
+                <a:cs typeface="Arial" pitchFamily="34" charset="-120"/>
+              </a:rPr>
+              <a:t>朝食もとても美味しくて、古いホテルだと思われますが綺麗でそんな事を思わせないくらい素晴らしいです</a:t>
+            </a:r>
+            <a:endParaRPr lang="en-US" sz="900" dirty="0"/>
+          </a:p>
+        </p:txBody>
+      </p:sp>
+      <p:sp>
+        <p:nvSpPr>
+          <p:cNvPr id="25" name="Text 23"/>
+          <p:cNvSpPr/>
+          <p:nvPr/>
+        </p:nvSpPr>
+        <p:spPr>
+          <a:xfrm>
+            <a:off x="6263640" y="1828800"/>
+            <a:ext cx="2377440" cy="640080"/>
+          </a:xfrm>
+          <a:prstGeom prst="rect">
+            <a:avLst/>
+          </a:prstGeom>
+          <a:noFill/>
+          <a:ln/>
+        </p:spPr>
+        <p:txBody>
+          <a:bodyPr wrap="square" lIns="0" tIns="0" rIns="0" bIns="0" rtlCol="0" anchor="ctr"/>
+          <a:lstStyle/>
+          <a:p>
+            <a:pPr indent="0" marL="0">
+              <a:buNone/>
+            </a:pPr>
+            <a:r>
+              <a:rPr lang="en-US" sz="900" i="1" dirty="0">
+                <a:solidFill>
+                  <a:srgbClr val="3B7DD8"/>
+                </a:solidFill>
+                <a:latin typeface="Arial" pitchFamily="34" charset="0"/>
+                <a:ea typeface="Arial" pitchFamily="34" charset="-122"/>
+                <a:cs typeface="Arial" pitchFamily="34" charset="-120"/>
+              </a:rPr>
+              <a:t>「朝食が非常に良かった」</a:t>
+            </a:r>
+            <a:endParaRPr lang="en-US" sz="900" dirty="0"/>
+          </a:p>
+        </p:txBody>
+      </p:sp>
+      <p:sp>
+        <p:nvSpPr>
+          <p:cNvPr id="26" name="Shape 24"/>
+          <p:cNvSpPr/>
+          <p:nvPr/>
+        </p:nvSpPr>
+        <p:spPr>
+          <a:xfrm>
+            <a:off x="457200" y="2880360"/>
+            <a:ext cx="2651760" cy="1600200"/>
+          </a:xfrm>
+          <a:prstGeom prst="rect">
+            <a:avLst/>
+          </a:prstGeom>
+          <a:solidFill>
+            <a:srgbClr val="FFFFFF"/>
+          </a:solidFill>
+          <a:ln/>
+          <a:effectLst>
+            <a:outerShdw sx="100000" sy="100000" kx="0" ky="0" algn="bl" rotWithShape="0" blurRad="50800" dist="25400" dir="8100000">
+              <a:srgbClr val="000000">
+                <a:alpha val="10000"/>
+              </a:srgbClr>
+            </a:outerShdw>
+          </a:effectLst>
+        </p:spPr>
+      </p:sp>
+      <p:sp>
+        <p:nvSpPr>
+          <p:cNvPr id="27" name="Shape 25"/>
+          <p:cNvSpPr/>
+          <p:nvPr/>
+        </p:nvSpPr>
+        <p:spPr>
+          <a:xfrm>
+            <a:off x="457200" y="2880360"/>
+            <a:ext cx="54864" cy="1600200"/>
+          </a:xfrm>
+          <a:prstGeom prst="rect">
+            <a:avLst/>
+          </a:prstGeom>
+          <a:solidFill>
+            <a:srgbClr val="16A34A"/>
+          </a:solidFill>
+          <a:ln/>
+        </p:spPr>
+      </p:sp>
+      <p:sp>
+        <p:nvSpPr>
+          <p:cNvPr id="28" name="Shape 26"/>
+          <p:cNvSpPr/>
+          <p:nvPr/>
+        </p:nvSpPr>
+        <p:spPr>
+          <a:xfrm>
+            <a:off x="2286000" y="2953512"/>
+            <a:ext cx="658368" cy="228600"/>
+          </a:xfrm>
+          <a:prstGeom prst="rect">
+            <a:avLst/>
+          </a:prstGeom>
+          <a:solidFill>
+            <a:srgbClr val="DCFCE7"/>
+          </a:solidFill>
+          <a:ln/>
+        </p:spPr>
+      </p:sp>
+      <p:sp>
+        <p:nvSpPr>
+          <p:cNvPr id="29" name="Text 27"/>
+          <p:cNvSpPr/>
+          <p:nvPr/>
+        </p:nvSpPr>
+        <p:spPr>
+          <a:xfrm>
+            <a:off x="2286000" y="2953512"/>
+            <a:ext cx="658368" cy="228600"/>
+          </a:xfrm>
+          <a:prstGeom prst="rect">
+            <a:avLst/>
+          </a:prstGeom>
+          <a:noFill/>
+          <a:ln/>
+        </p:spPr>
+        <p:txBody>
+          <a:bodyPr wrap="square" lIns="0" tIns="0" rIns="0" bIns="0" rtlCol="0" anchor="ctr"/>
+          <a:lstStyle/>
+          <a:p>
+            <a:pPr algn="ctr" indent="0" marL="0">
+              <a:buNone/>
+            </a:pPr>
+            <a:r>
+              <a:rPr lang="en-US" sz="900" b="1" dirty="0">
+                <a:solidFill>
+                  <a:srgbClr val="16A34A"/>
+                </a:solidFill>
+                <a:latin typeface="Arial" pitchFamily="34" charset="0"/>
+                <a:ea typeface="Arial" pitchFamily="34" charset="-122"/>
+                <a:cs typeface="Arial" pitchFamily="34" charset="-120"/>
+              </a:rPr>
+              <a:t>10件+</a:t>
+            </a:r>
+            <a:endParaRPr lang="en-US" sz="900" dirty="0"/>
+          </a:p>
+        </p:txBody>
+      </p:sp>
+      <p:sp>
+        <p:nvSpPr>
+          <p:cNvPr id="30" name="Text 28"/>
+          <p:cNvSpPr/>
+          <p:nvPr/>
+        </p:nvSpPr>
+        <p:spPr>
+          <a:xfrm>
+            <a:off x="594360" y="2953512"/>
+            <a:ext cx="1645920" cy="274320"/>
+          </a:xfrm>
+          <a:prstGeom prst="rect">
+            <a:avLst/>
+          </a:prstGeom>
+          <a:noFill/>
+          <a:ln/>
+        </p:spPr>
+        <p:txBody>
+          <a:bodyPr wrap="square" lIns="0" tIns="0" rIns="0" bIns="0" rtlCol="0" anchor="ctr"/>
+          <a:lstStyle/>
+          <a:p>
+            <a:pPr indent="0" marL="0">
+              <a:buNone/>
+            </a:pPr>
+            <a:r>
+              <a:rPr lang="en-US" sz="1300" b="1" dirty="0">
+                <a:solidFill>
+                  <a:srgbClr val="1A2744"/>
+                </a:solidFill>
+                <a:latin typeface="Arial" pitchFamily="34" charset="0"/>
+                <a:ea typeface="Arial" pitchFamily="34" charset="-122"/>
+                <a:cs typeface="Arial" pitchFamily="34" charset="-120"/>
+              </a:rPr>
+              <a:t>清潔さ・清掃</a:t>
+            </a:r>
+            <a:endParaRPr lang="en-US" sz="1300" dirty="0"/>
+          </a:p>
+        </p:txBody>
+      </p:sp>
+      <p:sp>
+        <p:nvSpPr>
+          <p:cNvPr id="31" name="Text 29"/>
+          <p:cNvSpPr/>
+          <p:nvPr/>
+        </p:nvSpPr>
+        <p:spPr>
+          <a:xfrm>
+            <a:off x="594360" y="3246120"/>
+            <a:ext cx="2377440" cy="365760"/>
+          </a:xfrm>
+          <a:prstGeom prst="rect">
+            <a:avLst/>
+          </a:prstGeom>
+          <a:noFill/>
+          <a:ln/>
+        </p:spPr>
+        <p:txBody>
+          <a:bodyPr wrap="square" lIns="0" tIns="0" rIns="0" bIns="0" rtlCol="0" anchor="ctr"/>
+          <a:lstStyle/>
+          <a:p>
+            <a:pPr indent="0" marL="0">
+              <a:buNone/>
+            </a:pPr>
+            <a:r>
+              <a:rPr lang="en-US" sz="900" dirty="0">
+                <a:solidFill>
+                  <a:srgbClr val="64748B"/>
+                </a:solidFill>
+                <a:latin typeface="Arial" pitchFamily="34" charset="0"/>
+                <a:ea typeface="Arial" pitchFamily="34" charset="-122"/>
+                <a:cs typeface="Arial" pitchFamily="34" charset="-120"/>
+              </a:rPr>
+              <a:t>朝食もとても美味しくて、古いホテルだと思われますが綺麗でそんな事を思わせないくらい素晴らしいです</a:t>
+            </a:r>
+            <a:endParaRPr lang="en-US" sz="900" dirty="0"/>
+          </a:p>
+        </p:txBody>
+      </p:sp>
+      <p:sp>
+        <p:nvSpPr>
+          <p:cNvPr id="32" name="Text 30"/>
+          <p:cNvSpPr/>
+          <p:nvPr/>
+        </p:nvSpPr>
+        <p:spPr>
+          <a:xfrm>
+            <a:off x="594360" y="3657600"/>
+            <a:ext cx="2377440" cy="640080"/>
+          </a:xfrm>
+          <a:prstGeom prst="rect">
+            <a:avLst/>
+          </a:prstGeom>
+          <a:noFill/>
+          <a:ln/>
+        </p:spPr>
+        <p:txBody>
+          <a:bodyPr wrap="square" lIns="0" tIns="0" rIns="0" bIns="0" rtlCol="0" anchor="ctr"/>
+          <a:lstStyle/>
+          <a:p>
+            <a:pPr indent="0" marL="0">
+              <a:buNone/>
+            </a:pPr>
+            <a:r>
+              <a:rPr lang="en-US" sz="900" i="1" dirty="0">
+                <a:solidFill>
+                  <a:srgbClr val="3B7DD8"/>
+                </a:solidFill>
+                <a:latin typeface="Arial" pitchFamily="34" charset="0"/>
+                <a:ea typeface="Arial" pitchFamily="34" charset="-122"/>
+                <a:cs typeface="Arial" pitchFamily="34" charset="-120"/>
+              </a:rPr>
+              <a:t>「全体的には許容範囲内だが、浴室の壁には以前の宿泊客の髪の毛が1本だけでなく複数付着しているので、もっと念入りに掃除...」</a:t>
+            </a:r>
+            <a:endParaRPr lang="en-US" sz="900" dirty="0"/>
+          </a:p>
+        </p:txBody>
+      </p:sp>
+      <p:sp>
+        <p:nvSpPr>
+          <p:cNvPr id="33" name="Shape 31"/>
+          <p:cNvSpPr/>
+          <p:nvPr/>
+        </p:nvSpPr>
+        <p:spPr>
+          <a:xfrm>
+            <a:off x="3291840" y="2880360"/>
+            <a:ext cx="2651760" cy="1600200"/>
+          </a:xfrm>
+          <a:prstGeom prst="rect">
+            <a:avLst/>
+          </a:prstGeom>
+          <a:solidFill>
+            <a:srgbClr val="FFFFFF"/>
+          </a:solidFill>
+          <a:ln/>
+          <a:effectLst>
+            <a:outerShdw sx="100000" sy="100000" kx="0" ky="0" algn="bl" rotWithShape="0" blurRad="50800" dist="25400" dir="8100000">
+              <a:srgbClr val="000000">
+                <a:alpha val="10000"/>
+              </a:srgbClr>
+            </a:outerShdw>
+          </a:effectLst>
+        </p:spPr>
+      </p:sp>
+      <p:sp>
+        <p:nvSpPr>
+          <p:cNvPr id="34" name="Shape 32"/>
+          <p:cNvSpPr/>
+          <p:nvPr/>
+        </p:nvSpPr>
+        <p:spPr>
+          <a:xfrm>
+            <a:off x="3291840" y="2880360"/>
+            <a:ext cx="54864" cy="1600200"/>
+          </a:xfrm>
+          <a:prstGeom prst="rect">
+            <a:avLst/>
+          </a:prstGeom>
+          <a:solidFill>
+            <a:srgbClr val="16A34A"/>
+          </a:solidFill>
+          <a:ln/>
+        </p:spPr>
+      </p:sp>
+      <p:sp>
+        <p:nvSpPr>
+          <p:cNvPr id="35" name="Shape 33"/>
+          <p:cNvSpPr/>
+          <p:nvPr/>
+        </p:nvSpPr>
+        <p:spPr>
+          <a:xfrm>
+            <a:off x="5120640" y="2953512"/>
+            <a:ext cx="658368" cy="228600"/>
+          </a:xfrm>
+          <a:prstGeom prst="rect">
+            <a:avLst/>
+          </a:prstGeom>
+          <a:solidFill>
+            <a:srgbClr val="DCFCE7"/>
+          </a:solidFill>
+          <a:ln/>
+        </p:spPr>
+      </p:sp>
+      <p:sp>
+        <p:nvSpPr>
+          <p:cNvPr id="36" name="Text 34"/>
+          <p:cNvSpPr/>
+          <p:nvPr/>
+        </p:nvSpPr>
+        <p:spPr>
+          <a:xfrm>
+            <a:off x="5120640" y="2953512"/>
+            <a:ext cx="658368" cy="228600"/>
+          </a:xfrm>
+          <a:prstGeom prst="rect">
+            <a:avLst/>
+          </a:prstGeom>
+          <a:noFill/>
+          <a:ln/>
+        </p:spPr>
+        <p:txBody>
+          <a:bodyPr wrap="square" lIns="0" tIns="0" rIns="0" bIns="0" rtlCol="0" anchor="ctr"/>
+          <a:lstStyle/>
+          <a:p>
+            <a:pPr algn="ctr" indent="0" marL="0">
+              <a:buNone/>
+            </a:pPr>
+            <a:r>
+              <a:rPr lang="en-US" sz="900" b="1" dirty="0">
+                <a:solidFill>
+                  <a:srgbClr val="16A34A"/>
+                </a:solidFill>
+                <a:latin typeface="Arial" pitchFamily="34" charset="0"/>
+                <a:ea typeface="Arial" pitchFamily="34" charset="-122"/>
+                <a:cs typeface="Arial" pitchFamily="34" charset="-120"/>
+              </a:rPr>
+              <a:t>10件+</a:t>
+            </a:r>
+            <a:endParaRPr lang="en-US" sz="900" dirty="0"/>
+          </a:p>
+        </p:txBody>
+      </p:sp>
+      <p:sp>
+        <p:nvSpPr>
+          <p:cNvPr id="37" name="Text 35"/>
+          <p:cNvSpPr/>
+          <p:nvPr/>
+        </p:nvSpPr>
+        <p:spPr>
+          <a:xfrm>
+            <a:off x="3429000" y="2953512"/>
+            <a:ext cx="1645920" cy="274320"/>
+          </a:xfrm>
+          <a:prstGeom prst="rect">
+            <a:avLst/>
+          </a:prstGeom>
+          <a:noFill/>
+          <a:ln/>
+        </p:spPr>
+        <p:txBody>
+          <a:bodyPr wrap="square" lIns="0" tIns="0" rIns="0" bIns="0" rtlCol="0" anchor="ctr"/>
+          <a:lstStyle/>
+          <a:p>
+            <a:pPr indent="0" marL="0">
+              <a:buNone/>
+            </a:pPr>
+            <a:r>
+              <a:rPr lang="en-US" sz="1300" b="1" dirty="0">
+                <a:solidFill>
+                  <a:srgbClr val="1A2744"/>
+                </a:solidFill>
+                <a:latin typeface="Arial" pitchFamily="34" charset="0"/>
+                <a:ea typeface="Arial" pitchFamily="34" charset="-122"/>
+                <a:cs typeface="Arial" pitchFamily="34" charset="-120"/>
+              </a:rPr>
               <a:t>快適さ・設備</a:t>
             </a:r>
             <a:endParaRPr lang="en-US" sz="1300" dirty="0"/>
@@ -10891,13 +11685,13 @@
       </p:sp>
       <p:sp>
         <p:nvSpPr>
-          <p:cNvPr id="24" name="Text 22"/>
-          <p:cNvSpPr/>
-          <p:nvPr/>
-        </p:nvSpPr>
-        <p:spPr>
-          <a:xfrm>
-            <a:off x="6263640" y="1417320"/>
+          <p:cNvPr id="38" name="Text 36"/>
+          <p:cNvSpPr/>
+          <p:nvPr/>
+        </p:nvSpPr>
+        <p:spPr>
+          <a:xfrm>
+            <a:off x="3429000" y="3246120"/>
             <a:ext cx="2377440" cy="365760"/>
           </a:xfrm>
           <a:prstGeom prst="rect">
@@ -10930,13 +11724,13 @@
       </p:sp>
       <p:sp>
         <p:nvSpPr>
-          <p:cNvPr id="25" name="Text 23"/>
-          <p:cNvSpPr/>
-          <p:nvPr/>
-        </p:nvSpPr>
-        <p:spPr>
-          <a:xfrm>
-            <a:off x="6263640" y="1828800"/>
+          <p:cNvPr id="39" name="Text 37"/>
+          <p:cNvSpPr/>
+          <p:nvPr/>
+        </p:nvSpPr>
+        <p:spPr>
+          <a:xfrm>
+            <a:off x="3429000" y="3657600"/>
             <a:ext cx="2377440" cy="640080"/>
           </a:xfrm>
           <a:prstGeom prst="rect">
@@ -10962,452 +11756,6 @@
                 <a:cs typeface="Arial" pitchFamily="34" charset="-120"/>
               </a:rPr>
               <a:t>「ホテルの設備は時代遅れだ」</a:t>
-            </a:r>
-            <a:endParaRPr lang="en-US" sz="900" dirty="0"/>
-          </a:p>
-        </p:txBody>
-      </p:sp>
-      <p:sp>
-        <p:nvSpPr>
-          <p:cNvPr id="26" name="Shape 24"/>
-          <p:cNvSpPr/>
-          <p:nvPr/>
-        </p:nvSpPr>
-        <p:spPr>
-          <a:xfrm>
-            <a:off x="457200" y="2880360"/>
-            <a:ext cx="2651760" cy="1600200"/>
-          </a:xfrm>
-          <a:prstGeom prst="rect">
-            <a:avLst/>
-          </a:prstGeom>
-          <a:solidFill>
-            <a:srgbClr val="FFFFFF"/>
-          </a:solidFill>
-          <a:ln/>
-          <a:effectLst>
-            <a:outerShdw sx="100000" sy="100000" kx="0" ky="0" algn="bl" rotWithShape="0" blurRad="50800" dist="25400" dir="8100000">
-              <a:srgbClr val="000000">
-                <a:alpha val="10000"/>
-              </a:srgbClr>
-            </a:outerShdw>
-          </a:effectLst>
-        </p:spPr>
-      </p:sp>
-      <p:sp>
-        <p:nvSpPr>
-          <p:cNvPr id="27" name="Shape 25"/>
-          <p:cNvSpPr/>
-          <p:nvPr/>
-        </p:nvSpPr>
-        <p:spPr>
-          <a:xfrm>
-            <a:off x="457200" y="2880360"/>
-            <a:ext cx="54864" cy="1600200"/>
-          </a:xfrm>
-          <a:prstGeom prst="rect">
-            <a:avLst/>
-          </a:prstGeom>
-          <a:solidFill>
-            <a:srgbClr val="16A34A"/>
-          </a:solidFill>
-          <a:ln/>
-        </p:spPr>
-      </p:sp>
-      <p:sp>
-        <p:nvSpPr>
-          <p:cNvPr id="28" name="Shape 26"/>
-          <p:cNvSpPr/>
-          <p:nvPr/>
-        </p:nvSpPr>
-        <p:spPr>
-          <a:xfrm>
-            <a:off x="2286000" y="2953512"/>
-            <a:ext cx="658368" cy="228600"/>
-          </a:xfrm>
-          <a:prstGeom prst="rect">
-            <a:avLst/>
-          </a:prstGeom>
-          <a:solidFill>
-            <a:srgbClr val="DCFCE7"/>
-          </a:solidFill>
-          <a:ln/>
-        </p:spPr>
-      </p:sp>
-      <p:sp>
-        <p:nvSpPr>
-          <p:cNvPr id="29" name="Text 27"/>
-          <p:cNvSpPr/>
-          <p:nvPr/>
-        </p:nvSpPr>
-        <p:spPr>
-          <a:xfrm>
-            <a:off x="2286000" y="2953512"/>
-            <a:ext cx="658368" cy="228600"/>
-          </a:xfrm>
-          <a:prstGeom prst="rect">
-            <a:avLst/>
-          </a:prstGeom>
-          <a:noFill/>
-          <a:ln/>
-        </p:spPr>
-        <p:txBody>
-          <a:bodyPr wrap="square" lIns="0" tIns="0" rIns="0" bIns="0" rtlCol="0" anchor="ctr"/>
-          <a:lstStyle/>
-          <a:p>
-            <a:pPr algn="ctr" indent="0" marL="0">
-              <a:buNone/>
-            </a:pPr>
-            <a:r>
-              <a:rPr lang="en-US" sz="900" b="1" dirty="0">
-                <a:solidFill>
-                  <a:srgbClr val="16A34A"/>
-                </a:solidFill>
-                <a:latin typeface="Arial" pitchFamily="34" charset="0"/>
-                <a:ea typeface="Arial" pitchFamily="34" charset="-122"/>
-                <a:cs typeface="Arial" pitchFamily="34" charset="-120"/>
-              </a:rPr>
-              <a:t>20件+</a:t>
-            </a:r>
-            <a:endParaRPr lang="en-US" sz="900" dirty="0"/>
-          </a:p>
-        </p:txBody>
-      </p:sp>
-      <p:sp>
-        <p:nvSpPr>
-          <p:cNvPr id="30" name="Text 28"/>
-          <p:cNvSpPr/>
-          <p:nvPr/>
-        </p:nvSpPr>
-        <p:spPr>
-          <a:xfrm>
-            <a:off x="594360" y="2953512"/>
-            <a:ext cx="1645920" cy="274320"/>
-          </a:xfrm>
-          <a:prstGeom prst="rect">
-            <a:avLst/>
-          </a:prstGeom>
-          <a:noFill/>
-          <a:ln/>
-        </p:spPr>
-        <p:txBody>
-          <a:bodyPr wrap="square" lIns="0" tIns="0" rIns="0" bIns="0" rtlCol="0" anchor="ctr"/>
-          <a:lstStyle/>
-          <a:p>
-            <a:pPr indent="0" marL="0">
-              <a:buNone/>
-            </a:pPr>
-            <a:r>
-              <a:rPr lang="en-US" sz="1300" b="1" dirty="0">
-                <a:solidFill>
-                  <a:srgbClr val="1A2744"/>
-                </a:solidFill>
-                <a:latin typeface="Arial" pitchFamily="34" charset="0"/>
-                <a:ea typeface="Arial" pitchFamily="34" charset="-122"/>
-                <a:cs typeface="Arial" pitchFamily="34" charset="-120"/>
-              </a:rPr>
-              <a:t>清潔さ・清掃</a:t>
-            </a:r>
-            <a:endParaRPr lang="en-US" sz="1300" dirty="0"/>
-          </a:p>
-        </p:txBody>
-      </p:sp>
-      <p:sp>
-        <p:nvSpPr>
-          <p:cNvPr id="31" name="Text 29"/>
-          <p:cNvSpPr/>
-          <p:nvPr/>
-        </p:nvSpPr>
-        <p:spPr>
-          <a:xfrm>
-            <a:off x="594360" y="3246120"/>
-            <a:ext cx="2377440" cy="365760"/>
-          </a:xfrm>
-          <a:prstGeom prst="rect">
-            <a:avLst/>
-          </a:prstGeom>
-          <a:noFill/>
-          <a:ln/>
-        </p:spPr>
-        <p:txBody>
-          <a:bodyPr wrap="square" lIns="0" tIns="0" rIns="0" bIns="0" rtlCol="0" anchor="ctr"/>
-          <a:lstStyle/>
-          <a:p>
-            <a:pPr indent="0" marL="0">
-              <a:buNone/>
-            </a:pPr>
-            <a:r>
-              <a:rPr lang="en-US" sz="900" dirty="0">
-                <a:solidFill>
-                  <a:srgbClr val="64748B"/>
-                </a:solidFill>
-                <a:latin typeface="Arial" pitchFamily="34" charset="0"/>
-                <a:ea typeface="Arial" pitchFamily="34" charset="-122"/>
-                <a:cs typeface="Arial" pitchFamily="34" charset="-120"/>
-              </a:rPr>
-              <a:t>ホテル内も綺麗でセキュリティも良く安心です</a:t>
-            </a:r>
-            <a:endParaRPr lang="en-US" sz="900" dirty="0"/>
-          </a:p>
-        </p:txBody>
-      </p:sp>
-      <p:sp>
-        <p:nvSpPr>
-          <p:cNvPr id="32" name="Text 30"/>
-          <p:cNvSpPr/>
-          <p:nvPr/>
-        </p:nvSpPr>
-        <p:spPr>
-          <a:xfrm>
-            <a:off x="594360" y="3657600"/>
-            <a:ext cx="2377440" cy="640080"/>
-          </a:xfrm>
-          <a:prstGeom prst="rect">
-            <a:avLst/>
-          </a:prstGeom>
-          <a:noFill/>
-          <a:ln/>
-        </p:spPr>
-        <p:txBody>
-          <a:bodyPr wrap="square" lIns="0" tIns="0" rIns="0" bIns="0" rtlCol="0" anchor="ctr"/>
-          <a:lstStyle/>
-          <a:p>
-            <a:pPr indent="0" marL="0">
-              <a:buNone/>
-            </a:pPr>
-            <a:r>
-              <a:rPr lang="en-US" sz="900" i="1" dirty="0">
-                <a:solidFill>
-                  <a:srgbClr val="3B7DD8"/>
-                </a:solidFill>
-                <a:latin typeface="Arial" pitchFamily="34" charset="0"/>
-                <a:ea typeface="Arial" pitchFamily="34" charset="-122"/>
-                <a:cs typeface="Arial" pitchFamily="34" charset="-120"/>
-              </a:rPr>
-              <a:t>「ホテルのフロントの対応も良く、客室設備は清潔で整頓されており、快適な滞在ができます」</a:t>
-            </a:r>
-            <a:endParaRPr lang="en-US" sz="900" dirty="0"/>
-          </a:p>
-        </p:txBody>
-      </p:sp>
-      <p:sp>
-        <p:nvSpPr>
-          <p:cNvPr id="33" name="Shape 31"/>
-          <p:cNvSpPr/>
-          <p:nvPr/>
-        </p:nvSpPr>
-        <p:spPr>
-          <a:xfrm>
-            <a:off x="3291840" y="2880360"/>
-            <a:ext cx="2651760" cy="1600200"/>
-          </a:xfrm>
-          <a:prstGeom prst="rect">
-            <a:avLst/>
-          </a:prstGeom>
-          <a:solidFill>
-            <a:srgbClr val="FFFFFF"/>
-          </a:solidFill>
-          <a:ln/>
-          <a:effectLst>
-            <a:outerShdw sx="100000" sy="100000" kx="0" ky="0" algn="bl" rotWithShape="0" blurRad="50800" dist="25400" dir="8100000">
-              <a:srgbClr val="000000">
-                <a:alpha val="10000"/>
-              </a:srgbClr>
-            </a:outerShdw>
-          </a:effectLst>
-        </p:spPr>
-      </p:sp>
-      <p:sp>
-        <p:nvSpPr>
-          <p:cNvPr id="34" name="Shape 32"/>
-          <p:cNvSpPr/>
-          <p:nvPr/>
-        </p:nvSpPr>
-        <p:spPr>
-          <a:xfrm>
-            <a:off x="3291840" y="2880360"/>
-            <a:ext cx="54864" cy="1600200"/>
-          </a:xfrm>
-          <a:prstGeom prst="rect">
-            <a:avLst/>
-          </a:prstGeom>
-          <a:solidFill>
-            <a:srgbClr val="16A34A"/>
-          </a:solidFill>
-          <a:ln/>
-        </p:spPr>
-      </p:sp>
-      <p:sp>
-        <p:nvSpPr>
-          <p:cNvPr id="35" name="Shape 33"/>
-          <p:cNvSpPr/>
-          <p:nvPr/>
-        </p:nvSpPr>
-        <p:spPr>
-          <a:xfrm>
-            <a:off x="5120640" y="2953512"/>
-            <a:ext cx="658368" cy="228600"/>
-          </a:xfrm>
-          <a:prstGeom prst="rect">
-            <a:avLst/>
-          </a:prstGeom>
-          <a:solidFill>
-            <a:srgbClr val="DCFCE7"/>
-          </a:solidFill>
-          <a:ln/>
-        </p:spPr>
-      </p:sp>
-      <p:sp>
-        <p:nvSpPr>
-          <p:cNvPr id="36" name="Text 34"/>
-          <p:cNvSpPr/>
-          <p:nvPr/>
-        </p:nvSpPr>
-        <p:spPr>
-          <a:xfrm>
-            <a:off x="5120640" y="2953512"/>
-            <a:ext cx="658368" cy="228600"/>
-          </a:xfrm>
-          <a:prstGeom prst="rect">
-            <a:avLst/>
-          </a:prstGeom>
-          <a:noFill/>
-          <a:ln/>
-        </p:spPr>
-        <p:txBody>
-          <a:bodyPr wrap="square" lIns="0" tIns="0" rIns="0" bIns="0" rtlCol="0" anchor="ctr"/>
-          <a:lstStyle/>
-          <a:p>
-            <a:pPr algn="ctr" indent="0" marL="0">
-              <a:buNone/>
-            </a:pPr>
-            <a:r>
-              <a:rPr lang="en-US" sz="900" b="1" dirty="0">
-                <a:solidFill>
-                  <a:srgbClr val="16A34A"/>
-                </a:solidFill>
-                <a:latin typeface="Arial" pitchFamily="34" charset="0"/>
-                <a:ea typeface="Arial" pitchFamily="34" charset="-122"/>
-                <a:cs typeface="Arial" pitchFamily="34" charset="-120"/>
-              </a:rPr>
-              <a:t>20件+</a:t>
-            </a:r>
-            <a:endParaRPr lang="en-US" sz="900" dirty="0"/>
-          </a:p>
-        </p:txBody>
-      </p:sp>
-      <p:sp>
-        <p:nvSpPr>
-          <p:cNvPr id="37" name="Text 35"/>
-          <p:cNvSpPr/>
-          <p:nvPr/>
-        </p:nvSpPr>
-        <p:spPr>
-          <a:xfrm>
-            <a:off x="3429000" y="2953512"/>
-            <a:ext cx="1645920" cy="274320"/>
-          </a:xfrm>
-          <a:prstGeom prst="rect">
-            <a:avLst/>
-          </a:prstGeom>
-          <a:noFill/>
-          <a:ln/>
-        </p:spPr>
-        <p:txBody>
-          <a:bodyPr wrap="square" lIns="0" tIns="0" rIns="0" bIns="0" rtlCol="0" anchor="ctr"/>
-          <a:lstStyle/>
-          <a:p>
-            <a:pPr indent="0" marL="0">
-              <a:buNone/>
-            </a:pPr>
-            <a:r>
-              <a:rPr lang="en-US" sz="1300" b="1" dirty="0">
-                <a:solidFill>
-                  <a:srgbClr val="1A2744"/>
-                </a:solidFill>
-                <a:latin typeface="Arial" pitchFamily="34" charset="0"/>
-                <a:ea typeface="Arial" pitchFamily="34" charset="-122"/>
-                <a:cs typeface="Arial" pitchFamily="34" charset="-120"/>
-              </a:rPr>
-              <a:t>朝食</a:t>
-            </a:r>
-            <a:endParaRPr lang="en-US" sz="1300" dirty="0"/>
-          </a:p>
-        </p:txBody>
-      </p:sp>
-      <p:sp>
-        <p:nvSpPr>
-          <p:cNvPr id="38" name="Text 36"/>
-          <p:cNvSpPr/>
-          <p:nvPr/>
-        </p:nvSpPr>
-        <p:spPr>
-          <a:xfrm>
-            <a:off x="3429000" y="3246120"/>
-            <a:ext cx="2377440" cy="365760"/>
-          </a:xfrm>
-          <a:prstGeom prst="rect">
-            <a:avLst/>
-          </a:prstGeom>
-          <a:noFill/>
-          <a:ln/>
-        </p:spPr>
-        <p:txBody>
-          <a:bodyPr wrap="square" lIns="0" tIns="0" rIns="0" bIns="0" rtlCol="0" anchor="ctr"/>
-          <a:lstStyle/>
-          <a:p>
-            <a:pPr indent="0" marL="0">
-              <a:buNone/>
-            </a:pPr>
-            <a:r>
-              <a:rPr lang="en-US" sz="900" dirty="0">
-                <a:solidFill>
-                  <a:srgbClr val="64748B"/>
-                </a:solidFill>
-                <a:latin typeface="Arial" pitchFamily="34" charset="0"/>
-                <a:ea typeface="Arial" pitchFamily="34" charset="-122"/>
-                <a:cs typeface="Arial" pitchFamily="34" charset="-120"/>
-              </a:rPr>
-              <a:t>朝食は種類豊富で、サービスも良く、部屋は静かで、立地も非常に便利です</a:t>
-            </a:r>
-            <a:endParaRPr lang="en-US" sz="900" dirty="0"/>
-          </a:p>
-        </p:txBody>
-      </p:sp>
-      <p:sp>
-        <p:nvSpPr>
-          <p:cNvPr id="39" name="Text 37"/>
-          <p:cNvSpPr/>
-          <p:nvPr/>
-        </p:nvSpPr>
-        <p:spPr>
-          <a:xfrm>
-            <a:off x="3429000" y="3657600"/>
-            <a:ext cx="2377440" cy="640080"/>
-          </a:xfrm>
-          <a:prstGeom prst="rect">
-            <a:avLst/>
-          </a:prstGeom>
-          <a:noFill/>
-          <a:ln/>
-        </p:spPr>
-        <p:txBody>
-          <a:bodyPr wrap="square" lIns="0" tIns="0" rIns="0" bIns="0" rtlCol="0" anchor="ctr"/>
-          <a:lstStyle/>
-          <a:p>
-            <a:pPr indent="0" marL="0">
-              <a:buNone/>
-            </a:pPr>
-            <a:r>
-              <a:rPr lang="en-US" sz="900" i="1" dirty="0">
-                <a:solidFill>
-                  <a:srgbClr val="3B7DD8"/>
-                </a:solidFill>
-                <a:latin typeface="Arial" pitchFamily="34" charset="0"/>
-                <a:ea typeface="Arial" pitchFamily="34" charset="-122"/>
-                <a:cs typeface="Arial" pitchFamily="34" charset="-120"/>
-              </a:rPr>
-              <a:t>「朝食を1日追加で購入したのですが、フロントでその旨を伝えたら割引クーポンをもらえました」</a:t>
             </a:r>
             <a:endParaRPr lang="en-US" sz="900" dirty="0"/>
           </a:p>
@@ -12320,7 +12668,7 @@
                           <a:ea typeface="Arial" pitchFamily="34" charset="-122"/>
                           <a:cs typeface="Arial" pitchFamily="34" charset="-120"/>
                         </a:rPr>
-                        <a:t>部屋の空調は全館空調が機能せず（間違いなく老朽化）全くダメでした</a:t>
+                        <a:t>ホテルにはセントラル空調があり、ファンを最高速度に設定し、室温を最低の18度にしても、まるで自分が焼かれているよう...</a:t>
                       </a:r>
                       <a:endParaRPr lang="en-US" sz="900" dirty="0">
                         <a:latin typeface="Arial" charset="0"/>
@@ -12388,7 +12736,7 @@
                           <a:ea typeface="Arial" pitchFamily="34" charset="-122"/>
                           <a:cs typeface="Arial" pitchFamily="34" charset="-120"/>
                         </a:rPr>
-                        <a:t>15件</a:t>
+                        <a:t>11件</a:t>
                       </a:r>
                       <a:endParaRPr lang="en-US" sz="900" dirty="0">
                         <a:latin typeface="Arial" charset="0"/>
@@ -12594,7 +12942,7 @@
                           <a:ea typeface="Arial" pitchFamily="34" charset="-122"/>
                           <a:cs typeface="Arial" pitchFamily="34" charset="-120"/>
                         </a:rPr>
-                        <a:t>ホテルは川崎駅のすぐそばに位置し、近くにはバスターミナルやショッピングモールがいくつかあり、水族館も隣接しているた...</a:t>
+                        <a:t>全体的には許容範囲内だが、浴室の壁には以前の宿泊客の髪の毛が1本だけでなく複数付着しているので、もっと念入りに掃除...</a:t>
                       </a:r>
                       <a:endParaRPr lang="en-US" sz="900" dirty="0">
                         <a:latin typeface="Arial" charset="0"/>
@@ -12662,7 +13010,7 @@
                           <a:ea typeface="Arial" pitchFamily="34" charset="-122"/>
                           <a:cs typeface="Arial" pitchFamily="34" charset="-120"/>
                         </a:rPr>
-                        <a:t>10件</a:t>
+                        <a:t>9件</a:t>
                       </a:r>
                       <a:endParaRPr lang="en-US" sz="900" dirty="0">
                         <a:latin typeface="Arial" charset="0"/>
@@ -12800,7 +13148,7 @@
                           <a:ea typeface="Arial" pitchFamily="34" charset="-122"/>
                           <a:cs typeface="Arial" pitchFamily="34" charset="-120"/>
                         </a:rPr>
-                        <a:t>防音性能</a:t>
+                        <a:t>窓・採光</a:t>
                       </a:r>
                       <a:endParaRPr lang="en-US" sz="900" dirty="0">
                         <a:latin typeface="Arial" charset="0"/>
@@ -12868,7 +13216,7 @@
                           <a:ea typeface="Arial" pitchFamily="34" charset="-122"/>
                           <a:cs typeface="Arial" pitchFamily="34" charset="-120"/>
                         </a:rPr>
-                        <a:t>高層階からは電車の眺めが素晴らしく、とても良かったのですが、騒音に敏感な方には少し不快かもしれません</a:t>
+                        <a:t>団体の方がいたので、混雑してるなら後で来ますと伝えると、静かな窓際に案内してくださりました</a:t>
                       </a:r>
                       <a:endParaRPr lang="en-US" sz="900" dirty="0">
                         <a:latin typeface="Arial" charset="0"/>
@@ -12936,7 +13284,7 @@
                           <a:ea typeface="Arial" pitchFamily="34" charset="-122"/>
                           <a:cs typeface="Arial" pitchFamily="34" charset="-120"/>
                         </a:rPr>
-                        <a:t>9件</a:t>
+                        <a:t>7件</a:t>
                       </a:r>
                       <a:endParaRPr lang="en-US" sz="900" dirty="0">
                         <a:latin typeface="Arial" charset="0"/>
@@ -13074,7 +13422,7 @@
                           <a:ea typeface="Arial" pitchFamily="34" charset="-122"/>
                           <a:cs typeface="Arial" pitchFamily="34" charset="-120"/>
                         </a:rPr>
-                        <a:t>窓・採光</a:t>
+                        <a:t>設備の老朽化</a:t>
                       </a:r>
                       <a:endParaRPr lang="en-US" sz="900" dirty="0">
                         <a:latin typeface="Arial" charset="0"/>
@@ -13142,7 +13490,7 @@
                           <a:ea typeface="Arial" pitchFamily="34" charset="-122"/>
                           <a:cs typeface="Arial" pitchFamily="34" charset="-120"/>
                         </a:rPr>
-                        <a:t>19階は窓からは夜景がとても綺麗でした</a:t>
+                        <a:t>朝食もとても美味しくて、古いホテルだと思われますが綺麗でそんな事を思わせないくらい素晴らしいです</a:t>
                       </a:r>
                       <a:endParaRPr lang="en-US" sz="900" dirty="0">
                         <a:latin typeface="Arial" charset="0"/>
@@ -13210,7 +13558,7 @@
                           <a:ea typeface="Arial" pitchFamily="34" charset="-122"/>
                           <a:cs typeface="Arial" pitchFamily="34" charset="-120"/>
                         </a:rPr>
-                        <a:t>9件</a:t>
+                        <a:t>5件</a:t>
                       </a:r>
                       <a:endParaRPr lang="en-US" sz="900" dirty="0">
                         <a:latin typeface="Arial" charset="0"/>
@@ -13416,7 +13764,7 @@
                           <a:ea typeface="Arial" pitchFamily="34" charset="-122"/>
                           <a:cs typeface="Arial" pitchFamily="34" charset="-120"/>
                         </a:rPr>
-                        <a:t>酒店櫃檯服務態度良好</a:t>
+                        <a:t>各フロアーでエレベーター現在改の表示が無かったのが残念 各フロアーでエレベーター現在改の表示が無かったのが残念</a:t>
                       </a:r>
                       <a:endParaRPr lang="en-US" sz="900" dirty="0">
                         <a:latin typeface="Arial" charset="0"/>
@@ -13484,7 +13832,7 @@
                           <a:ea typeface="Arial" pitchFamily="34" charset="-122"/>
                           <a:cs typeface="Arial" pitchFamily="34" charset="-120"/>
                         </a:rPr>
-                        <a:t>8件</a:t>
+                        <a:t>5件</a:t>
                       </a:r>
                       <a:endParaRPr lang="en-US" sz="900" dirty="0">
                         <a:latin typeface="Arial" charset="0"/>
@@ -13622,7 +13970,7 @@
                           <a:ea typeface="Arial" pitchFamily="34" charset="-122"/>
                           <a:cs typeface="Arial" pitchFamily="34" charset="-120"/>
                         </a:rPr>
-                        <a:t>設備の老朽化</a:t>
+                        <a:t>防音性能</a:t>
                       </a:r>
                       <a:endParaRPr lang="en-US" sz="900" dirty="0">
                         <a:latin typeface="Arial" charset="0"/>
@@ -13690,7 +14038,7 @@
                           <a:ea typeface="Arial" pitchFamily="34" charset="-122"/>
                           <a:cs typeface="Arial" pitchFamily="34" charset="-120"/>
                         </a:rPr>
-                        <a:t>部屋の空調は全館空調が機能せず（間違いなく老朽化）全くダメでした</a:t>
+                        <a:t>高層階からは電車の眺めが素晴らしく、とても良かったのですが、騒音に敏感な方には少し不快かもしれません</a:t>
                       </a:r>
                       <a:endParaRPr lang="en-US" sz="900" dirty="0">
                         <a:latin typeface="Arial" charset="0"/>
@@ -13758,7 +14106,7 @@
                           <a:ea typeface="Arial" pitchFamily="34" charset="-122"/>
                           <a:cs typeface="Arial" pitchFamily="34" charset="-120"/>
                         </a:rPr>
-                        <a:t>6件</a:t>
+                        <a:t>4件</a:t>
                       </a:r>
                       <a:endParaRPr lang="en-US" sz="900" dirty="0">
                         <a:latin typeface="Arial" charset="0"/>
@@ -13896,7 +14244,7 @@
                           <a:ea typeface="Arial" pitchFamily="34" charset="-122"/>
                           <a:cs typeface="Arial" pitchFamily="34" charset="-120"/>
                         </a:rPr>
-                        <a:t>朝食の改善要望</a:t>
+                        <a:t>臭い・匂い</a:t>
                       </a:r>
                       <a:endParaRPr lang="en-US" sz="900" dirty="0">
                         <a:latin typeface="Arial" charset="0"/>
@@ -13964,7 +14312,7 @@
                           <a:ea typeface="Arial" pitchFamily="34" charset="-122"/>
                           <a:cs typeface="Arial" pitchFamily="34" charset="-120"/>
                         </a:rPr>
-                        <a:t>感覺酒店設施及服務不上檔次，房間也比較小，價格卻比大阪京都的更大面積的房間貴不少 部屋にはボトル入りの水が用意され...</a:t>
+                        <a:t>むしろ、自分の体が焼ける匂いが早くするだけでした</a:t>
                       </a:r>
                       <a:endParaRPr lang="en-US" sz="900" dirty="0">
                         <a:latin typeface="Arial" charset="0"/>
@@ -14032,7 +14380,7 @@
                           <a:ea typeface="Arial" pitchFamily="34" charset="-122"/>
                           <a:cs typeface="Arial" pitchFamily="34" charset="-120"/>
                         </a:rPr>
-                        <a:t>4件</a:t>
+                        <a:t>3件</a:t>
                       </a:r>
                       <a:endParaRPr lang="en-US" sz="900" dirty="0">
                         <a:latin typeface="Arial" charset="0"/>
@@ -14170,7 +14518,7 @@
                           <a:ea typeface="Arial" pitchFamily="34" charset="-122"/>
                           <a:cs typeface="Arial" pitchFamily="34" charset="-120"/>
                         </a:rPr>
-                        <a:t>部屋の狭さ</a:t>
+                        <a:t>朝食の改善要望</a:t>
                       </a:r>
                       <a:endParaRPr lang="en-US" sz="900" dirty="0">
                         <a:latin typeface="Arial" charset="0"/>
@@ -14238,7 +14586,7 @@
                           <a:ea typeface="Arial" pitchFamily="34" charset="-122"/>
                           <a:cs typeface="Arial" pitchFamily="34" charset="-120"/>
                         </a:rPr>
-                        <a:t>食事、スタッフのサービス 部屋が狭い、ロケーションが悪い、入り口がわかりにくい 部屋が狭い、ロケーションが悪い、入...</a:t>
+                        <a:t>感覺酒店設施及服務不上檔次，房間也比較小，價格卻比大阪京都的更大面積的房間貴不少 部屋にはボトル入りの水が用意され...</a:t>
                       </a:r>
                       <a:endParaRPr lang="en-US" sz="900" dirty="0">
                         <a:latin typeface="Arial" charset="0"/>
@@ -14306,7 +14654,7 @@
                           <a:ea typeface="Arial" pitchFamily="34" charset="-122"/>
                           <a:cs typeface="Arial" pitchFamily="34" charset="-120"/>
                         </a:rPr>
-                        <a:t>2件</a:t>
+                        <a:t>3件</a:t>
                       </a:r>
                       <a:endParaRPr lang="en-US" sz="900" dirty="0">
                         <a:latin typeface="Arial" charset="0"/>
@@ -14444,7 +14792,7 @@
                           <a:ea typeface="Arial" pitchFamily="34" charset="-122"/>
                           <a:cs typeface="Arial" pitchFamily="34" charset="-120"/>
                         </a:rPr>
-                        <a:t>臭い・匂い</a:t>
+                        <a:t>部屋の狭さ</a:t>
                       </a:r>
                       <a:endParaRPr lang="en-US" sz="900" dirty="0">
                         <a:latin typeface="Arial" charset="0"/>
@@ -14512,7 +14860,7 @@
                           <a:ea typeface="Arial" pitchFamily="34" charset="-122"/>
                           <a:cs typeface="Arial" pitchFamily="34" charset="-120"/>
                         </a:rPr>
-                        <a:t>それと洋式トイレから僅かに尿臭がしてきたのもマイナスポイントでした</a:t>
+                        <a:t>食事、スタッフのサービス 部屋が狭い、ロケーションが悪い、入り口がわかりにくい 部屋が狭い、ロケーションが悪い、入...</a:t>
                       </a:r>
                       <a:endParaRPr lang="en-US" sz="900" dirty="0">
                         <a:latin typeface="Arial" charset="0"/>
@@ -14580,7 +14928,7 @@
                           <a:ea typeface="Arial" pitchFamily="34" charset="-122"/>
                           <a:cs typeface="Arial" pitchFamily="34" charset="-120"/>
                         </a:rPr>
-                        <a:t>2件</a:t>
+                        <a:t>1件</a:t>
                       </a:r>
                       <a:endParaRPr lang="en-US" sz="900" dirty="0">
                         <a:latin typeface="Arial" charset="0"/>

--- a/納品レポート/ホテル別レポート/kawasaki_nikko_口コミ分析レポート.pptx
+++ b/納品レポート/ホテル別レポート/kawasaki_nikko_口コミ分析レポート.pptx
@@ -2801,7 +2801,7 @@
                 <a:ea typeface="Arial" pitchFamily="34" charset="-122"/>
                 <a:cs typeface="Arial" pitchFamily="34" charset="-120"/>
               </a:rPr>
-              <a:t>作成日：2026年4月7日</a:t>
+              <a:t>作成日：2026年4月8日</a:t>
             </a:r>
             <a:endParaRPr lang="en-US" sz="1000" dirty="0"/>
           </a:p>

--- a/納品レポート/ホテル別レポート/kawasaki_nikko_口コミ分析レポート.pptx
+++ b/納品レポート/ホテル別レポート/kawasaki_nikko_口コミ分析レポート.pptx
@@ -2778,7 +2778,7 @@
                 <a:ea typeface="Arial" pitchFamily="34" charset="-122"/>
                 <a:cs typeface="Arial" pitchFamily="34" charset="-120"/>
               </a:rPr>
-              <a:t>作成日：2026年4月10日</a:t>
+              <a:t>作成日：2026年4月11日</a:t>
             </a:r>
             <a:endParaRPr lang="en-US" sz="1000" dirty="0"/>
           </a:p>

--- a/納品レポート/ホテル別レポート/kawasaki_nikko_口コミ分析レポート.pptx
+++ b/納品レポート/ホテル別レポート/kawasaki_nikko_口コミ分析レポート.pptx
@@ -2778,7 +2778,7 @@
                 <a:ea typeface="Arial" pitchFamily="34" charset="-122"/>
                 <a:cs typeface="Arial" pitchFamily="34" charset="-120"/>
               </a:rPr>
-              <a:t>作成日：2026年4月11日</a:t>
+              <a:t>作成日：2026年4月13日</a:t>
             </a:r>
             <a:endParaRPr lang="en-US" sz="1000" dirty="0"/>
           </a:p>
@@ -5896,7 +5896,7 @@
                 <a:ea typeface="Arial" pitchFamily="34" charset="-122"/>
                 <a:cs typeface="Arial" pitchFamily="34" charset="-120"/>
               </a:rPr>
-              <a:t>  ホテルのフロントの対応も良く、客室設備は清潔で整頓されており、快適な滞在ができます</a:t>
+              <a:t>  ホテルのフロントの対応も良く、客室設備も清潔で整頓されており、快適な滞在ができます</a:t>
             </a:r>
             <a:endParaRPr lang="en-US" sz="1100" dirty="0"/>
           </a:p>
@@ -5936,7 +5936,7 @@
                 <a:ea typeface="Arial" pitchFamily="34" charset="-122"/>
                 <a:cs typeface="Arial" pitchFamily="34" charset="-120"/>
               </a:rPr>
-              <a:t>  ホテルのフロントの対応も良く、客室設備は清潔で整頓されており、快適な滞在ができます</a:t>
+              <a:t>  ホテルのフロントの対応も良く、客室設備も清潔で整頓されており、快適な滞在ができます</a:t>
             </a:r>
             <a:endParaRPr lang="en-US" sz="1100" dirty="0"/>
           </a:p>
@@ -6164,7 +6164,7 @@
                 <a:ea typeface="Arial" pitchFamily="34" charset="-122"/>
                 <a:cs typeface="Arial" pitchFamily="34" charset="-120"/>
               </a:rPr>
-              <a:t>  ホテルは川崎駅のすぐそばに位置し、近くにはバスターミナルやショッピングモールがいくつかあり、水族館も隣接しているた...</a:t>
+              <a:t>  ホテルは川崎駅のすぐそばに位置し、バスターミナルも近くにあります</a:t>
             </a:r>
             <a:endParaRPr lang="en-US" sz="1100" dirty="0"/>
           </a:p>
@@ -10498,7 +10498,7 @@
                 <a:ea typeface="Arial" pitchFamily="34" charset="-122"/>
                 <a:cs typeface="Arial" pitchFamily="34" charset="-120"/>
               </a:rPr>
-              <a:t>「ホテルは川崎駅のすぐそばに位置し、近くにはバスターミナルやショッピングモールがいくつかあり、水族館も隣接しているた...」</a:t>
+              <a:t>「ショッピングモールも複数あり、水族館も隣にあるため、立地は非常に便利で多様です」</a:t>
             </a:r>
             <a:endParaRPr lang="en-US" sz="900" dirty="0"/>
           </a:p>
@@ -10682,7 +10682,7 @@
                 <a:ea typeface="Arial" pitchFamily="34" charset="-122"/>
                 <a:cs typeface="Arial" pitchFamily="34" charset="-120"/>
               </a:rPr>
-              <a:t>ホテルのフロントの対応も良く、客室設備は清潔で整頓されており、快適な滞在ができます</a:t>
+              <a:t>ホテルのフロントの対応も良く、客室設備も清潔で整頓されており、快適な滞在ができます</a:t>
             </a:r>
             <a:endParaRPr lang="en-US" sz="900" dirty="0"/>
           </a:p>
@@ -10905,7 +10905,7 @@
                 <a:ea typeface="Arial" pitchFamily="34" charset="-122"/>
                 <a:cs typeface="Arial" pitchFamily="34" charset="-120"/>
               </a:rPr>
-              <a:t>ホテルのフロントの対応も良く、客室設備は清潔で整頓されており、快適な滞在ができます</a:t>
+              <a:t>ホテルのフロントの対応も良く、客室設備も清潔で整頓されており、快適な滞在ができます</a:t>
             </a:r>
             <a:endParaRPr lang="en-US" sz="900" dirty="0"/>
           </a:p>
@@ -11390,7 +11390,7 @@
                 <a:ea typeface="Arial" pitchFamily="34" charset="-122"/>
                 <a:cs typeface="Arial" pitchFamily="34" charset="-120"/>
               </a:rPr>
-              <a:t>「ホテルのフロントの対応も良く、客室設備は清潔で整頓されており、快適な滞在ができます」</a:t>
+              <a:t>「ホテルのフロントの対応も良く、客室設備も清潔で整頓されており、快適な滞在ができます」</a:t>
             </a:r>
             <a:endParaRPr lang="en-US" sz="900" dirty="0"/>
           </a:p>
@@ -12851,7 +12851,7 @@
                           <a:ea typeface="Arial" pitchFamily="34" charset="-122"/>
                           <a:cs typeface="Arial" pitchFamily="34" charset="-120"/>
                         </a:rPr>
-                        <a:t>ホテルは川崎駅のすぐそばに位置し、近くにはバスターミナルやショッピングモールがいくつかあり、水族館も隣接しているた...</a:t>
+                        <a:t>ホテルは川崎駅のすぐそばに位置し、バスターミナルも近くにあります</a:t>
                       </a:r>
                       <a:endParaRPr lang="en-US" sz="900" dirty="0">
                         <a:latin typeface="Arial" charset="0"/>

--- a/納品レポート/ホテル別レポート/kawasaki_nikko_口コミ分析レポート.pptx
+++ b/納品レポート/ホテル別レポート/kawasaki_nikko_口コミ分析レポート.pptx
@@ -2778,7 +2778,7 @@
                 <a:ea typeface="Arial" pitchFamily="34" charset="-122"/>
                 <a:cs typeface="Arial" pitchFamily="34" charset="-120"/>
               </a:rPr>
-              <a:t>作成日：2026年4月13日</a:t>
+              <a:t>作成日：2026年4月15日</a:t>
             </a:r>
             <a:endParaRPr lang="en-US" sz="1000" dirty="0"/>
           </a:p>
@@ -5896,7 +5896,7 @@
                 <a:ea typeface="Arial" pitchFamily="34" charset="-122"/>
                 <a:cs typeface="Arial" pitchFamily="34" charset="-120"/>
               </a:rPr>
-              <a:t>  ホテルのフロントの対応も良く、客室設備も清潔で整頓されており、快適な滞在ができます</a:t>
+              <a:t>  ホテルのフロントの対応も良く、客室設備は清潔で整頓されており、快適な滞在ができます</a:t>
             </a:r>
             <a:endParaRPr lang="en-US" sz="1100" dirty="0"/>
           </a:p>
@@ -5936,7 +5936,7 @@
                 <a:ea typeface="Arial" pitchFamily="34" charset="-122"/>
                 <a:cs typeface="Arial" pitchFamily="34" charset="-120"/>
               </a:rPr>
-              <a:t>  ホテルのフロントの対応も良く、客室設備も清潔で整頓されており、快適な滞在ができます</a:t>
+              <a:t>  ホテルのフロントの対応も良く、客室設備は清潔で整頓されており、快適な滞在ができます</a:t>
             </a:r>
             <a:endParaRPr lang="en-US" sz="1100" dirty="0"/>
           </a:p>
@@ -6164,7 +6164,7 @@
                 <a:ea typeface="Arial" pitchFamily="34" charset="-122"/>
                 <a:cs typeface="Arial" pitchFamily="34" charset="-120"/>
               </a:rPr>
-              <a:t>  ホテルは川崎駅のすぐそばに位置し、バスターミナルも近くにあります</a:t>
+              <a:t>  ホテルは川崎駅のすぐそばに位置し、近くにはバスターミナルやショッピングモールがいくつかあり、水族館も隣接しているた...</a:t>
             </a:r>
             <a:endParaRPr lang="en-US" sz="1100" dirty="0"/>
           </a:p>
@@ -10498,7 +10498,7 @@
                 <a:ea typeface="Arial" pitchFamily="34" charset="-122"/>
                 <a:cs typeface="Arial" pitchFamily="34" charset="-120"/>
               </a:rPr>
-              <a:t>「ショッピングモールも複数あり、水族館も隣にあるため、立地は非常に便利で多様です」</a:t>
+              <a:t>「ホテルは川崎駅のすぐそばに位置し、近くにはバスターミナルやショッピングモールがいくつかあり、水族館も隣接しているた...」</a:t>
             </a:r>
             <a:endParaRPr lang="en-US" sz="900" dirty="0"/>
           </a:p>
@@ -10682,7 +10682,7 @@
                 <a:ea typeface="Arial" pitchFamily="34" charset="-122"/>
                 <a:cs typeface="Arial" pitchFamily="34" charset="-120"/>
               </a:rPr>
-              <a:t>ホテルのフロントの対応も良く、客室設備も清潔で整頓されており、快適な滞在ができます</a:t>
+              <a:t>ホテルのフロントの対応も良く、客室設備は清潔で整頓されており、快適な滞在ができます</a:t>
             </a:r>
             <a:endParaRPr lang="en-US" sz="900" dirty="0"/>
           </a:p>
@@ -10905,7 +10905,7 @@
                 <a:ea typeface="Arial" pitchFamily="34" charset="-122"/>
                 <a:cs typeface="Arial" pitchFamily="34" charset="-120"/>
               </a:rPr>
-              <a:t>ホテルのフロントの対応も良く、客室設備も清潔で整頓されており、快適な滞在ができます</a:t>
+              <a:t>ホテルのフロントの対応も良く、客室設備は清潔で整頓されており、快適な滞在ができます</a:t>
             </a:r>
             <a:endParaRPr lang="en-US" sz="900" dirty="0"/>
           </a:p>
@@ -11390,7 +11390,7 @@
                 <a:ea typeface="Arial" pitchFamily="34" charset="-122"/>
                 <a:cs typeface="Arial" pitchFamily="34" charset="-120"/>
               </a:rPr>
-              <a:t>「ホテルのフロントの対応も良く、客室設備も清潔で整頓されており、快適な滞在ができます」</a:t>
+              <a:t>「ホテルのフロントの対応も良く、客室設備は清潔で整頓されており、快適な滞在ができます」</a:t>
             </a:r>
             <a:endParaRPr lang="en-US" sz="900" dirty="0"/>
           </a:p>
@@ -12851,7 +12851,7 @@
                           <a:ea typeface="Arial" pitchFamily="34" charset="-122"/>
                           <a:cs typeface="Arial" pitchFamily="34" charset="-120"/>
                         </a:rPr>
-                        <a:t>ホテルは川崎駅のすぐそばに位置し、バスターミナルも近くにあります</a:t>
+                        <a:t>ホテルは川崎駅のすぐそばに位置し、近くにはバスターミナルやショッピングモールがいくつかあり、水族館も隣接しているた...</a:t>
                       </a:r>
                       <a:endParaRPr lang="en-US" sz="900" dirty="0">
                         <a:latin typeface="Arial" charset="0"/>

--- a/納品レポート/ホテル別レポート/kawasaki_nikko_口コミ分析レポート.pptx
+++ b/納品レポート/ホテル別レポート/kawasaki_nikko_口コミ分析レポート.pptx
@@ -2778,7 +2778,7 @@
                 <a:ea typeface="Arial" pitchFamily="34" charset="-122"/>
                 <a:cs typeface="Arial" pitchFamily="34" charset="-120"/>
               </a:rPr>
-              <a:t>作成日：2026年4月16日</a:t>
+              <a:t>作成日：2026年4月20日</a:t>
             </a:r>
             <a:endParaRPr lang="en-US" sz="1000" dirty="0"/>
           </a:p>

--- a/納品レポート/ホテル別レポート/kawasaki_nikko_口コミ分析レポート.pptx
+++ b/納品レポート/ホテル別レポート/kawasaki_nikko_口コミ分析レポート.pptx
@@ -2778,7 +2778,7 @@
                 <a:ea typeface="Arial" pitchFamily="34" charset="-122"/>
                 <a:cs typeface="Arial" pitchFamily="34" charset="-120"/>
               </a:rPr>
-              <a:t>作成日：2026年4月20日</a:t>
+              <a:t>作成日：2026年4月21日</a:t>
             </a:r>
             <a:endParaRPr lang="en-US" sz="1000" dirty="0"/>
           </a:p>

--- a/納品レポート/ホテル別レポート/kawasaki_nikko_口コミ分析レポート.pptx
+++ b/納品レポート/ホテル別レポート/kawasaki_nikko_口コミ分析レポート.pptx
@@ -2778,7 +2778,7 @@
                 <a:ea typeface="Arial" pitchFamily="34" charset="-122"/>
                 <a:cs typeface="Arial" pitchFamily="34" charset="-120"/>
               </a:rPr>
-              <a:t>作成日：2026年4月21日</a:t>
+              <a:t>作成日：2026年4月22日</a:t>
             </a:r>
             <a:endParaRPr lang="en-US" sz="1000" dirty="0"/>
           </a:p>
